--- a/presentations/2.1_Klassifikaciya_ViOPF.pptx
+++ b/presentations/2.1_Klassifikaciya_ViOPF.pptx
@@ -16,6 +16,7 @@
     <p:sldId id="261" r:id="rId21"/>
     <p:sldId id="262" r:id="rId22"/>
     <p:sldId id="263" r:id="rId23"/>
+    <p:sldId id="265" r:id="rId25"/>
     <p:sldId id="264" r:id="rId24"/>
   </p:sldIdLst>
   <p:sldSz cx="12192000" cy="6858000"/>
@@ -5538,6 +5539,1705 @@
 </p:sld>
 </file>
 
+<file path=ppt/slides/slide10.xml><?xml version="1.0" encoding="utf-8"?>
+<p:sld xmlns:a="http://schemas.openxmlformats.org/drawingml/2006/main" xmlns:r="http://schemas.openxmlformats.org/officeDocument/2006/relationships" xmlns:p="http://schemas.openxmlformats.org/presentationml/2006/main">
+  <p:cSld>
+    <p:spTree>
+      <p:nvGrpSpPr>
+        <p:cNvPr id="1" name=""/>
+        <p:cNvGrpSpPr/>
+        <p:nvPr/>
+      </p:nvGrpSpPr>
+      <p:grpSpPr>
+        <a:xfrm>
+          <a:off x="0" y="0"/>
+          <a:ext cx="0" cy="0"/>
+          <a:chOff x="0" y="0"/>
+          <a:chExt cx="0" cy="0"/>
+        </a:xfrm>
+      </p:grpSpPr>
+      <p:grpSp>
+        <p:nvGrpSpPr>
+          <p:cNvPr id="36" name="Группа 35">
+            <a:extLst>
+              <a:ext uri="{FF2B5EF4-FFF2-40B4-BE49-F238E27FC236}">
+                <a16:creationId xmlns:a16="http://schemas.microsoft.com/office/drawing/2014/main" id="{7FF1FBDA-7EF8-4E32-B285-B9BF1A70F363}"/>
+              </a:ext>
+            </a:extLst>
+          </p:cNvPr>
+          <p:cNvGrpSpPr/>
+          <p:nvPr/>
+        </p:nvGrpSpPr>
+        <p:grpSpPr>
+          <a:xfrm>
+            <a:off x="0" y="-214817"/>
+            <a:ext cx="13248168" cy="7072817"/>
+            <a:chOff x="0" y="-4170772"/>
+            <a:chExt cx="13248168" cy="7072817"/>
+          </a:xfrm>
+        </p:grpSpPr>
+        <p:grpSp>
+          <p:nvGrpSpPr>
+            <p:cNvPr id="6" name="Группа 5">
+              <a:extLst>
+                <a:ext uri="{FF2B5EF4-FFF2-40B4-BE49-F238E27FC236}">
+                  <a16:creationId xmlns:a16="http://schemas.microsoft.com/office/drawing/2014/main" id="{D194E697-28B3-404D-8A29-F48E94BF6241}"/>
+                </a:ext>
+              </a:extLst>
+            </p:cNvPr>
+            <p:cNvGrpSpPr/>
+            <p:nvPr/>
+          </p:nvGrpSpPr>
+          <p:grpSpPr>
+            <a:xfrm>
+              <a:off x="0" y="-4170772"/>
+              <a:ext cx="13248168" cy="7072817"/>
+              <a:chOff x="-166577" y="-12798"/>
+              <a:chExt cx="13248168" cy="7072817"/>
+            </a:xfrm>
+          </p:grpSpPr>
+          <p:cxnSp>
+            <p:nvCxnSpPr>
+              <p:cNvPr id="7" name="Прямая соединительная линия 6">
+                <a:extLst>
+                  <a:ext uri="{FF2B5EF4-FFF2-40B4-BE49-F238E27FC236}">
+                    <a16:creationId xmlns:a16="http://schemas.microsoft.com/office/drawing/2014/main" id="{82C61482-8E50-4404-94EC-6B83D92F983D}"/>
+                  </a:ext>
+                </a:extLst>
+              </p:cNvPr>
+              <p:cNvCxnSpPr/>
+              <p:nvPr/>
+            </p:nvCxnSpPr>
+            <p:spPr>
+              <a:xfrm>
+                <a:off x="340242" y="202019"/>
+                <a:ext cx="0" cy="6858000"/>
+              </a:xfrm>
+              <a:prstGeom prst="line">
+                <a:avLst/>
+              </a:prstGeom>
+              <a:ln>
+                <a:solidFill>
+                  <a:schemeClr val="tx1"/>
+                </a:solidFill>
+              </a:ln>
+            </p:spPr>
+            <p:style>
+              <a:lnRef idx="1">
+                <a:schemeClr val="accent1"/>
+              </a:lnRef>
+              <a:fillRef idx="0">
+                <a:schemeClr val="accent1"/>
+              </a:fillRef>
+              <a:effectRef idx="0">
+                <a:schemeClr val="accent1"/>
+              </a:effectRef>
+              <a:fontRef idx="minor">
+                <a:schemeClr val="tx1"/>
+              </a:fontRef>
+            </p:style>
+          </p:cxnSp>
+          <p:cxnSp>
+            <p:nvCxnSpPr>
+              <p:cNvPr id="8" name="Прямая соединительная линия 7">
+                <a:extLst>
+                  <a:ext uri="{FF2B5EF4-FFF2-40B4-BE49-F238E27FC236}">
+                    <a16:creationId xmlns:a16="http://schemas.microsoft.com/office/drawing/2014/main" id="{79FD2ADB-6B7C-417E-8070-20B7AC7BEC87}"/>
+                  </a:ext>
+                </a:extLst>
+              </p:cNvPr>
+              <p:cNvCxnSpPr>
+                <a:cxnSpLocks/>
+              </p:cNvCxnSpPr>
+              <p:nvPr/>
+            </p:nvCxnSpPr>
+            <p:spPr>
+              <a:xfrm>
+                <a:off x="1063257" y="0"/>
+                <a:ext cx="0" cy="7060019"/>
+              </a:xfrm>
+              <a:prstGeom prst="line">
+                <a:avLst/>
+              </a:prstGeom>
+              <a:ln>
+                <a:solidFill>
+                  <a:schemeClr val="tx1"/>
+                </a:solidFill>
+              </a:ln>
+            </p:spPr>
+            <p:style>
+              <a:lnRef idx="1">
+                <a:schemeClr val="accent1"/>
+              </a:lnRef>
+              <a:fillRef idx="0">
+                <a:schemeClr val="accent1"/>
+              </a:fillRef>
+              <a:effectRef idx="0">
+                <a:schemeClr val="accent1"/>
+              </a:effectRef>
+              <a:fontRef idx="minor">
+                <a:schemeClr val="tx1"/>
+              </a:fontRef>
+            </p:style>
+          </p:cxnSp>
+          <p:cxnSp>
+            <p:nvCxnSpPr>
+              <p:cNvPr id="9" name="Прямая соединительная линия 8">
+                <a:extLst>
+                  <a:ext uri="{FF2B5EF4-FFF2-40B4-BE49-F238E27FC236}">
+                    <a16:creationId xmlns:a16="http://schemas.microsoft.com/office/drawing/2014/main" id="{742E3E11-256E-4150-8476-2708422F0F21}"/>
+                  </a:ext>
+                </a:extLst>
+              </p:cNvPr>
+              <p:cNvCxnSpPr>
+                <a:cxnSpLocks/>
+              </p:cNvCxnSpPr>
+              <p:nvPr/>
+            </p:nvCxnSpPr>
+            <p:spPr>
+              <a:xfrm>
+                <a:off x="1786271" y="0"/>
+                <a:ext cx="0" cy="7060019"/>
+              </a:xfrm>
+              <a:prstGeom prst="line">
+                <a:avLst/>
+              </a:prstGeom>
+              <a:ln>
+                <a:solidFill>
+                  <a:schemeClr val="tx1"/>
+                </a:solidFill>
+              </a:ln>
+            </p:spPr>
+            <p:style>
+              <a:lnRef idx="1">
+                <a:schemeClr val="accent1"/>
+              </a:lnRef>
+              <a:fillRef idx="0">
+                <a:schemeClr val="accent1"/>
+              </a:fillRef>
+              <a:effectRef idx="0">
+                <a:schemeClr val="accent1"/>
+              </a:effectRef>
+              <a:fontRef idx="minor">
+                <a:schemeClr val="tx1"/>
+              </a:fontRef>
+            </p:style>
+          </p:cxnSp>
+          <p:cxnSp>
+            <p:nvCxnSpPr>
+              <p:cNvPr id="10" name="Прямая соединительная линия 9">
+                <a:extLst>
+                  <a:ext uri="{FF2B5EF4-FFF2-40B4-BE49-F238E27FC236}">
+                    <a16:creationId xmlns:a16="http://schemas.microsoft.com/office/drawing/2014/main" id="{71A89E76-8A26-4714-A28B-178CFA97EAA9}"/>
+                  </a:ext>
+                </a:extLst>
+              </p:cNvPr>
+              <p:cNvCxnSpPr>
+                <a:cxnSpLocks/>
+              </p:cNvCxnSpPr>
+              <p:nvPr/>
+            </p:nvCxnSpPr>
+            <p:spPr>
+              <a:xfrm>
+                <a:off x="2498653" y="0"/>
+                <a:ext cx="0" cy="7060019"/>
+              </a:xfrm>
+              <a:prstGeom prst="line">
+                <a:avLst/>
+              </a:prstGeom>
+              <a:ln>
+                <a:solidFill>
+                  <a:schemeClr val="tx1"/>
+                </a:solidFill>
+              </a:ln>
+            </p:spPr>
+            <p:style>
+              <a:lnRef idx="1">
+                <a:schemeClr val="accent1"/>
+              </a:lnRef>
+              <a:fillRef idx="0">
+                <a:schemeClr val="accent1"/>
+              </a:fillRef>
+              <a:effectRef idx="0">
+                <a:schemeClr val="accent1"/>
+              </a:effectRef>
+              <a:fontRef idx="minor">
+                <a:schemeClr val="tx1"/>
+              </a:fontRef>
+            </p:style>
+          </p:cxnSp>
+          <p:cxnSp>
+            <p:nvCxnSpPr>
+              <p:cNvPr id="11" name="Прямая соединительная линия 10">
+                <a:extLst>
+                  <a:ext uri="{FF2B5EF4-FFF2-40B4-BE49-F238E27FC236}">
+                    <a16:creationId xmlns:a16="http://schemas.microsoft.com/office/drawing/2014/main" id="{35DE7A21-97FE-45D0-A8C3-5D5C44459CD8}"/>
+                  </a:ext>
+                </a:extLst>
+              </p:cNvPr>
+              <p:cNvCxnSpPr>
+                <a:cxnSpLocks/>
+              </p:cNvCxnSpPr>
+              <p:nvPr/>
+            </p:nvCxnSpPr>
+            <p:spPr>
+              <a:xfrm>
+                <a:off x="3211034" y="0"/>
+                <a:ext cx="0" cy="7060019"/>
+              </a:xfrm>
+              <a:prstGeom prst="line">
+                <a:avLst/>
+              </a:prstGeom>
+              <a:ln>
+                <a:solidFill>
+                  <a:schemeClr val="tx1"/>
+                </a:solidFill>
+              </a:ln>
+            </p:spPr>
+            <p:style>
+              <a:lnRef idx="1">
+                <a:schemeClr val="accent1"/>
+              </a:lnRef>
+              <a:fillRef idx="0">
+                <a:schemeClr val="accent1"/>
+              </a:fillRef>
+              <a:effectRef idx="0">
+                <a:schemeClr val="accent1"/>
+              </a:effectRef>
+              <a:fontRef idx="minor">
+                <a:schemeClr val="tx1"/>
+              </a:fontRef>
+            </p:style>
+          </p:cxnSp>
+          <p:cxnSp>
+            <p:nvCxnSpPr>
+              <p:cNvPr id="12" name="Прямая соединительная линия 11">
+                <a:extLst>
+                  <a:ext uri="{FF2B5EF4-FFF2-40B4-BE49-F238E27FC236}">
+                    <a16:creationId xmlns:a16="http://schemas.microsoft.com/office/drawing/2014/main" id="{2230EA40-BFDD-4F33-9739-A1F381E44FCA}"/>
+                  </a:ext>
+                </a:extLst>
+              </p:cNvPr>
+              <p:cNvCxnSpPr>
+                <a:cxnSpLocks/>
+              </p:cNvCxnSpPr>
+              <p:nvPr/>
+            </p:nvCxnSpPr>
+            <p:spPr>
+              <a:xfrm>
+                <a:off x="3934048" y="0"/>
+                <a:ext cx="0" cy="7060019"/>
+              </a:xfrm>
+              <a:prstGeom prst="line">
+                <a:avLst/>
+              </a:prstGeom>
+              <a:ln>
+                <a:solidFill>
+                  <a:schemeClr val="tx1"/>
+                </a:solidFill>
+              </a:ln>
+            </p:spPr>
+            <p:style>
+              <a:lnRef idx="1">
+                <a:schemeClr val="accent1"/>
+              </a:lnRef>
+              <a:fillRef idx="0">
+                <a:schemeClr val="accent1"/>
+              </a:fillRef>
+              <a:effectRef idx="0">
+                <a:schemeClr val="accent1"/>
+              </a:effectRef>
+              <a:fontRef idx="minor">
+                <a:schemeClr val="tx1"/>
+              </a:fontRef>
+            </p:style>
+          </p:cxnSp>
+          <p:cxnSp>
+            <p:nvCxnSpPr>
+              <p:cNvPr id="13" name="Прямая соединительная линия 12">
+                <a:extLst>
+                  <a:ext uri="{FF2B5EF4-FFF2-40B4-BE49-F238E27FC236}">
+                    <a16:creationId xmlns:a16="http://schemas.microsoft.com/office/drawing/2014/main" id="{A2F0D873-D58C-44BF-9302-3E5185DD141C}"/>
+                  </a:ext>
+                </a:extLst>
+              </p:cNvPr>
+              <p:cNvCxnSpPr>
+                <a:cxnSpLocks/>
+              </p:cNvCxnSpPr>
+              <p:nvPr/>
+            </p:nvCxnSpPr>
+            <p:spPr>
+              <a:xfrm flipH="1">
+                <a:off x="-95693" y="552893"/>
+                <a:ext cx="12525153" cy="0"/>
+              </a:xfrm>
+              <a:prstGeom prst="line">
+                <a:avLst/>
+              </a:prstGeom>
+              <a:ln>
+                <a:solidFill>
+                  <a:schemeClr val="tx1"/>
+                </a:solidFill>
+              </a:ln>
+            </p:spPr>
+            <p:style>
+              <a:lnRef idx="1">
+                <a:schemeClr val="accent1"/>
+              </a:lnRef>
+              <a:fillRef idx="0">
+                <a:schemeClr val="accent1"/>
+              </a:fillRef>
+              <a:effectRef idx="0">
+                <a:schemeClr val="accent1"/>
+              </a:effectRef>
+              <a:fontRef idx="minor">
+                <a:schemeClr val="tx1"/>
+              </a:fontRef>
+            </p:style>
+          </p:cxnSp>
+          <p:cxnSp>
+            <p:nvCxnSpPr>
+              <p:cNvPr id="14" name="Прямая соединительная линия 13">
+                <a:extLst>
+                  <a:ext uri="{FF2B5EF4-FFF2-40B4-BE49-F238E27FC236}">
+                    <a16:creationId xmlns:a16="http://schemas.microsoft.com/office/drawing/2014/main" id="{4B549B82-A1D8-4959-A4BA-6626F5C7E9EA}"/>
+                  </a:ext>
+                </a:extLst>
+              </p:cNvPr>
+              <p:cNvCxnSpPr>
+                <a:cxnSpLocks/>
+              </p:cNvCxnSpPr>
+              <p:nvPr/>
+            </p:nvCxnSpPr>
+            <p:spPr>
+              <a:xfrm flipH="1">
+                <a:off x="-166577" y="1265274"/>
+                <a:ext cx="12525153" cy="0"/>
+              </a:xfrm>
+              <a:prstGeom prst="line">
+                <a:avLst/>
+              </a:prstGeom>
+              <a:ln>
+                <a:solidFill>
+                  <a:schemeClr val="tx1"/>
+                </a:solidFill>
+              </a:ln>
+            </p:spPr>
+            <p:style>
+              <a:lnRef idx="1">
+                <a:schemeClr val="accent1"/>
+              </a:lnRef>
+              <a:fillRef idx="0">
+                <a:schemeClr val="accent1"/>
+              </a:fillRef>
+              <a:effectRef idx="0">
+                <a:schemeClr val="accent1"/>
+              </a:effectRef>
+              <a:fontRef idx="minor">
+                <a:schemeClr val="tx1"/>
+              </a:fontRef>
+            </p:style>
+          </p:cxnSp>
+          <p:cxnSp>
+            <p:nvCxnSpPr>
+              <p:cNvPr id="15" name="Прямая соединительная линия 14">
+                <a:extLst>
+                  <a:ext uri="{FF2B5EF4-FFF2-40B4-BE49-F238E27FC236}">
+                    <a16:creationId xmlns:a16="http://schemas.microsoft.com/office/drawing/2014/main" id="{7E902903-75AC-495E-92CC-0E6B41592315}"/>
+                  </a:ext>
+                </a:extLst>
+              </p:cNvPr>
+              <p:cNvCxnSpPr>
+                <a:cxnSpLocks/>
+              </p:cNvCxnSpPr>
+              <p:nvPr/>
+            </p:nvCxnSpPr>
+            <p:spPr>
+              <a:xfrm flipH="1">
+                <a:off x="-166577" y="1988287"/>
+                <a:ext cx="12525153" cy="0"/>
+              </a:xfrm>
+              <a:prstGeom prst="line">
+                <a:avLst/>
+              </a:prstGeom>
+              <a:ln>
+                <a:solidFill>
+                  <a:schemeClr val="tx1"/>
+                </a:solidFill>
+              </a:ln>
+            </p:spPr>
+            <p:style>
+              <a:lnRef idx="1">
+                <a:schemeClr val="accent1"/>
+              </a:lnRef>
+              <a:fillRef idx="0">
+                <a:schemeClr val="accent1"/>
+              </a:fillRef>
+              <a:effectRef idx="0">
+                <a:schemeClr val="accent1"/>
+              </a:effectRef>
+              <a:fontRef idx="minor">
+                <a:schemeClr val="tx1"/>
+              </a:fontRef>
+            </p:style>
+          </p:cxnSp>
+          <p:cxnSp>
+            <p:nvCxnSpPr>
+              <p:cNvPr id="16" name="Прямая соединительная линия 15">
+                <a:extLst>
+                  <a:ext uri="{FF2B5EF4-FFF2-40B4-BE49-F238E27FC236}">
+                    <a16:creationId xmlns:a16="http://schemas.microsoft.com/office/drawing/2014/main" id="{C10264B3-AA1B-4EDA-BFE4-9A014BE9E499}"/>
+                  </a:ext>
+                </a:extLst>
+              </p:cNvPr>
+              <p:cNvCxnSpPr>
+                <a:cxnSpLocks/>
+              </p:cNvCxnSpPr>
+              <p:nvPr/>
+            </p:nvCxnSpPr>
+            <p:spPr>
+              <a:xfrm flipH="1">
+                <a:off x="-166577" y="2711302"/>
+                <a:ext cx="12525153" cy="0"/>
+              </a:xfrm>
+              <a:prstGeom prst="line">
+                <a:avLst/>
+              </a:prstGeom>
+              <a:ln>
+                <a:solidFill>
+                  <a:schemeClr val="tx1"/>
+                </a:solidFill>
+              </a:ln>
+            </p:spPr>
+            <p:style>
+              <a:lnRef idx="1">
+                <a:schemeClr val="accent1"/>
+              </a:lnRef>
+              <a:fillRef idx="0">
+                <a:schemeClr val="accent1"/>
+              </a:fillRef>
+              <a:effectRef idx="0">
+                <a:schemeClr val="accent1"/>
+              </a:effectRef>
+              <a:fontRef idx="minor">
+                <a:schemeClr val="tx1"/>
+              </a:fontRef>
+            </p:style>
+          </p:cxnSp>
+          <p:cxnSp>
+            <p:nvCxnSpPr>
+              <p:cNvPr id="17" name="Прямая соединительная линия 16">
+                <a:extLst>
+                  <a:ext uri="{FF2B5EF4-FFF2-40B4-BE49-F238E27FC236}">
+                    <a16:creationId xmlns:a16="http://schemas.microsoft.com/office/drawing/2014/main" id="{7DB95352-4A59-44BD-9F84-7A56998CFE6C}"/>
+                  </a:ext>
+                </a:extLst>
+              </p:cNvPr>
+              <p:cNvCxnSpPr>
+                <a:cxnSpLocks/>
+              </p:cNvCxnSpPr>
+              <p:nvPr/>
+            </p:nvCxnSpPr>
+            <p:spPr>
+              <a:xfrm flipH="1">
+                <a:off x="-166577" y="3429000"/>
+                <a:ext cx="12525153" cy="0"/>
+              </a:xfrm>
+              <a:prstGeom prst="line">
+                <a:avLst/>
+              </a:prstGeom>
+              <a:ln>
+                <a:solidFill>
+                  <a:schemeClr val="tx1"/>
+                </a:solidFill>
+              </a:ln>
+            </p:spPr>
+            <p:style>
+              <a:lnRef idx="1">
+                <a:schemeClr val="accent1"/>
+              </a:lnRef>
+              <a:fillRef idx="0">
+                <a:schemeClr val="accent1"/>
+              </a:fillRef>
+              <a:effectRef idx="0">
+                <a:schemeClr val="accent1"/>
+              </a:effectRef>
+              <a:fontRef idx="minor">
+                <a:schemeClr val="tx1"/>
+              </a:fontRef>
+            </p:style>
+          </p:cxnSp>
+          <p:cxnSp>
+            <p:nvCxnSpPr>
+              <p:cNvPr id="18" name="Прямая соединительная линия 17">
+                <a:extLst>
+                  <a:ext uri="{FF2B5EF4-FFF2-40B4-BE49-F238E27FC236}">
+                    <a16:creationId xmlns:a16="http://schemas.microsoft.com/office/drawing/2014/main" id="{B374052C-54F7-4119-BB4C-01EBB5D6B2F6}"/>
+                  </a:ext>
+                </a:extLst>
+              </p:cNvPr>
+              <p:cNvCxnSpPr>
+                <a:cxnSpLocks/>
+              </p:cNvCxnSpPr>
+              <p:nvPr/>
+            </p:nvCxnSpPr>
+            <p:spPr>
+              <a:xfrm flipH="1">
+                <a:off x="-166577" y="4152013"/>
+                <a:ext cx="12525153" cy="0"/>
+              </a:xfrm>
+              <a:prstGeom prst="line">
+                <a:avLst/>
+              </a:prstGeom>
+              <a:ln>
+                <a:solidFill>
+                  <a:schemeClr val="tx1"/>
+                </a:solidFill>
+              </a:ln>
+            </p:spPr>
+            <p:style>
+              <a:lnRef idx="1">
+                <a:schemeClr val="accent1"/>
+              </a:lnRef>
+              <a:fillRef idx="0">
+                <a:schemeClr val="accent1"/>
+              </a:fillRef>
+              <a:effectRef idx="0">
+                <a:schemeClr val="accent1"/>
+              </a:effectRef>
+              <a:fontRef idx="minor">
+                <a:schemeClr val="tx1"/>
+              </a:fontRef>
+            </p:style>
+          </p:cxnSp>
+          <p:cxnSp>
+            <p:nvCxnSpPr>
+              <p:cNvPr id="19" name="Прямая соединительная линия 18">
+                <a:extLst>
+                  <a:ext uri="{FF2B5EF4-FFF2-40B4-BE49-F238E27FC236}">
+                    <a16:creationId xmlns:a16="http://schemas.microsoft.com/office/drawing/2014/main" id="{A0FD0A9A-69F9-4170-BA94-3846FED025DA}"/>
+                  </a:ext>
+                </a:extLst>
+              </p:cNvPr>
+              <p:cNvCxnSpPr>
+                <a:cxnSpLocks/>
+              </p:cNvCxnSpPr>
+              <p:nvPr/>
+            </p:nvCxnSpPr>
+            <p:spPr>
+              <a:xfrm flipH="1">
+                <a:off x="-166577" y="4875027"/>
+                <a:ext cx="12525153" cy="0"/>
+              </a:xfrm>
+              <a:prstGeom prst="line">
+                <a:avLst/>
+              </a:prstGeom>
+              <a:ln>
+                <a:solidFill>
+                  <a:schemeClr val="tx1"/>
+                </a:solidFill>
+              </a:ln>
+            </p:spPr>
+            <p:style>
+              <a:lnRef idx="1">
+                <a:schemeClr val="accent1"/>
+              </a:lnRef>
+              <a:fillRef idx="0">
+                <a:schemeClr val="accent1"/>
+              </a:fillRef>
+              <a:effectRef idx="0">
+                <a:schemeClr val="accent1"/>
+              </a:effectRef>
+              <a:fontRef idx="minor">
+                <a:schemeClr val="tx1"/>
+              </a:fontRef>
+            </p:style>
+          </p:cxnSp>
+          <p:cxnSp>
+            <p:nvCxnSpPr>
+              <p:cNvPr id="20" name="Прямая соединительная линия 19">
+                <a:extLst>
+                  <a:ext uri="{FF2B5EF4-FFF2-40B4-BE49-F238E27FC236}">
+                    <a16:creationId xmlns:a16="http://schemas.microsoft.com/office/drawing/2014/main" id="{C7407EBB-B386-401C-9331-199FBF6114CE}"/>
+                  </a:ext>
+                </a:extLst>
+              </p:cNvPr>
+              <p:cNvCxnSpPr>
+                <a:cxnSpLocks/>
+              </p:cNvCxnSpPr>
+              <p:nvPr/>
+            </p:nvCxnSpPr>
+            <p:spPr>
+              <a:xfrm flipH="1">
+                <a:off x="-166577" y="5592726"/>
+                <a:ext cx="12525153" cy="0"/>
+              </a:xfrm>
+              <a:prstGeom prst="line">
+                <a:avLst/>
+              </a:prstGeom>
+              <a:ln>
+                <a:solidFill>
+                  <a:schemeClr val="tx1"/>
+                </a:solidFill>
+              </a:ln>
+            </p:spPr>
+            <p:style>
+              <a:lnRef idx="1">
+                <a:schemeClr val="accent1"/>
+              </a:lnRef>
+              <a:fillRef idx="0">
+                <a:schemeClr val="accent1"/>
+              </a:fillRef>
+              <a:effectRef idx="0">
+                <a:schemeClr val="accent1"/>
+              </a:effectRef>
+              <a:fontRef idx="minor">
+                <a:schemeClr val="tx1"/>
+              </a:fontRef>
+            </p:style>
+          </p:cxnSp>
+          <p:cxnSp>
+            <p:nvCxnSpPr>
+              <p:cNvPr id="21" name="Прямая соединительная линия 20">
+                <a:extLst>
+                  <a:ext uri="{FF2B5EF4-FFF2-40B4-BE49-F238E27FC236}">
+                    <a16:creationId xmlns:a16="http://schemas.microsoft.com/office/drawing/2014/main" id="{5A00AFAC-24D0-4772-B007-1F6D4801E061}"/>
+                  </a:ext>
+                </a:extLst>
+              </p:cNvPr>
+              <p:cNvCxnSpPr>
+                <a:cxnSpLocks/>
+              </p:cNvCxnSpPr>
+              <p:nvPr/>
+            </p:nvCxnSpPr>
+            <p:spPr>
+              <a:xfrm flipH="1">
+                <a:off x="-166577" y="6305107"/>
+                <a:ext cx="12525153" cy="0"/>
+              </a:xfrm>
+              <a:prstGeom prst="line">
+                <a:avLst/>
+              </a:prstGeom>
+              <a:ln>
+                <a:solidFill>
+                  <a:schemeClr val="tx1"/>
+                </a:solidFill>
+              </a:ln>
+            </p:spPr>
+            <p:style>
+              <a:lnRef idx="1">
+                <a:schemeClr val="accent1"/>
+              </a:lnRef>
+              <a:fillRef idx="0">
+                <a:schemeClr val="accent1"/>
+              </a:fillRef>
+              <a:effectRef idx="0">
+                <a:schemeClr val="accent1"/>
+              </a:effectRef>
+              <a:fontRef idx="minor">
+                <a:schemeClr val="tx1"/>
+              </a:fontRef>
+            </p:style>
+          </p:cxnSp>
+          <p:cxnSp>
+            <p:nvCxnSpPr>
+              <p:cNvPr id="22" name="Прямая соединительная линия 21">
+                <a:extLst>
+                  <a:ext uri="{FF2B5EF4-FFF2-40B4-BE49-F238E27FC236}">
+                    <a16:creationId xmlns:a16="http://schemas.microsoft.com/office/drawing/2014/main" id="{C92C6CD4-7D64-4358-88EB-42B20046AA6C}"/>
+                  </a:ext>
+                </a:extLst>
+              </p:cNvPr>
+              <p:cNvCxnSpPr>
+                <a:cxnSpLocks/>
+              </p:cNvCxnSpPr>
+              <p:nvPr/>
+            </p:nvCxnSpPr>
+            <p:spPr>
+              <a:xfrm>
+                <a:off x="4657063" y="0"/>
+                <a:ext cx="0" cy="7060019"/>
+              </a:xfrm>
+              <a:prstGeom prst="line">
+                <a:avLst/>
+              </a:prstGeom>
+              <a:ln>
+                <a:solidFill>
+                  <a:schemeClr val="tx1"/>
+                </a:solidFill>
+              </a:ln>
+            </p:spPr>
+            <p:style>
+              <a:lnRef idx="1">
+                <a:schemeClr val="accent1"/>
+              </a:lnRef>
+              <a:fillRef idx="0">
+                <a:schemeClr val="accent1"/>
+              </a:fillRef>
+              <a:effectRef idx="0">
+                <a:schemeClr val="accent1"/>
+              </a:effectRef>
+              <a:fontRef idx="minor">
+                <a:schemeClr val="tx1"/>
+              </a:fontRef>
+            </p:style>
+          </p:cxnSp>
+          <p:cxnSp>
+            <p:nvCxnSpPr>
+              <p:cNvPr id="23" name="Прямая соединительная линия 22">
+                <a:extLst>
+                  <a:ext uri="{FF2B5EF4-FFF2-40B4-BE49-F238E27FC236}">
+                    <a16:creationId xmlns:a16="http://schemas.microsoft.com/office/drawing/2014/main" id="{DBCB635D-5CCB-48A9-8D29-8AEA9C51BED5}"/>
+                  </a:ext>
+                </a:extLst>
+              </p:cNvPr>
+              <p:cNvCxnSpPr>
+                <a:cxnSpLocks/>
+              </p:cNvCxnSpPr>
+              <p:nvPr/>
+            </p:nvCxnSpPr>
+            <p:spPr>
+              <a:xfrm flipH="1">
+                <a:off x="556438" y="6305107"/>
+                <a:ext cx="12525153" cy="0"/>
+              </a:xfrm>
+              <a:prstGeom prst="line">
+                <a:avLst/>
+              </a:prstGeom>
+              <a:ln>
+                <a:solidFill>
+                  <a:schemeClr val="tx1"/>
+                </a:solidFill>
+              </a:ln>
+            </p:spPr>
+            <p:style>
+              <a:lnRef idx="1">
+                <a:schemeClr val="accent1"/>
+              </a:lnRef>
+              <a:fillRef idx="0">
+                <a:schemeClr val="accent1"/>
+              </a:fillRef>
+              <a:effectRef idx="0">
+                <a:schemeClr val="accent1"/>
+              </a:effectRef>
+              <a:fontRef idx="minor">
+                <a:schemeClr val="tx1"/>
+              </a:fontRef>
+            </p:style>
+          </p:cxnSp>
+          <p:cxnSp>
+            <p:nvCxnSpPr>
+              <p:cNvPr id="24" name="Прямая соединительная линия 23">
+                <a:extLst>
+                  <a:ext uri="{FF2B5EF4-FFF2-40B4-BE49-F238E27FC236}">
+                    <a16:creationId xmlns:a16="http://schemas.microsoft.com/office/drawing/2014/main" id="{A6FC8F23-5AE0-4FDB-B2BB-E6D3E8F266DE}"/>
+                  </a:ext>
+                </a:extLst>
+              </p:cNvPr>
+              <p:cNvCxnSpPr>
+                <a:cxnSpLocks/>
+              </p:cNvCxnSpPr>
+              <p:nvPr/>
+            </p:nvCxnSpPr>
+            <p:spPr>
+              <a:xfrm>
+                <a:off x="5380077" y="0"/>
+                <a:ext cx="0" cy="7060019"/>
+              </a:xfrm>
+              <a:prstGeom prst="line">
+                <a:avLst/>
+              </a:prstGeom>
+              <a:ln>
+                <a:solidFill>
+                  <a:schemeClr val="tx1"/>
+                </a:solidFill>
+              </a:ln>
+            </p:spPr>
+            <p:style>
+              <a:lnRef idx="1">
+                <a:schemeClr val="accent1"/>
+              </a:lnRef>
+              <a:fillRef idx="0">
+                <a:schemeClr val="accent1"/>
+              </a:fillRef>
+              <a:effectRef idx="0">
+                <a:schemeClr val="accent1"/>
+              </a:effectRef>
+              <a:fontRef idx="minor">
+                <a:schemeClr val="tx1"/>
+              </a:fontRef>
+            </p:style>
+          </p:cxnSp>
+          <p:cxnSp>
+            <p:nvCxnSpPr>
+              <p:cNvPr id="25" name="Прямая соединительная линия 24">
+                <a:extLst>
+                  <a:ext uri="{FF2B5EF4-FFF2-40B4-BE49-F238E27FC236}">
+                    <a16:creationId xmlns:a16="http://schemas.microsoft.com/office/drawing/2014/main" id="{F478A673-FAA0-40F7-9553-BE69EB96603E}"/>
+                  </a:ext>
+                </a:extLst>
+              </p:cNvPr>
+              <p:cNvCxnSpPr>
+                <a:cxnSpLocks/>
+              </p:cNvCxnSpPr>
+              <p:nvPr/>
+            </p:nvCxnSpPr>
+            <p:spPr>
+              <a:xfrm>
+                <a:off x="6096003" y="0"/>
+                <a:ext cx="0" cy="7060019"/>
+              </a:xfrm>
+              <a:prstGeom prst="line">
+                <a:avLst/>
+              </a:prstGeom>
+              <a:ln>
+                <a:solidFill>
+                  <a:schemeClr val="tx1"/>
+                </a:solidFill>
+              </a:ln>
+            </p:spPr>
+            <p:style>
+              <a:lnRef idx="1">
+                <a:schemeClr val="accent1"/>
+              </a:lnRef>
+              <a:fillRef idx="0">
+                <a:schemeClr val="accent1"/>
+              </a:fillRef>
+              <a:effectRef idx="0">
+                <a:schemeClr val="accent1"/>
+              </a:effectRef>
+              <a:fontRef idx="minor">
+                <a:schemeClr val="tx1"/>
+              </a:fontRef>
+            </p:style>
+          </p:cxnSp>
+          <p:cxnSp>
+            <p:nvCxnSpPr>
+              <p:cNvPr id="26" name="Прямая соединительная линия 25">
+                <a:extLst>
+                  <a:ext uri="{FF2B5EF4-FFF2-40B4-BE49-F238E27FC236}">
+                    <a16:creationId xmlns:a16="http://schemas.microsoft.com/office/drawing/2014/main" id="{632D97B2-5B41-4725-8BED-1BB84D9049A3}"/>
+                  </a:ext>
+                </a:extLst>
+              </p:cNvPr>
+              <p:cNvCxnSpPr>
+                <a:cxnSpLocks/>
+              </p:cNvCxnSpPr>
+              <p:nvPr/>
+            </p:nvCxnSpPr>
+            <p:spPr>
+              <a:xfrm>
+                <a:off x="6819014" y="-12795"/>
+                <a:ext cx="0" cy="7060019"/>
+              </a:xfrm>
+              <a:prstGeom prst="line">
+                <a:avLst/>
+              </a:prstGeom>
+              <a:ln>
+                <a:solidFill>
+                  <a:schemeClr val="tx1"/>
+                </a:solidFill>
+              </a:ln>
+            </p:spPr>
+            <p:style>
+              <a:lnRef idx="1">
+                <a:schemeClr val="accent1"/>
+              </a:lnRef>
+              <a:fillRef idx="0">
+                <a:schemeClr val="accent1"/>
+              </a:fillRef>
+              <a:effectRef idx="0">
+                <a:schemeClr val="accent1"/>
+              </a:effectRef>
+              <a:fontRef idx="minor">
+                <a:schemeClr val="tx1"/>
+              </a:fontRef>
+            </p:style>
+          </p:cxnSp>
+          <p:cxnSp>
+            <p:nvCxnSpPr>
+              <p:cNvPr id="27" name="Прямая соединительная линия 26">
+                <a:extLst>
+                  <a:ext uri="{FF2B5EF4-FFF2-40B4-BE49-F238E27FC236}">
+                    <a16:creationId xmlns:a16="http://schemas.microsoft.com/office/drawing/2014/main" id="{0096069A-E1F5-484F-9AD5-E590F3AFB8C1}"/>
+                  </a:ext>
+                </a:extLst>
+              </p:cNvPr>
+              <p:cNvCxnSpPr>
+                <a:cxnSpLocks/>
+              </p:cNvCxnSpPr>
+              <p:nvPr/>
+            </p:nvCxnSpPr>
+            <p:spPr>
+              <a:xfrm>
+                <a:off x="7542032" y="-12796"/>
+                <a:ext cx="0" cy="7060019"/>
+              </a:xfrm>
+              <a:prstGeom prst="line">
+                <a:avLst/>
+              </a:prstGeom>
+              <a:ln>
+                <a:solidFill>
+                  <a:schemeClr val="tx1"/>
+                </a:solidFill>
+              </a:ln>
+            </p:spPr>
+            <p:style>
+              <a:lnRef idx="1">
+                <a:schemeClr val="accent1"/>
+              </a:lnRef>
+              <a:fillRef idx="0">
+                <a:schemeClr val="accent1"/>
+              </a:fillRef>
+              <a:effectRef idx="0">
+                <a:schemeClr val="accent1"/>
+              </a:effectRef>
+              <a:fontRef idx="minor">
+                <a:schemeClr val="tx1"/>
+              </a:fontRef>
+            </p:style>
+          </p:cxnSp>
+          <p:cxnSp>
+            <p:nvCxnSpPr>
+              <p:cNvPr id="28" name="Прямая соединительная линия 27">
+                <a:extLst>
+                  <a:ext uri="{FF2B5EF4-FFF2-40B4-BE49-F238E27FC236}">
+                    <a16:creationId xmlns:a16="http://schemas.microsoft.com/office/drawing/2014/main" id="{CD8CFF4F-9474-44E2-8483-EE501133D094}"/>
+                  </a:ext>
+                </a:extLst>
+              </p:cNvPr>
+              <p:cNvCxnSpPr>
+                <a:cxnSpLocks/>
+              </p:cNvCxnSpPr>
+              <p:nvPr/>
+            </p:nvCxnSpPr>
+            <p:spPr>
+              <a:xfrm>
+                <a:off x="8265045" y="-12797"/>
+                <a:ext cx="0" cy="7060019"/>
+              </a:xfrm>
+              <a:prstGeom prst="line">
+                <a:avLst/>
+              </a:prstGeom>
+              <a:ln>
+                <a:solidFill>
+                  <a:schemeClr val="tx1"/>
+                </a:solidFill>
+              </a:ln>
+            </p:spPr>
+            <p:style>
+              <a:lnRef idx="1">
+                <a:schemeClr val="accent1"/>
+              </a:lnRef>
+              <a:fillRef idx="0">
+                <a:schemeClr val="accent1"/>
+              </a:fillRef>
+              <a:effectRef idx="0">
+                <a:schemeClr val="accent1"/>
+              </a:effectRef>
+              <a:fontRef idx="minor">
+                <a:schemeClr val="tx1"/>
+              </a:fontRef>
+            </p:style>
+          </p:cxnSp>
+          <p:cxnSp>
+            <p:nvCxnSpPr>
+              <p:cNvPr id="29" name="Прямая соединительная линия 28">
+                <a:extLst>
+                  <a:ext uri="{FF2B5EF4-FFF2-40B4-BE49-F238E27FC236}">
+                    <a16:creationId xmlns:a16="http://schemas.microsoft.com/office/drawing/2014/main" id="{CA573EE6-F195-44AF-9C78-7860BF4CC13C}"/>
+                  </a:ext>
+                </a:extLst>
+              </p:cNvPr>
+              <p:cNvCxnSpPr>
+                <a:cxnSpLocks/>
+              </p:cNvCxnSpPr>
+              <p:nvPr/>
+            </p:nvCxnSpPr>
+            <p:spPr>
+              <a:xfrm>
+                <a:off x="8977428" y="-12798"/>
+                <a:ext cx="0" cy="7060019"/>
+              </a:xfrm>
+              <a:prstGeom prst="line">
+                <a:avLst/>
+              </a:prstGeom>
+              <a:ln>
+                <a:solidFill>
+                  <a:schemeClr val="tx1"/>
+                </a:solidFill>
+              </a:ln>
+            </p:spPr>
+            <p:style>
+              <a:lnRef idx="1">
+                <a:schemeClr val="accent1"/>
+              </a:lnRef>
+              <a:fillRef idx="0">
+                <a:schemeClr val="accent1"/>
+              </a:fillRef>
+              <a:effectRef idx="0">
+                <a:schemeClr val="accent1"/>
+              </a:effectRef>
+              <a:fontRef idx="minor">
+                <a:schemeClr val="tx1"/>
+              </a:fontRef>
+            </p:style>
+          </p:cxnSp>
+          <p:cxnSp>
+            <p:nvCxnSpPr>
+              <p:cNvPr id="30" name="Прямая соединительная линия 29">
+                <a:extLst>
+                  <a:ext uri="{FF2B5EF4-FFF2-40B4-BE49-F238E27FC236}">
+                    <a16:creationId xmlns:a16="http://schemas.microsoft.com/office/drawing/2014/main" id="{64DB25F9-7347-4751-961B-E6FEBE4F1600}"/>
+                  </a:ext>
+                </a:extLst>
+              </p:cNvPr>
+              <p:cNvCxnSpPr>
+                <a:cxnSpLocks/>
+              </p:cNvCxnSpPr>
+              <p:nvPr/>
+            </p:nvCxnSpPr>
+            <p:spPr>
+              <a:xfrm>
+                <a:off x="9693347" y="0"/>
+                <a:ext cx="0" cy="7060019"/>
+              </a:xfrm>
+              <a:prstGeom prst="line">
+                <a:avLst/>
+              </a:prstGeom>
+              <a:ln>
+                <a:solidFill>
+                  <a:schemeClr val="tx1"/>
+                </a:solidFill>
+              </a:ln>
+            </p:spPr>
+            <p:style>
+              <a:lnRef idx="1">
+                <a:schemeClr val="accent1"/>
+              </a:lnRef>
+              <a:fillRef idx="0">
+                <a:schemeClr val="accent1"/>
+              </a:fillRef>
+              <a:effectRef idx="0">
+                <a:schemeClr val="accent1"/>
+              </a:effectRef>
+              <a:fontRef idx="minor">
+                <a:schemeClr val="tx1"/>
+              </a:fontRef>
+            </p:style>
+          </p:cxnSp>
+          <p:cxnSp>
+            <p:nvCxnSpPr>
+              <p:cNvPr id="31" name="Прямая соединительная линия 30">
+                <a:extLst>
+                  <a:ext uri="{FF2B5EF4-FFF2-40B4-BE49-F238E27FC236}">
+                    <a16:creationId xmlns:a16="http://schemas.microsoft.com/office/drawing/2014/main" id="{E497B18E-A3B4-492E-98EC-EB5195E84BE0}"/>
+                  </a:ext>
+                </a:extLst>
+              </p:cNvPr>
+              <p:cNvCxnSpPr>
+                <a:cxnSpLocks/>
+              </p:cNvCxnSpPr>
+              <p:nvPr/>
+            </p:nvCxnSpPr>
+            <p:spPr>
+              <a:xfrm>
+                <a:off x="10416362" y="0"/>
+                <a:ext cx="0" cy="7060019"/>
+              </a:xfrm>
+              <a:prstGeom prst="line">
+                <a:avLst/>
+              </a:prstGeom>
+              <a:ln>
+                <a:solidFill>
+                  <a:schemeClr val="tx1"/>
+                </a:solidFill>
+              </a:ln>
+            </p:spPr>
+            <p:style>
+              <a:lnRef idx="1">
+                <a:schemeClr val="accent1"/>
+              </a:lnRef>
+              <a:fillRef idx="0">
+                <a:schemeClr val="accent1"/>
+              </a:fillRef>
+              <a:effectRef idx="0">
+                <a:schemeClr val="accent1"/>
+              </a:effectRef>
+              <a:fontRef idx="minor">
+                <a:schemeClr val="tx1"/>
+              </a:fontRef>
+            </p:style>
+          </p:cxnSp>
+          <p:cxnSp>
+            <p:nvCxnSpPr>
+              <p:cNvPr id="32" name="Прямая соединительная линия 31">
+                <a:extLst>
+                  <a:ext uri="{FF2B5EF4-FFF2-40B4-BE49-F238E27FC236}">
+                    <a16:creationId xmlns:a16="http://schemas.microsoft.com/office/drawing/2014/main" id="{9A209BAB-9A16-4C31-A951-28C1FF9C8C80}"/>
+                  </a:ext>
+                </a:extLst>
+              </p:cNvPr>
+              <p:cNvCxnSpPr>
+                <a:cxnSpLocks/>
+              </p:cNvCxnSpPr>
+              <p:nvPr/>
+            </p:nvCxnSpPr>
+            <p:spPr>
+              <a:xfrm>
+                <a:off x="11128743" y="0"/>
+                <a:ext cx="0" cy="7060019"/>
+              </a:xfrm>
+              <a:prstGeom prst="line">
+                <a:avLst/>
+              </a:prstGeom>
+              <a:ln>
+                <a:solidFill>
+                  <a:schemeClr val="tx1"/>
+                </a:solidFill>
+              </a:ln>
+            </p:spPr>
+            <p:style>
+              <a:lnRef idx="1">
+                <a:schemeClr val="accent1"/>
+              </a:lnRef>
+              <a:fillRef idx="0">
+                <a:schemeClr val="accent1"/>
+              </a:fillRef>
+              <a:effectRef idx="0">
+                <a:schemeClr val="accent1"/>
+              </a:effectRef>
+              <a:fontRef idx="minor">
+                <a:schemeClr val="tx1"/>
+              </a:fontRef>
+            </p:style>
+          </p:cxnSp>
+          <p:cxnSp>
+            <p:nvCxnSpPr>
+              <p:cNvPr id="33" name="Прямая соединительная линия 32">
+                <a:extLst>
+                  <a:ext uri="{FF2B5EF4-FFF2-40B4-BE49-F238E27FC236}">
+                    <a16:creationId xmlns:a16="http://schemas.microsoft.com/office/drawing/2014/main" id="{DF66F787-5F35-42BB-99A2-5599D69B2759}"/>
+                  </a:ext>
+                </a:extLst>
+              </p:cNvPr>
+              <p:cNvCxnSpPr>
+                <a:cxnSpLocks/>
+              </p:cNvCxnSpPr>
+              <p:nvPr/>
+            </p:nvCxnSpPr>
+            <p:spPr>
+              <a:xfrm>
+                <a:off x="11862644" y="0"/>
+                <a:ext cx="0" cy="7060019"/>
+              </a:xfrm>
+              <a:prstGeom prst="line">
+                <a:avLst/>
+              </a:prstGeom>
+              <a:ln>
+                <a:solidFill>
+                  <a:schemeClr val="tx1"/>
+                </a:solidFill>
+              </a:ln>
+            </p:spPr>
+            <p:style>
+              <a:lnRef idx="1">
+                <a:schemeClr val="accent1"/>
+              </a:lnRef>
+              <a:fillRef idx="0">
+                <a:schemeClr val="accent1"/>
+              </a:fillRef>
+              <a:effectRef idx="0">
+                <a:schemeClr val="accent1"/>
+              </a:effectRef>
+              <a:fontRef idx="minor">
+                <a:schemeClr val="tx1"/>
+              </a:fontRef>
+            </p:style>
+          </p:cxnSp>
+        </p:grpSp>
+        <p:cxnSp>
+          <p:nvCxnSpPr>
+            <p:cNvPr id="35" name="Прямая соединительная линия 34">
+              <a:extLst>
+                <a:ext uri="{FF2B5EF4-FFF2-40B4-BE49-F238E27FC236}">
+                  <a16:creationId xmlns:a16="http://schemas.microsoft.com/office/drawing/2014/main" id="{A5354744-6A8D-4078-A907-2FAD85E3AF28}"/>
+                </a:ext>
+              </a:extLst>
+            </p:cNvPr>
+            <p:cNvCxnSpPr/>
+            <p:nvPr/>
+          </p:nvCxnSpPr>
+          <p:spPr>
+            <a:xfrm>
+              <a:off x="0" y="2889247"/>
+              <a:ext cx="12596037" cy="0"/>
+            </a:xfrm>
+            <a:prstGeom prst="line">
+              <a:avLst/>
+            </a:prstGeom>
+            <a:ln>
+              <a:solidFill>
+                <a:schemeClr val="tx1"/>
+              </a:solidFill>
+            </a:ln>
+          </p:spPr>
+          <p:style>
+            <a:lnRef idx="1">
+              <a:schemeClr val="accent1"/>
+            </a:lnRef>
+            <a:fillRef idx="0">
+              <a:schemeClr val="accent1"/>
+            </a:fillRef>
+            <a:effectRef idx="0">
+              <a:schemeClr val="accent1"/>
+            </a:effectRef>
+            <a:fontRef idx="minor">
+              <a:schemeClr val="tx1"/>
+            </a:fontRef>
+          </p:style>
+        </p:cxnSp>
+      </p:grpSp>
+      <p:sp>
+        <p:nvSpPr>
+          <p:cNvPr id="43" name="Прямоугольник 42">
+            <a:extLst>
+              <a:ext uri="{FF2B5EF4-FFF2-40B4-BE49-F238E27FC236}">
+                <a16:creationId xmlns:a16="http://schemas.microsoft.com/office/drawing/2014/main" id="{F1BA58C8-CB0D-42C8-9353-C041814589B5}"/>
+              </a:ext>
+            </a:extLst>
+          </p:cNvPr>
+          <p:cNvSpPr/>
+          <p:nvPr/>
+        </p:nvSpPr>
+        <p:spPr>
+          <a:xfrm>
+            <a:off x="1522575" y="1523675"/>
+            <a:ext cx="9869864" cy="4479264"/>
+          </a:xfrm>
+          <a:custGeom>
+            <a:avLst/>
+            <a:gdLst>
+              <a:gd name="connsiteX0" fmla="*/ 0 w 9869864"/>
+              <a:gd name="connsiteY0" fmla="*/ 0 h 4479264"/>
+              <a:gd name="connsiteX1" fmla="*/ 9869864 w 9869864"/>
+              <a:gd name="connsiteY1" fmla="*/ 0 h 4479264"/>
+              <a:gd name="connsiteX2" fmla="*/ 9869864 w 9869864"/>
+              <a:gd name="connsiteY2" fmla="*/ 4479264 h 4479264"/>
+              <a:gd name="connsiteX3" fmla="*/ 0 w 9869864"/>
+              <a:gd name="connsiteY3" fmla="*/ 4479264 h 4479264"/>
+              <a:gd name="connsiteX4" fmla="*/ 0 w 9869864"/>
+              <a:gd name="connsiteY4" fmla="*/ 0 h 4479264"/>
+            </a:gdLst>
+            <a:ahLst/>
+            <a:cxnLst>
+              <a:cxn ang="0">
+                <a:pos x="connsiteX0" y="connsiteY0"/>
+              </a:cxn>
+              <a:cxn ang="0">
+                <a:pos x="connsiteX1" y="connsiteY1"/>
+              </a:cxn>
+              <a:cxn ang="0">
+                <a:pos x="connsiteX2" y="connsiteY2"/>
+              </a:cxn>
+              <a:cxn ang="0">
+                <a:pos x="connsiteX3" y="connsiteY3"/>
+              </a:cxn>
+              <a:cxn ang="0">
+                <a:pos x="connsiteX4" y="connsiteY4"/>
+              </a:cxn>
+            </a:cxnLst>
+            <a:rect l="l" t="t" r="r" b="b"/>
+            <a:pathLst>
+              <a:path w="9869864" h="4479264" fill="none" extrusionOk="0">
+                <a:moveTo>
+                  <a:pt x="0" y="0"/>
+                </a:moveTo>
+                <a:cubicBezTo>
+                  <a:pt x="3831520" y="-159440"/>
+                  <a:pt x="6605196" y="19408"/>
+                  <a:pt x="9869864" y="0"/>
+                </a:cubicBezTo>
+                <a:cubicBezTo>
+                  <a:pt x="10027904" y="2011379"/>
+                  <a:pt x="9863463" y="3133819"/>
+                  <a:pt x="9869864" y="4479264"/>
+                </a:cubicBezTo>
+                <a:cubicBezTo>
+                  <a:pt x="7396228" y="4393032"/>
+                  <a:pt x="3393268" y="4395962"/>
+                  <a:pt x="0" y="4479264"/>
+                </a:cubicBezTo>
+                <a:cubicBezTo>
+                  <a:pt x="-145898" y="3619195"/>
+                  <a:pt x="-24387" y="1200516"/>
+                  <a:pt x="0" y="0"/>
+                </a:cubicBezTo>
+                <a:close/>
+              </a:path>
+              <a:path w="9869864" h="4479264" stroke="0" extrusionOk="0">
+                <a:moveTo>
+                  <a:pt x="0" y="0"/>
+                </a:moveTo>
+                <a:cubicBezTo>
+                  <a:pt x="4863626" y="112754"/>
+                  <a:pt x="7115958" y="-67146"/>
+                  <a:pt x="9869864" y="0"/>
+                </a:cubicBezTo>
+                <a:cubicBezTo>
+                  <a:pt x="9961230" y="833996"/>
+                  <a:pt x="9875015" y="2860015"/>
+                  <a:pt x="9869864" y="4479264"/>
+                </a:cubicBezTo>
+                <a:cubicBezTo>
+                  <a:pt x="6129429" y="4551694"/>
+                  <a:pt x="4447473" y="4558212"/>
+                  <a:pt x="0" y="4479264"/>
+                </a:cubicBezTo>
+                <a:cubicBezTo>
+                  <a:pt x="77396" y="3799926"/>
+                  <a:pt x="15692" y="1626302"/>
+                  <a:pt x="0" y="0"/>
+                </a:cubicBezTo>
+                <a:close/>
+              </a:path>
+            </a:pathLst>
+          </a:custGeom>
+          <a:solidFill>
+            <a:schemeClr val="accent5">
+              <a:lumMod val="20000"/>
+              <a:lumOff val="80000"/>
+            </a:schemeClr>
+          </a:solidFill>
+          <a:ln>
+            <a:solidFill>
+              <a:schemeClr val="tx1"/>
+            </a:solidFill>
+            <a:extLst>
+              <a:ext uri="{C807C97D-BFC1-408E-A445-0C87EB9F89A2}">
+                <ask:lineSketchStyleProps xmlns:ask="http://schemas.microsoft.com/office/drawing/2018/sketchyshapes" sd="1336358556">
+                  <a:prstGeom prst="rect">
+                    <a:avLst/>
+                  </a:prstGeom>
+                  <ask:type>
+                    <ask:lineSketchCurved/>
+                  </ask:type>
+                </ask:lineSketchStyleProps>
+              </a:ext>
+            </a:extLst>
+          </a:ln>
+        </p:spPr>
+        <p:style>
+          <a:lnRef idx="2">
+            <a:schemeClr val="accent1">
+              <a:shade val="50000"/>
+            </a:schemeClr>
+          </a:lnRef>
+          <a:fillRef idx="1">
+            <a:schemeClr val="accent1"/>
+          </a:fillRef>
+          <a:effectRef idx="0">
+            <a:schemeClr val="accent1"/>
+          </a:effectRef>
+          <a:fontRef idx="minor">
+            <a:schemeClr val="lt1"/>
+          </a:fontRef>
+        </p:style>
+        <p:txBody>
+          <a:bodyPr rtlCol="0" anchor="ctr"/>
+          <a:lstStyle/>
+          <a:p>
+            <a:pPr algn="ctr"/>
+            <a:r>
+              <a:rPr sz="1400" b="1">
+                <a:solidFill>
+                  <a:srgbClr val="2F2F2F"/>
+                </a:solidFill>
+                <a:latin typeface="Century Gothic"/>
+              </a:rPr>
+              <a:t>Главное</a:t>
+            </a:r>
+            <a:endParaRPr lang="ru-RU"/>
+          </a:p>
+          <a:p>
+            <a:r>
+              <a:rPr sz="800" b="0">
+                <a:solidFill>
+                  <a:srgbClr val="2F2F2F"/>
+                </a:solidFill>
+                <a:latin typeface="Century Gothic"/>
+              </a:rPr>
+              <a:t/>
+            </a:r>
+          </a:p>
+          <a:p>
+            <a:r>
+              <a:rPr sz="1400" b="0">
+                <a:solidFill>
+                  <a:srgbClr val="2F2F2F"/>
+                </a:solidFill>
+                <a:latin typeface="Century Gothic"/>
+              </a:rPr>
+              <a:t>Вредные факторы ведут к болезням, опасные — к травмам. По ст. 13 ФЗ-426 они делятся на физические, химические, биологические и факторы трудового процесса (тяжесть и напряжённость).</a:t>
+            </a:r>
+          </a:p>
+          <a:p>
+            <a:r>
+              <a:rPr sz="800" b="0">
+                <a:solidFill>
+                  <a:srgbClr val="2F2F2F"/>
+                </a:solidFill>
+                <a:latin typeface="Century Gothic"/>
+              </a:rPr>
+              <a:t/>
+            </a:r>
+          </a:p>
+          <a:p>
+            <a:r>
+              <a:rPr sz="1400" b="0">
+                <a:solidFill>
+                  <a:srgbClr val="2F2F2F"/>
+                </a:solidFill>
+                <a:latin typeface="Century Gothic"/>
+              </a:rPr>
+              <a:t>Выявляют их через СОУТ. Цель всех мероприятий — жизнь, здоровье и защита прав работника.</a:t>
+            </a:r>
+          </a:p>
+        </p:txBody>
+      </p:sp>
+      <p:sp>
+        <p:nvSpPr>
+          <p:cNvPr id="37" name="Прямоугольник 36">
+            <a:extLst>
+              <a:ext uri="{FF2B5EF4-FFF2-40B4-BE49-F238E27FC236}">
+                <a16:creationId xmlns:a16="http://schemas.microsoft.com/office/drawing/2014/main" id="{247A25D5-0201-4715-B299-1F1450E9A577}"/>
+              </a:ext>
+            </a:extLst>
+          </p:cNvPr>
+          <p:cNvSpPr/>
+          <p:nvPr/>
+        </p:nvSpPr>
+        <p:spPr>
+          <a:xfrm>
+            <a:off x="1161068" y="1179857"/>
+            <a:ext cx="9869864" cy="4479264"/>
+          </a:xfrm>
+          <a:custGeom>
+            <a:avLst/>
+            <a:gdLst>
+              <a:gd name="connsiteX0" fmla="*/ 0 w 9869864"/>
+              <a:gd name="connsiteY0" fmla="*/ 0 h 4479264"/>
+              <a:gd name="connsiteX1" fmla="*/ 9869864 w 9869864"/>
+              <a:gd name="connsiteY1" fmla="*/ 0 h 4479264"/>
+              <a:gd name="connsiteX2" fmla="*/ 9869864 w 9869864"/>
+              <a:gd name="connsiteY2" fmla="*/ 4479264 h 4479264"/>
+              <a:gd name="connsiteX3" fmla="*/ 0 w 9869864"/>
+              <a:gd name="connsiteY3" fmla="*/ 4479264 h 4479264"/>
+              <a:gd name="connsiteX4" fmla="*/ 0 w 9869864"/>
+              <a:gd name="connsiteY4" fmla="*/ 0 h 4479264"/>
+            </a:gdLst>
+            <a:ahLst/>
+            <a:cxnLst>
+              <a:cxn ang="0">
+                <a:pos x="connsiteX0" y="connsiteY0"/>
+              </a:cxn>
+              <a:cxn ang="0">
+                <a:pos x="connsiteX1" y="connsiteY1"/>
+              </a:cxn>
+              <a:cxn ang="0">
+                <a:pos x="connsiteX2" y="connsiteY2"/>
+              </a:cxn>
+              <a:cxn ang="0">
+                <a:pos x="connsiteX3" y="connsiteY3"/>
+              </a:cxn>
+              <a:cxn ang="0">
+                <a:pos x="connsiteX4" y="connsiteY4"/>
+              </a:cxn>
+            </a:cxnLst>
+            <a:rect l="l" t="t" r="r" b="b"/>
+            <a:pathLst>
+              <a:path w="9869864" h="4479264" fill="none" extrusionOk="0">
+                <a:moveTo>
+                  <a:pt x="0" y="0"/>
+                </a:moveTo>
+                <a:cubicBezTo>
+                  <a:pt x="3831520" y="-159440"/>
+                  <a:pt x="6605196" y="19408"/>
+                  <a:pt x="9869864" y="0"/>
+                </a:cubicBezTo>
+                <a:cubicBezTo>
+                  <a:pt x="10027904" y="2011379"/>
+                  <a:pt x="9863463" y="3133819"/>
+                  <a:pt x="9869864" y="4479264"/>
+                </a:cubicBezTo>
+                <a:cubicBezTo>
+                  <a:pt x="7396228" y="4393032"/>
+                  <a:pt x="3393268" y="4395962"/>
+                  <a:pt x="0" y="4479264"/>
+                </a:cubicBezTo>
+                <a:cubicBezTo>
+                  <a:pt x="-145898" y="3619195"/>
+                  <a:pt x="-24387" y="1200516"/>
+                  <a:pt x="0" y="0"/>
+                </a:cubicBezTo>
+                <a:close/>
+              </a:path>
+              <a:path w="9869864" h="4479264" stroke="0" extrusionOk="0">
+                <a:moveTo>
+                  <a:pt x="0" y="0"/>
+                </a:moveTo>
+                <a:cubicBezTo>
+                  <a:pt x="4863626" y="112754"/>
+                  <a:pt x="7115958" y="-67146"/>
+                  <a:pt x="9869864" y="0"/>
+                </a:cubicBezTo>
+                <a:cubicBezTo>
+                  <a:pt x="9961230" y="833996"/>
+                  <a:pt x="9875015" y="2860015"/>
+                  <a:pt x="9869864" y="4479264"/>
+                </a:cubicBezTo>
+                <a:cubicBezTo>
+                  <a:pt x="6129429" y="4551694"/>
+                  <a:pt x="4447473" y="4558212"/>
+                  <a:pt x="0" y="4479264"/>
+                </a:cubicBezTo>
+                <a:cubicBezTo>
+                  <a:pt x="77396" y="3799926"/>
+                  <a:pt x="15692" y="1626302"/>
+                  <a:pt x="0" y="0"/>
+                </a:cubicBezTo>
+                <a:close/>
+              </a:path>
+            </a:pathLst>
+          </a:custGeom>
+          <a:solidFill>
+            <a:srgbClr val="DAE3F3"/>
+          </a:solidFill>
+          <a:ln>
+            <a:solidFill>
+              <a:schemeClr val="tx1"/>
+            </a:solidFill>
+            <a:extLst>
+              <a:ext uri="{C807C97D-BFC1-408E-A445-0C87EB9F89A2}">
+                <ask:lineSketchStyleProps xmlns:ask="http://schemas.microsoft.com/office/drawing/2018/sketchyshapes" sd="1336358556">
+                  <a:prstGeom prst="rect">
+                    <a:avLst/>
+                  </a:prstGeom>
+                  <ask:type>
+                    <ask:lineSketchCurved/>
+                  </ask:type>
+                </ask:lineSketchStyleProps>
+              </a:ext>
+            </a:extLst>
+          </a:ln>
+        </p:spPr>
+        <p:style>
+          <a:lnRef idx="2">
+            <a:schemeClr val="accent1">
+              <a:shade val="50000"/>
+            </a:schemeClr>
+          </a:lnRef>
+          <a:fillRef idx="1">
+            <a:schemeClr val="accent1"/>
+          </a:fillRef>
+          <a:effectRef idx="0">
+            <a:schemeClr val="accent1"/>
+          </a:effectRef>
+          <a:fontRef idx="minor">
+            <a:schemeClr val="lt1"/>
+          </a:fontRef>
+        </p:style>
+        <p:txBody>
+          <a:bodyPr rtlCol="0" anchor="ctr"/>
+          <a:lstStyle/>
+          <a:p>
+            <a:pPr algn="ctr"/>
+            <a:endParaRPr lang="ru-RU"/>
+          </a:p>
+        </p:txBody>
+      </p:sp>
+      <p:sp>
+        <p:nvSpPr>
+          <p:cNvPr id="42" name="TextBox 41">
+            <a:extLst>
+              <a:ext uri="{FF2B5EF4-FFF2-40B4-BE49-F238E27FC236}">
+                <a16:creationId xmlns:a16="http://schemas.microsoft.com/office/drawing/2014/main" id="{6C2623F0-1205-437B-80EB-293BD3B22892}"/>
+              </a:ext>
+            </a:extLst>
+          </p:cNvPr>
+          <p:cNvSpPr txBox="1"/>
+          <p:nvPr/>
+        </p:nvSpPr>
+        <p:spPr>
+          <a:xfrm>
+            <a:off x="1862359" y="1736635"/>
+            <a:ext cx="8915312" cy="3283015"/>
+          </a:xfrm>
+          <a:prstGeom prst="rect">
+            <a:avLst/>
+          </a:prstGeom>
+          <a:noFill/>
+        </p:spPr>
+        <p:txBody>
+          <a:bodyPr wrap="square">
+            <a:spAutoFit/>
+          </a:bodyPr>
+          <a:lstStyle/>
+          <a:p>
+            <a:pPr>
+              <a:lnSpc>
+                <a:spcPct val="150000"/>
+              </a:lnSpc>
+            </a:pPr>
+          </a:p>
+        </p:txBody>
+      </p:sp>
+      <p:pic>
+        <p:nvPicPr>
+          <p:cNvPr id="2" name="Рисунок 1">
+            <a:extLst>
+              <a:ext uri="{FF2B5EF4-FFF2-40B4-BE49-F238E27FC236}">
+                <a16:creationId xmlns:a16="http://schemas.microsoft.com/office/drawing/2014/main" id="{1238151D-9F0E-404B-808F-017B8F6E2F83}"/>
+              </a:ext>
+            </a:extLst>
+          </p:cNvPr>
+          <p:cNvPicPr>
+            <a:picLocks noChangeAspect="1"/>
+          </p:cNvPicPr>
+          <p:nvPr/>
+        </p:nvPicPr>
+        <p:blipFill>
+          <a:blip r:embed="rId4"/>
+          <a:stretch>
+            <a:fillRect/>
+          </a:stretch>
+        </p:blipFill>
+        <p:spPr>
+          <a:xfrm>
+            <a:off x="1350570" y="1741601"/>
+            <a:ext cx="511789" cy="511789"/>
+          </a:xfrm>
+          <a:prstGeom prst="rect">
+            <a:avLst/>
+          </a:prstGeom>
+        </p:spPr>
+      </p:pic>
+    </p:spTree>
+    <p:custDataLst>
+      <p:tags r:id="rId1"/>
+    </p:custDataLst>
+    <p:extLst>
+      <p:ext uri="{BB962C8B-B14F-4D97-AF65-F5344CB8AC3E}">
+        <p14:creationId xmlns:p14="http://schemas.microsoft.com/office/powerpoint/2010/main" val="852760726"/>
+      </p:ext>
+    </p:extLst>
+  </p:cSld>
+  <p:clrMapOvr>
+    <a:masterClrMapping/>
+  </p:clrMapOvr>
+</p:sld>
+</file>
+
 <file path=ppt/slides/slide2.xml><?xml version="1.0" encoding="utf-8"?>
 <p:sld xmlns:a="http://schemas.openxmlformats.org/drawingml/2006/main" xmlns:r="http://schemas.openxmlformats.org/officeDocument/2006/relationships" xmlns:p="http://schemas.openxmlformats.org/presentationml/2006/main">
   <p:cSld>
@@ -18843,10 +20543,10 @@
       </p:grpSp>
       <p:sp>
         <p:nvSpPr>
-          <p:cNvPr id="43" name="Прямоугольник 42">
+          <p:cNvPr id="44" name="Прямоугольник 43">
             <a:extLst>
               <a:ext uri="{FF2B5EF4-FFF2-40B4-BE49-F238E27FC236}">
-                <a16:creationId xmlns:a16="http://schemas.microsoft.com/office/drawing/2014/main" id="{F1BA58C8-CB0D-42C8-9353-C041814589B5}"/>
+                <a16:creationId xmlns:a16="http://schemas.microsoft.com/office/drawing/2014/main" id="{3F54A79C-EE9A-4A17-830B-192AC83A4DF8}"/>
               </a:ext>
             </a:extLst>
           </p:cNvPr>
@@ -18855,22 +20555,22 @@
         </p:nvSpPr>
         <p:spPr>
           <a:xfrm>
-            <a:off x="1522575" y="1523675"/>
-            <a:ext cx="9869864" cy="4479264"/>
+            <a:off x="1446030" y="1467292"/>
+            <a:ext cx="9869864" cy="4910435"/>
           </a:xfrm>
           <a:custGeom>
             <a:avLst/>
             <a:gdLst>
               <a:gd name="connsiteX0" fmla="*/ 0 w 9869864"/>
-              <a:gd name="connsiteY0" fmla="*/ 0 h 4479264"/>
+              <a:gd name="connsiteY0" fmla="*/ 0 h 4910435"/>
               <a:gd name="connsiteX1" fmla="*/ 9869864 w 9869864"/>
-              <a:gd name="connsiteY1" fmla="*/ 0 h 4479264"/>
+              <a:gd name="connsiteY1" fmla="*/ 0 h 4910435"/>
               <a:gd name="connsiteX2" fmla="*/ 9869864 w 9869864"/>
-              <a:gd name="connsiteY2" fmla="*/ 4479264 h 4479264"/>
+              <a:gd name="connsiteY2" fmla="*/ 4910435 h 4910435"/>
               <a:gd name="connsiteX3" fmla="*/ 0 w 9869864"/>
-              <a:gd name="connsiteY3" fmla="*/ 4479264 h 4479264"/>
+              <a:gd name="connsiteY3" fmla="*/ 4910435 h 4910435"/>
               <a:gd name="connsiteX4" fmla="*/ 0 w 9869864"/>
-              <a:gd name="connsiteY4" fmla="*/ 0 h 4479264"/>
+              <a:gd name="connsiteY4" fmla="*/ 0 h 4910435"/>
             </a:gdLst>
             <a:ahLst/>
             <a:cxnLst>
@@ -18892,7 +20592,7 @@
             </a:cxnLst>
             <a:rect l="l" t="t" r="r" b="b"/>
             <a:pathLst>
-              <a:path w="9869864" h="4479264" fill="none" extrusionOk="0">
+              <a:path w="9869864" h="4910435" fill="none" extrusionOk="0">
                 <a:moveTo>
                   <a:pt x="0" y="0"/>
                 </a:moveTo>
@@ -18902,23 +20602,23 @@
                   <a:pt x="9869864" y="0"/>
                 </a:cubicBezTo>
                 <a:cubicBezTo>
-                  <a:pt x="10027904" y="2011379"/>
-                  <a:pt x="9863463" y="3133819"/>
-                  <a:pt x="9869864" y="4479264"/>
+                  <a:pt x="10027904" y="1667649"/>
+                  <a:pt x="9863463" y="3186992"/>
+                  <a:pt x="9869864" y="4910435"/>
                 </a:cubicBezTo>
                 <a:cubicBezTo>
-                  <a:pt x="7396228" y="4393032"/>
-                  <a:pt x="3393268" y="4395962"/>
-                  <a:pt x="0" y="4479264"/>
+                  <a:pt x="7396228" y="4824203"/>
+                  <a:pt x="3393268" y="4827133"/>
+                  <a:pt x="0" y="4910435"/>
                 </a:cubicBezTo>
                 <a:cubicBezTo>
-                  <a:pt x="-145898" y="3619195"/>
-                  <a:pt x="-24387" y="1200516"/>
+                  <a:pt x="-145898" y="3099276"/>
+                  <a:pt x="-24387" y="660950"/>
                   <a:pt x="0" y="0"/>
                 </a:cubicBezTo>
                 <a:close/>
               </a:path>
-              <a:path w="9869864" h="4479264" stroke="0" extrusionOk="0">
+              <a:path w="9869864" h="4910435" stroke="0" extrusionOk="0">
                 <a:moveTo>
                   <a:pt x="0" y="0"/>
                 </a:moveTo>
@@ -18928,18 +20628,18 @@
                   <a:pt x="9869864" y="0"/>
                 </a:cubicBezTo>
                 <a:cubicBezTo>
-                  <a:pt x="9961230" y="833996"/>
-                  <a:pt x="9875015" y="2860015"/>
-                  <a:pt x="9869864" y="4479264"/>
+                  <a:pt x="9961230" y="1206123"/>
+                  <a:pt x="9875015" y="2657538"/>
+                  <a:pt x="9869864" y="4910435"/>
                 </a:cubicBezTo>
                 <a:cubicBezTo>
-                  <a:pt x="6129429" y="4551694"/>
-                  <a:pt x="4447473" y="4558212"/>
-                  <a:pt x="0" y="4479264"/>
+                  <a:pt x="6129429" y="4982865"/>
+                  <a:pt x="4447473" y="4989383"/>
+                  <a:pt x="0" y="4910435"/>
                 </a:cubicBezTo>
                 <a:cubicBezTo>
-                  <a:pt x="77396" y="3799926"/>
-                  <a:pt x="15692" y="1626302"/>
+                  <a:pt x="77396" y="3204905"/>
+                  <a:pt x="15692" y="2262567"/>
                   <a:pt x="0" y="0"/>
                 </a:cubicBezTo>
                 <a:close/>
@@ -18998,52 +20698,19 @@
                 </a:solidFill>
                 <a:latin typeface="Century Gothic"/>
               </a:rPr>
-              <a:t>Главное</a:t>
+              <a:t>На что обратить внимание</a:t>
             </a:r>
             <a:endParaRPr lang="ru-RU"/>
           </a:p>
           <a:p>
             <a:r>
-              <a:rPr sz="800" b="0">
+              <a:rPr sz="1400" b="0">
                 <a:solidFill>
                   <a:srgbClr val="2F2F2F"/>
                 </a:solidFill>
                 <a:latin typeface="Century Gothic"/>
               </a:rPr>
-              <a:t/>
-            </a:r>
-          </a:p>
-          <a:p>
-            <a:r>
-              <a:rPr sz="1400" b="0">
-                <a:solidFill>
-                  <a:srgbClr val="2F2F2F"/>
-                </a:solidFill>
-                <a:latin typeface="Century Gothic"/>
-              </a:rPr>
-              <a:t>Вредные факторы ведут к болезням, опасные — к травмам. По ст. 13 ФЗ-426 они делятся на физические, химические, биологические и факторы трудового процесса (тяжесть и напряжённость).</a:t>
-            </a:r>
-          </a:p>
-          <a:p>
-            <a:r>
-              <a:rPr sz="800" b="0">
-                <a:solidFill>
-                  <a:srgbClr val="2F2F2F"/>
-                </a:solidFill>
-                <a:latin typeface="Century Gothic"/>
-              </a:rPr>
-              <a:t/>
-            </a:r>
-          </a:p>
-          <a:p>
-            <a:r>
-              <a:rPr sz="1400" b="0">
-                <a:solidFill>
-                  <a:srgbClr val="2F2F2F"/>
-                </a:solidFill>
-                <a:latin typeface="Century Gothic"/>
-              </a:rPr>
-              <a:t>Выявляют их через СОУТ. Цель всех мероприятий — жизнь, здоровье и защита прав работника.</a:t>
+              <a:t>Длительная работа сидя, нагрузка на зрение и нервную систему, неправильная организация рабочего места. Опасные факторы тоже возможны: электротравма, спотыкание, падение предметов, поражение при неисправной технике.</a:t>
             </a:r>
           </a:p>
         </p:txBody>
@@ -19062,22 +20729,22 @@
         </p:nvSpPr>
         <p:spPr>
           <a:xfrm>
-            <a:off x="1161068" y="1179857"/>
-            <a:ext cx="9869864" cy="4479264"/>
+            <a:off x="1161068" y="1179856"/>
+            <a:ext cx="9869864" cy="4910435"/>
           </a:xfrm>
           <a:custGeom>
             <a:avLst/>
             <a:gdLst>
               <a:gd name="connsiteX0" fmla="*/ 0 w 9869864"/>
-              <a:gd name="connsiteY0" fmla="*/ 0 h 4479264"/>
+              <a:gd name="connsiteY0" fmla="*/ 0 h 4910435"/>
               <a:gd name="connsiteX1" fmla="*/ 9869864 w 9869864"/>
-              <a:gd name="connsiteY1" fmla="*/ 0 h 4479264"/>
+              <a:gd name="connsiteY1" fmla="*/ 0 h 4910435"/>
               <a:gd name="connsiteX2" fmla="*/ 9869864 w 9869864"/>
-              <a:gd name="connsiteY2" fmla="*/ 4479264 h 4479264"/>
+              <a:gd name="connsiteY2" fmla="*/ 4910435 h 4910435"/>
               <a:gd name="connsiteX3" fmla="*/ 0 w 9869864"/>
-              <a:gd name="connsiteY3" fmla="*/ 4479264 h 4479264"/>
+              <a:gd name="connsiteY3" fmla="*/ 4910435 h 4910435"/>
               <a:gd name="connsiteX4" fmla="*/ 0 w 9869864"/>
-              <a:gd name="connsiteY4" fmla="*/ 0 h 4479264"/>
+              <a:gd name="connsiteY4" fmla="*/ 0 h 4910435"/>
             </a:gdLst>
             <a:ahLst/>
             <a:cxnLst>
@@ -19099,7 +20766,7 @@
             </a:cxnLst>
             <a:rect l="l" t="t" r="r" b="b"/>
             <a:pathLst>
-              <a:path w="9869864" h="4479264" fill="none" extrusionOk="0">
+              <a:path w="9869864" h="4910435" fill="none" extrusionOk="0">
                 <a:moveTo>
                   <a:pt x="0" y="0"/>
                 </a:moveTo>
@@ -19109,23 +20776,23 @@
                   <a:pt x="9869864" y="0"/>
                 </a:cubicBezTo>
                 <a:cubicBezTo>
-                  <a:pt x="10027904" y="2011379"/>
-                  <a:pt x="9863463" y="3133819"/>
-                  <a:pt x="9869864" y="4479264"/>
+                  <a:pt x="10027904" y="1667649"/>
+                  <a:pt x="9863463" y="3186992"/>
+                  <a:pt x="9869864" y="4910435"/>
                 </a:cubicBezTo>
                 <a:cubicBezTo>
-                  <a:pt x="7396228" y="4393032"/>
-                  <a:pt x="3393268" y="4395962"/>
-                  <a:pt x="0" y="4479264"/>
+                  <a:pt x="7396228" y="4824203"/>
+                  <a:pt x="3393268" y="4827133"/>
+                  <a:pt x="0" y="4910435"/>
                 </a:cubicBezTo>
                 <a:cubicBezTo>
-                  <a:pt x="-145898" y="3619195"/>
-                  <a:pt x="-24387" y="1200516"/>
+                  <a:pt x="-145898" y="3099276"/>
+                  <a:pt x="-24387" y="660950"/>
                   <a:pt x="0" y="0"/>
                 </a:cubicBezTo>
                 <a:close/>
               </a:path>
-              <a:path w="9869864" h="4479264" stroke="0" extrusionOk="0">
+              <a:path w="9869864" h="4910435" stroke="0" extrusionOk="0">
                 <a:moveTo>
                   <a:pt x="0" y="0"/>
                 </a:moveTo>
@@ -19135,18 +20802,18 @@
                   <a:pt x="9869864" y="0"/>
                 </a:cubicBezTo>
                 <a:cubicBezTo>
-                  <a:pt x="9961230" y="833996"/>
-                  <a:pt x="9875015" y="2860015"/>
-                  <a:pt x="9869864" y="4479264"/>
+                  <a:pt x="9961230" y="1206123"/>
+                  <a:pt x="9875015" y="2657538"/>
+                  <a:pt x="9869864" y="4910435"/>
                 </a:cubicBezTo>
                 <a:cubicBezTo>
-                  <a:pt x="6129429" y="4551694"/>
-                  <a:pt x="4447473" y="4558212"/>
-                  <a:pt x="0" y="4479264"/>
+                  <a:pt x="6129429" y="4982865"/>
+                  <a:pt x="4447473" y="4989383"/>
+                  <a:pt x="0" y="4910435"/>
                 </a:cubicBezTo>
                 <a:cubicBezTo>
-                  <a:pt x="77396" y="3799926"/>
-                  <a:pt x="15692" y="1626302"/>
+                  <a:pt x="77396" y="3204905"/>
+                  <a:pt x="15692" y="2262567"/>
                   <a:pt x="0" y="0"/>
                 </a:cubicBezTo>
                 <a:close/>
@@ -19195,7 +20862,27 @@
           <a:lstStyle/>
           <a:p>
             <a:pPr algn="ctr"/>
+            <a:r>
+              <a:rPr sz="1400" b="1">
+                <a:solidFill>
+                  <a:srgbClr val="2F2F2F"/>
+                </a:solidFill>
+                <a:latin typeface="Century Gothic"/>
+              </a:rPr>
+              <a:t>Факторы, типичные для офиса</a:t>
+            </a:r>
             <a:endParaRPr lang="ru-RU"/>
+          </a:p>
+          <a:p>
+            <a:r>
+              <a:rPr sz="1400" b="0">
+                <a:solidFill>
+                  <a:srgbClr val="2F2F2F"/>
+                </a:solidFill>
+                <a:latin typeface="Century Gothic"/>
+              </a:rPr>
+              <a:t>Чаще всего встречаются: микроклимат (жара, холод, сквозняки), освещённость, шум, электромагнитные поля от оргтехники, а также напряжённость труда при работе за компьютером.</a:t>
+            </a:r>
           </a:p>
         </p:txBody>
       </p:sp>
@@ -19204,7 +20891,7 @@
           <p:cNvPr id="42" name="TextBox 41">
             <a:extLst>
               <a:ext uri="{FF2B5EF4-FFF2-40B4-BE49-F238E27FC236}">
-                <a16:creationId xmlns:a16="http://schemas.microsoft.com/office/drawing/2014/main" id="{6C2623F0-1205-437B-80EB-293BD3B22892}"/>
+                <a16:creationId xmlns:a16="http://schemas.microsoft.com/office/drawing/2014/main" id="{E393B0F4-C184-417F-9035-92EF3E107ED3}"/>
               </a:ext>
             </a:extLst>
           </p:cNvPr>
@@ -19213,8 +20900,51 @@
         </p:nvSpPr>
         <p:spPr>
           <a:xfrm>
-            <a:off x="1862359" y="1736635"/>
-            <a:ext cx="8915312" cy="3283015"/>
+            <a:off x="1665610" y="1467292"/>
+            <a:ext cx="8753605" cy="851580"/>
+          </a:xfrm>
+          <a:prstGeom prst="rect">
+            <a:avLst/>
+          </a:prstGeom>
+          <a:noFill/>
+        </p:spPr>
+        <p:txBody>
+          <a:bodyPr wrap="square">
+            <a:spAutoFit/>
+          </a:bodyPr>
+          <a:lstStyle/>
+          <a:p>
+            <a:pPr fontAlgn="base">
+              <a:lnSpc>
+                <a:spcPct val="150000"/>
+              </a:lnSpc>
+              <a:spcAft>
+                <a:spcPts val="1200"/>
+              </a:spcAft>
+            </a:pPr>
+            <a:endParaRPr lang="en-US" sz="1400" b="1" dirty="0">
+              <a:latin typeface="Century Gothic" panose="020B0502020202020204" pitchFamily="34" charset="0"/>
+              <a:ea typeface="Times New Roman" panose="02020603050405020304" pitchFamily="18" charset="0"/>
+            </a:endParaRPr>
+          </a:p>
+        </p:txBody>
+      </p:sp>
+      <p:sp>
+        <p:nvSpPr>
+          <p:cNvPr id="43" name="TextBox 42">
+            <a:extLst>
+              <a:ext uri="{FF2B5EF4-FFF2-40B4-BE49-F238E27FC236}">
+                <a16:creationId xmlns:a16="http://schemas.microsoft.com/office/drawing/2014/main" id="{0630E37F-2C87-4FDB-8FC5-870FFA1EDA19}"/>
+              </a:ext>
+            </a:extLst>
+          </p:cNvPr>
+          <p:cNvSpPr txBox="1"/>
+          <p:nvPr/>
+        </p:nvSpPr>
+        <p:spPr>
+          <a:xfrm>
+            <a:off x="1665610" y="2826543"/>
+            <a:ext cx="9133779" cy="1446614"/>
           </a:xfrm>
           <a:prstGeom prst="rect">
             <a:avLst/>
@@ -19231,47 +20961,20 @@
               <a:lnSpc>
                 <a:spcPct val="150000"/>
               </a:lnSpc>
+              <a:spcAft>
+                <a:spcPts val="800"/>
+              </a:spcAft>
             </a:pPr>
           </a:p>
         </p:txBody>
       </p:sp>
-      <p:pic>
-        <p:nvPicPr>
-          <p:cNvPr id="2" name="Рисунок 1">
-            <a:extLst>
-              <a:ext uri="{FF2B5EF4-FFF2-40B4-BE49-F238E27FC236}">
-                <a16:creationId xmlns:a16="http://schemas.microsoft.com/office/drawing/2014/main" id="{1238151D-9F0E-404B-808F-017B8F6E2F83}"/>
-              </a:ext>
-            </a:extLst>
-          </p:cNvPr>
-          <p:cNvPicPr>
-            <a:picLocks noChangeAspect="1"/>
-          </p:cNvPicPr>
-          <p:nvPr/>
-        </p:nvPicPr>
-        <p:blipFill>
-          <a:blip r:embed="rId4"/>
-          <a:stretch>
-            <a:fillRect/>
-          </a:stretch>
-        </p:blipFill>
-        <p:spPr>
-          <a:xfrm>
-            <a:off x="1350570" y="1741601"/>
-            <a:ext cx="511789" cy="511789"/>
-          </a:xfrm>
-          <a:prstGeom prst="rect">
-            <a:avLst/>
-          </a:prstGeom>
-        </p:spPr>
-      </p:pic>
     </p:spTree>
     <p:custDataLst>
       <p:tags r:id="rId1"/>
     </p:custDataLst>
     <p:extLst>
       <p:ext uri="{BB962C8B-B14F-4D97-AF65-F5344CB8AC3E}">
-        <p14:creationId xmlns:p14="http://schemas.microsoft.com/office/powerpoint/2010/main" val="852760726"/>
+        <p14:creationId xmlns:p14="http://schemas.microsoft.com/office/powerpoint/2010/main" val="2275704587"/>
       </p:ext>
     </p:extLst>
   </p:cSld>

--- a/presentations/2.1_Klassifikaciya_ViOPF.pptx
+++ b/presentations/2.1_Klassifikaciya_ViOPF.pptx
@@ -13,8 +13,6 @@
     <p:sldId id="258" r:id="rId18"/>
     <p:sldId id="259" r:id="rId19"/>
     <p:sldId id="260" r:id="rId20"/>
-    <p:sldId id="261" r:id="rId21"/>
-    <p:sldId id="262" r:id="rId22"/>
     <p:sldId id="263" r:id="rId23"/>
     <p:sldId id="265" r:id="rId25"/>
     <p:sldId id="264" r:id="rId24"/>
@@ -5539,1705 +5537,6 @@
 </p:sld>
 </file>
 
-<file path=ppt/slides/slide10.xml><?xml version="1.0" encoding="utf-8"?>
-<p:sld xmlns:a="http://schemas.openxmlformats.org/drawingml/2006/main" xmlns:r="http://schemas.openxmlformats.org/officeDocument/2006/relationships" xmlns:p="http://schemas.openxmlformats.org/presentationml/2006/main">
-  <p:cSld>
-    <p:spTree>
-      <p:nvGrpSpPr>
-        <p:cNvPr id="1" name=""/>
-        <p:cNvGrpSpPr/>
-        <p:nvPr/>
-      </p:nvGrpSpPr>
-      <p:grpSpPr>
-        <a:xfrm>
-          <a:off x="0" y="0"/>
-          <a:ext cx="0" cy="0"/>
-          <a:chOff x="0" y="0"/>
-          <a:chExt cx="0" cy="0"/>
-        </a:xfrm>
-      </p:grpSpPr>
-      <p:grpSp>
-        <p:nvGrpSpPr>
-          <p:cNvPr id="36" name="Группа 35">
-            <a:extLst>
-              <a:ext uri="{FF2B5EF4-FFF2-40B4-BE49-F238E27FC236}">
-                <a16:creationId xmlns:a16="http://schemas.microsoft.com/office/drawing/2014/main" id="{7FF1FBDA-7EF8-4E32-B285-B9BF1A70F363}"/>
-              </a:ext>
-            </a:extLst>
-          </p:cNvPr>
-          <p:cNvGrpSpPr/>
-          <p:nvPr/>
-        </p:nvGrpSpPr>
-        <p:grpSpPr>
-          <a:xfrm>
-            <a:off x="0" y="-214817"/>
-            <a:ext cx="13248168" cy="7072817"/>
-            <a:chOff x="0" y="-4170772"/>
-            <a:chExt cx="13248168" cy="7072817"/>
-          </a:xfrm>
-        </p:grpSpPr>
-        <p:grpSp>
-          <p:nvGrpSpPr>
-            <p:cNvPr id="6" name="Группа 5">
-              <a:extLst>
-                <a:ext uri="{FF2B5EF4-FFF2-40B4-BE49-F238E27FC236}">
-                  <a16:creationId xmlns:a16="http://schemas.microsoft.com/office/drawing/2014/main" id="{D194E697-28B3-404D-8A29-F48E94BF6241}"/>
-                </a:ext>
-              </a:extLst>
-            </p:cNvPr>
-            <p:cNvGrpSpPr/>
-            <p:nvPr/>
-          </p:nvGrpSpPr>
-          <p:grpSpPr>
-            <a:xfrm>
-              <a:off x="0" y="-4170772"/>
-              <a:ext cx="13248168" cy="7072817"/>
-              <a:chOff x="-166577" y="-12798"/>
-              <a:chExt cx="13248168" cy="7072817"/>
-            </a:xfrm>
-          </p:grpSpPr>
-          <p:cxnSp>
-            <p:nvCxnSpPr>
-              <p:cNvPr id="7" name="Прямая соединительная линия 6">
-                <a:extLst>
-                  <a:ext uri="{FF2B5EF4-FFF2-40B4-BE49-F238E27FC236}">
-                    <a16:creationId xmlns:a16="http://schemas.microsoft.com/office/drawing/2014/main" id="{82C61482-8E50-4404-94EC-6B83D92F983D}"/>
-                  </a:ext>
-                </a:extLst>
-              </p:cNvPr>
-              <p:cNvCxnSpPr/>
-              <p:nvPr/>
-            </p:nvCxnSpPr>
-            <p:spPr>
-              <a:xfrm>
-                <a:off x="340242" y="202019"/>
-                <a:ext cx="0" cy="6858000"/>
-              </a:xfrm>
-              <a:prstGeom prst="line">
-                <a:avLst/>
-              </a:prstGeom>
-              <a:ln>
-                <a:solidFill>
-                  <a:schemeClr val="tx1"/>
-                </a:solidFill>
-              </a:ln>
-            </p:spPr>
-            <p:style>
-              <a:lnRef idx="1">
-                <a:schemeClr val="accent1"/>
-              </a:lnRef>
-              <a:fillRef idx="0">
-                <a:schemeClr val="accent1"/>
-              </a:fillRef>
-              <a:effectRef idx="0">
-                <a:schemeClr val="accent1"/>
-              </a:effectRef>
-              <a:fontRef idx="minor">
-                <a:schemeClr val="tx1"/>
-              </a:fontRef>
-            </p:style>
-          </p:cxnSp>
-          <p:cxnSp>
-            <p:nvCxnSpPr>
-              <p:cNvPr id="8" name="Прямая соединительная линия 7">
-                <a:extLst>
-                  <a:ext uri="{FF2B5EF4-FFF2-40B4-BE49-F238E27FC236}">
-                    <a16:creationId xmlns:a16="http://schemas.microsoft.com/office/drawing/2014/main" id="{79FD2ADB-6B7C-417E-8070-20B7AC7BEC87}"/>
-                  </a:ext>
-                </a:extLst>
-              </p:cNvPr>
-              <p:cNvCxnSpPr>
-                <a:cxnSpLocks/>
-              </p:cNvCxnSpPr>
-              <p:nvPr/>
-            </p:nvCxnSpPr>
-            <p:spPr>
-              <a:xfrm>
-                <a:off x="1063257" y="0"/>
-                <a:ext cx="0" cy="7060019"/>
-              </a:xfrm>
-              <a:prstGeom prst="line">
-                <a:avLst/>
-              </a:prstGeom>
-              <a:ln>
-                <a:solidFill>
-                  <a:schemeClr val="tx1"/>
-                </a:solidFill>
-              </a:ln>
-            </p:spPr>
-            <p:style>
-              <a:lnRef idx="1">
-                <a:schemeClr val="accent1"/>
-              </a:lnRef>
-              <a:fillRef idx="0">
-                <a:schemeClr val="accent1"/>
-              </a:fillRef>
-              <a:effectRef idx="0">
-                <a:schemeClr val="accent1"/>
-              </a:effectRef>
-              <a:fontRef idx="minor">
-                <a:schemeClr val="tx1"/>
-              </a:fontRef>
-            </p:style>
-          </p:cxnSp>
-          <p:cxnSp>
-            <p:nvCxnSpPr>
-              <p:cNvPr id="9" name="Прямая соединительная линия 8">
-                <a:extLst>
-                  <a:ext uri="{FF2B5EF4-FFF2-40B4-BE49-F238E27FC236}">
-                    <a16:creationId xmlns:a16="http://schemas.microsoft.com/office/drawing/2014/main" id="{742E3E11-256E-4150-8476-2708422F0F21}"/>
-                  </a:ext>
-                </a:extLst>
-              </p:cNvPr>
-              <p:cNvCxnSpPr>
-                <a:cxnSpLocks/>
-              </p:cNvCxnSpPr>
-              <p:nvPr/>
-            </p:nvCxnSpPr>
-            <p:spPr>
-              <a:xfrm>
-                <a:off x="1786271" y="0"/>
-                <a:ext cx="0" cy="7060019"/>
-              </a:xfrm>
-              <a:prstGeom prst="line">
-                <a:avLst/>
-              </a:prstGeom>
-              <a:ln>
-                <a:solidFill>
-                  <a:schemeClr val="tx1"/>
-                </a:solidFill>
-              </a:ln>
-            </p:spPr>
-            <p:style>
-              <a:lnRef idx="1">
-                <a:schemeClr val="accent1"/>
-              </a:lnRef>
-              <a:fillRef idx="0">
-                <a:schemeClr val="accent1"/>
-              </a:fillRef>
-              <a:effectRef idx="0">
-                <a:schemeClr val="accent1"/>
-              </a:effectRef>
-              <a:fontRef idx="minor">
-                <a:schemeClr val="tx1"/>
-              </a:fontRef>
-            </p:style>
-          </p:cxnSp>
-          <p:cxnSp>
-            <p:nvCxnSpPr>
-              <p:cNvPr id="10" name="Прямая соединительная линия 9">
-                <a:extLst>
-                  <a:ext uri="{FF2B5EF4-FFF2-40B4-BE49-F238E27FC236}">
-                    <a16:creationId xmlns:a16="http://schemas.microsoft.com/office/drawing/2014/main" id="{71A89E76-8A26-4714-A28B-178CFA97EAA9}"/>
-                  </a:ext>
-                </a:extLst>
-              </p:cNvPr>
-              <p:cNvCxnSpPr>
-                <a:cxnSpLocks/>
-              </p:cNvCxnSpPr>
-              <p:nvPr/>
-            </p:nvCxnSpPr>
-            <p:spPr>
-              <a:xfrm>
-                <a:off x="2498653" y="0"/>
-                <a:ext cx="0" cy="7060019"/>
-              </a:xfrm>
-              <a:prstGeom prst="line">
-                <a:avLst/>
-              </a:prstGeom>
-              <a:ln>
-                <a:solidFill>
-                  <a:schemeClr val="tx1"/>
-                </a:solidFill>
-              </a:ln>
-            </p:spPr>
-            <p:style>
-              <a:lnRef idx="1">
-                <a:schemeClr val="accent1"/>
-              </a:lnRef>
-              <a:fillRef idx="0">
-                <a:schemeClr val="accent1"/>
-              </a:fillRef>
-              <a:effectRef idx="0">
-                <a:schemeClr val="accent1"/>
-              </a:effectRef>
-              <a:fontRef idx="minor">
-                <a:schemeClr val="tx1"/>
-              </a:fontRef>
-            </p:style>
-          </p:cxnSp>
-          <p:cxnSp>
-            <p:nvCxnSpPr>
-              <p:cNvPr id="11" name="Прямая соединительная линия 10">
-                <a:extLst>
-                  <a:ext uri="{FF2B5EF4-FFF2-40B4-BE49-F238E27FC236}">
-                    <a16:creationId xmlns:a16="http://schemas.microsoft.com/office/drawing/2014/main" id="{35DE7A21-97FE-45D0-A8C3-5D5C44459CD8}"/>
-                  </a:ext>
-                </a:extLst>
-              </p:cNvPr>
-              <p:cNvCxnSpPr>
-                <a:cxnSpLocks/>
-              </p:cNvCxnSpPr>
-              <p:nvPr/>
-            </p:nvCxnSpPr>
-            <p:spPr>
-              <a:xfrm>
-                <a:off x="3211034" y="0"/>
-                <a:ext cx="0" cy="7060019"/>
-              </a:xfrm>
-              <a:prstGeom prst="line">
-                <a:avLst/>
-              </a:prstGeom>
-              <a:ln>
-                <a:solidFill>
-                  <a:schemeClr val="tx1"/>
-                </a:solidFill>
-              </a:ln>
-            </p:spPr>
-            <p:style>
-              <a:lnRef idx="1">
-                <a:schemeClr val="accent1"/>
-              </a:lnRef>
-              <a:fillRef idx="0">
-                <a:schemeClr val="accent1"/>
-              </a:fillRef>
-              <a:effectRef idx="0">
-                <a:schemeClr val="accent1"/>
-              </a:effectRef>
-              <a:fontRef idx="minor">
-                <a:schemeClr val="tx1"/>
-              </a:fontRef>
-            </p:style>
-          </p:cxnSp>
-          <p:cxnSp>
-            <p:nvCxnSpPr>
-              <p:cNvPr id="12" name="Прямая соединительная линия 11">
-                <a:extLst>
-                  <a:ext uri="{FF2B5EF4-FFF2-40B4-BE49-F238E27FC236}">
-                    <a16:creationId xmlns:a16="http://schemas.microsoft.com/office/drawing/2014/main" id="{2230EA40-BFDD-4F33-9739-A1F381E44FCA}"/>
-                  </a:ext>
-                </a:extLst>
-              </p:cNvPr>
-              <p:cNvCxnSpPr>
-                <a:cxnSpLocks/>
-              </p:cNvCxnSpPr>
-              <p:nvPr/>
-            </p:nvCxnSpPr>
-            <p:spPr>
-              <a:xfrm>
-                <a:off x="3934048" y="0"/>
-                <a:ext cx="0" cy="7060019"/>
-              </a:xfrm>
-              <a:prstGeom prst="line">
-                <a:avLst/>
-              </a:prstGeom>
-              <a:ln>
-                <a:solidFill>
-                  <a:schemeClr val="tx1"/>
-                </a:solidFill>
-              </a:ln>
-            </p:spPr>
-            <p:style>
-              <a:lnRef idx="1">
-                <a:schemeClr val="accent1"/>
-              </a:lnRef>
-              <a:fillRef idx="0">
-                <a:schemeClr val="accent1"/>
-              </a:fillRef>
-              <a:effectRef idx="0">
-                <a:schemeClr val="accent1"/>
-              </a:effectRef>
-              <a:fontRef idx="minor">
-                <a:schemeClr val="tx1"/>
-              </a:fontRef>
-            </p:style>
-          </p:cxnSp>
-          <p:cxnSp>
-            <p:nvCxnSpPr>
-              <p:cNvPr id="13" name="Прямая соединительная линия 12">
-                <a:extLst>
-                  <a:ext uri="{FF2B5EF4-FFF2-40B4-BE49-F238E27FC236}">
-                    <a16:creationId xmlns:a16="http://schemas.microsoft.com/office/drawing/2014/main" id="{A2F0D873-D58C-44BF-9302-3E5185DD141C}"/>
-                  </a:ext>
-                </a:extLst>
-              </p:cNvPr>
-              <p:cNvCxnSpPr>
-                <a:cxnSpLocks/>
-              </p:cNvCxnSpPr>
-              <p:nvPr/>
-            </p:nvCxnSpPr>
-            <p:spPr>
-              <a:xfrm flipH="1">
-                <a:off x="-95693" y="552893"/>
-                <a:ext cx="12525153" cy="0"/>
-              </a:xfrm>
-              <a:prstGeom prst="line">
-                <a:avLst/>
-              </a:prstGeom>
-              <a:ln>
-                <a:solidFill>
-                  <a:schemeClr val="tx1"/>
-                </a:solidFill>
-              </a:ln>
-            </p:spPr>
-            <p:style>
-              <a:lnRef idx="1">
-                <a:schemeClr val="accent1"/>
-              </a:lnRef>
-              <a:fillRef idx="0">
-                <a:schemeClr val="accent1"/>
-              </a:fillRef>
-              <a:effectRef idx="0">
-                <a:schemeClr val="accent1"/>
-              </a:effectRef>
-              <a:fontRef idx="minor">
-                <a:schemeClr val="tx1"/>
-              </a:fontRef>
-            </p:style>
-          </p:cxnSp>
-          <p:cxnSp>
-            <p:nvCxnSpPr>
-              <p:cNvPr id="14" name="Прямая соединительная линия 13">
-                <a:extLst>
-                  <a:ext uri="{FF2B5EF4-FFF2-40B4-BE49-F238E27FC236}">
-                    <a16:creationId xmlns:a16="http://schemas.microsoft.com/office/drawing/2014/main" id="{4B549B82-A1D8-4959-A4BA-6626F5C7E9EA}"/>
-                  </a:ext>
-                </a:extLst>
-              </p:cNvPr>
-              <p:cNvCxnSpPr>
-                <a:cxnSpLocks/>
-              </p:cNvCxnSpPr>
-              <p:nvPr/>
-            </p:nvCxnSpPr>
-            <p:spPr>
-              <a:xfrm flipH="1">
-                <a:off x="-166577" y="1265274"/>
-                <a:ext cx="12525153" cy="0"/>
-              </a:xfrm>
-              <a:prstGeom prst="line">
-                <a:avLst/>
-              </a:prstGeom>
-              <a:ln>
-                <a:solidFill>
-                  <a:schemeClr val="tx1"/>
-                </a:solidFill>
-              </a:ln>
-            </p:spPr>
-            <p:style>
-              <a:lnRef idx="1">
-                <a:schemeClr val="accent1"/>
-              </a:lnRef>
-              <a:fillRef idx="0">
-                <a:schemeClr val="accent1"/>
-              </a:fillRef>
-              <a:effectRef idx="0">
-                <a:schemeClr val="accent1"/>
-              </a:effectRef>
-              <a:fontRef idx="minor">
-                <a:schemeClr val="tx1"/>
-              </a:fontRef>
-            </p:style>
-          </p:cxnSp>
-          <p:cxnSp>
-            <p:nvCxnSpPr>
-              <p:cNvPr id="15" name="Прямая соединительная линия 14">
-                <a:extLst>
-                  <a:ext uri="{FF2B5EF4-FFF2-40B4-BE49-F238E27FC236}">
-                    <a16:creationId xmlns:a16="http://schemas.microsoft.com/office/drawing/2014/main" id="{7E902903-75AC-495E-92CC-0E6B41592315}"/>
-                  </a:ext>
-                </a:extLst>
-              </p:cNvPr>
-              <p:cNvCxnSpPr>
-                <a:cxnSpLocks/>
-              </p:cNvCxnSpPr>
-              <p:nvPr/>
-            </p:nvCxnSpPr>
-            <p:spPr>
-              <a:xfrm flipH="1">
-                <a:off x="-166577" y="1988287"/>
-                <a:ext cx="12525153" cy="0"/>
-              </a:xfrm>
-              <a:prstGeom prst="line">
-                <a:avLst/>
-              </a:prstGeom>
-              <a:ln>
-                <a:solidFill>
-                  <a:schemeClr val="tx1"/>
-                </a:solidFill>
-              </a:ln>
-            </p:spPr>
-            <p:style>
-              <a:lnRef idx="1">
-                <a:schemeClr val="accent1"/>
-              </a:lnRef>
-              <a:fillRef idx="0">
-                <a:schemeClr val="accent1"/>
-              </a:fillRef>
-              <a:effectRef idx="0">
-                <a:schemeClr val="accent1"/>
-              </a:effectRef>
-              <a:fontRef idx="minor">
-                <a:schemeClr val="tx1"/>
-              </a:fontRef>
-            </p:style>
-          </p:cxnSp>
-          <p:cxnSp>
-            <p:nvCxnSpPr>
-              <p:cNvPr id="16" name="Прямая соединительная линия 15">
-                <a:extLst>
-                  <a:ext uri="{FF2B5EF4-FFF2-40B4-BE49-F238E27FC236}">
-                    <a16:creationId xmlns:a16="http://schemas.microsoft.com/office/drawing/2014/main" id="{C10264B3-AA1B-4EDA-BFE4-9A014BE9E499}"/>
-                  </a:ext>
-                </a:extLst>
-              </p:cNvPr>
-              <p:cNvCxnSpPr>
-                <a:cxnSpLocks/>
-              </p:cNvCxnSpPr>
-              <p:nvPr/>
-            </p:nvCxnSpPr>
-            <p:spPr>
-              <a:xfrm flipH="1">
-                <a:off x="-166577" y="2711302"/>
-                <a:ext cx="12525153" cy="0"/>
-              </a:xfrm>
-              <a:prstGeom prst="line">
-                <a:avLst/>
-              </a:prstGeom>
-              <a:ln>
-                <a:solidFill>
-                  <a:schemeClr val="tx1"/>
-                </a:solidFill>
-              </a:ln>
-            </p:spPr>
-            <p:style>
-              <a:lnRef idx="1">
-                <a:schemeClr val="accent1"/>
-              </a:lnRef>
-              <a:fillRef idx="0">
-                <a:schemeClr val="accent1"/>
-              </a:fillRef>
-              <a:effectRef idx="0">
-                <a:schemeClr val="accent1"/>
-              </a:effectRef>
-              <a:fontRef idx="minor">
-                <a:schemeClr val="tx1"/>
-              </a:fontRef>
-            </p:style>
-          </p:cxnSp>
-          <p:cxnSp>
-            <p:nvCxnSpPr>
-              <p:cNvPr id="17" name="Прямая соединительная линия 16">
-                <a:extLst>
-                  <a:ext uri="{FF2B5EF4-FFF2-40B4-BE49-F238E27FC236}">
-                    <a16:creationId xmlns:a16="http://schemas.microsoft.com/office/drawing/2014/main" id="{7DB95352-4A59-44BD-9F84-7A56998CFE6C}"/>
-                  </a:ext>
-                </a:extLst>
-              </p:cNvPr>
-              <p:cNvCxnSpPr>
-                <a:cxnSpLocks/>
-              </p:cNvCxnSpPr>
-              <p:nvPr/>
-            </p:nvCxnSpPr>
-            <p:spPr>
-              <a:xfrm flipH="1">
-                <a:off x="-166577" y="3429000"/>
-                <a:ext cx="12525153" cy="0"/>
-              </a:xfrm>
-              <a:prstGeom prst="line">
-                <a:avLst/>
-              </a:prstGeom>
-              <a:ln>
-                <a:solidFill>
-                  <a:schemeClr val="tx1"/>
-                </a:solidFill>
-              </a:ln>
-            </p:spPr>
-            <p:style>
-              <a:lnRef idx="1">
-                <a:schemeClr val="accent1"/>
-              </a:lnRef>
-              <a:fillRef idx="0">
-                <a:schemeClr val="accent1"/>
-              </a:fillRef>
-              <a:effectRef idx="0">
-                <a:schemeClr val="accent1"/>
-              </a:effectRef>
-              <a:fontRef idx="minor">
-                <a:schemeClr val="tx1"/>
-              </a:fontRef>
-            </p:style>
-          </p:cxnSp>
-          <p:cxnSp>
-            <p:nvCxnSpPr>
-              <p:cNvPr id="18" name="Прямая соединительная линия 17">
-                <a:extLst>
-                  <a:ext uri="{FF2B5EF4-FFF2-40B4-BE49-F238E27FC236}">
-                    <a16:creationId xmlns:a16="http://schemas.microsoft.com/office/drawing/2014/main" id="{B374052C-54F7-4119-BB4C-01EBB5D6B2F6}"/>
-                  </a:ext>
-                </a:extLst>
-              </p:cNvPr>
-              <p:cNvCxnSpPr>
-                <a:cxnSpLocks/>
-              </p:cNvCxnSpPr>
-              <p:nvPr/>
-            </p:nvCxnSpPr>
-            <p:spPr>
-              <a:xfrm flipH="1">
-                <a:off x="-166577" y="4152013"/>
-                <a:ext cx="12525153" cy="0"/>
-              </a:xfrm>
-              <a:prstGeom prst="line">
-                <a:avLst/>
-              </a:prstGeom>
-              <a:ln>
-                <a:solidFill>
-                  <a:schemeClr val="tx1"/>
-                </a:solidFill>
-              </a:ln>
-            </p:spPr>
-            <p:style>
-              <a:lnRef idx="1">
-                <a:schemeClr val="accent1"/>
-              </a:lnRef>
-              <a:fillRef idx="0">
-                <a:schemeClr val="accent1"/>
-              </a:fillRef>
-              <a:effectRef idx="0">
-                <a:schemeClr val="accent1"/>
-              </a:effectRef>
-              <a:fontRef idx="minor">
-                <a:schemeClr val="tx1"/>
-              </a:fontRef>
-            </p:style>
-          </p:cxnSp>
-          <p:cxnSp>
-            <p:nvCxnSpPr>
-              <p:cNvPr id="19" name="Прямая соединительная линия 18">
-                <a:extLst>
-                  <a:ext uri="{FF2B5EF4-FFF2-40B4-BE49-F238E27FC236}">
-                    <a16:creationId xmlns:a16="http://schemas.microsoft.com/office/drawing/2014/main" id="{A0FD0A9A-69F9-4170-BA94-3846FED025DA}"/>
-                  </a:ext>
-                </a:extLst>
-              </p:cNvPr>
-              <p:cNvCxnSpPr>
-                <a:cxnSpLocks/>
-              </p:cNvCxnSpPr>
-              <p:nvPr/>
-            </p:nvCxnSpPr>
-            <p:spPr>
-              <a:xfrm flipH="1">
-                <a:off x="-166577" y="4875027"/>
-                <a:ext cx="12525153" cy="0"/>
-              </a:xfrm>
-              <a:prstGeom prst="line">
-                <a:avLst/>
-              </a:prstGeom>
-              <a:ln>
-                <a:solidFill>
-                  <a:schemeClr val="tx1"/>
-                </a:solidFill>
-              </a:ln>
-            </p:spPr>
-            <p:style>
-              <a:lnRef idx="1">
-                <a:schemeClr val="accent1"/>
-              </a:lnRef>
-              <a:fillRef idx="0">
-                <a:schemeClr val="accent1"/>
-              </a:fillRef>
-              <a:effectRef idx="0">
-                <a:schemeClr val="accent1"/>
-              </a:effectRef>
-              <a:fontRef idx="minor">
-                <a:schemeClr val="tx1"/>
-              </a:fontRef>
-            </p:style>
-          </p:cxnSp>
-          <p:cxnSp>
-            <p:nvCxnSpPr>
-              <p:cNvPr id="20" name="Прямая соединительная линия 19">
-                <a:extLst>
-                  <a:ext uri="{FF2B5EF4-FFF2-40B4-BE49-F238E27FC236}">
-                    <a16:creationId xmlns:a16="http://schemas.microsoft.com/office/drawing/2014/main" id="{C7407EBB-B386-401C-9331-199FBF6114CE}"/>
-                  </a:ext>
-                </a:extLst>
-              </p:cNvPr>
-              <p:cNvCxnSpPr>
-                <a:cxnSpLocks/>
-              </p:cNvCxnSpPr>
-              <p:nvPr/>
-            </p:nvCxnSpPr>
-            <p:spPr>
-              <a:xfrm flipH="1">
-                <a:off x="-166577" y="5592726"/>
-                <a:ext cx="12525153" cy="0"/>
-              </a:xfrm>
-              <a:prstGeom prst="line">
-                <a:avLst/>
-              </a:prstGeom>
-              <a:ln>
-                <a:solidFill>
-                  <a:schemeClr val="tx1"/>
-                </a:solidFill>
-              </a:ln>
-            </p:spPr>
-            <p:style>
-              <a:lnRef idx="1">
-                <a:schemeClr val="accent1"/>
-              </a:lnRef>
-              <a:fillRef idx="0">
-                <a:schemeClr val="accent1"/>
-              </a:fillRef>
-              <a:effectRef idx="0">
-                <a:schemeClr val="accent1"/>
-              </a:effectRef>
-              <a:fontRef idx="minor">
-                <a:schemeClr val="tx1"/>
-              </a:fontRef>
-            </p:style>
-          </p:cxnSp>
-          <p:cxnSp>
-            <p:nvCxnSpPr>
-              <p:cNvPr id="21" name="Прямая соединительная линия 20">
-                <a:extLst>
-                  <a:ext uri="{FF2B5EF4-FFF2-40B4-BE49-F238E27FC236}">
-                    <a16:creationId xmlns:a16="http://schemas.microsoft.com/office/drawing/2014/main" id="{5A00AFAC-24D0-4772-B007-1F6D4801E061}"/>
-                  </a:ext>
-                </a:extLst>
-              </p:cNvPr>
-              <p:cNvCxnSpPr>
-                <a:cxnSpLocks/>
-              </p:cNvCxnSpPr>
-              <p:nvPr/>
-            </p:nvCxnSpPr>
-            <p:spPr>
-              <a:xfrm flipH="1">
-                <a:off x="-166577" y="6305107"/>
-                <a:ext cx="12525153" cy="0"/>
-              </a:xfrm>
-              <a:prstGeom prst="line">
-                <a:avLst/>
-              </a:prstGeom>
-              <a:ln>
-                <a:solidFill>
-                  <a:schemeClr val="tx1"/>
-                </a:solidFill>
-              </a:ln>
-            </p:spPr>
-            <p:style>
-              <a:lnRef idx="1">
-                <a:schemeClr val="accent1"/>
-              </a:lnRef>
-              <a:fillRef idx="0">
-                <a:schemeClr val="accent1"/>
-              </a:fillRef>
-              <a:effectRef idx="0">
-                <a:schemeClr val="accent1"/>
-              </a:effectRef>
-              <a:fontRef idx="minor">
-                <a:schemeClr val="tx1"/>
-              </a:fontRef>
-            </p:style>
-          </p:cxnSp>
-          <p:cxnSp>
-            <p:nvCxnSpPr>
-              <p:cNvPr id="22" name="Прямая соединительная линия 21">
-                <a:extLst>
-                  <a:ext uri="{FF2B5EF4-FFF2-40B4-BE49-F238E27FC236}">
-                    <a16:creationId xmlns:a16="http://schemas.microsoft.com/office/drawing/2014/main" id="{C92C6CD4-7D64-4358-88EB-42B20046AA6C}"/>
-                  </a:ext>
-                </a:extLst>
-              </p:cNvPr>
-              <p:cNvCxnSpPr>
-                <a:cxnSpLocks/>
-              </p:cNvCxnSpPr>
-              <p:nvPr/>
-            </p:nvCxnSpPr>
-            <p:spPr>
-              <a:xfrm>
-                <a:off x="4657063" y="0"/>
-                <a:ext cx="0" cy="7060019"/>
-              </a:xfrm>
-              <a:prstGeom prst="line">
-                <a:avLst/>
-              </a:prstGeom>
-              <a:ln>
-                <a:solidFill>
-                  <a:schemeClr val="tx1"/>
-                </a:solidFill>
-              </a:ln>
-            </p:spPr>
-            <p:style>
-              <a:lnRef idx="1">
-                <a:schemeClr val="accent1"/>
-              </a:lnRef>
-              <a:fillRef idx="0">
-                <a:schemeClr val="accent1"/>
-              </a:fillRef>
-              <a:effectRef idx="0">
-                <a:schemeClr val="accent1"/>
-              </a:effectRef>
-              <a:fontRef idx="minor">
-                <a:schemeClr val="tx1"/>
-              </a:fontRef>
-            </p:style>
-          </p:cxnSp>
-          <p:cxnSp>
-            <p:nvCxnSpPr>
-              <p:cNvPr id="23" name="Прямая соединительная линия 22">
-                <a:extLst>
-                  <a:ext uri="{FF2B5EF4-FFF2-40B4-BE49-F238E27FC236}">
-                    <a16:creationId xmlns:a16="http://schemas.microsoft.com/office/drawing/2014/main" id="{DBCB635D-5CCB-48A9-8D29-8AEA9C51BED5}"/>
-                  </a:ext>
-                </a:extLst>
-              </p:cNvPr>
-              <p:cNvCxnSpPr>
-                <a:cxnSpLocks/>
-              </p:cNvCxnSpPr>
-              <p:nvPr/>
-            </p:nvCxnSpPr>
-            <p:spPr>
-              <a:xfrm flipH="1">
-                <a:off x="556438" y="6305107"/>
-                <a:ext cx="12525153" cy="0"/>
-              </a:xfrm>
-              <a:prstGeom prst="line">
-                <a:avLst/>
-              </a:prstGeom>
-              <a:ln>
-                <a:solidFill>
-                  <a:schemeClr val="tx1"/>
-                </a:solidFill>
-              </a:ln>
-            </p:spPr>
-            <p:style>
-              <a:lnRef idx="1">
-                <a:schemeClr val="accent1"/>
-              </a:lnRef>
-              <a:fillRef idx="0">
-                <a:schemeClr val="accent1"/>
-              </a:fillRef>
-              <a:effectRef idx="0">
-                <a:schemeClr val="accent1"/>
-              </a:effectRef>
-              <a:fontRef idx="minor">
-                <a:schemeClr val="tx1"/>
-              </a:fontRef>
-            </p:style>
-          </p:cxnSp>
-          <p:cxnSp>
-            <p:nvCxnSpPr>
-              <p:cNvPr id="24" name="Прямая соединительная линия 23">
-                <a:extLst>
-                  <a:ext uri="{FF2B5EF4-FFF2-40B4-BE49-F238E27FC236}">
-                    <a16:creationId xmlns:a16="http://schemas.microsoft.com/office/drawing/2014/main" id="{A6FC8F23-5AE0-4FDB-B2BB-E6D3E8F266DE}"/>
-                  </a:ext>
-                </a:extLst>
-              </p:cNvPr>
-              <p:cNvCxnSpPr>
-                <a:cxnSpLocks/>
-              </p:cNvCxnSpPr>
-              <p:nvPr/>
-            </p:nvCxnSpPr>
-            <p:spPr>
-              <a:xfrm>
-                <a:off x="5380077" y="0"/>
-                <a:ext cx="0" cy="7060019"/>
-              </a:xfrm>
-              <a:prstGeom prst="line">
-                <a:avLst/>
-              </a:prstGeom>
-              <a:ln>
-                <a:solidFill>
-                  <a:schemeClr val="tx1"/>
-                </a:solidFill>
-              </a:ln>
-            </p:spPr>
-            <p:style>
-              <a:lnRef idx="1">
-                <a:schemeClr val="accent1"/>
-              </a:lnRef>
-              <a:fillRef idx="0">
-                <a:schemeClr val="accent1"/>
-              </a:fillRef>
-              <a:effectRef idx="0">
-                <a:schemeClr val="accent1"/>
-              </a:effectRef>
-              <a:fontRef idx="minor">
-                <a:schemeClr val="tx1"/>
-              </a:fontRef>
-            </p:style>
-          </p:cxnSp>
-          <p:cxnSp>
-            <p:nvCxnSpPr>
-              <p:cNvPr id="25" name="Прямая соединительная линия 24">
-                <a:extLst>
-                  <a:ext uri="{FF2B5EF4-FFF2-40B4-BE49-F238E27FC236}">
-                    <a16:creationId xmlns:a16="http://schemas.microsoft.com/office/drawing/2014/main" id="{F478A673-FAA0-40F7-9553-BE69EB96603E}"/>
-                  </a:ext>
-                </a:extLst>
-              </p:cNvPr>
-              <p:cNvCxnSpPr>
-                <a:cxnSpLocks/>
-              </p:cNvCxnSpPr>
-              <p:nvPr/>
-            </p:nvCxnSpPr>
-            <p:spPr>
-              <a:xfrm>
-                <a:off x="6096003" y="0"/>
-                <a:ext cx="0" cy="7060019"/>
-              </a:xfrm>
-              <a:prstGeom prst="line">
-                <a:avLst/>
-              </a:prstGeom>
-              <a:ln>
-                <a:solidFill>
-                  <a:schemeClr val="tx1"/>
-                </a:solidFill>
-              </a:ln>
-            </p:spPr>
-            <p:style>
-              <a:lnRef idx="1">
-                <a:schemeClr val="accent1"/>
-              </a:lnRef>
-              <a:fillRef idx="0">
-                <a:schemeClr val="accent1"/>
-              </a:fillRef>
-              <a:effectRef idx="0">
-                <a:schemeClr val="accent1"/>
-              </a:effectRef>
-              <a:fontRef idx="minor">
-                <a:schemeClr val="tx1"/>
-              </a:fontRef>
-            </p:style>
-          </p:cxnSp>
-          <p:cxnSp>
-            <p:nvCxnSpPr>
-              <p:cNvPr id="26" name="Прямая соединительная линия 25">
-                <a:extLst>
-                  <a:ext uri="{FF2B5EF4-FFF2-40B4-BE49-F238E27FC236}">
-                    <a16:creationId xmlns:a16="http://schemas.microsoft.com/office/drawing/2014/main" id="{632D97B2-5B41-4725-8BED-1BB84D9049A3}"/>
-                  </a:ext>
-                </a:extLst>
-              </p:cNvPr>
-              <p:cNvCxnSpPr>
-                <a:cxnSpLocks/>
-              </p:cNvCxnSpPr>
-              <p:nvPr/>
-            </p:nvCxnSpPr>
-            <p:spPr>
-              <a:xfrm>
-                <a:off x="6819014" y="-12795"/>
-                <a:ext cx="0" cy="7060019"/>
-              </a:xfrm>
-              <a:prstGeom prst="line">
-                <a:avLst/>
-              </a:prstGeom>
-              <a:ln>
-                <a:solidFill>
-                  <a:schemeClr val="tx1"/>
-                </a:solidFill>
-              </a:ln>
-            </p:spPr>
-            <p:style>
-              <a:lnRef idx="1">
-                <a:schemeClr val="accent1"/>
-              </a:lnRef>
-              <a:fillRef idx="0">
-                <a:schemeClr val="accent1"/>
-              </a:fillRef>
-              <a:effectRef idx="0">
-                <a:schemeClr val="accent1"/>
-              </a:effectRef>
-              <a:fontRef idx="minor">
-                <a:schemeClr val="tx1"/>
-              </a:fontRef>
-            </p:style>
-          </p:cxnSp>
-          <p:cxnSp>
-            <p:nvCxnSpPr>
-              <p:cNvPr id="27" name="Прямая соединительная линия 26">
-                <a:extLst>
-                  <a:ext uri="{FF2B5EF4-FFF2-40B4-BE49-F238E27FC236}">
-                    <a16:creationId xmlns:a16="http://schemas.microsoft.com/office/drawing/2014/main" id="{0096069A-E1F5-484F-9AD5-E590F3AFB8C1}"/>
-                  </a:ext>
-                </a:extLst>
-              </p:cNvPr>
-              <p:cNvCxnSpPr>
-                <a:cxnSpLocks/>
-              </p:cNvCxnSpPr>
-              <p:nvPr/>
-            </p:nvCxnSpPr>
-            <p:spPr>
-              <a:xfrm>
-                <a:off x="7542032" y="-12796"/>
-                <a:ext cx="0" cy="7060019"/>
-              </a:xfrm>
-              <a:prstGeom prst="line">
-                <a:avLst/>
-              </a:prstGeom>
-              <a:ln>
-                <a:solidFill>
-                  <a:schemeClr val="tx1"/>
-                </a:solidFill>
-              </a:ln>
-            </p:spPr>
-            <p:style>
-              <a:lnRef idx="1">
-                <a:schemeClr val="accent1"/>
-              </a:lnRef>
-              <a:fillRef idx="0">
-                <a:schemeClr val="accent1"/>
-              </a:fillRef>
-              <a:effectRef idx="0">
-                <a:schemeClr val="accent1"/>
-              </a:effectRef>
-              <a:fontRef idx="minor">
-                <a:schemeClr val="tx1"/>
-              </a:fontRef>
-            </p:style>
-          </p:cxnSp>
-          <p:cxnSp>
-            <p:nvCxnSpPr>
-              <p:cNvPr id="28" name="Прямая соединительная линия 27">
-                <a:extLst>
-                  <a:ext uri="{FF2B5EF4-FFF2-40B4-BE49-F238E27FC236}">
-                    <a16:creationId xmlns:a16="http://schemas.microsoft.com/office/drawing/2014/main" id="{CD8CFF4F-9474-44E2-8483-EE501133D094}"/>
-                  </a:ext>
-                </a:extLst>
-              </p:cNvPr>
-              <p:cNvCxnSpPr>
-                <a:cxnSpLocks/>
-              </p:cNvCxnSpPr>
-              <p:nvPr/>
-            </p:nvCxnSpPr>
-            <p:spPr>
-              <a:xfrm>
-                <a:off x="8265045" y="-12797"/>
-                <a:ext cx="0" cy="7060019"/>
-              </a:xfrm>
-              <a:prstGeom prst="line">
-                <a:avLst/>
-              </a:prstGeom>
-              <a:ln>
-                <a:solidFill>
-                  <a:schemeClr val="tx1"/>
-                </a:solidFill>
-              </a:ln>
-            </p:spPr>
-            <p:style>
-              <a:lnRef idx="1">
-                <a:schemeClr val="accent1"/>
-              </a:lnRef>
-              <a:fillRef idx="0">
-                <a:schemeClr val="accent1"/>
-              </a:fillRef>
-              <a:effectRef idx="0">
-                <a:schemeClr val="accent1"/>
-              </a:effectRef>
-              <a:fontRef idx="minor">
-                <a:schemeClr val="tx1"/>
-              </a:fontRef>
-            </p:style>
-          </p:cxnSp>
-          <p:cxnSp>
-            <p:nvCxnSpPr>
-              <p:cNvPr id="29" name="Прямая соединительная линия 28">
-                <a:extLst>
-                  <a:ext uri="{FF2B5EF4-FFF2-40B4-BE49-F238E27FC236}">
-                    <a16:creationId xmlns:a16="http://schemas.microsoft.com/office/drawing/2014/main" id="{CA573EE6-F195-44AF-9C78-7860BF4CC13C}"/>
-                  </a:ext>
-                </a:extLst>
-              </p:cNvPr>
-              <p:cNvCxnSpPr>
-                <a:cxnSpLocks/>
-              </p:cNvCxnSpPr>
-              <p:nvPr/>
-            </p:nvCxnSpPr>
-            <p:spPr>
-              <a:xfrm>
-                <a:off x="8977428" y="-12798"/>
-                <a:ext cx="0" cy="7060019"/>
-              </a:xfrm>
-              <a:prstGeom prst="line">
-                <a:avLst/>
-              </a:prstGeom>
-              <a:ln>
-                <a:solidFill>
-                  <a:schemeClr val="tx1"/>
-                </a:solidFill>
-              </a:ln>
-            </p:spPr>
-            <p:style>
-              <a:lnRef idx="1">
-                <a:schemeClr val="accent1"/>
-              </a:lnRef>
-              <a:fillRef idx="0">
-                <a:schemeClr val="accent1"/>
-              </a:fillRef>
-              <a:effectRef idx="0">
-                <a:schemeClr val="accent1"/>
-              </a:effectRef>
-              <a:fontRef idx="minor">
-                <a:schemeClr val="tx1"/>
-              </a:fontRef>
-            </p:style>
-          </p:cxnSp>
-          <p:cxnSp>
-            <p:nvCxnSpPr>
-              <p:cNvPr id="30" name="Прямая соединительная линия 29">
-                <a:extLst>
-                  <a:ext uri="{FF2B5EF4-FFF2-40B4-BE49-F238E27FC236}">
-                    <a16:creationId xmlns:a16="http://schemas.microsoft.com/office/drawing/2014/main" id="{64DB25F9-7347-4751-961B-E6FEBE4F1600}"/>
-                  </a:ext>
-                </a:extLst>
-              </p:cNvPr>
-              <p:cNvCxnSpPr>
-                <a:cxnSpLocks/>
-              </p:cNvCxnSpPr>
-              <p:nvPr/>
-            </p:nvCxnSpPr>
-            <p:spPr>
-              <a:xfrm>
-                <a:off x="9693347" y="0"/>
-                <a:ext cx="0" cy="7060019"/>
-              </a:xfrm>
-              <a:prstGeom prst="line">
-                <a:avLst/>
-              </a:prstGeom>
-              <a:ln>
-                <a:solidFill>
-                  <a:schemeClr val="tx1"/>
-                </a:solidFill>
-              </a:ln>
-            </p:spPr>
-            <p:style>
-              <a:lnRef idx="1">
-                <a:schemeClr val="accent1"/>
-              </a:lnRef>
-              <a:fillRef idx="0">
-                <a:schemeClr val="accent1"/>
-              </a:fillRef>
-              <a:effectRef idx="0">
-                <a:schemeClr val="accent1"/>
-              </a:effectRef>
-              <a:fontRef idx="minor">
-                <a:schemeClr val="tx1"/>
-              </a:fontRef>
-            </p:style>
-          </p:cxnSp>
-          <p:cxnSp>
-            <p:nvCxnSpPr>
-              <p:cNvPr id="31" name="Прямая соединительная линия 30">
-                <a:extLst>
-                  <a:ext uri="{FF2B5EF4-FFF2-40B4-BE49-F238E27FC236}">
-                    <a16:creationId xmlns:a16="http://schemas.microsoft.com/office/drawing/2014/main" id="{E497B18E-A3B4-492E-98EC-EB5195E84BE0}"/>
-                  </a:ext>
-                </a:extLst>
-              </p:cNvPr>
-              <p:cNvCxnSpPr>
-                <a:cxnSpLocks/>
-              </p:cNvCxnSpPr>
-              <p:nvPr/>
-            </p:nvCxnSpPr>
-            <p:spPr>
-              <a:xfrm>
-                <a:off x="10416362" y="0"/>
-                <a:ext cx="0" cy="7060019"/>
-              </a:xfrm>
-              <a:prstGeom prst="line">
-                <a:avLst/>
-              </a:prstGeom>
-              <a:ln>
-                <a:solidFill>
-                  <a:schemeClr val="tx1"/>
-                </a:solidFill>
-              </a:ln>
-            </p:spPr>
-            <p:style>
-              <a:lnRef idx="1">
-                <a:schemeClr val="accent1"/>
-              </a:lnRef>
-              <a:fillRef idx="0">
-                <a:schemeClr val="accent1"/>
-              </a:fillRef>
-              <a:effectRef idx="0">
-                <a:schemeClr val="accent1"/>
-              </a:effectRef>
-              <a:fontRef idx="minor">
-                <a:schemeClr val="tx1"/>
-              </a:fontRef>
-            </p:style>
-          </p:cxnSp>
-          <p:cxnSp>
-            <p:nvCxnSpPr>
-              <p:cNvPr id="32" name="Прямая соединительная линия 31">
-                <a:extLst>
-                  <a:ext uri="{FF2B5EF4-FFF2-40B4-BE49-F238E27FC236}">
-                    <a16:creationId xmlns:a16="http://schemas.microsoft.com/office/drawing/2014/main" id="{9A209BAB-9A16-4C31-A951-28C1FF9C8C80}"/>
-                  </a:ext>
-                </a:extLst>
-              </p:cNvPr>
-              <p:cNvCxnSpPr>
-                <a:cxnSpLocks/>
-              </p:cNvCxnSpPr>
-              <p:nvPr/>
-            </p:nvCxnSpPr>
-            <p:spPr>
-              <a:xfrm>
-                <a:off x="11128743" y="0"/>
-                <a:ext cx="0" cy="7060019"/>
-              </a:xfrm>
-              <a:prstGeom prst="line">
-                <a:avLst/>
-              </a:prstGeom>
-              <a:ln>
-                <a:solidFill>
-                  <a:schemeClr val="tx1"/>
-                </a:solidFill>
-              </a:ln>
-            </p:spPr>
-            <p:style>
-              <a:lnRef idx="1">
-                <a:schemeClr val="accent1"/>
-              </a:lnRef>
-              <a:fillRef idx="0">
-                <a:schemeClr val="accent1"/>
-              </a:fillRef>
-              <a:effectRef idx="0">
-                <a:schemeClr val="accent1"/>
-              </a:effectRef>
-              <a:fontRef idx="minor">
-                <a:schemeClr val="tx1"/>
-              </a:fontRef>
-            </p:style>
-          </p:cxnSp>
-          <p:cxnSp>
-            <p:nvCxnSpPr>
-              <p:cNvPr id="33" name="Прямая соединительная линия 32">
-                <a:extLst>
-                  <a:ext uri="{FF2B5EF4-FFF2-40B4-BE49-F238E27FC236}">
-                    <a16:creationId xmlns:a16="http://schemas.microsoft.com/office/drawing/2014/main" id="{DF66F787-5F35-42BB-99A2-5599D69B2759}"/>
-                  </a:ext>
-                </a:extLst>
-              </p:cNvPr>
-              <p:cNvCxnSpPr>
-                <a:cxnSpLocks/>
-              </p:cNvCxnSpPr>
-              <p:nvPr/>
-            </p:nvCxnSpPr>
-            <p:spPr>
-              <a:xfrm>
-                <a:off x="11862644" y="0"/>
-                <a:ext cx="0" cy="7060019"/>
-              </a:xfrm>
-              <a:prstGeom prst="line">
-                <a:avLst/>
-              </a:prstGeom>
-              <a:ln>
-                <a:solidFill>
-                  <a:schemeClr val="tx1"/>
-                </a:solidFill>
-              </a:ln>
-            </p:spPr>
-            <p:style>
-              <a:lnRef idx="1">
-                <a:schemeClr val="accent1"/>
-              </a:lnRef>
-              <a:fillRef idx="0">
-                <a:schemeClr val="accent1"/>
-              </a:fillRef>
-              <a:effectRef idx="0">
-                <a:schemeClr val="accent1"/>
-              </a:effectRef>
-              <a:fontRef idx="minor">
-                <a:schemeClr val="tx1"/>
-              </a:fontRef>
-            </p:style>
-          </p:cxnSp>
-        </p:grpSp>
-        <p:cxnSp>
-          <p:nvCxnSpPr>
-            <p:cNvPr id="35" name="Прямая соединительная линия 34">
-              <a:extLst>
-                <a:ext uri="{FF2B5EF4-FFF2-40B4-BE49-F238E27FC236}">
-                  <a16:creationId xmlns:a16="http://schemas.microsoft.com/office/drawing/2014/main" id="{A5354744-6A8D-4078-A907-2FAD85E3AF28}"/>
-                </a:ext>
-              </a:extLst>
-            </p:cNvPr>
-            <p:cNvCxnSpPr/>
-            <p:nvPr/>
-          </p:nvCxnSpPr>
-          <p:spPr>
-            <a:xfrm>
-              <a:off x="0" y="2889247"/>
-              <a:ext cx="12596037" cy="0"/>
-            </a:xfrm>
-            <a:prstGeom prst="line">
-              <a:avLst/>
-            </a:prstGeom>
-            <a:ln>
-              <a:solidFill>
-                <a:schemeClr val="tx1"/>
-              </a:solidFill>
-            </a:ln>
-          </p:spPr>
-          <p:style>
-            <a:lnRef idx="1">
-              <a:schemeClr val="accent1"/>
-            </a:lnRef>
-            <a:fillRef idx="0">
-              <a:schemeClr val="accent1"/>
-            </a:fillRef>
-            <a:effectRef idx="0">
-              <a:schemeClr val="accent1"/>
-            </a:effectRef>
-            <a:fontRef idx="minor">
-              <a:schemeClr val="tx1"/>
-            </a:fontRef>
-          </p:style>
-        </p:cxnSp>
-      </p:grpSp>
-      <p:sp>
-        <p:nvSpPr>
-          <p:cNvPr id="43" name="Прямоугольник 42">
-            <a:extLst>
-              <a:ext uri="{FF2B5EF4-FFF2-40B4-BE49-F238E27FC236}">
-                <a16:creationId xmlns:a16="http://schemas.microsoft.com/office/drawing/2014/main" id="{F1BA58C8-CB0D-42C8-9353-C041814589B5}"/>
-              </a:ext>
-            </a:extLst>
-          </p:cNvPr>
-          <p:cNvSpPr/>
-          <p:nvPr/>
-        </p:nvSpPr>
-        <p:spPr>
-          <a:xfrm>
-            <a:off x="1522575" y="1523675"/>
-            <a:ext cx="9869864" cy="4479264"/>
-          </a:xfrm>
-          <a:custGeom>
-            <a:avLst/>
-            <a:gdLst>
-              <a:gd name="connsiteX0" fmla="*/ 0 w 9869864"/>
-              <a:gd name="connsiteY0" fmla="*/ 0 h 4479264"/>
-              <a:gd name="connsiteX1" fmla="*/ 9869864 w 9869864"/>
-              <a:gd name="connsiteY1" fmla="*/ 0 h 4479264"/>
-              <a:gd name="connsiteX2" fmla="*/ 9869864 w 9869864"/>
-              <a:gd name="connsiteY2" fmla="*/ 4479264 h 4479264"/>
-              <a:gd name="connsiteX3" fmla="*/ 0 w 9869864"/>
-              <a:gd name="connsiteY3" fmla="*/ 4479264 h 4479264"/>
-              <a:gd name="connsiteX4" fmla="*/ 0 w 9869864"/>
-              <a:gd name="connsiteY4" fmla="*/ 0 h 4479264"/>
-            </a:gdLst>
-            <a:ahLst/>
-            <a:cxnLst>
-              <a:cxn ang="0">
-                <a:pos x="connsiteX0" y="connsiteY0"/>
-              </a:cxn>
-              <a:cxn ang="0">
-                <a:pos x="connsiteX1" y="connsiteY1"/>
-              </a:cxn>
-              <a:cxn ang="0">
-                <a:pos x="connsiteX2" y="connsiteY2"/>
-              </a:cxn>
-              <a:cxn ang="0">
-                <a:pos x="connsiteX3" y="connsiteY3"/>
-              </a:cxn>
-              <a:cxn ang="0">
-                <a:pos x="connsiteX4" y="connsiteY4"/>
-              </a:cxn>
-            </a:cxnLst>
-            <a:rect l="l" t="t" r="r" b="b"/>
-            <a:pathLst>
-              <a:path w="9869864" h="4479264" fill="none" extrusionOk="0">
-                <a:moveTo>
-                  <a:pt x="0" y="0"/>
-                </a:moveTo>
-                <a:cubicBezTo>
-                  <a:pt x="3831520" y="-159440"/>
-                  <a:pt x="6605196" y="19408"/>
-                  <a:pt x="9869864" y="0"/>
-                </a:cubicBezTo>
-                <a:cubicBezTo>
-                  <a:pt x="10027904" y="2011379"/>
-                  <a:pt x="9863463" y="3133819"/>
-                  <a:pt x="9869864" y="4479264"/>
-                </a:cubicBezTo>
-                <a:cubicBezTo>
-                  <a:pt x="7396228" y="4393032"/>
-                  <a:pt x="3393268" y="4395962"/>
-                  <a:pt x="0" y="4479264"/>
-                </a:cubicBezTo>
-                <a:cubicBezTo>
-                  <a:pt x="-145898" y="3619195"/>
-                  <a:pt x="-24387" y="1200516"/>
-                  <a:pt x="0" y="0"/>
-                </a:cubicBezTo>
-                <a:close/>
-              </a:path>
-              <a:path w="9869864" h="4479264" stroke="0" extrusionOk="0">
-                <a:moveTo>
-                  <a:pt x="0" y="0"/>
-                </a:moveTo>
-                <a:cubicBezTo>
-                  <a:pt x="4863626" y="112754"/>
-                  <a:pt x="7115958" y="-67146"/>
-                  <a:pt x="9869864" y="0"/>
-                </a:cubicBezTo>
-                <a:cubicBezTo>
-                  <a:pt x="9961230" y="833996"/>
-                  <a:pt x="9875015" y="2860015"/>
-                  <a:pt x="9869864" y="4479264"/>
-                </a:cubicBezTo>
-                <a:cubicBezTo>
-                  <a:pt x="6129429" y="4551694"/>
-                  <a:pt x="4447473" y="4558212"/>
-                  <a:pt x="0" y="4479264"/>
-                </a:cubicBezTo>
-                <a:cubicBezTo>
-                  <a:pt x="77396" y="3799926"/>
-                  <a:pt x="15692" y="1626302"/>
-                  <a:pt x="0" y="0"/>
-                </a:cubicBezTo>
-                <a:close/>
-              </a:path>
-            </a:pathLst>
-          </a:custGeom>
-          <a:solidFill>
-            <a:schemeClr val="accent5">
-              <a:lumMod val="20000"/>
-              <a:lumOff val="80000"/>
-            </a:schemeClr>
-          </a:solidFill>
-          <a:ln>
-            <a:solidFill>
-              <a:schemeClr val="tx1"/>
-            </a:solidFill>
-            <a:extLst>
-              <a:ext uri="{C807C97D-BFC1-408E-A445-0C87EB9F89A2}">
-                <ask:lineSketchStyleProps xmlns:ask="http://schemas.microsoft.com/office/drawing/2018/sketchyshapes" sd="1336358556">
-                  <a:prstGeom prst="rect">
-                    <a:avLst/>
-                  </a:prstGeom>
-                  <ask:type>
-                    <ask:lineSketchCurved/>
-                  </ask:type>
-                </ask:lineSketchStyleProps>
-              </a:ext>
-            </a:extLst>
-          </a:ln>
-        </p:spPr>
-        <p:style>
-          <a:lnRef idx="2">
-            <a:schemeClr val="accent1">
-              <a:shade val="50000"/>
-            </a:schemeClr>
-          </a:lnRef>
-          <a:fillRef idx="1">
-            <a:schemeClr val="accent1"/>
-          </a:fillRef>
-          <a:effectRef idx="0">
-            <a:schemeClr val="accent1"/>
-          </a:effectRef>
-          <a:fontRef idx="minor">
-            <a:schemeClr val="lt1"/>
-          </a:fontRef>
-        </p:style>
-        <p:txBody>
-          <a:bodyPr rtlCol="0" anchor="ctr"/>
-          <a:lstStyle/>
-          <a:p>
-            <a:pPr algn="ctr"/>
-            <a:r>
-              <a:rPr sz="1400" b="1">
-                <a:solidFill>
-                  <a:srgbClr val="2F2F2F"/>
-                </a:solidFill>
-                <a:latin typeface="Century Gothic"/>
-              </a:rPr>
-              <a:t>Главное</a:t>
-            </a:r>
-            <a:endParaRPr lang="ru-RU"/>
-          </a:p>
-          <a:p>
-            <a:r>
-              <a:rPr sz="800" b="0">
-                <a:solidFill>
-                  <a:srgbClr val="2F2F2F"/>
-                </a:solidFill>
-                <a:latin typeface="Century Gothic"/>
-              </a:rPr>
-              <a:t/>
-            </a:r>
-          </a:p>
-          <a:p>
-            <a:r>
-              <a:rPr sz="1400" b="0">
-                <a:solidFill>
-                  <a:srgbClr val="2F2F2F"/>
-                </a:solidFill>
-                <a:latin typeface="Century Gothic"/>
-              </a:rPr>
-              <a:t>Вредные факторы ведут к болезням, опасные — к травмам. По ст. 13 ФЗ-426 они делятся на физические, химические, биологические и факторы трудового процесса (тяжесть и напряжённость).</a:t>
-            </a:r>
-          </a:p>
-          <a:p>
-            <a:r>
-              <a:rPr sz="800" b="0">
-                <a:solidFill>
-                  <a:srgbClr val="2F2F2F"/>
-                </a:solidFill>
-                <a:latin typeface="Century Gothic"/>
-              </a:rPr>
-              <a:t/>
-            </a:r>
-          </a:p>
-          <a:p>
-            <a:r>
-              <a:rPr sz="1400" b="0">
-                <a:solidFill>
-                  <a:srgbClr val="2F2F2F"/>
-                </a:solidFill>
-                <a:latin typeface="Century Gothic"/>
-              </a:rPr>
-              <a:t>Выявляют их через СОУТ. Цель всех мероприятий — жизнь, здоровье и защита прав работника.</a:t>
-            </a:r>
-          </a:p>
-        </p:txBody>
-      </p:sp>
-      <p:sp>
-        <p:nvSpPr>
-          <p:cNvPr id="37" name="Прямоугольник 36">
-            <a:extLst>
-              <a:ext uri="{FF2B5EF4-FFF2-40B4-BE49-F238E27FC236}">
-                <a16:creationId xmlns:a16="http://schemas.microsoft.com/office/drawing/2014/main" id="{247A25D5-0201-4715-B299-1F1450E9A577}"/>
-              </a:ext>
-            </a:extLst>
-          </p:cNvPr>
-          <p:cNvSpPr/>
-          <p:nvPr/>
-        </p:nvSpPr>
-        <p:spPr>
-          <a:xfrm>
-            <a:off x="1161068" y="1179857"/>
-            <a:ext cx="9869864" cy="4479264"/>
-          </a:xfrm>
-          <a:custGeom>
-            <a:avLst/>
-            <a:gdLst>
-              <a:gd name="connsiteX0" fmla="*/ 0 w 9869864"/>
-              <a:gd name="connsiteY0" fmla="*/ 0 h 4479264"/>
-              <a:gd name="connsiteX1" fmla="*/ 9869864 w 9869864"/>
-              <a:gd name="connsiteY1" fmla="*/ 0 h 4479264"/>
-              <a:gd name="connsiteX2" fmla="*/ 9869864 w 9869864"/>
-              <a:gd name="connsiteY2" fmla="*/ 4479264 h 4479264"/>
-              <a:gd name="connsiteX3" fmla="*/ 0 w 9869864"/>
-              <a:gd name="connsiteY3" fmla="*/ 4479264 h 4479264"/>
-              <a:gd name="connsiteX4" fmla="*/ 0 w 9869864"/>
-              <a:gd name="connsiteY4" fmla="*/ 0 h 4479264"/>
-            </a:gdLst>
-            <a:ahLst/>
-            <a:cxnLst>
-              <a:cxn ang="0">
-                <a:pos x="connsiteX0" y="connsiteY0"/>
-              </a:cxn>
-              <a:cxn ang="0">
-                <a:pos x="connsiteX1" y="connsiteY1"/>
-              </a:cxn>
-              <a:cxn ang="0">
-                <a:pos x="connsiteX2" y="connsiteY2"/>
-              </a:cxn>
-              <a:cxn ang="0">
-                <a:pos x="connsiteX3" y="connsiteY3"/>
-              </a:cxn>
-              <a:cxn ang="0">
-                <a:pos x="connsiteX4" y="connsiteY4"/>
-              </a:cxn>
-            </a:cxnLst>
-            <a:rect l="l" t="t" r="r" b="b"/>
-            <a:pathLst>
-              <a:path w="9869864" h="4479264" fill="none" extrusionOk="0">
-                <a:moveTo>
-                  <a:pt x="0" y="0"/>
-                </a:moveTo>
-                <a:cubicBezTo>
-                  <a:pt x="3831520" y="-159440"/>
-                  <a:pt x="6605196" y="19408"/>
-                  <a:pt x="9869864" y="0"/>
-                </a:cubicBezTo>
-                <a:cubicBezTo>
-                  <a:pt x="10027904" y="2011379"/>
-                  <a:pt x="9863463" y="3133819"/>
-                  <a:pt x="9869864" y="4479264"/>
-                </a:cubicBezTo>
-                <a:cubicBezTo>
-                  <a:pt x="7396228" y="4393032"/>
-                  <a:pt x="3393268" y="4395962"/>
-                  <a:pt x="0" y="4479264"/>
-                </a:cubicBezTo>
-                <a:cubicBezTo>
-                  <a:pt x="-145898" y="3619195"/>
-                  <a:pt x="-24387" y="1200516"/>
-                  <a:pt x="0" y="0"/>
-                </a:cubicBezTo>
-                <a:close/>
-              </a:path>
-              <a:path w="9869864" h="4479264" stroke="0" extrusionOk="0">
-                <a:moveTo>
-                  <a:pt x="0" y="0"/>
-                </a:moveTo>
-                <a:cubicBezTo>
-                  <a:pt x="4863626" y="112754"/>
-                  <a:pt x="7115958" y="-67146"/>
-                  <a:pt x="9869864" y="0"/>
-                </a:cubicBezTo>
-                <a:cubicBezTo>
-                  <a:pt x="9961230" y="833996"/>
-                  <a:pt x="9875015" y="2860015"/>
-                  <a:pt x="9869864" y="4479264"/>
-                </a:cubicBezTo>
-                <a:cubicBezTo>
-                  <a:pt x="6129429" y="4551694"/>
-                  <a:pt x="4447473" y="4558212"/>
-                  <a:pt x="0" y="4479264"/>
-                </a:cubicBezTo>
-                <a:cubicBezTo>
-                  <a:pt x="77396" y="3799926"/>
-                  <a:pt x="15692" y="1626302"/>
-                  <a:pt x="0" y="0"/>
-                </a:cubicBezTo>
-                <a:close/>
-              </a:path>
-            </a:pathLst>
-          </a:custGeom>
-          <a:solidFill>
-            <a:srgbClr val="DAE3F3"/>
-          </a:solidFill>
-          <a:ln>
-            <a:solidFill>
-              <a:schemeClr val="tx1"/>
-            </a:solidFill>
-            <a:extLst>
-              <a:ext uri="{C807C97D-BFC1-408E-A445-0C87EB9F89A2}">
-                <ask:lineSketchStyleProps xmlns:ask="http://schemas.microsoft.com/office/drawing/2018/sketchyshapes" sd="1336358556">
-                  <a:prstGeom prst="rect">
-                    <a:avLst/>
-                  </a:prstGeom>
-                  <ask:type>
-                    <ask:lineSketchCurved/>
-                  </ask:type>
-                </ask:lineSketchStyleProps>
-              </a:ext>
-            </a:extLst>
-          </a:ln>
-        </p:spPr>
-        <p:style>
-          <a:lnRef idx="2">
-            <a:schemeClr val="accent1">
-              <a:shade val="50000"/>
-            </a:schemeClr>
-          </a:lnRef>
-          <a:fillRef idx="1">
-            <a:schemeClr val="accent1"/>
-          </a:fillRef>
-          <a:effectRef idx="0">
-            <a:schemeClr val="accent1"/>
-          </a:effectRef>
-          <a:fontRef idx="minor">
-            <a:schemeClr val="lt1"/>
-          </a:fontRef>
-        </p:style>
-        <p:txBody>
-          <a:bodyPr rtlCol="0" anchor="ctr"/>
-          <a:lstStyle/>
-          <a:p>
-            <a:pPr algn="ctr"/>
-            <a:endParaRPr lang="ru-RU"/>
-          </a:p>
-        </p:txBody>
-      </p:sp>
-      <p:sp>
-        <p:nvSpPr>
-          <p:cNvPr id="42" name="TextBox 41">
-            <a:extLst>
-              <a:ext uri="{FF2B5EF4-FFF2-40B4-BE49-F238E27FC236}">
-                <a16:creationId xmlns:a16="http://schemas.microsoft.com/office/drawing/2014/main" id="{6C2623F0-1205-437B-80EB-293BD3B22892}"/>
-              </a:ext>
-            </a:extLst>
-          </p:cNvPr>
-          <p:cNvSpPr txBox="1"/>
-          <p:nvPr/>
-        </p:nvSpPr>
-        <p:spPr>
-          <a:xfrm>
-            <a:off x="1862359" y="1736635"/>
-            <a:ext cx="8915312" cy="3283015"/>
-          </a:xfrm>
-          <a:prstGeom prst="rect">
-            <a:avLst/>
-          </a:prstGeom>
-          <a:noFill/>
-        </p:spPr>
-        <p:txBody>
-          <a:bodyPr wrap="square">
-            <a:spAutoFit/>
-          </a:bodyPr>
-          <a:lstStyle/>
-          <a:p>
-            <a:pPr>
-              <a:lnSpc>
-                <a:spcPct val="150000"/>
-              </a:lnSpc>
-            </a:pPr>
-          </a:p>
-        </p:txBody>
-      </p:sp>
-      <p:pic>
-        <p:nvPicPr>
-          <p:cNvPr id="2" name="Рисунок 1">
-            <a:extLst>
-              <a:ext uri="{FF2B5EF4-FFF2-40B4-BE49-F238E27FC236}">
-                <a16:creationId xmlns:a16="http://schemas.microsoft.com/office/drawing/2014/main" id="{1238151D-9F0E-404B-808F-017B8F6E2F83}"/>
-              </a:ext>
-            </a:extLst>
-          </p:cNvPr>
-          <p:cNvPicPr>
-            <a:picLocks noChangeAspect="1"/>
-          </p:cNvPicPr>
-          <p:nvPr/>
-        </p:nvPicPr>
-        <p:blipFill>
-          <a:blip r:embed="rId4"/>
-          <a:stretch>
-            <a:fillRect/>
-          </a:stretch>
-        </p:blipFill>
-        <p:spPr>
-          <a:xfrm>
-            <a:off x="1350570" y="1741601"/>
-            <a:ext cx="511789" cy="511789"/>
-          </a:xfrm>
-          <a:prstGeom prst="rect">
-            <a:avLst/>
-          </a:prstGeom>
-        </p:spPr>
-      </p:pic>
-    </p:spTree>
-    <p:custDataLst>
-      <p:tags r:id="rId1"/>
-    </p:custDataLst>
-    <p:extLst>
-      <p:ext uri="{BB962C8B-B14F-4D97-AF65-F5344CB8AC3E}">
-        <p14:creationId xmlns:p14="http://schemas.microsoft.com/office/powerpoint/2010/main" val="852760726"/>
-      </p:ext>
-    </p:extLst>
-  </p:cSld>
-  <p:clrMapOvr>
-    <a:masterClrMapping/>
-  </p:clrMapOvr>
-</p:sld>
-</file>
-
 <file path=ppt/slides/slide2.xml><?xml version="1.0" encoding="utf-8"?>
 <p:sld xmlns:a="http://schemas.openxmlformats.org/drawingml/2006/main" xmlns:r="http://schemas.openxmlformats.org/officeDocument/2006/relationships" xmlns:p="http://schemas.openxmlformats.org/presentationml/2006/main">
   <p:cSld>
@@ -13674,10 +11973,10 @@
       </p:grpSp>
       <p:sp>
         <p:nvSpPr>
-          <p:cNvPr id="44" name="Прямоугольник 43">
+          <p:cNvPr id="41" name="Прямоугольник 40">
             <a:extLst>
               <a:ext uri="{FF2B5EF4-FFF2-40B4-BE49-F238E27FC236}">
-                <a16:creationId xmlns:a16="http://schemas.microsoft.com/office/drawing/2014/main" id="{3F54A79C-EE9A-4A17-830B-192AC83A4DF8}"/>
+                <a16:creationId xmlns:a16="http://schemas.microsoft.com/office/drawing/2014/main" id="{A90786C7-3329-4CE7-B3B8-EE15002A4870}"/>
               </a:ext>
             </a:extLst>
           </p:cNvPr>
@@ -13829,7 +12128,7 @@
                 </a:solidFill>
                 <a:latin typeface="Century Gothic"/>
               </a:rPr>
-              <a:t>Примеры</a:t>
+              <a:t>Химические и биологические факторы</a:t>
             </a:r>
             <a:endParaRPr lang="ru-RU"/>
           </a:p>
@@ -13841,7 +12140,7 @@
                 </a:solidFill>
                 <a:latin typeface="Century Gothic"/>
               </a:rPr>
-              <a:t>Опасные: движущиеся механизмы, электрический ток, высота, острые кромки. Вредные: постоянный шум, вибрация инструмента, жара/холод, плохое освещение.</a:t>
+              <a:t>Вещества и смеси в воздухе и на коже; вещества биологической природы. Пути: дыхание, кожа, ЖКТ. Примеры: растворители, кислоты/щелочи, CO, сварочный аэрозоль, пыль.</a:t>
             </a:r>
           </a:p>
         </p:txBody>
@@ -14012,17 +12311,17 @@
                 </a:solidFill>
                 <a:latin typeface="Century Gothic"/>
               </a:rPr>
-              <a:t>Микроклимат, аэрозоли (пыль), шум, инфразвук и ультразвук, вибрация, освещённость, неионизирующие и ионизирующие излучения.</a:t>
+              <a:t>Микроклимат, пыль, шум, вибрация, освещённость, излучения. Опасные примеры: механизмы, ток, высота. Вредные: постоянный шум, вибрация, жара/холод, плохое освещение.</a:t>
             </a:r>
           </a:p>
         </p:txBody>
       </p:sp>
       <p:sp>
         <p:nvSpPr>
-          <p:cNvPr id="42" name="TextBox 41">
+          <p:cNvPr id="38" name="TextBox 37">
             <a:extLst>
               <a:ext uri="{FF2B5EF4-FFF2-40B4-BE49-F238E27FC236}">
-                <a16:creationId xmlns:a16="http://schemas.microsoft.com/office/drawing/2014/main" id="{E393B0F4-C184-417F-9035-92EF3E107ED3}"/>
+                <a16:creationId xmlns:a16="http://schemas.microsoft.com/office/drawing/2014/main" id="{4CD22F8E-6599-489D-96FD-D69217B29F3E}"/>
               </a:ext>
             </a:extLst>
           </p:cNvPr>
@@ -14031,51 +12330,8 @@
         </p:nvSpPr>
         <p:spPr>
           <a:xfrm>
-            <a:off x="1665610" y="1467292"/>
-            <a:ext cx="8753605" cy="851580"/>
-          </a:xfrm>
-          <a:prstGeom prst="rect">
-            <a:avLst/>
-          </a:prstGeom>
-          <a:noFill/>
-        </p:spPr>
-        <p:txBody>
-          <a:bodyPr wrap="square">
-            <a:spAutoFit/>
-          </a:bodyPr>
-          <a:lstStyle/>
-          <a:p>
-            <a:pPr fontAlgn="base">
-              <a:lnSpc>
-                <a:spcPct val="150000"/>
-              </a:lnSpc>
-              <a:spcAft>
-                <a:spcPts val="1200"/>
-              </a:spcAft>
-            </a:pPr>
-            <a:endParaRPr lang="en-US" sz="1400" b="1" dirty="0">
-              <a:latin typeface="Century Gothic" panose="020B0502020202020204" pitchFamily="34" charset="0"/>
-              <a:ea typeface="Times New Roman" panose="02020603050405020304" pitchFamily="18" charset="0"/>
-            </a:endParaRPr>
-          </a:p>
-        </p:txBody>
-      </p:sp>
-      <p:sp>
-        <p:nvSpPr>
-          <p:cNvPr id="43" name="TextBox 42">
-            <a:extLst>
-              <a:ext uri="{FF2B5EF4-FFF2-40B4-BE49-F238E27FC236}">
-                <a16:creationId xmlns:a16="http://schemas.microsoft.com/office/drawing/2014/main" id="{0630E37F-2C87-4FDB-8FC5-870FFA1EDA19}"/>
-              </a:ext>
-            </a:extLst>
-          </p:cNvPr>
-          <p:cNvSpPr txBox="1"/>
-          <p:nvPr/>
-        </p:nvSpPr>
-        <p:spPr>
-          <a:xfrm>
-            <a:off x="1665610" y="2826543"/>
-            <a:ext cx="9133779" cy="1446614"/>
+            <a:off x="1653087" y="1483508"/>
+            <a:ext cx="8929852" cy="1123449"/>
           </a:xfrm>
           <a:prstGeom prst="rect">
             <a:avLst/>
@@ -14096,6 +12352,110 @@
                 <a:spcPts val="800"/>
               </a:spcAft>
             </a:pPr>
+            <a:endParaRPr lang="ru-RU" sz="1400" b="1" dirty="0">
+              <a:latin typeface="Century Gothic" panose="020B0502020202020204" pitchFamily="34" charset="0"/>
+              <a:ea typeface="Calibri" panose="020F0502020204030204" pitchFamily="34" charset="0"/>
+              <a:cs typeface="Times New Roman" panose="02020603050405020304" pitchFamily="18" charset="0"/>
+            </a:endParaRPr>
+          </a:p>
+        </p:txBody>
+      </p:sp>
+      <p:sp>
+        <p:nvSpPr>
+          <p:cNvPr id="39" name="TextBox 38">
+            <a:extLst>
+              <a:ext uri="{FF2B5EF4-FFF2-40B4-BE49-F238E27FC236}">
+                <a16:creationId xmlns:a16="http://schemas.microsoft.com/office/drawing/2014/main" id="{2AA3C534-9335-490D-8F1B-D1936FFFCB5F}"/>
+              </a:ext>
+            </a:extLst>
+          </p:cNvPr>
+          <p:cNvSpPr txBox="1"/>
+          <p:nvPr/>
+        </p:nvSpPr>
+        <p:spPr>
+          <a:xfrm>
+            <a:off x="1649736" y="2704561"/>
+            <a:ext cx="9063311" cy="1446614"/>
+          </a:xfrm>
+          <a:prstGeom prst="rect">
+            <a:avLst/>
+          </a:prstGeom>
+          <a:noFill/>
+        </p:spPr>
+        <p:txBody>
+          <a:bodyPr wrap="square">
+            <a:spAutoFit/>
+          </a:bodyPr>
+          <a:lstStyle/>
+          <a:p>
+            <a:pPr>
+              <a:lnSpc>
+                <a:spcPct val="150000"/>
+              </a:lnSpc>
+              <a:spcAft>
+                <a:spcPts val="800"/>
+              </a:spcAft>
+            </a:pPr>
+            <a:r>
+              <a:rPr sz="1400" b="1">
+                <a:solidFill>
+                  <a:srgbClr val="2F2F2F"/>
+                </a:solidFill>
+                <a:latin typeface="Century Gothic"/>
+              </a:rPr>
+              <a:t>Факторы трудового процесса</a:t>
+            </a:r>
+          </a:p>
+          <a:p>
+            <a:r>
+              <a:rPr sz="1400" b="0">
+                <a:solidFill>
+                  <a:srgbClr val="2F2F2F"/>
+                </a:solidFill>
+                <a:latin typeface="Century Gothic"/>
+              </a:rPr>
+              <a:t>Тяжесть — физическая нагрузка (грузы, усилия, наклоны, движения). Напряжённость — нагрузка на нервную систему и органы чувств (наблюдение, сигналы, слух, зрение, голос).</a:t>
+            </a:r>
+          </a:p>
+        </p:txBody>
+      </p:sp>
+      <p:sp>
+        <p:nvSpPr>
+          <p:cNvPr id="40" name="TextBox 39">
+            <a:extLst>
+              <a:ext uri="{FF2B5EF4-FFF2-40B4-BE49-F238E27FC236}">
+                <a16:creationId xmlns:a16="http://schemas.microsoft.com/office/drawing/2014/main" id="{DBDFA73F-D516-43E7-B8A8-7D9F3D4D6189}"/>
+              </a:ext>
+            </a:extLst>
+          </p:cNvPr>
+          <p:cNvSpPr txBox="1"/>
+          <p:nvPr/>
+        </p:nvSpPr>
+        <p:spPr>
+          <a:xfrm>
+            <a:off x="1649736" y="4325119"/>
+            <a:ext cx="8933203" cy="1020857"/>
+          </a:xfrm>
+          <a:prstGeom prst="rect">
+            <a:avLst/>
+          </a:prstGeom>
+          <a:noFill/>
+        </p:spPr>
+        <p:txBody>
+          <a:bodyPr wrap="square">
+            <a:spAutoFit/>
+          </a:bodyPr>
+          <a:lstStyle/>
+          <a:p>
+            <a:pPr>
+              <a:lnSpc>
+                <a:spcPct val="150000"/>
+              </a:lnSpc>
+            </a:pPr>
+            <a:endParaRPr lang="en-US" sz="1400" b="1" i="0" dirty="0">
+              <a:effectLst/>
+              <a:latin typeface="Century Gothic" panose="020B0502020202020204" pitchFamily="34" charset="0"/>
+            </a:endParaRPr>
           </a:p>
         </p:txBody>
       </p:sp>
@@ -14105,7 +12465,7 @@
     </p:custDataLst>
     <p:extLst>
       <p:ext uri="{BB962C8B-B14F-4D97-AF65-F5344CB8AC3E}">
-        <p14:creationId xmlns:p14="http://schemas.microsoft.com/office/powerpoint/2010/main" val="2275704587"/>
+        <p14:creationId xmlns:p14="http://schemas.microsoft.com/office/powerpoint/2010/main" val="683743847"/>
       </p:ext>
     </p:extLst>
   </p:cSld>
@@ -14116,6 +12476,1769 @@
 </file>
 
 <file path=ppt/slides/slide6.xml><?xml version="1.0" encoding="utf-8"?>
+<p:sld xmlns:a="http://schemas.openxmlformats.org/drawingml/2006/main" xmlns:r="http://schemas.openxmlformats.org/officeDocument/2006/relationships" xmlns:p="http://schemas.openxmlformats.org/presentationml/2006/main">
+  <p:cSld>
+    <p:spTree>
+      <p:nvGrpSpPr>
+        <p:cNvPr id="1" name=""/>
+        <p:cNvGrpSpPr/>
+        <p:nvPr/>
+      </p:nvGrpSpPr>
+      <p:grpSpPr>
+        <a:xfrm>
+          <a:off x="0" y="0"/>
+          <a:ext cx="0" cy="0"/>
+          <a:chOff x="0" y="0"/>
+          <a:chExt cx="0" cy="0"/>
+        </a:xfrm>
+      </p:grpSpPr>
+      <p:grpSp>
+        <p:nvGrpSpPr>
+          <p:cNvPr id="36" name="Группа 35">
+            <a:extLst>
+              <a:ext uri="{FF2B5EF4-FFF2-40B4-BE49-F238E27FC236}">
+                <a16:creationId xmlns:a16="http://schemas.microsoft.com/office/drawing/2014/main" id="{7FF1FBDA-7EF8-4E32-B285-B9BF1A70F363}"/>
+              </a:ext>
+            </a:extLst>
+          </p:cNvPr>
+          <p:cNvGrpSpPr/>
+          <p:nvPr/>
+        </p:nvGrpSpPr>
+        <p:grpSpPr>
+          <a:xfrm>
+            <a:off x="0" y="-214817"/>
+            <a:ext cx="13248168" cy="7072817"/>
+            <a:chOff x="0" y="-4170772"/>
+            <a:chExt cx="13248168" cy="7072817"/>
+          </a:xfrm>
+        </p:grpSpPr>
+        <p:grpSp>
+          <p:nvGrpSpPr>
+            <p:cNvPr id="6" name="Группа 5">
+              <a:extLst>
+                <a:ext uri="{FF2B5EF4-FFF2-40B4-BE49-F238E27FC236}">
+                  <a16:creationId xmlns:a16="http://schemas.microsoft.com/office/drawing/2014/main" id="{D194E697-28B3-404D-8A29-F48E94BF6241}"/>
+                </a:ext>
+              </a:extLst>
+            </p:cNvPr>
+            <p:cNvGrpSpPr/>
+            <p:nvPr/>
+          </p:nvGrpSpPr>
+          <p:grpSpPr>
+            <a:xfrm>
+              <a:off x="0" y="-4170772"/>
+              <a:ext cx="13248168" cy="7072817"/>
+              <a:chOff x="-166577" y="-12798"/>
+              <a:chExt cx="13248168" cy="7072817"/>
+            </a:xfrm>
+          </p:grpSpPr>
+          <p:cxnSp>
+            <p:nvCxnSpPr>
+              <p:cNvPr id="7" name="Прямая соединительная линия 6">
+                <a:extLst>
+                  <a:ext uri="{FF2B5EF4-FFF2-40B4-BE49-F238E27FC236}">
+                    <a16:creationId xmlns:a16="http://schemas.microsoft.com/office/drawing/2014/main" id="{82C61482-8E50-4404-94EC-6B83D92F983D}"/>
+                  </a:ext>
+                </a:extLst>
+              </p:cNvPr>
+              <p:cNvCxnSpPr/>
+              <p:nvPr/>
+            </p:nvCxnSpPr>
+            <p:spPr>
+              <a:xfrm>
+                <a:off x="340242" y="202019"/>
+                <a:ext cx="0" cy="6858000"/>
+              </a:xfrm>
+              <a:prstGeom prst="line">
+                <a:avLst/>
+              </a:prstGeom>
+              <a:ln>
+                <a:solidFill>
+                  <a:schemeClr val="tx1"/>
+                </a:solidFill>
+              </a:ln>
+            </p:spPr>
+            <p:style>
+              <a:lnRef idx="1">
+                <a:schemeClr val="accent1"/>
+              </a:lnRef>
+              <a:fillRef idx="0">
+                <a:schemeClr val="accent1"/>
+              </a:fillRef>
+              <a:effectRef idx="0">
+                <a:schemeClr val="accent1"/>
+              </a:effectRef>
+              <a:fontRef idx="minor">
+                <a:schemeClr val="tx1"/>
+              </a:fontRef>
+            </p:style>
+          </p:cxnSp>
+          <p:cxnSp>
+            <p:nvCxnSpPr>
+              <p:cNvPr id="8" name="Прямая соединительная линия 7">
+                <a:extLst>
+                  <a:ext uri="{FF2B5EF4-FFF2-40B4-BE49-F238E27FC236}">
+                    <a16:creationId xmlns:a16="http://schemas.microsoft.com/office/drawing/2014/main" id="{79FD2ADB-6B7C-417E-8070-20B7AC7BEC87}"/>
+                  </a:ext>
+                </a:extLst>
+              </p:cNvPr>
+              <p:cNvCxnSpPr>
+                <a:cxnSpLocks/>
+              </p:cNvCxnSpPr>
+              <p:nvPr/>
+            </p:nvCxnSpPr>
+            <p:spPr>
+              <a:xfrm>
+                <a:off x="1063257" y="0"/>
+                <a:ext cx="0" cy="7060019"/>
+              </a:xfrm>
+              <a:prstGeom prst="line">
+                <a:avLst/>
+              </a:prstGeom>
+              <a:ln>
+                <a:solidFill>
+                  <a:schemeClr val="tx1"/>
+                </a:solidFill>
+              </a:ln>
+            </p:spPr>
+            <p:style>
+              <a:lnRef idx="1">
+                <a:schemeClr val="accent1"/>
+              </a:lnRef>
+              <a:fillRef idx="0">
+                <a:schemeClr val="accent1"/>
+              </a:fillRef>
+              <a:effectRef idx="0">
+                <a:schemeClr val="accent1"/>
+              </a:effectRef>
+              <a:fontRef idx="minor">
+                <a:schemeClr val="tx1"/>
+              </a:fontRef>
+            </p:style>
+          </p:cxnSp>
+          <p:cxnSp>
+            <p:nvCxnSpPr>
+              <p:cNvPr id="9" name="Прямая соединительная линия 8">
+                <a:extLst>
+                  <a:ext uri="{FF2B5EF4-FFF2-40B4-BE49-F238E27FC236}">
+                    <a16:creationId xmlns:a16="http://schemas.microsoft.com/office/drawing/2014/main" id="{742E3E11-256E-4150-8476-2708422F0F21}"/>
+                  </a:ext>
+                </a:extLst>
+              </p:cNvPr>
+              <p:cNvCxnSpPr>
+                <a:cxnSpLocks/>
+              </p:cNvCxnSpPr>
+              <p:nvPr/>
+            </p:nvCxnSpPr>
+            <p:spPr>
+              <a:xfrm>
+                <a:off x="1786271" y="0"/>
+                <a:ext cx="0" cy="7060019"/>
+              </a:xfrm>
+              <a:prstGeom prst="line">
+                <a:avLst/>
+              </a:prstGeom>
+              <a:ln>
+                <a:solidFill>
+                  <a:schemeClr val="tx1"/>
+                </a:solidFill>
+              </a:ln>
+            </p:spPr>
+            <p:style>
+              <a:lnRef idx="1">
+                <a:schemeClr val="accent1"/>
+              </a:lnRef>
+              <a:fillRef idx="0">
+                <a:schemeClr val="accent1"/>
+              </a:fillRef>
+              <a:effectRef idx="0">
+                <a:schemeClr val="accent1"/>
+              </a:effectRef>
+              <a:fontRef idx="minor">
+                <a:schemeClr val="tx1"/>
+              </a:fontRef>
+            </p:style>
+          </p:cxnSp>
+          <p:cxnSp>
+            <p:nvCxnSpPr>
+              <p:cNvPr id="10" name="Прямая соединительная линия 9">
+                <a:extLst>
+                  <a:ext uri="{FF2B5EF4-FFF2-40B4-BE49-F238E27FC236}">
+                    <a16:creationId xmlns:a16="http://schemas.microsoft.com/office/drawing/2014/main" id="{71A89E76-8A26-4714-A28B-178CFA97EAA9}"/>
+                  </a:ext>
+                </a:extLst>
+              </p:cNvPr>
+              <p:cNvCxnSpPr>
+                <a:cxnSpLocks/>
+              </p:cNvCxnSpPr>
+              <p:nvPr/>
+            </p:nvCxnSpPr>
+            <p:spPr>
+              <a:xfrm>
+                <a:off x="2498653" y="0"/>
+                <a:ext cx="0" cy="7060019"/>
+              </a:xfrm>
+              <a:prstGeom prst="line">
+                <a:avLst/>
+              </a:prstGeom>
+              <a:ln>
+                <a:solidFill>
+                  <a:schemeClr val="tx1"/>
+                </a:solidFill>
+              </a:ln>
+            </p:spPr>
+            <p:style>
+              <a:lnRef idx="1">
+                <a:schemeClr val="accent1"/>
+              </a:lnRef>
+              <a:fillRef idx="0">
+                <a:schemeClr val="accent1"/>
+              </a:fillRef>
+              <a:effectRef idx="0">
+                <a:schemeClr val="accent1"/>
+              </a:effectRef>
+              <a:fontRef idx="minor">
+                <a:schemeClr val="tx1"/>
+              </a:fontRef>
+            </p:style>
+          </p:cxnSp>
+          <p:cxnSp>
+            <p:nvCxnSpPr>
+              <p:cNvPr id="11" name="Прямая соединительная линия 10">
+                <a:extLst>
+                  <a:ext uri="{FF2B5EF4-FFF2-40B4-BE49-F238E27FC236}">
+                    <a16:creationId xmlns:a16="http://schemas.microsoft.com/office/drawing/2014/main" id="{35DE7A21-97FE-45D0-A8C3-5D5C44459CD8}"/>
+                  </a:ext>
+                </a:extLst>
+              </p:cNvPr>
+              <p:cNvCxnSpPr>
+                <a:cxnSpLocks/>
+              </p:cNvCxnSpPr>
+              <p:nvPr/>
+            </p:nvCxnSpPr>
+            <p:spPr>
+              <a:xfrm>
+                <a:off x="3211034" y="0"/>
+                <a:ext cx="0" cy="7060019"/>
+              </a:xfrm>
+              <a:prstGeom prst="line">
+                <a:avLst/>
+              </a:prstGeom>
+              <a:ln>
+                <a:solidFill>
+                  <a:schemeClr val="tx1"/>
+                </a:solidFill>
+              </a:ln>
+            </p:spPr>
+            <p:style>
+              <a:lnRef idx="1">
+                <a:schemeClr val="accent1"/>
+              </a:lnRef>
+              <a:fillRef idx="0">
+                <a:schemeClr val="accent1"/>
+              </a:fillRef>
+              <a:effectRef idx="0">
+                <a:schemeClr val="accent1"/>
+              </a:effectRef>
+              <a:fontRef idx="minor">
+                <a:schemeClr val="tx1"/>
+              </a:fontRef>
+            </p:style>
+          </p:cxnSp>
+          <p:cxnSp>
+            <p:nvCxnSpPr>
+              <p:cNvPr id="12" name="Прямая соединительная линия 11">
+                <a:extLst>
+                  <a:ext uri="{FF2B5EF4-FFF2-40B4-BE49-F238E27FC236}">
+                    <a16:creationId xmlns:a16="http://schemas.microsoft.com/office/drawing/2014/main" id="{2230EA40-BFDD-4F33-9739-A1F381E44FCA}"/>
+                  </a:ext>
+                </a:extLst>
+              </p:cNvPr>
+              <p:cNvCxnSpPr>
+                <a:cxnSpLocks/>
+              </p:cNvCxnSpPr>
+              <p:nvPr/>
+            </p:nvCxnSpPr>
+            <p:spPr>
+              <a:xfrm>
+                <a:off x="3934048" y="0"/>
+                <a:ext cx="0" cy="7060019"/>
+              </a:xfrm>
+              <a:prstGeom prst="line">
+                <a:avLst/>
+              </a:prstGeom>
+              <a:ln>
+                <a:solidFill>
+                  <a:schemeClr val="tx1"/>
+                </a:solidFill>
+              </a:ln>
+            </p:spPr>
+            <p:style>
+              <a:lnRef idx="1">
+                <a:schemeClr val="accent1"/>
+              </a:lnRef>
+              <a:fillRef idx="0">
+                <a:schemeClr val="accent1"/>
+              </a:fillRef>
+              <a:effectRef idx="0">
+                <a:schemeClr val="accent1"/>
+              </a:effectRef>
+              <a:fontRef idx="minor">
+                <a:schemeClr val="tx1"/>
+              </a:fontRef>
+            </p:style>
+          </p:cxnSp>
+          <p:cxnSp>
+            <p:nvCxnSpPr>
+              <p:cNvPr id="13" name="Прямая соединительная линия 12">
+                <a:extLst>
+                  <a:ext uri="{FF2B5EF4-FFF2-40B4-BE49-F238E27FC236}">
+                    <a16:creationId xmlns:a16="http://schemas.microsoft.com/office/drawing/2014/main" id="{A2F0D873-D58C-44BF-9302-3E5185DD141C}"/>
+                  </a:ext>
+                </a:extLst>
+              </p:cNvPr>
+              <p:cNvCxnSpPr>
+                <a:cxnSpLocks/>
+              </p:cNvCxnSpPr>
+              <p:nvPr/>
+            </p:nvCxnSpPr>
+            <p:spPr>
+              <a:xfrm flipH="1">
+                <a:off x="-95693" y="552893"/>
+                <a:ext cx="12525153" cy="0"/>
+              </a:xfrm>
+              <a:prstGeom prst="line">
+                <a:avLst/>
+              </a:prstGeom>
+              <a:ln>
+                <a:solidFill>
+                  <a:schemeClr val="tx1"/>
+                </a:solidFill>
+              </a:ln>
+            </p:spPr>
+            <p:style>
+              <a:lnRef idx="1">
+                <a:schemeClr val="accent1"/>
+              </a:lnRef>
+              <a:fillRef idx="0">
+                <a:schemeClr val="accent1"/>
+              </a:fillRef>
+              <a:effectRef idx="0">
+                <a:schemeClr val="accent1"/>
+              </a:effectRef>
+              <a:fontRef idx="minor">
+                <a:schemeClr val="tx1"/>
+              </a:fontRef>
+            </p:style>
+          </p:cxnSp>
+          <p:cxnSp>
+            <p:nvCxnSpPr>
+              <p:cNvPr id="14" name="Прямая соединительная линия 13">
+                <a:extLst>
+                  <a:ext uri="{FF2B5EF4-FFF2-40B4-BE49-F238E27FC236}">
+                    <a16:creationId xmlns:a16="http://schemas.microsoft.com/office/drawing/2014/main" id="{4B549B82-A1D8-4959-A4BA-6626F5C7E9EA}"/>
+                  </a:ext>
+                </a:extLst>
+              </p:cNvPr>
+              <p:cNvCxnSpPr>
+                <a:cxnSpLocks/>
+              </p:cNvCxnSpPr>
+              <p:nvPr/>
+            </p:nvCxnSpPr>
+            <p:spPr>
+              <a:xfrm flipH="1">
+                <a:off x="-166577" y="1265274"/>
+                <a:ext cx="12525153" cy="0"/>
+              </a:xfrm>
+              <a:prstGeom prst="line">
+                <a:avLst/>
+              </a:prstGeom>
+              <a:ln>
+                <a:solidFill>
+                  <a:schemeClr val="tx1"/>
+                </a:solidFill>
+              </a:ln>
+            </p:spPr>
+            <p:style>
+              <a:lnRef idx="1">
+                <a:schemeClr val="accent1"/>
+              </a:lnRef>
+              <a:fillRef idx="0">
+                <a:schemeClr val="accent1"/>
+              </a:fillRef>
+              <a:effectRef idx="0">
+                <a:schemeClr val="accent1"/>
+              </a:effectRef>
+              <a:fontRef idx="minor">
+                <a:schemeClr val="tx1"/>
+              </a:fontRef>
+            </p:style>
+          </p:cxnSp>
+          <p:cxnSp>
+            <p:nvCxnSpPr>
+              <p:cNvPr id="15" name="Прямая соединительная линия 14">
+                <a:extLst>
+                  <a:ext uri="{FF2B5EF4-FFF2-40B4-BE49-F238E27FC236}">
+                    <a16:creationId xmlns:a16="http://schemas.microsoft.com/office/drawing/2014/main" id="{7E902903-75AC-495E-92CC-0E6B41592315}"/>
+                  </a:ext>
+                </a:extLst>
+              </p:cNvPr>
+              <p:cNvCxnSpPr>
+                <a:cxnSpLocks/>
+              </p:cNvCxnSpPr>
+              <p:nvPr/>
+            </p:nvCxnSpPr>
+            <p:spPr>
+              <a:xfrm flipH="1">
+                <a:off x="-166577" y="1988287"/>
+                <a:ext cx="12525153" cy="0"/>
+              </a:xfrm>
+              <a:prstGeom prst="line">
+                <a:avLst/>
+              </a:prstGeom>
+              <a:ln>
+                <a:solidFill>
+                  <a:schemeClr val="tx1"/>
+                </a:solidFill>
+              </a:ln>
+            </p:spPr>
+            <p:style>
+              <a:lnRef idx="1">
+                <a:schemeClr val="accent1"/>
+              </a:lnRef>
+              <a:fillRef idx="0">
+                <a:schemeClr val="accent1"/>
+              </a:fillRef>
+              <a:effectRef idx="0">
+                <a:schemeClr val="accent1"/>
+              </a:effectRef>
+              <a:fontRef idx="minor">
+                <a:schemeClr val="tx1"/>
+              </a:fontRef>
+            </p:style>
+          </p:cxnSp>
+          <p:cxnSp>
+            <p:nvCxnSpPr>
+              <p:cNvPr id="16" name="Прямая соединительная линия 15">
+                <a:extLst>
+                  <a:ext uri="{FF2B5EF4-FFF2-40B4-BE49-F238E27FC236}">
+                    <a16:creationId xmlns:a16="http://schemas.microsoft.com/office/drawing/2014/main" id="{C10264B3-AA1B-4EDA-BFE4-9A014BE9E499}"/>
+                  </a:ext>
+                </a:extLst>
+              </p:cNvPr>
+              <p:cNvCxnSpPr>
+                <a:cxnSpLocks/>
+              </p:cNvCxnSpPr>
+              <p:nvPr/>
+            </p:nvCxnSpPr>
+            <p:spPr>
+              <a:xfrm flipH="1">
+                <a:off x="-166577" y="2711302"/>
+                <a:ext cx="12525153" cy="0"/>
+              </a:xfrm>
+              <a:prstGeom prst="line">
+                <a:avLst/>
+              </a:prstGeom>
+              <a:ln>
+                <a:solidFill>
+                  <a:schemeClr val="tx1"/>
+                </a:solidFill>
+              </a:ln>
+            </p:spPr>
+            <p:style>
+              <a:lnRef idx="1">
+                <a:schemeClr val="accent1"/>
+              </a:lnRef>
+              <a:fillRef idx="0">
+                <a:schemeClr val="accent1"/>
+              </a:fillRef>
+              <a:effectRef idx="0">
+                <a:schemeClr val="accent1"/>
+              </a:effectRef>
+              <a:fontRef idx="minor">
+                <a:schemeClr val="tx1"/>
+              </a:fontRef>
+            </p:style>
+          </p:cxnSp>
+          <p:cxnSp>
+            <p:nvCxnSpPr>
+              <p:cNvPr id="17" name="Прямая соединительная линия 16">
+                <a:extLst>
+                  <a:ext uri="{FF2B5EF4-FFF2-40B4-BE49-F238E27FC236}">
+                    <a16:creationId xmlns:a16="http://schemas.microsoft.com/office/drawing/2014/main" id="{7DB95352-4A59-44BD-9F84-7A56998CFE6C}"/>
+                  </a:ext>
+                </a:extLst>
+              </p:cNvPr>
+              <p:cNvCxnSpPr>
+                <a:cxnSpLocks/>
+              </p:cNvCxnSpPr>
+              <p:nvPr/>
+            </p:nvCxnSpPr>
+            <p:spPr>
+              <a:xfrm flipH="1">
+                <a:off x="-166577" y="3429000"/>
+                <a:ext cx="12525153" cy="0"/>
+              </a:xfrm>
+              <a:prstGeom prst="line">
+                <a:avLst/>
+              </a:prstGeom>
+              <a:ln>
+                <a:solidFill>
+                  <a:schemeClr val="tx1"/>
+                </a:solidFill>
+              </a:ln>
+            </p:spPr>
+            <p:style>
+              <a:lnRef idx="1">
+                <a:schemeClr val="accent1"/>
+              </a:lnRef>
+              <a:fillRef idx="0">
+                <a:schemeClr val="accent1"/>
+              </a:fillRef>
+              <a:effectRef idx="0">
+                <a:schemeClr val="accent1"/>
+              </a:effectRef>
+              <a:fontRef idx="minor">
+                <a:schemeClr val="tx1"/>
+              </a:fontRef>
+            </p:style>
+          </p:cxnSp>
+          <p:cxnSp>
+            <p:nvCxnSpPr>
+              <p:cNvPr id="18" name="Прямая соединительная линия 17">
+                <a:extLst>
+                  <a:ext uri="{FF2B5EF4-FFF2-40B4-BE49-F238E27FC236}">
+                    <a16:creationId xmlns:a16="http://schemas.microsoft.com/office/drawing/2014/main" id="{B374052C-54F7-4119-BB4C-01EBB5D6B2F6}"/>
+                  </a:ext>
+                </a:extLst>
+              </p:cNvPr>
+              <p:cNvCxnSpPr>
+                <a:cxnSpLocks/>
+              </p:cNvCxnSpPr>
+              <p:nvPr/>
+            </p:nvCxnSpPr>
+            <p:spPr>
+              <a:xfrm flipH="1">
+                <a:off x="-166577" y="4152013"/>
+                <a:ext cx="12525153" cy="0"/>
+              </a:xfrm>
+              <a:prstGeom prst="line">
+                <a:avLst/>
+              </a:prstGeom>
+              <a:ln>
+                <a:solidFill>
+                  <a:schemeClr val="tx1"/>
+                </a:solidFill>
+              </a:ln>
+            </p:spPr>
+            <p:style>
+              <a:lnRef idx="1">
+                <a:schemeClr val="accent1"/>
+              </a:lnRef>
+              <a:fillRef idx="0">
+                <a:schemeClr val="accent1"/>
+              </a:fillRef>
+              <a:effectRef idx="0">
+                <a:schemeClr val="accent1"/>
+              </a:effectRef>
+              <a:fontRef idx="minor">
+                <a:schemeClr val="tx1"/>
+              </a:fontRef>
+            </p:style>
+          </p:cxnSp>
+          <p:cxnSp>
+            <p:nvCxnSpPr>
+              <p:cNvPr id="19" name="Прямая соединительная линия 18">
+                <a:extLst>
+                  <a:ext uri="{FF2B5EF4-FFF2-40B4-BE49-F238E27FC236}">
+                    <a16:creationId xmlns:a16="http://schemas.microsoft.com/office/drawing/2014/main" id="{A0FD0A9A-69F9-4170-BA94-3846FED025DA}"/>
+                  </a:ext>
+                </a:extLst>
+              </p:cNvPr>
+              <p:cNvCxnSpPr>
+                <a:cxnSpLocks/>
+              </p:cNvCxnSpPr>
+              <p:nvPr/>
+            </p:nvCxnSpPr>
+            <p:spPr>
+              <a:xfrm flipH="1">
+                <a:off x="-166577" y="4875027"/>
+                <a:ext cx="12525153" cy="0"/>
+              </a:xfrm>
+              <a:prstGeom prst="line">
+                <a:avLst/>
+              </a:prstGeom>
+              <a:ln>
+                <a:solidFill>
+                  <a:schemeClr val="tx1"/>
+                </a:solidFill>
+              </a:ln>
+            </p:spPr>
+            <p:style>
+              <a:lnRef idx="1">
+                <a:schemeClr val="accent1"/>
+              </a:lnRef>
+              <a:fillRef idx="0">
+                <a:schemeClr val="accent1"/>
+              </a:fillRef>
+              <a:effectRef idx="0">
+                <a:schemeClr val="accent1"/>
+              </a:effectRef>
+              <a:fontRef idx="minor">
+                <a:schemeClr val="tx1"/>
+              </a:fontRef>
+            </p:style>
+          </p:cxnSp>
+          <p:cxnSp>
+            <p:nvCxnSpPr>
+              <p:cNvPr id="20" name="Прямая соединительная линия 19">
+                <a:extLst>
+                  <a:ext uri="{FF2B5EF4-FFF2-40B4-BE49-F238E27FC236}">
+                    <a16:creationId xmlns:a16="http://schemas.microsoft.com/office/drawing/2014/main" id="{C7407EBB-B386-401C-9331-199FBF6114CE}"/>
+                  </a:ext>
+                </a:extLst>
+              </p:cNvPr>
+              <p:cNvCxnSpPr>
+                <a:cxnSpLocks/>
+              </p:cNvCxnSpPr>
+              <p:nvPr/>
+            </p:nvCxnSpPr>
+            <p:spPr>
+              <a:xfrm flipH="1">
+                <a:off x="-166577" y="5592726"/>
+                <a:ext cx="12525153" cy="0"/>
+              </a:xfrm>
+              <a:prstGeom prst="line">
+                <a:avLst/>
+              </a:prstGeom>
+              <a:ln>
+                <a:solidFill>
+                  <a:schemeClr val="tx1"/>
+                </a:solidFill>
+              </a:ln>
+            </p:spPr>
+            <p:style>
+              <a:lnRef idx="1">
+                <a:schemeClr val="accent1"/>
+              </a:lnRef>
+              <a:fillRef idx="0">
+                <a:schemeClr val="accent1"/>
+              </a:fillRef>
+              <a:effectRef idx="0">
+                <a:schemeClr val="accent1"/>
+              </a:effectRef>
+              <a:fontRef idx="minor">
+                <a:schemeClr val="tx1"/>
+              </a:fontRef>
+            </p:style>
+          </p:cxnSp>
+          <p:cxnSp>
+            <p:nvCxnSpPr>
+              <p:cNvPr id="21" name="Прямая соединительная линия 20">
+                <a:extLst>
+                  <a:ext uri="{FF2B5EF4-FFF2-40B4-BE49-F238E27FC236}">
+                    <a16:creationId xmlns:a16="http://schemas.microsoft.com/office/drawing/2014/main" id="{5A00AFAC-24D0-4772-B007-1F6D4801E061}"/>
+                  </a:ext>
+                </a:extLst>
+              </p:cNvPr>
+              <p:cNvCxnSpPr>
+                <a:cxnSpLocks/>
+              </p:cNvCxnSpPr>
+              <p:nvPr/>
+            </p:nvCxnSpPr>
+            <p:spPr>
+              <a:xfrm flipH="1">
+                <a:off x="-166577" y="6305107"/>
+                <a:ext cx="12525153" cy="0"/>
+              </a:xfrm>
+              <a:prstGeom prst="line">
+                <a:avLst/>
+              </a:prstGeom>
+              <a:ln>
+                <a:solidFill>
+                  <a:schemeClr val="tx1"/>
+                </a:solidFill>
+              </a:ln>
+            </p:spPr>
+            <p:style>
+              <a:lnRef idx="1">
+                <a:schemeClr val="accent1"/>
+              </a:lnRef>
+              <a:fillRef idx="0">
+                <a:schemeClr val="accent1"/>
+              </a:fillRef>
+              <a:effectRef idx="0">
+                <a:schemeClr val="accent1"/>
+              </a:effectRef>
+              <a:fontRef idx="minor">
+                <a:schemeClr val="tx1"/>
+              </a:fontRef>
+            </p:style>
+          </p:cxnSp>
+          <p:cxnSp>
+            <p:nvCxnSpPr>
+              <p:cNvPr id="22" name="Прямая соединительная линия 21">
+                <a:extLst>
+                  <a:ext uri="{FF2B5EF4-FFF2-40B4-BE49-F238E27FC236}">
+                    <a16:creationId xmlns:a16="http://schemas.microsoft.com/office/drawing/2014/main" id="{C92C6CD4-7D64-4358-88EB-42B20046AA6C}"/>
+                  </a:ext>
+                </a:extLst>
+              </p:cNvPr>
+              <p:cNvCxnSpPr>
+                <a:cxnSpLocks/>
+              </p:cNvCxnSpPr>
+              <p:nvPr/>
+            </p:nvCxnSpPr>
+            <p:spPr>
+              <a:xfrm>
+                <a:off x="4657063" y="0"/>
+                <a:ext cx="0" cy="7060019"/>
+              </a:xfrm>
+              <a:prstGeom prst="line">
+                <a:avLst/>
+              </a:prstGeom>
+              <a:ln>
+                <a:solidFill>
+                  <a:schemeClr val="tx1"/>
+                </a:solidFill>
+              </a:ln>
+            </p:spPr>
+            <p:style>
+              <a:lnRef idx="1">
+                <a:schemeClr val="accent1"/>
+              </a:lnRef>
+              <a:fillRef idx="0">
+                <a:schemeClr val="accent1"/>
+              </a:fillRef>
+              <a:effectRef idx="0">
+                <a:schemeClr val="accent1"/>
+              </a:effectRef>
+              <a:fontRef idx="minor">
+                <a:schemeClr val="tx1"/>
+              </a:fontRef>
+            </p:style>
+          </p:cxnSp>
+          <p:cxnSp>
+            <p:nvCxnSpPr>
+              <p:cNvPr id="23" name="Прямая соединительная линия 22">
+                <a:extLst>
+                  <a:ext uri="{FF2B5EF4-FFF2-40B4-BE49-F238E27FC236}">
+                    <a16:creationId xmlns:a16="http://schemas.microsoft.com/office/drawing/2014/main" id="{DBCB635D-5CCB-48A9-8D29-8AEA9C51BED5}"/>
+                  </a:ext>
+                </a:extLst>
+              </p:cNvPr>
+              <p:cNvCxnSpPr>
+                <a:cxnSpLocks/>
+              </p:cNvCxnSpPr>
+              <p:nvPr/>
+            </p:nvCxnSpPr>
+            <p:spPr>
+              <a:xfrm flipH="1">
+                <a:off x="556438" y="6305107"/>
+                <a:ext cx="12525153" cy="0"/>
+              </a:xfrm>
+              <a:prstGeom prst="line">
+                <a:avLst/>
+              </a:prstGeom>
+              <a:ln>
+                <a:solidFill>
+                  <a:schemeClr val="tx1"/>
+                </a:solidFill>
+              </a:ln>
+            </p:spPr>
+            <p:style>
+              <a:lnRef idx="1">
+                <a:schemeClr val="accent1"/>
+              </a:lnRef>
+              <a:fillRef idx="0">
+                <a:schemeClr val="accent1"/>
+              </a:fillRef>
+              <a:effectRef idx="0">
+                <a:schemeClr val="accent1"/>
+              </a:effectRef>
+              <a:fontRef idx="minor">
+                <a:schemeClr val="tx1"/>
+              </a:fontRef>
+            </p:style>
+          </p:cxnSp>
+          <p:cxnSp>
+            <p:nvCxnSpPr>
+              <p:cNvPr id="24" name="Прямая соединительная линия 23">
+                <a:extLst>
+                  <a:ext uri="{FF2B5EF4-FFF2-40B4-BE49-F238E27FC236}">
+                    <a16:creationId xmlns:a16="http://schemas.microsoft.com/office/drawing/2014/main" id="{A6FC8F23-5AE0-4FDB-B2BB-E6D3E8F266DE}"/>
+                  </a:ext>
+                </a:extLst>
+              </p:cNvPr>
+              <p:cNvCxnSpPr>
+                <a:cxnSpLocks/>
+              </p:cNvCxnSpPr>
+              <p:nvPr/>
+            </p:nvCxnSpPr>
+            <p:spPr>
+              <a:xfrm>
+                <a:off x="5380077" y="0"/>
+                <a:ext cx="0" cy="7060019"/>
+              </a:xfrm>
+              <a:prstGeom prst="line">
+                <a:avLst/>
+              </a:prstGeom>
+              <a:ln>
+                <a:solidFill>
+                  <a:schemeClr val="tx1"/>
+                </a:solidFill>
+              </a:ln>
+            </p:spPr>
+            <p:style>
+              <a:lnRef idx="1">
+                <a:schemeClr val="accent1"/>
+              </a:lnRef>
+              <a:fillRef idx="0">
+                <a:schemeClr val="accent1"/>
+              </a:fillRef>
+              <a:effectRef idx="0">
+                <a:schemeClr val="accent1"/>
+              </a:effectRef>
+              <a:fontRef idx="minor">
+                <a:schemeClr val="tx1"/>
+              </a:fontRef>
+            </p:style>
+          </p:cxnSp>
+          <p:cxnSp>
+            <p:nvCxnSpPr>
+              <p:cNvPr id="25" name="Прямая соединительная линия 24">
+                <a:extLst>
+                  <a:ext uri="{FF2B5EF4-FFF2-40B4-BE49-F238E27FC236}">
+                    <a16:creationId xmlns:a16="http://schemas.microsoft.com/office/drawing/2014/main" id="{F478A673-FAA0-40F7-9553-BE69EB96603E}"/>
+                  </a:ext>
+                </a:extLst>
+              </p:cNvPr>
+              <p:cNvCxnSpPr>
+                <a:cxnSpLocks/>
+              </p:cNvCxnSpPr>
+              <p:nvPr/>
+            </p:nvCxnSpPr>
+            <p:spPr>
+              <a:xfrm>
+                <a:off x="6096003" y="0"/>
+                <a:ext cx="0" cy="7060019"/>
+              </a:xfrm>
+              <a:prstGeom prst="line">
+                <a:avLst/>
+              </a:prstGeom>
+              <a:ln>
+                <a:solidFill>
+                  <a:schemeClr val="tx1"/>
+                </a:solidFill>
+              </a:ln>
+            </p:spPr>
+            <p:style>
+              <a:lnRef idx="1">
+                <a:schemeClr val="accent1"/>
+              </a:lnRef>
+              <a:fillRef idx="0">
+                <a:schemeClr val="accent1"/>
+              </a:fillRef>
+              <a:effectRef idx="0">
+                <a:schemeClr val="accent1"/>
+              </a:effectRef>
+              <a:fontRef idx="minor">
+                <a:schemeClr val="tx1"/>
+              </a:fontRef>
+            </p:style>
+          </p:cxnSp>
+          <p:cxnSp>
+            <p:nvCxnSpPr>
+              <p:cNvPr id="26" name="Прямая соединительная линия 25">
+                <a:extLst>
+                  <a:ext uri="{FF2B5EF4-FFF2-40B4-BE49-F238E27FC236}">
+                    <a16:creationId xmlns:a16="http://schemas.microsoft.com/office/drawing/2014/main" id="{632D97B2-5B41-4725-8BED-1BB84D9049A3}"/>
+                  </a:ext>
+                </a:extLst>
+              </p:cNvPr>
+              <p:cNvCxnSpPr>
+                <a:cxnSpLocks/>
+              </p:cNvCxnSpPr>
+              <p:nvPr/>
+            </p:nvCxnSpPr>
+            <p:spPr>
+              <a:xfrm>
+                <a:off x="6819014" y="-12795"/>
+                <a:ext cx="0" cy="7060019"/>
+              </a:xfrm>
+              <a:prstGeom prst="line">
+                <a:avLst/>
+              </a:prstGeom>
+              <a:ln>
+                <a:solidFill>
+                  <a:schemeClr val="tx1"/>
+                </a:solidFill>
+              </a:ln>
+            </p:spPr>
+            <p:style>
+              <a:lnRef idx="1">
+                <a:schemeClr val="accent1"/>
+              </a:lnRef>
+              <a:fillRef idx="0">
+                <a:schemeClr val="accent1"/>
+              </a:fillRef>
+              <a:effectRef idx="0">
+                <a:schemeClr val="accent1"/>
+              </a:effectRef>
+              <a:fontRef idx="minor">
+                <a:schemeClr val="tx1"/>
+              </a:fontRef>
+            </p:style>
+          </p:cxnSp>
+          <p:cxnSp>
+            <p:nvCxnSpPr>
+              <p:cNvPr id="27" name="Прямая соединительная линия 26">
+                <a:extLst>
+                  <a:ext uri="{FF2B5EF4-FFF2-40B4-BE49-F238E27FC236}">
+                    <a16:creationId xmlns:a16="http://schemas.microsoft.com/office/drawing/2014/main" id="{0096069A-E1F5-484F-9AD5-E590F3AFB8C1}"/>
+                  </a:ext>
+                </a:extLst>
+              </p:cNvPr>
+              <p:cNvCxnSpPr>
+                <a:cxnSpLocks/>
+              </p:cNvCxnSpPr>
+              <p:nvPr/>
+            </p:nvCxnSpPr>
+            <p:spPr>
+              <a:xfrm>
+                <a:off x="7542032" y="-12796"/>
+                <a:ext cx="0" cy="7060019"/>
+              </a:xfrm>
+              <a:prstGeom prst="line">
+                <a:avLst/>
+              </a:prstGeom>
+              <a:ln>
+                <a:solidFill>
+                  <a:schemeClr val="tx1"/>
+                </a:solidFill>
+              </a:ln>
+            </p:spPr>
+            <p:style>
+              <a:lnRef idx="1">
+                <a:schemeClr val="accent1"/>
+              </a:lnRef>
+              <a:fillRef idx="0">
+                <a:schemeClr val="accent1"/>
+              </a:fillRef>
+              <a:effectRef idx="0">
+                <a:schemeClr val="accent1"/>
+              </a:effectRef>
+              <a:fontRef idx="minor">
+                <a:schemeClr val="tx1"/>
+              </a:fontRef>
+            </p:style>
+          </p:cxnSp>
+          <p:cxnSp>
+            <p:nvCxnSpPr>
+              <p:cNvPr id="28" name="Прямая соединительная линия 27">
+                <a:extLst>
+                  <a:ext uri="{FF2B5EF4-FFF2-40B4-BE49-F238E27FC236}">
+                    <a16:creationId xmlns:a16="http://schemas.microsoft.com/office/drawing/2014/main" id="{CD8CFF4F-9474-44E2-8483-EE501133D094}"/>
+                  </a:ext>
+                </a:extLst>
+              </p:cNvPr>
+              <p:cNvCxnSpPr>
+                <a:cxnSpLocks/>
+              </p:cNvCxnSpPr>
+              <p:nvPr/>
+            </p:nvCxnSpPr>
+            <p:spPr>
+              <a:xfrm>
+                <a:off x="8265045" y="-12797"/>
+                <a:ext cx="0" cy="7060019"/>
+              </a:xfrm>
+              <a:prstGeom prst="line">
+                <a:avLst/>
+              </a:prstGeom>
+              <a:ln>
+                <a:solidFill>
+                  <a:schemeClr val="tx1"/>
+                </a:solidFill>
+              </a:ln>
+            </p:spPr>
+            <p:style>
+              <a:lnRef idx="1">
+                <a:schemeClr val="accent1"/>
+              </a:lnRef>
+              <a:fillRef idx="0">
+                <a:schemeClr val="accent1"/>
+              </a:fillRef>
+              <a:effectRef idx="0">
+                <a:schemeClr val="accent1"/>
+              </a:effectRef>
+              <a:fontRef idx="minor">
+                <a:schemeClr val="tx1"/>
+              </a:fontRef>
+            </p:style>
+          </p:cxnSp>
+          <p:cxnSp>
+            <p:nvCxnSpPr>
+              <p:cNvPr id="29" name="Прямая соединительная линия 28">
+                <a:extLst>
+                  <a:ext uri="{FF2B5EF4-FFF2-40B4-BE49-F238E27FC236}">
+                    <a16:creationId xmlns:a16="http://schemas.microsoft.com/office/drawing/2014/main" id="{CA573EE6-F195-44AF-9C78-7860BF4CC13C}"/>
+                  </a:ext>
+                </a:extLst>
+              </p:cNvPr>
+              <p:cNvCxnSpPr>
+                <a:cxnSpLocks/>
+              </p:cNvCxnSpPr>
+              <p:nvPr/>
+            </p:nvCxnSpPr>
+            <p:spPr>
+              <a:xfrm>
+                <a:off x="8977428" y="-12798"/>
+                <a:ext cx="0" cy="7060019"/>
+              </a:xfrm>
+              <a:prstGeom prst="line">
+                <a:avLst/>
+              </a:prstGeom>
+              <a:ln>
+                <a:solidFill>
+                  <a:schemeClr val="tx1"/>
+                </a:solidFill>
+              </a:ln>
+            </p:spPr>
+            <p:style>
+              <a:lnRef idx="1">
+                <a:schemeClr val="accent1"/>
+              </a:lnRef>
+              <a:fillRef idx="0">
+                <a:schemeClr val="accent1"/>
+              </a:fillRef>
+              <a:effectRef idx="0">
+                <a:schemeClr val="accent1"/>
+              </a:effectRef>
+              <a:fontRef idx="minor">
+                <a:schemeClr val="tx1"/>
+              </a:fontRef>
+            </p:style>
+          </p:cxnSp>
+          <p:cxnSp>
+            <p:nvCxnSpPr>
+              <p:cNvPr id="30" name="Прямая соединительная линия 29">
+                <a:extLst>
+                  <a:ext uri="{FF2B5EF4-FFF2-40B4-BE49-F238E27FC236}">
+                    <a16:creationId xmlns:a16="http://schemas.microsoft.com/office/drawing/2014/main" id="{64DB25F9-7347-4751-961B-E6FEBE4F1600}"/>
+                  </a:ext>
+                </a:extLst>
+              </p:cNvPr>
+              <p:cNvCxnSpPr>
+                <a:cxnSpLocks/>
+              </p:cNvCxnSpPr>
+              <p:nvPr/>
+            </p:nvCxnSpPr>
+            <p:spPr>
+              <a:xfrm>
+                <a:off x="9693347" y="0"/>
+                <a:ext cx="0" cy="7060019"/>
+              </a:xfrm>
+              <a:prstGeom prst="line">
+                <a:avLst/>
+              </a:prstGeom>
+              <a:ln>
+                <a:solidFill>
+                  <a:schemeClr val="tx1"/>
+                </a:solidFill>
+              </a:ln>
+            </p:spPr>
+            <p:style>
+              <a:lnRef idx="1">
+                <a:schemeClr val="accent1"/>
+              </a:lnRef>
+              <a:fillRef idx="0">
+                <a:schemeClr val="accent1"/>
+              </a:fillRef>
+              <a:effectRef idx="0">
+                <a:schemeClr val="accent1"/>
+              </a:effectRef>
+              <a:fontRef idx="minor">
+                <a:schemeClr val="tx1"/>
+              </a:fontRef>
+            </p:style>
+          </p:cxnSp>
+          <p:cxnSp>
+            <p:nvCxnSpPr>
+              <p:cNvPr id="31" name="Прямая соединительная линия 30">
+                <a:extLst>
+                  <a:ext uri="{FF2B5EF4-FFF2-40B4-BE49-F238E27FC236}">
+                    <a16:creationId xmlns:a16="http://schemas.microsoft.com/office/drawing/2014/main" id="{E497B18E-A3B4-492E-98EC-EB5195E84BE0}"/>
+                  </a:ext>
+                </a:extLst>
+              </p:cNvPr>
+              <p:cNvCxnSpPr>
+                <a:cxnSpLocks/>
+              </p:cNvCxnSpPr>
+              <p:nvPr/>
+            </p:nvCxnSpPr>
+            <p:spPr>
+              <a:xfrm>
+                <a:off x="10416362" y="0"/>
+                <a:ext cx="0" cy="7060019"/>
+              </a:xfrm>
+              <a:prstGeom prst="line">
+                <a:avLst/>
+              </a:prstGeom>
+              <a:ln>
+                <a:solidFill>
+                  <a:schemeClr val="tx1"/>
+                </a:solidFill>
+              </a:ln>
+            </p:spPr>
+            <p:style>
+              <a:lnRef idx="1">
+                <a:schemeClr val="accent1"/>
+              </a:lnRef>
+              <a:fillRef idx="0">
+                <a:schemeClr val="accent1"/>
+              </a:fillRef>
+              <a:effectRef idx="0">
+                <a:schemeClr val="accent1"/>
+              </a:effectRef>
+              <a:fontRef idx="minor">
+                <a:schemeClr val="tx1"/>
+              </a:fontRef>
+            </p:style>
+          </p:cxnSp>
+          <p:cxnSp>
+            <p:nvCxnSpPr>
+              <p:cNvPr id="32" name="Прямая соединительная линия 31">
+                <a:extLst>
+                  <a:ext uri="{FF2B5EF4-FFF2-40B4-BE49-F238E27FC236}">
+                    <a16:creationId xmlns:a16="http://schemas.microsoft.com/office/drawing/2014/main" id="{9A209BAB-9A16-4C31-A951-28C1FF9C8C80}"/>
+                  </a:ext>
+                </a:extLst>
+              </p:cNvPr>
+              <p:cNvCxnSpPr>
+                <a:cxnSpLocks/>
+              </p:cNvCxnSpPr>
+              <p:nvPr/>
+            </p:nvCxnSpPr>
+            <p:spPr>
+              <a:xfrm>
+                <a:off x="11128743" y="0"/>
+                <a:ext cx="0" cy="7060019"/>
+              </a:xfrm>
+              <a:prstGeom prst="line">
+                <a:avLst/>
+              </a:prstGeom>
+              <a:ln>
+                <a:solidFill>
+                  <a:schemeClr val="tx1"/>
+                </a:solidFill>
+              </a:ln>
+            </p:spPr>
+            <p:style>
+              <a:lnRef idx="1">
+                <a:schemeClr val="accent1"/>
+              </a:lnRef>
+              <a:fillRef idx="0">
+                <a:schemeClr val="accent1"/>
+              </a:fillRef>
+              <a:effectRef idx="0">
+                <a:schemeClr val="accent1"/>
+              </a:effectRef>
+              <a:fontRef idx="minor">
+                <a:schemeClr val="tx1"/>
+              </a:fontRef>
+            </p:style>
+          </p:cxnSp>
+          <p:cxnSp>
+            <p:nvCxnSpPr>
+              <p:cNvPr id="33" name="Прямая соединительная линия 32">
+                <a:extLst>
+                  <a:ext uri="{FF2B5EF4-FFF2-40B4-BE49-F238E27FC236}">
+                    <a16:creationId xmlns:a16="http://schemas.microsoft.com/office/drawing/2014/main" id="{DF66F787-5F35-42BB-99A2-5599D69B2759}"/>
+                  </a:ext>
+                </a:extLst>
+              </p:cNvPr>
+              <p:cNvCxnSpPr>
+                <a:cxnSpLocks/>
+              </p:cNvCxnSpPr>
+              <p:nvPr/>
+            </p:nvCxnSpPr>
+            <p:spPr>
+              <a:xfrm>
+                <a:off x="11862644" y="0"/>
+                <a:ext cx="0" cy="7060019"/>
+              </a:xfrm>
+              <a:prstGeom prst="line">
+                <a:avLst/>
+              </a:prstGeom>
+              <a:ln>
+                <a:solidFill>
+                  <a:schemeClr val="tx1"/>
+                </a:solidFill>
+              </a:ln>
+            </p:spPr>
+            <p:style>
+              <a:lnRef idx="1">
+                <a:schemeClr val="accent1"/>
+              </a:lnRef>
+              <a:fillRef idx="0">
+                <a:schemeClr val="accent1"/>
+              </a:fillRef>
+              <a:effectRef idx="0">
+                <a:schemeClr val="accent1"/>
+              </a:effectRef>
+              <a:fontRef idx="minor">
+                <a:schemeClr val="tx1"/>
+              </a:fontRef>
+            </p:style>
+          </p:cxnSp>
+        </p:grpSp>
+        <p:cxnSp>
+          <p:nvCxnSpPr>
+            <p:cNvPr id="35" name="Прямая соединительная линия 34">
+              <a:extLst>
+                <a:ext uri="{FF2B5EF4-FFF2-40B4-BE49-F238E27FC236}">
+                  <a16:creationId xmlns:a16="http://schemas.microsoft.com/office/drawing/2014/main" id="{A5354744-6A8D-4078-A907-2FAD85E3AF28}"/>
+                </a:ext>
+              </a:extLst>
+            </p:cNvPr>
+            <p:cNvCxnSpPr/>
+            <p:nvPr/>
+          </p:nvCxnSpPr>
+          <p:spPr>
+            <a:xfrm>
+              <a:off x="0" y="2889247"/>
+              <a:ext cx="12596037" cy="0"/>
+            </a:xfrm>
+            <a:prstGeom prst="line">
+              <a:avLst/>
+            </a:prstGeom>
+            <a:ln>
+              <a:solidFill>
+                <a:schemeClr val="tx1"/>
+              </a:solidFill>
+            </a:ln>
+          </p:spPr>
+          <p:style>
+            <a:lnRef idx="1">
+              <a:schemeClr val="accent1"/>
+            </a:lnRef>
+            <a:fillRef idx="0">
+              <a:schemeClr val="accent1"/>
+            </a:fillRef>
+            <a:effectRef idx="0">
+              <a:schemeClr val="accent1"/>
+            </a:effectRef>
+            <a:fontRef idx="minor">
+              <a:schemeClr val="tx1"/>
+            </a:fontRef>
+          </p:style>
+        </p:cxnSp>
+      </p:grpSp>
+      <p:sp>
+        <p:nvSpPr>
+          <p:cNvPr id="41" name="Прямоугольник 40">
+            <a:extLst>
+              <a:ext uri="{FF2B5EF4-FFF2-40B4-BE49-F238E27FC236}">
+                <a16:creationId xmlns:a16="http://schemas.microsoft.com/office/drawing/2014/main" id="{A90786C7-3329-4CE7-B3B8-EE15002A4870}"/>
+              </a:ext>
+            </a:extLst>
+          </p:cNvPr>
+          <p:cNvSpPr/>
+          <p:nvPr/>
+        </p:nvSpPr>
+        <p:spPr>
+          <a:xfrm>
+            <a:off x="1446030" y="1467292"/>
+            <a:ext cx="9869864" cy="4910435"/>
+          </a:xfrm>
+          <a:custGeom>
+            <a:avLst/>
+            <a:gdLst>
+              <a:gd name="connsiteX0" fmla="*/ 0 w 9869864"/>
+              <a:gd name="connsiteY0" fmla="*/ 0 h 4910435"/>
+              <a:gd name="connsiteX1" fmla="*/ 9869864 w 9869864"/>
+              <a:gd name="connsiteY1" fmla="*/ 0 h 4910435"/>
+              <a:gd name="connsiteX2" fmla="*/ 9869864 w 9869864"/>
+              <a:gd name="connsiteY2" fmla="*/ 4910435 h 4910435"/>
+              <a:gd name="connsiteX3" fmla="*/ 0 w 9869864"/>
+              <a:gd name="connsiteY3" fmla="*/ 4910435 h 4910435"/>
+              <a:gd name="connsiteX4" fmla="*/ 0 w 9869864"/>
+              <a:gd name="connsiteY4" fmla="*/ 0 h 4910435"/>
+            </a:gdLst>
+            <a:ahLst/>
+            <a:cxnLst>
+              <a:cxn ang="0">
+                <a:pos x="connsiteX0" y="connsiteY0"/>
+              </a:cxn>
+              <a:cxn ang="0">
+                <a:pos x="connsiteX1" y="connsiteY1"/>
+              </a:cxn>
+              <a:cxn ang="0">
+                <a:pos x="connsiteX2" y="connsiteY2"/>
+              </a:cxn>
+              <a:cxn ang="0">
+                <a:pos x="connsiteX3" y="connsiteY3"/>
+              </a:cxn>
+              <a:cxn ang="0">
+                <a:pos x="connsiteX4" y="connsiteY4"/>
+              </a:cxn>
+            </a:cxnLst>
+            <a:rect l="l" t="t" r="r" b="b"/>
+            <a:pathLst>
+              <a:path w="9869864" h="4910435" fill="none" extrusionOk="0">
+                <a:moveTo>
+                  <a:pt x="0" y="0"/>
+                </a:moveTo>
+                <a:cubicBezTo>
+                  <a:pt x="3831520" y="-159440"/>
+                  <a:pt x="6605196" y="19408"/>
+                  <a:pt x="9869864" y="0"/>
+                </a:cubicBezTo>
+                <a:cubicBezTo>
+                  <a:pt x="10027904" y="1667649"/>
+                  <a:pt x="9863463" y="3186992"/>
+                  <a:pt x="9869864" y="4910435"/>
+                </a:cubicBezTo>
+                <a:cubicBezTo>
+                  <a:pt x="7396228" y="4824203"/>
+                  <a:pt x="3393268" y="4827133"/>
+                  <a:pt x="0" y="4910435"/>
+                </a:cubicBezTo>
+                <a:cubicBezTo>
+                  <a:pt x="-145898" y="3099276"/>
+                  <a:pt x="-24387" y="660950"/>
+                  <a:pt x="0" y="0"/>
+                </a:cubicBezTo>
+                <a:close/>
+              </a:path>
+              <a:path w="9869864" h="4910435" stroke="0" extrusionOk="0">
+                <a:moveTo>
+                  <a:pt x="0" y="0"/>
+                </a:moveTo>
+                <a:cubicBezTo>
+                  <a:pt x="4863626" y="112754"/>
+                  <a:pt x="7115958" y="-67146"/>
+                  <a:pt x="9869864" y="0"/>
+                </a:cubicBezTo>
+                <a:cubicBezTo>
+                  <a:pt x="9961230" y="1206123"/>
+                  <a:pt x="9875015" y="2657538"/>
+                  <a:pt x="9869864" y="4910435"/>
+                </a:cubicBezTo>
+                <a:cubicBezTo>
+                  <a:pt x="6129429" y="4982865"/>
+                  <a:pt x="4447473" y="4989383"/>
+                  <a:pt x="0" y="4910435"/>
+                </a:cubicBezTo>
+                <a:cubicBezTo>
+                  <a:pt x="77396" y="3204905"/>
+                  <a:pt x="15692" y="2262567"/>
+                  <a:pt x="0" y="0"/>
+                </a:cubicBezTo>
+                <a:close/>
+              </a:path>
+            </a:pathLst>
+          </a:custGeom>
+          <a:solidFill>
+            <a:schemeClr val="accent5">
+              <a:lumMod val="20000"/>
+              <a:lumOff val="80000"/>
+            </a:schemeClr>
+          </a:solidFill>
+          <a:ln>
+            <a:solidFill>
+              <a:schemeClr val="tx1"/>
+            </a:solidFill>
+            <a:extLst>
+              <a:ext uri="{C807C97D-BFC1-408E-A445-0C87EB9F89A2}">
+                <ask:lineSketchStyleProps xmlns:ask="http://schemas.microsoft.com/office/drawing/2018/sketchyshapes" sd="1336358556">
+                  <a:prstGeom prst="rect">
+                    <a:avLst/>
+                  </a:prstGeom>
+                  <ask:type>
+                    <ask:lineSketchCurved/>
+                  </ask:type>
+                </ask:lineSketchStyleProps>
+              </a:ext>
+            </a:extLst>
+          </a:ln>
+        </p:spPr>
+        <p:style>
+          <a:lnRef idx="2">
+            <a:schemeClr val="accent1">
+              <a:shade val="50000"/>
+            </a:schemeClr>
+          </a:lnRef>
+          <a:fillRef idx="1">
+            <a:schemeClr val="accent1"/>
+          </a:fillRef>
+          <a:effectRef idx="0">
+            <a:schemeClr val="accent1"/>
+          </a:effectRef>
+          <a:fontRef idx="minor">
+            <a:schemeClr val="lt1"/>
+          </a:fontRef>
+        </p:style>
+        <p:txBody>
+          <a:bodyPr rtlCol="0" anchor="ctr"/>
+          <a:lstStyle/>
+          <a:p>
+            <a:pPr algn="ctr"/>
+            <a:r>
+              <a:rPr sz="1400" b="1">
+                <a:solidFill>
+                  <a:srgbClr val="2F2F2F"/>
+                </a:solidFill>
+                <a:latin typeface="Century Gothic"/>
+              </a:rPr>
+              <a:t>Для чего это нужно</a:t>
+            </a:r>
+            <a:endParaRPr lang="ru-RU"/>
+          </a:p>
+          <a:p>
+            <a:r>
+              <a:rPr sz="1400" b="0">
+                <a:solidFill>
+                  <a:srgbClr val="2F2F2F"/>
+                </a:solidFill>
+                <a:latin typeface="Century Gothic"/>
+              </a:rPr>
+              <a:t>Не «галочка», а инструмент: инструкции и СИЗ; гарантии и компенсации (в т.ч. по приказу № 291н); медосмотры для профилактики профзаболеваний.</a:t>
+            </a:r>
+          </a:p>
+        </p:txBody>
+      </p:sp>
+      <p:sp>
+        <p:nvSpPr>
+          <p:cNvPr id="37" name="Прямоугольник 36">
+            <a:extLst>
+              <a:ext uri="{FF2B5EF4-FFF2-40B4-BE49-F238E27FC236}">
+                <a16:creationId xmlns:a16="http://schemas.microsoft.com/office/drawing/2014/main" id="{247A25D5-0201-4715-B299-1F1450E9A577}"/>
+              </a:ext>
+            </a:extLst>
+          </p:cNvPr>
+          <p:cNvSpPr/>
+          <p:nvPr/>
+        </p:nvSpPr>
+        <p:spPr>
+          <a:xfrm>
+            <a:off x="1161068" y="1179856"/>
+            <a:ext cx="9869864" cy="4910435"/>
+          </a:xfrm>
+          <a:custGeom>
+            <a:avLst/>
+            <a:gdLst>
+              <a:gd name="connsiteX0" fmla="*/ 0 w 9869864"/>
+              <a:gd name="connsiteY0" fmla="*/ 0 h 4910435"/>
+              <a:gd name="connsiteX1" fmla="*/ 9869864 w 9869864"/>
+              <a:gd name="connsiteY1" fmla="*/ 0 h 4910435"/>
+              <a:gd name="connsiteX2" fmla="*/ 9869864 w 9869864"/>
+              <a:gd name="connsiteY2" fmla="*/ 4910435 h 4910435"/>
+              <a:gd name="connsiteX3" fmla="*/ 0 w 9869864"/>
+              <a:gd name="connsiteY3" fmla="*/ 4910435 h 4910435"/>
+              <a:gd name="connsiteX4" fmla="*/ 0 w 9869864"/>
+              <a:gd name="connsiteY4" fmla="*/ 0 h 4910435"/>
+            </a:gdLst>
+            <a:ahLst/>
+            <a:cxnLst>
+              <a:cxn ang="0">
+                <a:pos x="connsiteX0" y="connsiteY0"/>
+              </a:cxn>
+              <a:cxn ang="0">
+                <a:pos x="connsiteX1" y="connsiteY1"/>
+              </a:cxn>
+              <a:cxn ang="0">
+                <a:pos x="connsiteX2" y="connsiteY2"/>
+              </a:cxn>
+              <a:cxn ang="0">
+                <a:pos x="connsiteX3" y="connsiteY3"/>
+              </a:cxn>
+              <a:cxn ang="0">
+                <a:pos x="connsiteX4" y="connsiteY4"/>
+              </a:cxn>
+            </a:cxnLst>
+            <a:rect l="l" t="t" r="r" b="b"/>
+            <a:pathLst>
+              <a:path w="9869864" h="4910435" fill="none" extrusionOk="0">
+                <a:moveTo>
+                  <a:pt x="0" y="0"/>
+                </a:moveTo>
+                <a:cubicBezTo>
+                  <a:pt x="3831520" y="-159440"/>
+                  <a:pt x="6605196" y="19408"/>
+                  <a:pt x="9869864" y="0"/>
+                </a:cubicBezTo>
+                <a:cubicBezTo>
+                  <a:pt x="10027904" y="1667649"/>
+                  <a:pt x="9863463" y="3186992"/>
+                  <a:pt x="9869864" y="4910435"/>
+                </a:cubicBezTo>
+                <a:cubicBezTo>
+                  <a:pt x="7396228" y="4824203"/>
+                  <a:pt x="3393268" y="4827133"/>
+                  <a:pt x="0" y="4910435"/>
+                </a:cubicBezTo>
+                <a:cubicBezTo>
+                  <a:pt x="-145898" y="3099276"/>
+                  <a:pt x="-24387" y="660950"/>
+                  <a:pt x="0" y="0"/>
+                </a:cubicBezTo>
+                <a:close/>
+              </a:path>
+              <a:path w="9869864" h="4910435" stroke="0" extrusionOk="0">
+                <a:moveTo>
+                  <a:pt x="0" y="0"/>
+                </a:moveTo>
+                <a:cubicBezTo>
+                  <a:pt x="4863626" y="112754"/>
+                  <a:pt x="7115958" y="-67146"/>
+                  <a:pt x="9869864" y="0"/>
+                </a:cubicBezTo>
+                <a:cubicBezTo>
+                  <a:pt x="9961230" y="1206123"/>
+                  <a:pt x="9875015" y="2657538"/>
+                  <a:pt x="9869864" y="4910435"/>
+                </a:cubicBezTo>
+                <a:cubicBezTo>
+                  <a:pt x="6129429" y="4982865"/>
+                  <a:pt x="4447473" y="4989383"/>
+                  <a:pt x="0" y="4910435"/>
+                </a:cubicBezTo>
+                <a:cubicBezTo>
+                  <a:pt x="77396" y="3204905"/>
+                  <a:pt x="15692" y="2262567"/>
+                  <a:pt x="0" y="0"/>
+                </a:cubicBezTo>
+                <a:close/>
+              </a:path>
+            </a:pathLst>
+          </a:custGeom>
+          <a:solidFill>
+            <a:srgbClr val="DAE3F3"/>
+          </a:solidFill>
+          <a:ln>
+            <a:solidFill>
+              <a:schemeClr val="tx1"/>
+            </a:solidFill>
+            <a:extLst>
+              <a:ext uri="{C807C97D-BFC1-408E-A445-0C87EB9F89A2}">
+                <ask:lineSketchStyleProps xmlns:ask="http://schemas.microsoft.com/office/drawing/2018/sketchyshapes" sd="1336358556">
+                  <a:prstGeom prst="rect">
+                    <a:avLst/>
+                  </a:prstGeom>
+                  <ask:type>
+                    <ask:lineSketchCurved/>
+                  </ask:type>
+                </ask:lineSketchStyleProps>
+              </a:ext>
+            </a:extLst>
+          </a:ln>
+        </p:spPr>
+        <p:style>
+          <a:lnRef idx="2">
+            <a:schemeClr val="accent1">
+              <a:shade val="50000"/>
+            </a:schemeClr>
+          </a:lnRef>
+          <a:fillRef idx="1">
+            <a:schemeClr val="accent1"/>
+          </a:fillRef>
+          <a:effectRef idx="0">
+            <a:schemeClr val="accent1"/>
+          </a:effectRef>
+          <a:fontRef idx="minor">
+            <a:schemeClr val="lt1"/>
+          </a:fontRef>
+        </p:style>
+        <p:txBody>
+          <a:bodyPr rtlCol="0" anchor="ctr"/>
+          <a:lstStyle/>
+          <a:p>
+            <a:pPr algn="ctr"/>
+            <a:r>
+              <a:rPr sz="1400" b="1">
+                <a:solidFill>
+                  <a:srgbClr val="2F2F2F"/>
+                </a:solidFill>
+                <a:latin typeface="Century Gothic"/>
+              </a:rPr>
+              <a:t>Как выявляют факторы: СОУТ</a:t>
+            </a:r>
+            <a:endParaRPr lang="ru-RU"/>
+          </a:p>
+          <a:p>
+            <a:r>
+              <a:rPr sz="1400" b="0">
+                <a:solidFill>
+                  <a:srgbClr val="2F2F2F"/>
+                </a:solidFill>
+                <a:latin typeface="Century Gothic"/>
+              </a:rPr>
+              <a:t>По ФЗ-426: идентификация факторов → исследования и измерения → установление класса условий труда (от оптимальных до опасных).</a:t>
+            </a:r>
+          </a:p>
+        </p:txBody>
+      </p:sp>
+      <p:sp>
+        <p:nvSpPr>
+          <p:cNvPr id="38" name="TextBox 37">
+            <a:extLst>
+              <a:ext uri="{FF2B5EF4-FFF2-40B4-BE49-F238E27FC236}">
+                <a16:creationId xmlns:a16="http://schemas.microsoft.com/office/drawing/2014/main" id="{4CD22F8E-6599-489D-96FD-D69217B29F3E}"/>
+              </a:ext>
+            </a:extLst>
+          </p:cNvPr>
+          <p:cNvSpPr txBox="1"/>
+          <p:nvPr/>
+        </p:nvSpPr>
+        <p:spPr>
+          <a:xfrm>
+            <a:off x="1653087" y="1483508"/>
+            <a:ext cx="8929852" cy="1123449"/>
+          </a:xfrm>
+          <a:prstGeom prst="rect">
+            <a:avLst/>
+          </a:prstGeom>
+          <a:noFill/>
+        </p:spPr>
+        <p:txBody>
+          <a:bodyPr wrap="square">
+            <a:spAutoFit/>
+          </a:bodyPr>
+          <a:lstStyle/>
+          <a:p>
+            <a:pPr>
+              <a:lnSpc>
+                <a:spcPct val="150000"/>
+              </a:lnSpc>
+              <a:spcAft>
+                <a:spcPts val="800"/>
+              </a:spcAft>
+            </a:pPr>
+            <a:endParaRPr lang="ru-RU" sz="1400" b="1" dirty="0">
+              <a:latin typeface="Century Gothic" panose="020B0502020202020204" pitchFamily="34" charset="0"/>
+              <a:ea typeface="Calibri" panose="020F0502020204030204" pitchFamily="34" charset="0"/>
+              <a:cs typeface="Times New Roman" panose="02020603050405020304" pitchFamily="18" charset="0"/>
+            </a:endParaRPr>
+          </a:p>
+        </p:txBody>
+      </p:sp>
+      <p:sp>
+        <p:nvSpPr>
+          <p:cNvPr id="39" name="TextBox 38">
+            <a:extLst>
+              <a:ext uri="{FF2B5EF4-FFF2-40B4-BE49-F238E27FC236}">
+                <a16:creationId xmlns:a16="http://schemas.microsoft.com/office/drawing/2014/main" id="{2AA3C534-9335-490D-8F1B-D1936FFFCB5F}"/>
+              </a:ext>
+            </a:extLst>
+          </p:cNvPr>
+          <p:cNvSpPr txBox="1"/>
+          <p:nvPr/>
+        </p:nvSpPr>
+        <p:spPr>
+          <a:xfrm>
+            <a:off x="1649736" y="2704561"/>
+            <a:ext cx="9063311" cy="1446614"/>
+          </a:xfrm>
+          <a:prstGeom prst="rect">
+            <a:avLst/>
+          </a:prstGeom>
+          <a:noFill/>
+        </p:spPr>
+        <p:txBody>
+          <a:bodyPr wrap="square">
+            <a:spAutoFit/>
+          </a:bodyPr>
+          <a:lstStyle/>
+          <a:p>
+            <a:pPr>
+              <a:lnSpc>
+                <a:spcPct val="150000"/>
+              </a:lnSpc>
+              <a:spcAft>
+                <a:spcPts val="800"/>
+              </a:spcAft>
+            </a:pPr>
+            <a:r>
+              <a:rPr sz="1400" b="1">
+                <a:solidFill>
+                  <a:srgbClr val="2F2F2F"/>
+                </a:solidFill>
+                <a:latin typeface="Century Gothic"/>
+              </a:rPr>
+              <a:t>Связь с управлением рисками</a:t>
+            </a:r>
+          </a:p>
+          <a:p>
+            <a:r>
+              <a:rPr sz="1400" b="0">
+                <a:solidFill>
+                  <a:srgbClr val="2F2F2F"/>
+                </a:solidFill>
+                <a:latin typeface="Century Gothic"/>
+              </a:rPr>
+              <a:t>Выявление опасностей, оценка рисков и разработка мер по их снижению опираются на результаты СОУТ и классификацию факторов.</a:t>
+            </a:r>
+          </a:p>
+        </p:txBody>
+      </p:sp>
+      <p:sp>
+        <p:nvSpPr>
+          <p:cNvPr id="40" name="TextBox 39">
+            <a:extLst>
+              <a:ext uri="{FF2B5EF4-FFF2-40B4-BE49-F238E27FC236}">
+                <a16:creationId xmlns:a16="http://schemas.microsoft.com/office/drawing/2014/main" id="{DBDFA73F-D516-43E7-B8A8-7D9F3D4D6189}"/>
+              </a:ext>
+            </a:extLst>
+          </p:cNvPr>
+          <p:cNvSpPr txBox="1"/>
+          <p:nvPr/>
+        </p:nvSpPr>
+        <p:spPr>
+          <a:xfrm>
+            <a:off x="1649736" y="4325119"/>
+            <a:ext cx="8933203" cy="1020857"/>
+          </a:xfrm>
+          <a:prstGeom prst="rect">
+            <a:avLst/>
+          </a:prstGeom>
+          <a:noFill/>
+        </p:spPr>
+        <p:txBody>
+          <a:bodyPr wrap="square">
+            <a:spAutoFit/>
+          </a:bodyPr>
+          <a:lstStyle/>
+          <a:p>
+            <a:pPr>
+              <a:lnSpc>
+                <a:spcPct val="150000"/>
+              </a:lnSpc>
+            </a:pPr>
+            <a:endParaRPr lang="en-US" sz="1400" b="1" i="0" dirty="0">
+              <a:effectLst/>
+              <a:latin typeface="Century Gothic" panose="020B0502020202020204" pitchFamily="34" charset="0"/>
+            </a:endParaRPr>
+          </a:p>
+        </p:txBody>
+      </p:sp>
+    </p:spTree>
+    <p:custDataLst>
+      <p:tags r:id="rId1"/>
+    </p:custDataLst>
+    <p:extLst>
+      <p:ext uri="{BB962C8B-B14F-4D97-AF65-F5344CB8AC3E}">
+        <p14:creationId xmlns:p14="http://schemas.microsoft.com/office/powerpoint/2010/main" val="683743847"/>
+      </p:ext>
+    </p:extLst>
+  </p:cSld>
+  <p:clrMapOvr>
+    <a:masterClrMapping/>
+  </p:clrMapOvr>
+</p:sld>
+</file>
+
+<file path=ppt/slides/slide7.xml><?xml version="1.0" encoding="utf-8"?>
 <p:sld xmlns:a="http://schemas.openxmlformats.org/drawingml/2006/main" xmlns:r="http://schemas.openxmlformats.org/officeDocument/2006/relationships" xmlns:p="http://schemas.openxmlformats.org/presentationml/2006/main">
   <p:cSld>
     <p:spTree>
@@ -15531,7 +15654,7 @@
                 </a:solidFill>
                 <a:latin typeface="Century Gothic"/>
               </a:rPr>
-              <a:t>Примеры</a:t>
+              <a:t>На что обратить внимание</a:t>
             </a:r>
             <a:endParaRPr lang="ru-RU"/>
           </a:p>
@@ -15543,7 +15666,7 @@
                 </a:solidFill>
                 <a:latin typeface="Century Gothic"/>
               </a:rPr>
-              <a:t>Опасные: пары растворителей, кислоты и щелочи. Вредные: угарный газ, сварочный аэрозоль, органические растворители, пыль (угольная, цементная).</a:t>
+              <a:t>Длительная работа сидя, нагрузка на зрение и нервную систему, неправильная организация рабочего места. Опасные факторы тоже возможны: электротравма, спотыкание, падение предметов, поражение при неисправной технике.</a:t>
             </a:r>
           </a:p>
         </p:txBody>
@@ -15702,7 +15825,7 @@
                 </a:solidFill>
                 <a:latin typeface="Century Gothic"/>
               </a:rPr>
-              <a:t>Химические и биологические факторы</a:t>
+              <a:t>Факторы, типичные для офиса</a:t>
             </a:r>
             <a:endParaRPr lang="ru-RU"/>
           </a:p>
@@ -15714,1709 +15837,7 @@
                 </a:solidFill>
                 <a:latin typeface="Century Gothic"/>
               </a:rPr>
-              <a:t>Химические вещества и смеси в воздухе и на коже; вещества биологической природы (антибиотики, витамины, гормоны, ферменты и др.). Пути: дыхание, кожа, ЖКТ.</a:t>
-            </a:r>
-          </a:p>
-        </p:txBody>
-      </p:sp>
-      <p:sp>
-        <p:nvSpPr>
-          <p:cNvPr id="42" name="TextBox 41">
-            <a:extLst>
-              <a:ext uri="{FF2B5EF4-FFF2-40B4-BE49-F238E27FC236}">
-                <a16:creationId xmlns:a16="http://schemas.microsoft.com/office/drawing/2014/main" id="{E393B0F4-C184-417F-9035-92EF3E107ED3}"/>
-              </a:ext>
-            </a:extLst>
-          </p:cNvPr>
-          <p:cNvSpPr txBox="1"/>
-          <p:nvPr/>
-        </p:nvSpPr>
-        <p:spPr>
-          <a:xfrm>
-            <a:off x="1665610" y="1467292"/>
-            <a:ext cx="8753605" cy="851580"/>
-          </a:xfrm>
-          <a:prstGeom prst="rect">
-            <a:avLst/>
-          </a:prstGeom>
-          <a:noFill/>
-        </p:spPr>
-        <p:txBody>
-          <a:bodyPr wrap="square">
-            <a:spAutoFit/>
-          </a:bodyPr>
-          <a:lstStyle/>
-          <a:p>
-            <a:pPr fontAlgn="base">
-              <a:lnSpc>
-                <a:spcPct val="150000"/>
-              </a:lnSpc>
-              <a:spcAft>
-                <a:spcPts val="1200"/>
-              </a:spcAft>
-            </a:pPr>
-            <a:endParaRPr lang="en-US" sz="1400" b="1" dirty="0">
-              <a:latin typeface="Century Gothic" panose="020B0502020202020204" pitchFamily="34" charset="0"/>
-              <a:ea typeface="Times New Roman" panose="02020603050405020304" pitchFamily="18" charset="0"/>
-            </a:endParaRPr>
-          </a:p>
-        </p:txBody>
-      </p:sp>
-      <p:sp>
-        <p:nvSpPr>
-          <p:cNvPr id="43" name="TextBox 42">
-            <a:extLst>
-              <a:ext uri="{FF2B5EF4-FFF2-40B4-BE49-F238E27FC236}">
-                <a16:creationId xmlns:a16="http://schemas.microsoft.com/office/drawing/2014/main" id="{0630E37F-2C87-4FDB-8FC5-870FFA1EDA19}"/>
-              </a:ext>
-            </a:extLst>
-          </p:cNvPr>
-          <p:cNvSpPr txBox="1"/>
-          <p:nvPr/>
-        </p:nvSpPr>
-        <p:spPr>
-          <a:xfrm>
-            <a:off x="1665610" y="2826543"/>
-            <a:ext cx="9133779" cy="1446614"/>
-          </a:xfrm>
-          <a:prstGeom prst="rect">
-            <a:avLst/>
-          </a:prstGeom>
-          <a:noFill/>
-        </p:spPr>
-        <p:txBody>
-          <a:bodyPr wrap="square">
-            <a:spAutoFit/>
-          </a:bodyPr>
-          <a:lstStyle/>
-          <a:p>
-            <a:pPr>
-              <a:lnSpc>
-                <a:spcPct val="150000"/>
-              </a:lnSpc>
-              <a:spcAft>
-                <a:spcPts val="800"/>
-              </a:spcAft>
-            </a:pPr>
-          </a:p>
-        </p:txBody>
-      </p:sp>
-    </p:spTree>
-    <p:custDataLst>
-      <p:tags r:id="rId1"/>
-    </p:custDataLst>
-    <p:extLst>
-      <p:ext uri="{BB962C8B-B14F-4D97-AF65-F5344CB8AC3E}">
-        <p14:creationId xmlns:p14="http://schemas.microsoft.com/office/powerpoint/2010/main" val="2275704587"/>
-      </p:ext>
-    </p:extLst>
-  </p:cSld>
-  <p:clrMapOvr>
-    <a:masterClrMapping/>
-  </p:clrMapOvr>
-</p:sld>
-</file>
-
-<file path=ppt/slides/slide7.xml><?xml version="1.0" encoding="utf-8"?>
-<p:sld xmlns:a="http://schemas.openxmlformats.org/drawingml/2006/main" xmlns:r="http://schemas.openxmlformats.org/officeDocument/2006/relationships" xmlns:p="http://schemas.openxmlformats.org/presentationml/2006/main">
-  <p:cSld>
-    <p:spTree>
-      <p:nvGrpSpPr>
-        <p:cNvPr id="1" name=""/>
-        <p:cNvGrpSpPr/>
-        <p:nvPr/>
-      </p:nvGrpSpPr>
-      <p:grpSpPr>
-        <a:xfrm>
-          <a:off x="0" y="0"/>
-          <a:ext cx="0" cy="0"/>
-          <a:chOff x="0" y="0"/>
-          <a:chExt cx="0" cy="0"/>
-        </a:xfrm>
-      </p:grpSpPr>
-      <p:grpSp>
-        <p:nvGrpSpPr>
-          <p:cNvPr id="36" name="Группа 35">
-            <a:extLst>
-              <a:ext uri="{FF2B5EF4-FFF2-40B4-BE49-F238E27FC236}">
-                <a16:creationId xmlns:a16="http://schemas.microsoft.com/office/drawing/2014/main" id="{7FF1FBDA-7EF8-4E32-B285-B9BF1A70F363}"/>
-              </a:ext>
-            </a:extLst>
-          </p:cNvPr>
-          <p:cNvGrpSpPr/>
-          <p:nvPr/>
-        </p:nvGrpSpPr>
-        <p:grpSpPr>
-          <a:xfrm>
-            <a:off x="0" y="-214817"/>
-            <a:ext cx="13248168" cy="7072817"/>
-            <a:chOff x="0" y="-4170772"/>
-            <a:chExt cx="13248168" cy="7072817"/>
-          </a:xfrm>
-        </p:grpSpPr>
-        <p:grpSp>
-          <p:nvGrpSpPr>
-            <p:cNvPr id="6" name="Группа 5">
-              <a:extLst>
-                <a:ext uri="{FF2B5EF4-FFF2-40B4-BE49-F238E27FC236}">
-                  <a16:creationId xmlns:a16="http://schemas.microsoft.com/office/drawing/2014/main" id="{D194E697-28B3-404D-8A29-F48E94BF6241}"/>
-                </a:ext>
-              </a:extLst>
-            </p:cNvPr>
-            <p:cNvGrpSpPr/>
-            <p:nvPr/>
-          </p:nvGrpSpPr>
-          <p:grpSpPr>
-            <a:xfrm>
-              <a:off x="0" y="-4170772"/>
-              <a:ext cx="13248168" cy="7072817"/>
-              <a:chOff x="-166577" y="-12798"/>
-              <a:chExt cx="13248168" cy="7072817"/>
-            </a:xfrm>
-          </p:grpSpPr>
-          <p:cxnSp>
-            <p:nvCxnSpPr>
-              <p:cNvPr id="7" name="Прямая соединительная линия 6">
-                <a:extLst>
-                  <a:ext uri="{FF2B5EF4-FFF2-40B4-BE49-F238E27FC236}">
-                    <a16:creationId xmlns:a16="http://schemas.microsoft.com/office/drawing/2014/main" id="{82C61482-8E50-4404-94EC-6B83D92F983D}"/>
-                  </a:ext>
-                </a:extLst>
-              </p:cNvPr>
-              <p:cNvCxnSpPr/>
-              <p:nvPr/>
-            </p:nvCxnSpPr>
-            <p:spPr>
-              <a:xfrm>
-                <a:off x="340242" y="202019"/>
-                <a:ext cx="0" cy="6858000"/>
-              </a:xfrm>
-              <a:prstGeom prst="line">
-                <a:avLst/>
-              </a:prstGeom>
-              <a:ln>
-                <a:solidFill>
-                  <a:schemeClr val="tx1"/>
-                </a:solidFill>
-              </a:ln>
-            </p:spPr>
-            <p:style>
-              <a:lnRef idx="1">
-                <a:schemeClr val="accent1"/>
-              </a:lnRef>
-              <a:fillRef idx="0">
-                <a:schemeClr val="accent1"/>
-              </a:fillRef>
-              <a:effectRef idx="0">
-                <a:schemeClr val="accent1"/>
-              </a:effectRef>
-              <a:fontRef idx="minor">
-                <a:schemeClr val="tx1"/>
-              </a:fontRef>
-            </p:style>
-          </p:cxnSp>
-          <p:cxnSp>
-            <p:nvCxnSpPr>
-              <p:cNvPr id="8" name="Прямая соединительная линия 7">
-                <a:extLst>
-                  <a:ext uri="{FF2B5EF4-FFF2-40B4-BE49-F238E27FC236}">
-                    <a16:creationId xmlns:a16="http://schemas.microsoft.com/office/drawing/2014/main" id="{79FD2ADB-6B7C-417E-8070-20B7AC7BEC87}"/>
-                  </a:ext>
-                </a:extLst>
-              </p:cNvPr>
-              <p:cNvCxnSpPr>
-                <a:cxnSpLocks/>
-              </p:cNvCxnSpPr>
-              <p:nvPr/>
-            </p:nvCxnSpPr>
-            <p:spPr>
-              <a:xfrm>
-                <a:off x="1063257" y="0"/>
-                <a:ext cx="0" cy="7060019"/>
-              </a:xfrm>
-              <a:prstGeom prst="line">
-                <a:avLst/>
-              </a:prstGeom>
-              <a:ln>
-                <a:solidFill>
-                  <a:schemeClr val="tx1"/>
-                </a:solidFill>
-              </a:ln>
-            </p:spPr>
-            <p:style>
-              <a:lnRef idx="1">
-                <a:schemeClr val="accent1"/>
-              </a:lnRef>
-              <a:fillRef idx="0">
-                <a:schemeClr val="accent1"/>
-              </a:fillRef>
-              <a:effectRef idx="0">
-                <a:schemeClr val="accent1"/>
-              </a:effectRef>
-              <a:fontRef idx="minor">
-                <a:schemeClr val="tx1"/>
-              </a:fontRef>
-            </p:style>
-          </p:cxnSp>
-          <p:cxnSp>
-            <p:nvCxnSpPr>
-              <p:cNvPr id="9" name="Прямая соединительная линия 8">
-                <a:extLst>
-                  <a:ext uri="{FF2B5EF4-FFF2-40B4-BE49-F238E27FC236}">
-                    <a16:creationId xmlns:a16="http://schemas.microsoft.com/office/drawing/2014/main" id="{742E3E11-256E-4150-8476-2708422F0F21}"/>
-                  </a:ext>
-                </a:extLst>
-              </p:cNvPr>
-              <p:cNvCxnSpPr>
-                <a:cxnSpLocks/>
-              </p:cNvCxnSpPr>
-              <p:nvPr/>
-            </p:nvCxnSpPr>
-            <p:spPr>
-              <a:xfrm>
-                <a:off x="1786271" y="0"/>
-                <a:ext cx="0" cy="7060019"/>
-              </a:xfrm>
-              <a:prstGeom prst="line">
-                <a:avLst/>
-              </a:prstGeom>
-              <a:ln>
-                <a:solidFill>
-                  <a:schemeClr val="tx1"/>
-                </a:solidFill>
-              </a:ln>
-            </p:spPr>
-            <p:style>
-              <a:lnRef idx="1">
-                <a:schemeClr val="accent1"/>
-              </a:lnRef>
-              <a:fillRef idx="0">
-                <a:schemeClr val="accent1"/>
-              </a:fillRef>
-              <a:effectRef idx="0">
-                <a:schemeClr val="accent1"/>
-              </a:effectRef>
-              <a:fontRef idx="minor">
-                <a:schemeClr val="tx1"/>
-              </a:fontRef>
-            </p:style>
-          </p:cxnSp>
-          <p:cxnSp>
-            <p:nvCxnSpPr>
-              <p:cNvPr id="10" name="Прямая соединительная линия 9">
-                <a:extLst>
-                  <a:ext uri="{FF2B5EF4-FFF2-40B4-BE49-F238E27FC236}">
-                    <a16:creationId xmlns:a16="http://schemas.microsoft.com/office/drawing/2014/main" id="{71A89E76-8A26-4714-A28B-178CFA97EAA9}"/>
-                  </a:ext>
-                </a:extLst>
-              </p:cNvPr>
-              <p:cNvCxnSpPr>
-                <a:cxnSpLocks/>
-              </p:cNvCxnSpPr>
-              <p:nvPr/>
-            </p:nvCxnSpPr>
-            <p:spPr>
-              <a:xfrm>
-                <a:off x="2498653" y="0"/>
-                <a:ext cx="0" cy="7060019"/>
-              </a:xfrm>
-              <a:prstGeom prst="line">
-                <a:avLst/>
-              </a:prstGeom>
-              <a:ln>
-                <a:solidFill>
-                  <a:schemeClr val="tx1"/>
-                </a:solidFill>
-              </a:ln>
-            </p:spPr>
-            <p:style>
-              <a:lnRef idx="1">
-                <a:schemeClr val="accent1"/>
-              </a:lnRef>
-              <a:fillRef idx="0">
-                <a:schemeClr val="accent1"/>
-              </a:fillRef>
-              <a:effectRef idx="0">
-                <a:schemeClr val="accent1"/>
-              </a:effectRef>
-              <a:fontRef idx="minor">
-                <a:schemeClr val="tx1"/>
-              </a:fontRef>
-            </p:style>
-          </p:cxnSp>
-          <p:cxnSp>
-            <p:nvCxnSpPr>
-              <p:cNvPr id="11" name="Прямая соединительная линия 10">
-                <a:extLst>
-                  <a:ext uri="{FF2B5EF4-FFF2-40B4-BE49-F238E27FC236}">
-                    <a16:creationId xmlns:a16="http://schemas.microsoft.com/office/drawing/2014/main" id="{35DE7A21-97FE-45D0-A8C3-5D5C44459CD8}"/>
-                  </a:ext>
-                </a:extLst>
-              </p:cNvPr>
-              <p:cNvCxnSpPr>
-                <a:cxnSpLocks/>
-              </p:cNvCxnSpPr>
-              <p:nvPr/>
-            </p:nvCxnSpPr>
-            <p:spPr>
-              <a:xfrm>
-                <a:off x="3211034" y="0"/>
-                <a:ext cx="0" cy="7060019"/>
-              </a:xfrm>
-              <a:prstGeom prst="line">
-                <a:avLst/>
-              </a:prstGeom>
-              <a:ln>
-                <a:solidFill>
-                  <a:schemeClr val="tx1"/>
-                </a:solidFill>
-              </a:ln>
-            </p:spPr>
-            <p:style>
-              <a:lnRef idx="1">
-                <a:schemeClr val="accent1"/>
-              </a:lnRef>
-              <a:fillRef idx="0">
-                <a:schemeClr val="accent1"/>
-              </a:fillRef>
-              <a:effectRef idx="0">
-                <a:schemeClr val="accent1"/>
-              </a:effectRef>
-              <a:fontRef idx="minor">
-                <a:schemeClr val="tx1"/>
-              </a:fontRef>
-            </p:style>
-          </p:cxnSp>
-          <p:cxnSp>
-            <p:nvCxnSpPr>
-              <p:cNvPr id="12" name="Прямая соединительная линия 11">
-                <a:extLst>
-                  <a:ext uri="{FF2B5EF4-FFF2-40B4-BE49-F238E27FC236}">
-                    <a16:creationId xmlns:a16="http://schemas.microsoft.com/office/drawing/2014/main" id="{2230EA40-BFDD-4F33-9739-A1F381E44FCA}"/>
-                  </a:ext>
-                </a:extLst>
-              </p:cNvPr>
-              <p:cNvCxnSpPr>
-                <a:cxnSpLocks/>
-              </p:cNvCxnSpPr>
-              <p:nvPr/>
-            </p:nvCxnSpPr>
-            <p:spPr>
-              <a:xfrm>
-                <a:off x="3934048" y="0"/>
-                <a:ext cx="0" cy="7060019"/>
-              </a:xfrm>
-              <a:prstGeom prst="line">
-                <a:avLst/>
-              </a:prstGeom>
-              <a:ln>
-                <a:solidFill>
-                  <a:schemeClr val="tx1"/>
-                </a:solidFill>
-              </a:ln>
-            </p:spPr>
-            <p:style>
-              <a:lnRef idx="1">
-                <a:schemeClr val="accent1"/>
-              </a:lnRef>
-              <a:fillRef idx="0">
-                <a:schemeClr val="accent1"/>
-              </a:fillRef>
-              <a:effectRef idx="0">
-                <a:schemeClr val="accent1"/>
-              </a:effectRef>
-              <a:fontRef idx="minor">
-                <a:schemeClr val="tx1"/>
-              </a:fontRef>
-            </p:style>
-          </p:cxnSp>
-          <p:cxnSp>
-            <p:nvCxnSpPr>
-              <p:cNvPr id="13" name="Прямая соединительная линия 12">
-                <a:extLst>
-                  <a:ext uri="{FF2B5EF4-FFF2-40B4-BE49-F238E27FC236}">
-                    <a16:creationId xmlns:a16="http://schemas.microsoft.com/office/drawing/2014/main" id="{A2F0D873-D58C-44BF-9302-3E5185DD141C}"/>
-                  </a:ext>
-                </a:extLst>
-              </p:cNvPr>
-              <p:cNvCxnSpPr>
-                <a:cxnSpLocks/>
-              </p:cNvCxnSpPr>
-              <p:nvPr/>
-            </p:nvCxnSpPr>
-            <p:spPr>
-              <a:xfrm flipH="1">
-                <a:off x="-95693" y="552893"/>
-                <a:ext cx="12525153" cy="0"/>
-              </a:xfrm>
-              <a:prstGeom prst="line">
-                <a:avLst/>
-              </a:prstGeom>
-              <a:ln>
-                <a:solidFill>
-                  <a:schemeClr val="tx1"/>
-                </a:solidFill>
-              </a:ln>
-            </p:spPr>
-            <p:style>
-              <a:lnRef idx="1">
-                <a:schemeClr val="accent1"/>
-              </a:lnRef>
-              <a:fillRef idx="0">
-                <a:schemeClr val="accent1"/>
-              </a:fillRef>
-              <a:effectRef idx="0">
-                <a:schemeClr val="accent1"/>
-              </a:effectRef>
-              <a:fontRef idx="minor">
-                <a:schemeClr val="tx1"/>
-              </a:fontRef>
-            </p:style>
-          </p:cxnSp>
-          <p:cxnSp>
-            <p:nvCxnSpPr>
-              <p:cNvPr id="14" name="Прямая соединительная линия 13">
-                <a:extLst>
-                  <a:ext uri="{FF2B5EF4-FFF2-40B4-BE49-F238E27FC236}">
-                    <a16:creationId xmlns:a16="http://schemas.microsoft.com/office/drawing/2014/main" id="{4B549B82-A1D8-4959-A4BA-6626F5C7E9EA}"/>
-                  </a:ext>
-                </a:extLst>
-              </p:cNvPr>
-              <p:cNvCxnSpPr>
-                <a:cxnSpLocks/>
-              </p:cNvCxnSpPr>
-              <p:nvPr/>
-            </p:nvCxnSpPr>
-            <p:spPr>
-              <a:xfrm flipH="1">
-                <a:off x="-166577" y="1265274"/>
-                <a:ext cx="12525153" cy="0"/>
-              </a:xfrm>
-              <a:prstGeom prst="line">
-                <a:avLst/>
-              </a:prstGeom>
-              <a:ln>
-                <a:solidFill>
-                  <a:schemeClr val="tx1"/>
-                </a:solidFill>
-              </a:ln>
-            </p:spPr>
-            <p:style>
-              <a:lnRef idx="1">
-                <a:schemeClr val="accent1"/>
-              </a:lnRef>
-              <a:fillRef idx="0">
-                <a:schemeClr val="accent1"/>
-              </a:fillRef>
-              <a:effectRef idx="0">
-                <a:schemeClr val="accent1"/>
-              </a:effectRef>
-              <a:fontRef idx="minor">
-                <a:schemeClr val="tx1"/>
-              </a:fontRef>
-            </p:style>
-          </p:cxnSp>
-          <p:cxnSp>
-            <p:nvCxnSpPr>
-              <p:cNvPr id="15" name="Прямая соединительная линия 14">
-                <a:extLst>
-                  <a:ext uri="{FF2B5EF4-FFF2-40B4-BE49-F238E27FC236}">
-                    <a16:creationId xmlns:a16="http://schemas.microsoft.com/office/drawing/2014/main" id="{7E902903-75AC-495E-92CC-0E6B41592315}"/>
-                  </a:ext>
-                </a:extLst>
-              </p:cNvPr>
-              <p:cNvCxnSpPr>
-                <a:cxnSpLocks/>
-              </p:cNvCxnSpPr>
-              <p:nvPr/>
-            </p:nvCxnSpPr>
-            <p:spPr>
-              <a:xfrm flipH="1">
-                <a:off x="-166577" y="1988287"/>
-                <a:ext cx="12525153" cy="0"/>
-              </a:xfrm>
-              <a:prstGeom prst="line">
-                <a:avLst/>
-              </a:prstGeom>
-              <a:ln>
-                <a:solidFill>
-                  <a:schemeClr val="tx1"/>
-                </a:solidFill>
-              </a:ln>
-            </p:spPr>
-            <p:style>
-              <a:lnRef idx="1">
-                <a:schemeClr val="accent1"/>
-              </a:lnRef>
-              <a:fillRef idx="0">
-                <a:schemeClr val="accent1"/>
-              </a:fillRef>
-              <a:effectRef idx="0">
-                <a:schemeClr val="accent1"/>
-              </a:effectRef>
-              <a:fontRef idx="minor">
-                <a:schemeClr val="tx1"/>
-              </a:fontRef>
-            </p:style>
-          </p:cxnSp>
-          <p:cxnSp>
-            <p:nvCxnSpPr>
-              <p:cNvPr id="16" name="Прямая соединительная линия 15">
-                <a:extLst>
-                  <a:ext uri="{FF2B5EF4-FFF2-40B4-BE49-F238E27FC236}">
-                    <a16:creationId xmlns:a16="http://schemas.microsoft.com/office/drawing/2014/main" id="{C10264B3-AA1B-4EDA-BFE4-9A014BE9E499}"/>
-                  </a:ext>
-                </a:extLst>
-              </p:cNvPr>
-              <p:cNvCxnSpPr>
-                <a:cxnSpLocks/>
-              </p:cNvCxnSpPr>
-              <p:nvPr/>
-            </p:nvCxnSpPr>
-            <p:spPr>
-              <a:xfrm flipH="1">
-                <a:off x="-166577" y="2711302"/>
-                <a:ext cx="12525153" cy="0"/>
-              </a:xfrm>
-              <a:prstGeom prst="line">
-                <a:avLst/>
-              </a:prstGeom>
-              <a:ln>
-                <a:solidFill>
-                  <a:schemeClr val="tx1"/>
-                </a:solidFill>
-              </a:ln>
-            </p:spPr>
-            <p:style>
-              <a:lnRef idx="1">
-                <a:schemeClr val="accent1"/>
-              </a:lnRef>
-              <a:fillRef idx="0">
-                <a:schemeClr val="accent1"/>
-              </a:fillRef>
-              <a:effectRef idx="0">
-                <a:schemeClr val="accent1"/>
-              </a:effectRef>
-              <a:fontRef idx="minor">
-                <a:schemeClr val="tx1"/>
-              </a:fontRef>
-            </p:style>
-          </p:cxnSp>
-          <p:cxnSp>
-            <p:nvCxnSpPr>
-              <p:cNvPr id="17" name="Прямая соединительная линия 16">
-                <a:extLst>
-                  <a:ext uri="{FF2B5EF4-FFF2-40B4-BE49-F238E27FC236}">
-                    <a16:creationId xmlns:a16="http://schemas.microsoft.com/office/drawing/2014/main" id="{7DB95352-4A59-44BD-9F84-7A56998CFE6C}"/>
-                  </a:ext>
-                </a:extLst>
-              </p:cNvPr>
-              <p:cNvCxnSpPr>
-                <a:cxnSpLocks/>
-              </p:cNvCxnSpPr>
-              <p:nvPr/>
-            </p:nvCxnSpPr>
-            <p:spPr>
-              <a:xfrm flipH="1">
-                <a:off x="-166577" y="3429000"/>
-                <a:ext cx="12525153" cy="0"/>
-              </a:xfrm>
-              <a:prstGeom prst="line">
-                <a:avLst/>
-              </a:prstGeom>
-              <a:ln>
-                <a:solidFill>
-                  <a:schemeClr val="tx1"/>
-                </a:solidFill>
-              </a:ln>
-            </p:spPr>
-            <p:style>
-              <a:lnRef idx="1">
-                <a:schemeClr val="accent1"/>
-              </a:lnRef>
-              <a:fillRef idx="0">
-                <a:schemeClr val="accent1"/>
-              </a:fillRef>
-              <a:effectRef idx="0">
-                <a:schemeClr val="accent1"/>
-              </a:effectRef>
-              <a:fontRef idx="minor">
-                <a:schemeClr val="tx1"/>
-              </a:fontRef>
-            </p:style>
-          </p:cxnSp>
-          <p:cxnSp>
-            <p:nvCxnSpPr>
-              <p:cNvPr id="18" name="Прямая соединительная линия 17">
-                <a:extLst>
-                  <a:ext uri="{FF2B5EF4-FFF2-40B4-BE49-F238E27FC236}">
-                    <a16:creationId xmlns:a16="http://schemas.microsoft.com/office/drawing/2014/main" id="{B374052C-54F7-4119-BB4C-01EBB5D6B2F6}"/>
-                  </a:ext>
-                </a:extLst>
-              </p:cNvPr>
-              <p:cNvCxnSpPr>
-                <a:cxnSpLocks/>
-              </p:cNvCxnSpPr>
-              <p:nvPr/>
-            </p:nvCxnSpPr>
-            <p:spPr>
-              <a:xfrm flipH="1">
-                <a:off x="-166577" y="4152013"/>
-                <a:ext cx="12525153" cy="0"/>
-              </a:xfrm>
-              <a:prstGeom prst="line">
-                <a:avLst/>
-              </a:prstGeom>
-              <a:ln>
-                <a:solidFill>
-                  <a:schemeClr val="tx1"/>
-                </a:solidFill>
-              </a:ln>
-            </p:spPr>
-            <p:style>
-              <a:lnRef idx="1">
-                <a:schemeClr val="accent1"/>
-              </a:lnRef>
-              <a:fillRef idx="0">
-                <a:schemeClr val="accent1"/>
-              </a:fillRef>
-              <a:effectRef idx="0">
-                <a:schemeClr val="accent1"/>
-              </a:effectRef>
-              <a:fontRef idx="minor">
-                <a:schemeClr val="tx1"/>
-              </a:fontRef>
-            </p:style>
-          </p:cxnSp>
-          <p:cxnSp>
-            <p:nvCxnSpPr>
-              <p:cNvPr id="19" name="Прямая соединительная линия 18">
-                <a:extLst>
-                  <a:ext uri="{FF2B5EF4-FFF2-40B4-BE49-F238E27FC236}">
-                    <a16:creationId xmlns:a16="http://schemas.microsoft.com/office/drawing/2014/main" id="{A0FD0A9A-69F9-4170-BA94-3846FED025DA}"/>
-                  </a:ext>
-                </a:extLst>
-              </p:cNvPr>
-              <p:cNvCxnSpPr>
-                <a:cxnSpLocks/>
-              </p:cNvCxnSpPr>
-              <p:nvPr/>
-            </p:nvCxnSpPr>
-            <p:spPr>
-              <a:xfrm flipH="1">
-                <a:off x="-166577" y="4875027"/>
-                <a:ext cx="12525153" cy="0"/>
-              </a:xfrm>
-              <a:prstGeom prst="line">
-                <a:avLst/>
-              </a:prstGeom>
-              <a:ln>
-                <a:solidFill>
-                  <a:schemeClr val="tx1"/>
-                </a:solidFill>
-              </a:ln>
-            </p:spPr>
-            <p:style>
-              <a:lnRef idx="1">
-                <a:schemeClr val="accent1"/>
-              </a:lnRef>
-              <a:fillRef idx="0">
-                <a:schemeClr val="accent1"/>
-              </a:fillRef>
-              <a:effectRef idx="0">
-                <a:schemeClr val="accent1"/>
-              </a:effectRef>
-              <a:fontRef idx="minor">
-                <a:schemeClr val="tx1"/>
-              </a:fontRef>
-            </p:style>
-          </p:cxnSp>
-          <p:cxnSp>
-            <p:nvCxnSpPr>
-              <p:cNvPr id="20" name="Прямая соединительная линия 19">
-                <a:extLst>
-                  <a:ext uri="{FF2B5EF4-FFF2-40B4-BE49-F238E27FC236}">
-                    <a16:creationId xmlns:a16="http://schemas.microsoft.com/office/drawing/2014/main" id="{C7407EBB-B386-401C-9331-199FBF6114CE}"/>
-                  </a:ext>
-                </a:extLst>
-              </p:cNvPr>
-              <p:cNvCxnSpPr>
-                <a:cxnSpLocks/>
-              </p:cNvCxnSpPr>
-              <p:nvPr/>
-            </p:nvCxnSpPr>
-            <p:spPr>
-              <a:xfrm flipH="1">
-                <a:off x="-166577" y="5592726"/>
-                <a:ext cx="12525153" cy="0"/>
-              </a:xfrm>
-              <a:prstGeom prst="line">
-                <a:avLst/>
-              </a:prstGeom>
-              <a:ln>
-                <a:solidFill>
-                  <a:schemeClr val="tx1"/>
-                </a:solidFill>
-              </a:ln>
-            </p:spPr>
-            <p:style>
-              <a:lnRef idx="1">
-                <a:schemeClr val="accent1"/>
-              </a:lnRef>
-              <a:fillRef idx="0">
-                <a:schemeClr val="accent1"/>
-              </a:fillRef>
-              <a:effectRef idx="0">
-                <a:schemeClr val="accent1"/>
-              </a:effectRef>
-              <a:fontRef idx="minor">
-                <a:schemeClr val="tx1"/>
-              </a:fontRef>
-            </p:style>
-          </p:cxnSp>
-          <p:cxnSp>
-            <p:nvCxnSpPr>
-              <p:cNvPr id="21" name="Прямая соединительная линия 20">
-                <a:extLst>
-                  <a:ext uri="{FF2B5EF4-FFF2-40B4-BE49-F238E27FC236}">
-                    <a16:creationId xmlns:a16="http://schemas.microsoft.com/office/drawing/2014/main" id="{5A00AFAC-24D0-4772-B007-1F6D4801E061}"/>
-                  </a:ext>
-                </a:extLst>
-              </p:cNvPr>
-              <p:cNvCxnSpPr>
-                <a:cxnSpLocks/>
-              </p:cNvCxnSpPr>
-              <p:nvPr/>
-            </p:nvCxnSpPr>
-            <p:spPr>
-              <a:xfrm flipH="1">
-                <a:off x="-166577" y="6305107"/>
-                <a:ext cx="12525153" cy="0"/>
-              </a:xfrm>
-              <a:prstGeom prst="line">
-                <a:avLst/>
-              </a:prstGeom>
-              <a:ln>
-                <a:solidFill>
-                  <a:schemeClr val="tx1"/>
-                </a:solidFill>
-              </a:ln>
-            </p:spPr>
-            <p:style>
-              <a:lnRef idx="1">
-                <a:schemeClr val="accent1"/>
-              </a:lnRef>
-              <a:fillRef idx="0">
-                <a:schemeClr val="accent1"/>
-              </a:fillRef>
-              <a:effectRef idx="0">
-                <a:schemeClr val="accent1"/>
-              </a:effectRef>
-              <a:fontRef idx="minor">
-                <a:schemeClr val="tx1"/>
-              </a:fontRef>
-            </p:style>
-          </p:cxnSp>
-          <p:cxnSp>
-            <p:nvCxnSpPr>
-              <p:cNvPr id="22" name="Прямая соединительная линия 21">
-                <a:extLst>
-                  <a:ext uri="{FF2B5EF4-FFF2-40B4-BE49-F238E27FC236}">
-                    <a16:creationId xmlns:a16="http://schemas.microsoft.com/office/drawing/2014/main" id="{C92C6CD4-7D64-4358-88EB-42B20046AA6C}"/>
-                  </a:ext>
-                </a:extLst>
-              </p:cNvPr>
-              <p:cNvCxnSpPr>
-                <a:cxnSpLocks/>
-              </p:cNvCxnSpPr>
-              <p:nvPr/>
-            </p:nvCxnSpPr>
-            <p:spPr>
-              <a:xfrm>
-                <a:off x="4657063" y="0"/>
-                <a:ext cx="0" cy="7060019"/>
-              </a:xfrm>
-              <a:prstGeom prst="line">
-                <a:avLst/>
-              </a:prstGeom>
-              <a:ln>
-                <a:solidFill>
-                  <a:schemeClr val="tx1"/>
-                </a:solidFill>
-              </a:ln>
-            </p:spPr>
-            <p:style>
-              <a:lnRef idx="1">
-                <a:schemeClr val="accent1"/>
-              </a:lnRef>
-              <a:fillRef idx="0">
-                <a:schemeClr val="accent1"/>
-              </a:fillRef>
-              <a:effectRef idx="0">
-                <a:schemeClr val="accent1"/>
-              </a:effectRef>
-              <a:fontRef idx="minor">
-                <a:schemeClr val="tx1"/>
-              </a:fontRef>
-            </p:style>
-          </p:cxnSp>
-          <p:cxnSp>
-            <p:nvCxnSpPr>
-              <p:cNvPr id="23" name="Прямая соединительная линия 22">
-                <a:extLst>
-                  <a:ext uri="{FF2B5EF4-FFF2-40B4-BE49-F238E27FC236}">
-                    <a16:creationId xmlns:a16="http://schemas.microsoft.com/office/drawing/2014/main" id="{DBCB635D-5CCB-48A9-8D29-8AEA9C51BED5}"/>
-                  </a:ext>
-                </a:extLst>
-              </p:cNvPr>
-              <p:cNvCxnSpPr>
-                <a:cxnSpLocks/>
-              </p:cNvCxnSpPr>
-              <p:nvPr/>
-            </p:nvCxnSpPr>
-            <p:spPr>
-              <a:xfrm flipH="1">
-                <a:off x="556438" y="6305107"/>
-                <a:ext cx="12525153" cy="0"/>
-              </a:xfrm>
-              <a:prstGeom prst="line">
-                <a:avLst/>
-              </a:prstGeom>
-              <a:ln>
-                <a:solidFill>
-                  <a:schemeClr val="tx1"/>
-                </a:solidFill>
-              </a:ln>
-            </p:spPr>
-            <p:style>
-              <a:lnRef idx="1">
-                <a:schemeClr val="accent1"/>
-              </a:lnRef>
-              <a:fillRef idx="0">
-                <a:schemeClr val="accent1"/>
-              </a:fillRef>
-              <a:effectRef idx="0">
-                <a:schemeClr val="accent1"/>
-              </a:effectRef>
-              <a:fontRef idx="minor">
-                <a:schemeClr val="tx1"/>
-              </a:fontRef>
-            </p:style>
-          </p:cxnSp>
-          <p:cxnSp>
-            <p:nvCxnSpPr>
-              <p:cNvPr id="24" name="Прямая соединительная линия 23">
-                <a:extLst>
-                  <a:ext uri="{FF2B5EF4-FFF2-40B4-BE49-F238E27FC236}">
-                    <a16:creationId xmlns:a16="http://schemas.microsoft.com/office/drawing/2014/main" id="{A6FC8F23-5AE0-4FDB-B2BB-E6D3E8F266DE}"/>
-                  </a:ext>
-                </a:extLst>
-              </p:cNvPr>
-              <p:cNvCxnSpPr>
-                <a:cxnSpLocks/>
-              </p:cNvCxnSpPr>
-              <p:nvPr/>
-            </p:nvCxnSpPr>
-            <p:spPr>
-              <a:xfrm>
-                <a:off x="5380077" y="0"/>
-                <a:ext cx="0" cy="7060019"/>
-              </a:xfrm>
-              <a:prstGeom prst="line">
-                <a:avLst/>
-              </a:prstGeom>
-              <a:ln>
-                <a:solidFill>
-                  <a:schemeClr val="tx1"/>
-                </a:solidFill>
-              </a:ln>
-            </p:spPr>
-            <p:style>
-              <a:lnRef idx="1">
-                <a:schemeClr val="accent1"/>
-              </a:lnRef>
-              <a:fillRef idx="0">
-                <a:schemeClr val="accent1"/>
-              </a:fillRef>
-              <a:effectRef idx="0">
-                <a:schemeClr val="accent1"/>
-              </a:effectRef>
-              <a:fontRef idx="minor">
-                <a:schemeClr val="tx1"/>
-              </a:fontRef>
-            </p:style>
-          </p:cxnSp>
-          <p:cxnSp>
-            <p:nvCxnSpPr>
-              <p:cNvPr id="25" name="Прямая соединительная линия 24">
-                <a:extLst>
-                  <a:ext uri="{FF2B5EF4-FFF2-40B4-BE49-F238E27FC236}">
-                    <a16:creationId xmlns:a16="http://schemas.microsoft.com/office/drawing/2014/main" id="{F478A673-FAA0-40F7-9553-BE69EB96603E}"/>
-                  </a:ext>
-                </a:extLst>
-              </p:cNvPr>
-              <p:cNvCxnSpPr>
-                <a:cxnSpLocks/>
-              </p:cNvCxnSpPr>
-              <p:nvPr/>
-            </p:nvCxnSpPr>
-            <p:spPr>
-              <a:xfrm>
-                <a:off x="6096003" y="0"/>
-                <a:ext cx="0" cy="7060019"/>
-              </a:xfrm>
-              <a:prstGeom prst="line">
-                <a:avLst/>
-              </a:prstGeom>
-              <a:ln>
-                <a:solidFill>
-                  <a:schemeClr val="tx1"/>
-                </a:solidFill>
-              </a:ln>
-            </p:spPr>
-            <p:style>
-              <a:lnRef idx="1">
-                <a:schemeClr val="accent1"/>
-              </a:lnRef>
-              <a:fillRef idx="0">
-                <a:schemeClr val="accent1"/>
-              </a:fillRef>
-              <a:effectRef idx="0">
-                <a:schemeClr val="accent1"/>
-              </a:effectRef>
-              <a:fontRef idx="minor">
-                <a:schemeClr val="tx1"/>
-              </a:fontRef>
-            </p:style>
-          </p:cxnSp>
-          <p:cxnSp>
-            <p:nvCxnSpPr>
-              <p:cNvPr id="26" name="Прямая соединительная линия 25">
-                <a:extLst>
-                  <a:ext uri="{FF2B5EF4-FFF2-40B4-BE49-F238E27FC236}">
-                    <a16:creationId xmlns:a16="http://schemas.microsoft.com/office/drawing/2014/main" id="{632D97B2-5B41-4725-8BED-1BB84D9049A3}"/>
-                  </a:ext>
-                </a:extLst>
-              </p:cNvPr>
-              <p:cNvCxnSpPr>
-                <a:cxnSpLocks/>
-              </p:cNvCxnSpPr>
-              <p:nvPr/>
-            </p:nvCxnSpPr>
-            <p:spPr>
-              <a:xfrm>
-                <a:off x="6819014" y="-12795"/>
-                <a:ext cx="0" cy="7060019"/>
-              </a:xfrm>
-              <a:prstGeom prst="line">
-                <a:avLst/>
-              </a:prstGeom>
-              <a:ln>
-                <a:solidFill>
-                  <a:schemeClr val="tx1"/>
-                </a:solidFill>
-              </a:ln>
-            </p:spPr>
-            <p:style>
-              <a:lnRef idx="1">
-                <a:schemeClr val="accent1"/>
-              </a:lnRef>
-              <a:fillRef idx="0">
-                <a:schemeClr val="accent1"/>
-              </a:fillRef>
-              <a:effectRef idx="0">
-                <a:schemeClr val="accent1"/>
-              </a:effectRef>
-              <a:fontRef idx="minor">
-                <a:schemeClr val="tx1"/>
-              </a:fontRef>
-            </p:style>
-          </p:cxnSp>
-          <p:cxnSp>
-            <p:nvCxnSpPr>
-              <p:cNvPr id="27" name="Прямая соединительная линия 26">
-                <a:extLst>
-                  <a:ext uri="{FF2B5EF4-FFF2-40B4-BE49-F238E27FC236}">
-                    <a16:creationId xmlns:a16="http://schemas.microsoft.com/office/drawing/2014/main" id="{0096069A-E1F5-484F-9AD5-E590F3AFB8C1}"/>
-                  </a:ext>
-                </a:extLst>
-              </p:cNvPr>
-              <p:cNvCxnSpPr>
-                <a:cxnSpLocks/>
-              </p:cNvCxnSpPr>
-              <p:nvPr/>
-            </p:nvCxnSpPr>
-            <p:spPr>
-              <a:xfrm>
-                <a:off x="7542032" y="-12796"/>
-                <a:ext cx="0" cy="7060019"/>
-              </a:xfrm>
-              <a:prstGeom prst="line">
-                <a:avLst/>
-              </a:prstGeom>
-              <a:ln>
-                <a:solidFill>
-                  <a:schemeClr val="tx1"/>
-                </a:solidFill>
-              </a:ln>
-            </p:spPr>
-            <p:style>
-              <a:lnRef idx="1">
-                <a:schemeClr val="accent1"/>
-              </a:lnRef>
-              <a:fillRef idx="0">
-                <a:schemeClr val="accent1"/>
-              </a:fillRef>
-              <a:effectRef idx="0">
-                <a:schemeClr val="accent1"/>
-              </a:effectRef>
-              <a:fontRef idx="minor">
-                <a:schemeClr val="tx1"/>
-              </a:fontRef>
-            </p:style>
-          </p:cxnSp>
-          <p:cxnSp>
-            <p:nvCxnSpPr>
-              <p:cNvPr id="28" name="Прямая соединительная линия 27">
-                <a:extLst>
-                  <a:ext uri="{FF2B5EF4-FFF2-40B4-BE49-F238E27FC236}">
-                    <a16:creationId xmlns:a16="http://schemas.microsoft.com/office/drawing/2014/main" id="{CD8CFF4F-9474-44E2-8483-EE501133D094}"/>
-                  </a:ext>
-                </a:extLst>
-              </p:cNvPr>
-              <p:cNvCxnSpPr>
-                <a:cxnSpLocks/>
-              </p:cNvCxnSpPr>
-              <p:nvPr/>
-            </p:nvCxnSpPr>
-            <p:spPr>
-              <a:xfrm>
-                <a:off x="8265045" y="-12797"/>
-                <a:ext cx="0" cy="7060019"/>
-              </a:xfrm>
-              <a:prstGeom prst="line">
-                <a:avLst/>
-              </a:prstGeom>
-              <a:ln>
-                <a:solidFill>
-                  <a:schemeClr val="tx1"/>
-                </a:solidFill>
-              </a:ln>
-            </p:spPr>
-            <p:style>
-              <a:lnRef idx="1">
-                <a:schemeClr val="accent1"/>
-              </a:lnRef>
-              <a:fillRef idx="0">
-                <a:schemeClr val="accent1"/>
-              </a:fillRef>
-              <a:effectRef idx="0">
-                <a:schemeClr val="accent1"/>
-              </a:effectRef>
-              <a:fontRef idx="minor">
-                <a:schemeClr val="tx1"/>
-              </a:fontRef>
-            </p:style>
-          </p:cxnSp>
-          <p:cxnSp>
-            <p:nvCxnSpPr>
-              <p:cNvPr id="29" name="Прямая соединительная линия 28">
-                <a:extLst>
-                  <a:ext uri="{FF2B5EF4-FFF2-40B4-BE49-F238E27FC236}">
-                    <a16:creationId xmlns:a16="http://schemas.microsoft.com/office/drawing/2014/main" id="{CA573EE6-F195-44AF-9C78-7860BF4CC13C}"/>
-                  </a:ext>
-                </a:extLst>
-              </p:cNvPr>
-              <p:cNvCxnSpPr>
-                <a:cxnSpLocks/>
-              </p:cNvCxnSpPr>
-              <p:nvPr/>
-            </p:nvCxnSpPr>
-            <p:spPr>
-              <a:xfrm>
-                <a:off x="8977428" y="-12798"/>
-                <a:ext cx="0" cy="7060019"/>
-              </a:xfrm>
-              <a:prstGeom prst="line">
-                <a:avLst/>
-              </a:prstGeom>
-              <a:ln>
-                <a:solidFill>
-                  <a:schemeClr val="tx1"/>
-                </a:solidFill>
-              </a:ln>
-            </p:spPr>
-            <p:style>
-              <a:lnRef idx="1">
-                <a:schemeClr val="accent1"/>
-              </a:lnRef>
-              <a:fillRef idx="0">
-                <a:schemeClr val="accent1"/>
-              </a:fillRef>
-              <a:effectRef idx="0">
-                <a:schemeClr val="accent1"/>
-              </a:effectRef>
-              <a:fontRef idx="minor">
-                <a:schemeClr val="tx1"/>
-              </a:fontRef>
-            </p:style>
-          </p:cxnSp>
-          <p:cxnSp>
-            <p:nvCxnSpPr>
-              <p:cNvPr id="30" name="Прямая соединительная линия 29">
-                <a:extLst>
-                  <a:ext uri="{FF2B5EF4-FFF2-40B4-BE49-F238E27FC236}">
-                    <a16:creationId xmlns:a16="http://schemas.microsoft.com/office/drawing/2014/main" id="{64DB25F9-7347-4751-961B-E6FEBE4F1600}"/>
-                  </a:ext>
-                </a:extLst>
-              </p:cNvPr>
-              <p:cNvCxnSpPr>
-                <a:cxnSpLocks/>
-              </p:cNvCxnSpPr>
-              <p:nvPr/>
-            </p:nvCxnSpPr>
-            <p:spPr>
-              <a:xfrm>
-                <a:off x="9693347" y="0"/>
-                <a:ext cx="0" cy="7060019"/>
-              </a:xfrm>
-              <a:prstGeom prst="line">
-                <a:avLst/>
-              </a:prstGeom>
-              <a:ln>
-                <a:solidFill>
-                  <a:schemeClr val="tx1"/>
-                </a:solidFill>
-              </a:ln>
-            </p:spPr>
-            <p:style>
-              <a:lnRef idx="1">
-                <a:schemeClr val="accent1"/>
-              </a:lnRef>
-              <a:fillRef idx="0">
-                <a:schemeClr val="accent1"/>
-              </a:fillRef>
-              <a:effectRef idx="0">
-                <a:schemeClr val="accent1"/>
-              </a:effectRef>
-              <a:fontRef idx="minor">
-                <a:schemeClr val="tx1"/>
-              </a:fontRef>
-            </p:style>
-          </p:cxnSp>
-          <p:cxnSp>
-            <p:nvCxnSpPr>
-              <p:cNvPr id="31" name="Прямая соединительная линия 30">
-                <a:extLst>
-                  <a:ext uri="{FF2B5EF4-FFF2-40B4-BE49-F238E27FC236}">
-                    <a16:creationId xmlns:a16="http://schemas.microsoft.com/office/drawing/2014/main" id="{E497B18E-A3B4-492E-98EC-EB5195E84BE0}"/>
-                  </a:ext>
-                </a:extLst>
-              </p:cNvPr>
-              <p:cNvCxnSpPr>
-                <a:cxnSpLocks/>
-              </p:cNvCxnSpPr>
-              <p:nvPr/>
-            </p:nvCxnSpPr>
-            <p:spPr>
-              <a:xfrm>
-                <a:off x="10416362" y="0"/>
-                <a:ext cx="0" cy="7060019"/>
-              </a:xfrm>
-              <a:prstGeom prst="line">
-                <a:avLst/>
-              </a:prstGeom>
-              <a:ln>
-                <a:solidFill>
-                  <a:schemeClr val="tx1"/>
-                </a:solidFill>
-              </a:ln>
-            </p:spPr>
-            <p:style>
-              <a:lnRef idx="1">
-                <a:schemeClr val="accent1"/>
-              </a:lnRef>
-              <a:fillRef idx="0">
-                <a:schemeClr val="accent1"/>
-              </a:fillRef>
-              <a:effectRef idx="0">
-                <a:schemeClr val="accent1"/>
-              </a:effectRef>
-              <a:fontRef idx="minor">
-                <a:schemeClr val="tx1"/>
-              </a:fontRef>
-            </p:style>
-          </p:cxnSp>
-          <p:cxnSp>
-            <p:nvCxnSpPr>
-              <p:cNvPr id="32" name="Прямая соединительная линия 31">
-                <a:extLst>
-                  <a:ext uri="{FF2B5EF4-FFF2-40B4-BE49-F238E27FC236}">
-                    <a16:creationId xmlns:a16="http://schemas.microsoft.com/office/drawing/2014/main" id="{9A209BAB-9A16-4C31-A951-28C1FF9C8C80}"/>
-                  </a:ext>
-                </a:extLst>
-              </p:cNvPr>
-              <p:cNvCxnSpPr>
-                <a:cxnSpLocks/>
-              </p:cNvCxnSpPr>
-              <p:nvPr/>
-            </p:nvCxnSpPr>
-            <p:spPr>
-              <a:xfrm>
-                <a:off x="11128743" y="0"/>
-                <a:ext cx="0" cy="7060019"/>
-              </a:xfrm>
-              <a:prstGeom prst="line">
-                <a:avLst/>
-              </a:prstGeom>
-              <a:ln>
-                <a:solidFill>
-                  <a:schemeClr val="tx1"/>
-                </a:solidFill>
-              </a:ln>
-            </p:spPr>
-            <p:style>
-              <a:lnRef idx="1">
-                <a:schemeClr val="accent1"/>
-              </a:lnRef>
-              <a:fillRef idx="0">
-                <a:schemeClr val="accent1"/>
-              </a:fillRef>
-              <a:effectRef idx="0">
-                <a:schemeClr val="accent1"/>
-              </a:effectRef>
-              <a:fontRef idx="minor">
-                <a:schemeClr val="tx1"/>
-              </a:fontRef>
-            </p:style>
-          </p:cxnSp>
-          <p:cxnSp>
-            <p:nvCxnSpPr>
-              <p:cNvPr id="33" name="Прямая соединительная линия 32">
-                <a:extLst>
-                  <a:ext uri="{FF2B5EF4-FFF2-40B4-BE49-F238E27FC236}">
-                    <a16:creationId xmlns:a16="http://schemas.microsoft.com/office/drawing/2014/main" id="{DF66F787-5F35-42BB-99A2-5599D69B2759}"/>
-                  </a:ext>
-                </a:extLst>
-              </p:cNvPr>
-              <p:cNvCxnSpPr>
-                <a:cxnSpLocks/>
-              </p:cNvCxnSpPr>
-              <p:nvPr/>
-            </p:nvCxnSpPr>
-            <p:spPr>
-              <a:xfrm>
-                <a:off x="11862644" y="0"/>
-                <a:ext cx="0" cy="7060019"/>
-              </a:xfrm>
-              <a:prstGeom prst="line">
-                <a:avLst/>
-              </a:prstGeom>
-              <a:ln>
-                <a:solidFill>
-                  <a:schemeClr val="tx1"/>
-                </a:solidFill>
-              </a:ln>
-            </p:spPr>
-            <p:style>
-              <a:lnRef idx="1">
-                <a:schemeClr val="accent1"/>
-              </a:lnRef>
-              <a:fillRef idx="0">
-                <a:schemeClr val="accent1"/>
-              </a:fillRef>
-              <a:effectRef idx="0">
-                <a:schemeClr val="accent1"/>
-              </a:effectRef>
-              <a:fontRef idx="minor">
-                <a:schemeClr val="tx1"/>
-              </a:fontRef>
-            </p:style>
-          </p:cxnSp>
-        </p:grpSp>
-        <p:cxnSp>
-          <p:nvCxnSpPr>
-            <p:cNvPr id="35" name="Прямая соединительная линия 34">
-              <a:extLst>
-                <a:ext uri="{FF2B5EF4-FFF2-40B4-BE49-F238E27FC236}">
-                  <a16:creationId xmlns:a16="http://schemas.microsoft.com/office/drawing/2014/main" id="{A5354744-6A8D-4078-A907-2FAD85E3AF28}"/>
-                </a:ext>
-              </a:extLst>
-            </p:cNvPr>
-            <p:cNvCxnSpPr/>
-            <p:nvPr/>
-          </p:nvCxnSpPr>
-          <p:spPr>
-            <a:xfrm>
-              <a:off x="0" y="2889247"/>
-              <a:ext cx="12596037" cy="0"/>
-            </a:xfrm>
-            <a:prstGeom prst="line">
-              <a:avLst/>
-            </a:prstGeom>
-            <a:ln>
-              <a:solidFill>
-                <a:schemeClr val="tx1"/>
-              </a:solidFill>
-            </a:ln>
-          </p:spPr>
-          <p:style>
-            <a:lnRef idx="1">
-              <a:schemeClr val="accent1"/>
-            </a:lnRef>
-            <a:fillRef idx="0">
-              <a:schemeClr val="accent1"/>
-            </a:fillRef>
-            <a:effectRef idx="0">
-              <a:schemeClr val="accent1"/>
-            </a:effectRef>
-            <a:fontRef idx="minor">
-              <a:schemeClr val="tx1"/>
-            </a:fontRef>
-          </p:style>
-        </p:cxnSp>
-      </p:grpSp>
-      <p:sp>
-        <p:nvSpPr>
-          <p:cNvPr id="44" name="Прямоугольник 43">
-            <a:extLst>
-              <a:ext uri="{FF2B5EF4-FFF2-40B4-BE49-F238E27FC236}">
-                <a16:creationId xmlns:a16="http://schemas.microsoft.com/office/drawing/2014/main" id="{3F54A79C-EE9A-4A17-830B-192AC83A4DF8}"/>
-              </a:ext>
-            </a:extLst>
-          </p:cNvPr>
-          <p:cNvSpPr/>
-          <p:nvPr/>
-        </p:nvSpPr>
-        <p:spPr>
-          <a:xfrm>
-            <a:off x="1446030" y="1467292"/>
-            <a:ext cx="9869864" cy="4910435"/>
-          </a:xfrm>
-          <a:custGeom>
-            <a:avLst/>
-            <a:gdLst>
-              <a:gd name="connsiteX0" fmla="*/ 0 w 9869864"/>
-              <a:gd name="connsiteY0" fmla="*/ 0 h 4910435"/>
-              <a:gd name="connsiteX1" fmla="*/ 9869864 w 9869864"/>
-              <a:gd name="connsiteY1" fmla="*/ 0 h 4910435"/>
-              <a:gd name="connsiteX2" fmla="*/ 9869864 w 9869864"/>
-              <a:gd name="connsiteY2" fmla="*/ 4910435 h 4910435"/>
-              <a:gd name="connsiteX3" fmla="*/ 0 w 9869864"/>
-              <a:gd name="connsiteY3" fmla="*/ 4910435 h 4910435"/>
-              <a:gd name="connsiteX4" fmla="*/ 0 w 9869864"/>
-              <a:gd name="connsiteY4" fmla="*/ 0 h 4910435"/>
-            </a:gdLst>
-            <a:ahLst/>
-            <a:cxnLst>
-              <a:cxn ang="0">
-                <a:pos x="connsiteX0" y="connsiteY0"/>
-              </a:cxn>
-              <a:cxn ang="0">
-                <a:pos x="connsiteX1" y="connsiteY1"/>
-              </a:cxn>
-              <a:cxn ang="0">
-                <a:pos x="connsiteX2" y="connsiteY2"/>
-              </a:cxn>
-              <a:cxn ang="0">
-                <a:pos x="connsiteX3" y="connsiteY3"/>
-              </a:cxn>
-              <a:cxn ang="0">
-                <a:pos x="connsiteX4" y="connsiteY4"/>
-              </a:cxn>
-            </a:cxnLst>
-            <a:rect l="l" t="t" r="r" b="b"/>
-            <a:pathLst>
-              <a:path w="9869864" h="4910435" fill="none" extrusionOk="0">
-                <a:moveTo>
-                  <a:pt x="0" y="0"/>
-                </a:moveTo>
-                <a:cubicBezTo>
-                  <a:pt x="3831520" y="-159440"/>
-                  <a:pt x="6605196" y="19408"/>
-                  <a:pt x="9869864" y="0"/>
-                </a:cubicBezTo>
-                <a:cubicBezTo>
-                  <a:pt x="10027904" y="1667649"/>
-                  <a:pt x="9863463" y="3186992"/>
-                  <a:pt x="9869864" y="4910435"/>
-                </a:cubicBezTo>
-                <a:cubicBezTo>
-                  <a:pt x="7396228" y="4824203"/>
-                  <a:pt x="3393268" y="4827133"/>
-                  <a:pt x="0" y="4910435"/>
-                </a:cubicBezTo>
-                <a:cubicBezTo>
-                  <a:pt x="-145898" y="3099276"/>
-                  <a:pt x="-24387" y="660950"/>
-                  <a:pt x="0" y="0"/>
-                </a:cubicBezTo>
-                <a:close/>
-              </a:path>
-              <a:path w="9869864" h="4910435" stroke="0" extrusionOk="0">
-                <a:moveTo>
-                  <a:pt x="0" y="0"/>
-                </a:moveTo>
-                <a:cubicBezTo>
-                  <a:pt x="4863626" y="112754"/>
-                  <a:pt x="7115958" y="-67146"/>
-                  <a:pt x="9869864" y="0"/>
-                </a:cubicBezTo>
-                <a:cubicBezTo>
-                  <a:pt x="9961230" y="1206123"/>
-                  <a:pt x="9875015" y="2657538"/>
-                  <a:pt x="9869864" y="4910435"/>
-                </a:cubicBezTo>
-                <a:cubicBezTo>
-                  <a:pt x="6129429" y="4982865"/>
-                  <a:pt x="4447473" y="4989383"/>
-                  <a:pt x="0" y="4910435"/>
-                </a:cubicBezTo>
-                <a:cubicBezTo>
-                  <a:pt x="77396" y="3204905"/>
-                  <a:pt x="15692" y="2262567"/>
-                  <a:pt x="0" y="0"/>
-                </a:cubicBezTo>
-                <a:close/>
-              </a:path>
-            </a:pathLst>
-          </a:custGeom>
-          <a:solidFill>
-            <a:schemeClr val="accent5">
-              <a:lumMod val="20000"/>
-              <a:lumOff val="80000"/>
-            </a:schemeClr>
-          </a:solidFill>
-          <a:ln>
-            <a:solidFill>
-              <a:schemeClr val="tx1"/>
-            </a:solidFill>
-            <a:extLst>
-              <a:ext uri="{C807C97D-BFC1-408E-A445-0C87EB9F89A2}">
-                <ask:lineSketchStyleProps xmlns:ask="http://schemas.microsoft.com/office/drawing/2018/sketchyshapes" sd="1336358556">
-                  <a:prstGeom prst="rect">
-                    <a:avLst/>
-                  </a:prstGeom>
-                  <ask:type>
-                    <ask:lineSketchCurved/>
-                  </ask:type>
-                </ask:lineSketchStyleProps>
-              </a:ext>
-            </a:extLst>
-          </a:ln>
-        </p:spPr>
-        <p:style>
-          <a:lnRef idx="2">
-            <a:schemeClr val="accent1">
-              <a:shade val="50000"/>
-            </a:schemeClr>
-          </a:lnRef>
-          <a:fillRef idx="1">
-            <a:schemeClr val="accent1"/>
-          </a:fillRef>
-          <a:effectRef idx="0">
-            <a:schemeClr val="accent1"/>
-          </a:effectRef>
-          <a:fontRef idx="minor">
-            <a:schemeClr val="lt1"/>
-          </a:fontRef>
-        </p:style>
-        <p:txBody>
-          <a:bodyPr rtlCol="0" anchor="ctr"/>
-          <a:lstStyle/>
-          <a:p>
-            <a:pPr algn="ctr"/>
-            <a:r>
-              <a:rPr sz="1400" b="1">
-                <a:solidFill>
-                  <a:srgbClr val="2F2F2F"/>
-                </a:solidFill>
-                <a:latin typeface="Century Gothic"/>
-              </a:rPr>
-              <a:t>Напряжённость трудового процесса</a:t>
-            </a:r>
-            <a:endParaRPr lang="ru-RU"/>
-          </a:p>
-          <a:p>
-            <a:r>
-              <a:rPr sz="1400" b="0">
-                <a:solidFill>
-                  <a:srgbClr val="2F2F2F"/>
-                </a:solidFill>
-                <a:latin typeface="Century Gothic"/>
-              </a:rPr>
-              <a:t>Нагрузка на нервную систему и органы чувств: сосредоточенное наблюдение, плотность сигналов, нагрузка на слух, зрение (оптика) и голосовой аппарат.</a:t>
-            </a:r>
-          </a:p>
-        </p:txBody>
-      </p:sp>
-      <p:sp>
-        <p:nvSpPr>
-          <p:cNvPr id="37" name="Прямоугольник 36">
-            <a:extLst>
-              <a:ext uri="{FF2B5EF4-FFF2-40B4-BE49-F238E27FC236}">
-                <a16:creationId xmlns:a16="http://schemas.microsoft.com/office/drawing/2014/main" id="{247A25D5-0201-4715-B299-1F1450E9A577}"/>
-              </a:ext>
-            </a:extLst>
-          </p:cNvPr>
-          <p:cNvSpPr/>
-          <p:nvPr/>
-        </p:nvSpPr>
-        <p:spPr>
-          <a:xfrm>
-            <a:off x="1161068" y="1179856"/>
-            <a:ext cx="9869864" cy="4910435"/>
-          </a:xfrm>
-          <a:custGeom>
-            <a:avLst/>
-            <a:gdLst>
-              <a:gd name="connsiteX0" fmla="*/ 0 w 9869864"/>
-              <a:gd name="connsiteY0" fmla="*/ 0 h 4910435"/>
-              <a:gd name="connsiteX1" fmla="*/ 9869864 w 9869864"/>
-              <a:gd name="connsiteY1" fmla="*/ 0 h 4910435"/>
-              <a:gd name="connsiteX2" fmla="*/ 9869864 w 9869864"/>
-              <a:gd name="connsiteY2" fmla="*/ 4910435 h 4910435"/>
-              <a:gd name="connsiteX3" fmla="*/ 0 w 9869864"/>
-              <a:gd name="connsiteY3" fmla="*/ 4910435 h 4910435"/>
-              <a:gd name="connsiteX4" fmla="*/ 0 w 9869864"/>
-              <a:gd name="connsiteY4" fmla="*/ 0 h 4910435"/>
-            </a:gdLst>
-            <a:ahLst/>
-            <a:cxnLst>
-              <a:cxn ang="0">
-                <a:pos x="connsiteX0" y="connsiteY0"/>
-              </a:cxn>
-              <a:cxn ang="0">
-                <a:pos x="connsiteX1" y="connsiteY1"/>
-              </a:cxn>
-              <a:cxn ang="0">
-                <a:pos x="connsiteX2" y="connsiteY2"/>
-              </a:cxn>
-              <a:cxn ang="0">
-                <a:pos x="connsiteX3" y="connsiteY3"/>
-              </a:cxn>
-              <a:cxn ang="0">
-                <a:pos x="connsiteX4" y="connsiteY4"/>
-              </a:cxn>
-            </a:cxnLst>
-            <a:rect l="l" t="t" r="r" b="b"/>
-            <a:pathLst>
-              <a:path w="9869864" h="4910435" fill="none" extrusionOk="0">
-                <a:moveTo>
-                  <a:pt x="0" y="0"/>
-                </a:moveTo>
-                <a:cubicBezTo>
-                  <a:pt x="3831520" y="-159440"/>
-                  <a:pt x="6605196" y="19408"/>
-                  <a:pt x="9869864" y="0"/>
-                </a:cubicBezTo>
-                <a:cubicBezTo>
-                  <a:pt x="10027904" y="1667649"/>
-                  <a:pt x="9863463" y="3186992"/>
-                  <a:pt x="9869864" y="4910435"/>
-                </a:cubicBezTo>
-                <a:cubicBezTo>
-                  <a:pt x="7396228" y="4824203"/>
-                  <a:pt x="3393268" y="4827133"/>
-                  <a:pt x="0" y="4910435"/>
-                </a:cubicBezTo>
-                <a:cubicBezTo>
-                  <a:pt x="-145898" y="3099276"/>
-                  <a:pt x="-24387" y="660950"/>
-                  <a:pt x="0" y="0"/>
-                </a:cubicBezTo>
-                <a:close/>
-              </a:path>
-              <a:path w="9869864" h="4910435" stroke="0" extrusionOk="0">
-                <a:moveTo>
-                  <a:pt x="0" y="0"/>
-                </a:moveTo>
-                <a:cubicBezTo>
-                  <a:pt x="4863626" y="112754"/>
-                  <a:pt x="7115958" y="-67146"/>
-                  <a:pt x="9869864" y="0"/>
-                </a:cubicBezTo>
-                <a:cubicBezTo>
-                  <a:pt x="9961230" y="1206123"/>
-                  <a:pt x="9875015" y="2657538"/>
-                  <a:pt x="9869864" y="4910435"/>
-                </a:cubicBezTo>
-                <a:cubicBezTo>
-                  <a:pt x="6129429" y="4982865"/>
-                  <a:pt x="4447473" y="4989383"/>
-                  <a:pt x="0" y="4910435"/>
-                </a:cubicBezTo>
-                <a:cubicBezTo>
-                  <a:pt x="77396" y="3204905"/>
-                  <a:pt x="15692" y="2262567"/>
-                  <a:pt x="0" y="0"/>
-                </a:cubicBezTo>
-                <a:close/>
-              </a:path>
-            </a:pathLst>
-          </a:custGeom>
-          <a:solidFill>
-            <a:srgbClr val="DAE3F3"/>
-          </a:solidFill>
-          <a:ln>
-            <a:solidFill>
-              <a:schemeClr val="tx1"/>
-            </a:solidFill>
-            <a:extLst>
-              <a:ext uri="{C807C97D-BFC1-408E-A445-0C87EB9F89A2}">
-                <ask:lineSketchStyleProps xmlns:ask="http://schemas.microsoft.com/office/drawing/2018/sketchyshapes" sd="1336358556">
-                  <a:prstGeom prst="rect">
-                    <a:avLst/>
-                  </a:prstGeom>
-                  <ask:type>
-                    <ask:lineSketchCurved/>
-                  </ask:type>
-                </ask:lineSketchStyleProps>
-              </a:ext>
-            </a:extLst>
-          </a:ln>
-        </p:spPr>
-        <p:style>
-          <a:lnRef idx="2">
-            <a:schemeClr val="accent1">
-              <a:shade val="50000"/>
-            </a:schemeClr>
-          </a:lnRef>
-          <a:fillRef idx="1">
-            <a:schemeClr val="accent1"/>
-          </a:fillRef>
-          <a:effectRef idx="0">
-            <a:schemeClr val="accent1"/>
-          </a:effectRef>
-          <a:fontRef idx="minor">
-            <a:schemeClr val="lt1"/>
-          </a:fontRef>
-        </p:style>
-        <p:txBody>
-          <a:bodyPr rtlCol="0" anchor="ctr"/>
-          <a:lstStyle/>
-          <a:p>
-            <a:pPr algn="ctr"/>
-            <a:r>
-              <a:rPr sz="1400" b="1">
-                <a:solidFill>
-                  <a:srgbClr val="2F2F2F"/>
-                </a:solidFill>
-                <a:latin typeface="Century Gothic"/>
-              </a:rPr>
-              <a:t>Тяжесть трудового процесса</a:t>
-            </a:r>
-            <a:endParaRPr lang="ru-RU"/>
-          </a:p>
-          <a:p>
-            <a:r>
-              <a:rPr sz="1400" b="0">
-                <a:solidFill>
-                  <a:srgbClr val="2F2F2F"/>
-                </a:solidFill>
-                <a:latin typeface="Century Gothic"/>
-              </a:rPr>
-              <a:t>Физическая нагрузка: масса и путь перемещения груза, мышечное усилие, наклоны корпуса, время удержания груза, стереотипные движения.</a:t>
+              <a:t>Чаще всего встречаются: микроклимат (жара, холод, сквозняки), освещённость, шум, электромагнитные поля от оргтехники, а также напряжённость труда при работе за компьютером.</a:t>
             </a:r>
           </a:p>
         </p:txBody>
@@ -18780,10 +17201,10 @@
       </p:grpSp>
       <p:sp>
         <p:nvSpPr>
-          <p:cNvPr id="41" name="Прямоугольник 40">
+          <p:cNvPr id="43" name="Прямоугольник 42">
             <a:extLst>
               <a:ext uri="{FF2B5EF4-FFF2-40B4-BE49-F238E27FC236}">
-                <a16:creationId xmlns:a16="http://schemas.microsoft.com/office/drawing/2014/main" id="{A90786C7-3329-4CE7-B3B8-EE15002A4870}"/>
+                <a16:creationId xmlns:a16="http://schemas.microsoft.com/office/drawing/2014/main" id="{F1BA58C8-CB0D-42C8-9353-C041814589B5}"/>
               </a:ext>
             </a:extLst>
           </p:cNvPr>
@@ -18792,22 +17213,22 @@
         </p:nvSpPr>
         <p:spPr>
           <a:xfrm>
-            <a:off x="1446030" y="1467292"/>
-            <a:ext cx="9869864" cy="4910435"/>
+            <a:off x="1522575" y="1523675"/>
+            <a:ext cx="9869864" cy="4479264"/>
           </a:xfrm>
           <a:custGeom>
             <a:avLst/>
             <a:gdLst>
               <a:gd name="connsiteX0" fmla="*/ 0 w 9869864"/>
-              <a:gd name="connsiteY0" fmla="*/ 0 h 4910435"/>
+              <a:gd name="connsiteY0" fmla="*/ 0 h 4479264"/>
               <a:gd name="connsiteX1" fmla="*/ 9869864 w 9869864"/>
-              <a:gd name="connsiteY1" fmla="*/ 0 h 4910435"/>
+              <a:gd name="connsiteY1" fmla="*/ 0 h 4479264"/>
               <a:gd name="connsiteX2" fmla="*/ 9869864 w 9869864"/>
-              <a:gd name="connsiteY2" fmla="*/ 4910435 h 4910435"/>
+              <a:gd name="connsiteY2" fmla="*/ 4479264 h 4479264"/>
               <a:gd name="connsiteX3" fmla="*/ 0 w 9869864"/>
-              <a:gd name="connsiteY3" fmla="*/ 4910435 h 4910435"/>
+              <a:gd name="connsiteY3" fmla="*/ 4479264 h 4479264"/>
               <a:gd name="connsiteX4" fmla="*/ 0 w 9869864"/>
-              <a:gd name="connsiteY4" fmla="*/ 0 h 4910435"/>
+              <a:gd name="connsiteY4" fmla="*/ 0 h 4479264"/>
             </a:gdLst>
             <a:ahLst/>
             <a:cxnLst>
@@ -18829,7 +17250,7 @@
             </a:cxnLst>
             <a:rect l="l" t="t" r="r" b="b"/>
             <a:pathLst>
-              <a:path w="9869864" h="4910435" fill="none" extrusionOk="0">
+              <a:path w="9869864" h="4479264" fill="none" extrusionOk="0">
                 <a:moveTo>
                   <a:pt x="0" y="0"/>
                 </a:moveTo>
@@ -18839,23 +17260,23 @@
                   <a:pt x="9869864" y="0"/>
                 </a:cubicBezTo>
                 <a:cubicBezTo>
-                  <a:pt x="10027904" y="1667649"/>
-                  <a:pt x="9863463" y="3186992"/>
-                  <a:pt x="9869864" y="4910435"/>
+                  <a:pt x="10027904" y="2011379"/>
+                  <a:pt x="9863463" y="3133819"/>
+                  <a:pt x="9869864" y="4479264"/>
                 </a:cubicBezTo>
                 <a:cubicBezTo>
-                  <a:pt x="7396228" y="4824203"/>
-                  <a:pt x="3393268" y="4827133"/>
-                  <a:pt x="0" y="4910435"/>
+                  <a:pt x="7396228" y="4393032"/>
+                  <a:pt x="3393268" y="4395962"/>
+                  <a:pt x="0" y="4479264"/>
                 </a:cubicBezTo>
                 <a:cubicBezTo>
-                  <a:pt x="-145898" y="3099276"/>
-                  <a:pt x="-24387" y="660950"/>
+                  <a:pt x="-145898" y="3619195"/>
+                  <a:pt x="-24387" y="1200516"/>
                   <a:pt x="0" y="0"/>
                 </a:cubicBezTo>
                 <a:close/>
               </a:path>
-              <a:path w="9869864" h="4910435" stroke="0" extrusionOk="0">
+              <a:path w="9869864" h="4479264" stroke="0" extrusionOk="0">
                 <a:moveTo>
                   <a:pt x="0" y="0"/>
                 </a:moveTo>
@@ -18865,18 +17286,18 @@
                   <a:pt x="9869864" y="0"/>
                 </a:cubicBezTo>
                 <a:cubicBezTo>
-                  <a:pt x="9961230" y="1206123"/>
-                  <a:pt x="9875015" y="2657538"/>
-                  <a:pt x="9869864" y="4910435"/>
+                  <a:pt x="9961230" y="833996"/>
+                  <a:pt x="9875015" y="2860015"/>
+                  <a:pt x="9869864" y="4479264"/>
                 </a:cubicBezTo>
                 <a:cubicBezTo>
-                  <a:pt x="6129429" y="4982865"/>
-                  <a:pt x="4447473" y="4989383"/>
-                  <a:pt x="0" y="4910435"/>
+                  <a:pt x="6129429" y="4551694"/>
+                  <a:pt x="4447473" y="4558212"/>
+                  <a:pt x="0" y="4479264"/>
                 </a:cubicBezTo>
                 <a:cubicBezTo>
-                  <a:pt x="77396" y="3204905"/>
-                  <a:pt x="15692" y="2262567"/>
+                  <a:pt x="77396" y="3799926"/>
+                  <a:pt x="15692" y="1626302"/>
                   <a:pt x="0" y="0"/>
                 </a:cubicBezTo>
                 <a:close/>
@@ -18935,19 +17356,52 @@
                 </a:solidFill>
                 <a:latin typeface="Century Gothic"/>
               </a:rPr>
-              <a:t>Для чего это нужно</a:t>
+              <a:t>Главное</a:t>
             </a:r>
             <a:endParaRPr lang="ru-RU"/>
           </a:p>
           <a:p>
             <a:r>
-              <a:rPr sz="1400" b="0">
+              <a:rPr sz="800" b="0">
                 <a:solidFill>
                   <a:srgbClr val="2F2F2F"/>
                 </a:solidFill>
                 <a:latin typeface="Century Gothic"/>
               </a:rPr>
-              <a:t>Не «галочка», а инструмент: инструкции и СИЗ; гарантии и компенсации (в т.ч. по приказу № 291н); медосмотры для профилактики профзаболеваний.</a:t>
+              <a:t/>
+            </a:r>
+          </a:p>
+          <a:p>
+            <a:r>
+              <a:rPr sz="1400" b="0">
+                <a:solidFill>
+                  <a:srgbClr val="2F2F2F"/>
+                </a:solidFill>
+                <a:latin typeface="Century Gothic"/>
+              </a:rPr>
+              <a:t>Вредные факторы ведут к болезням, опасные — к травмам. По ст. 13 ФЗ-426 они делятся на физические, химические, биологические и факторы трудового процесса (тяжесть и напряжённость).</a:t>
+            </a:r>
+          </a:p>
+          <a:p>
+            <a:r>
+              <a:rPr sz="800" b="0">
+                <a:solidFill>
+                  <a:srgbClr val="2F2F2F"/>
+                </a:solidFill>
+                <a:latin typeface="Century Gothic"/>
+              </a:rPr>
+              <a:t/>
+            </a:r>
+          </a:p>
+          <a:p>
+            <a:r>
+              <a:rPr sz="1400" b="0">
+                <a:solidFill>
+                  <a:srgbClr val="2F2F2F"/>
+                </a:solidFill>
+                <a:latin typeface="Century Gothic"/>
+              </a:rPr>
+              <a:t>Выявляют их через СОУТ. Цель всех мероприятий — жизнь, здоровье и защита прав работника.</a:t>
             </a:r>
           </a:p>
         </p:txBody>
@@ -18966,22 +17420,22 @@
         </p:nvSpPr>
         <p:spPr>
           <a:xfrm>
-            <a:off x="1161068" y="1179856"/>
-            <a:ext cx="9869864" cy="4910435"/>
+            <a:off x="1161068" y="1179857"/>
+            <a:ext cx="9869864" cy="4479264"/>
           </a:xfrm>
           <a:custGeom>
             <a:avLst/>
             <a:gdLst>
               <a:gd name="connsiteX0" fmla="*/ 0 w 9869864"/>
-              <a:gd name="connsiteY0" fmla="*/ 0 h 4910435"/>
+              <a:gd name="connsiteY0" fmla="*/ 0 h 4479264"/>
               <a:gd name="connsiteX1" fmla="*/ 9869864 w 9869864"/>
-              <a:gd name="connsiteY1" fmla="*/ 0 h 4910435"/>
+              <a:gd name="connsiteY1" fmla="*/ 0 h 4479264"/>
               <a:gd name="connsiteX2" fmla="*/ 9869864 w 9869864"/>
-              <a:gd name="connsiteY2" fmla="*/ 4910435 h 4910435"/>
+              <a:gd name="connsiteY2" fmla="*/ 4479264 h 4479264"/>
               <a:gd name="connsiteX3" fmla="*/ 0 w 9869864"/>
-              <a:gd name="connsiteY3" fmla="*/ 4910435 h 4910435"/>
+              <a:gd name="connsiteY3" fmla="*/ 4479264 h 4479264"/>
               <a:gd name="connsiteX4" fmla="*/ 0 w 9869864"/>
-              <a:gd name="connsiteY4" fmla="*/ 0 h 4910435"/>
+              <a:gd name="connsiteY4" fmla="*/ 0 h 4479264"/>
             </a:gdLst>
             <a:ahLst/>
             <a:cxnLst>
@@ -19003,7 +17457,7 @@
             </a:cxnLst>
             <a:rect l="l" t="t" r="r" b="b"/>
             <a:pathLst>
-              <a:path w="9869864" h="4910435" fill="none" extrusionOk="0">
+              <a:path w="9869864" h="4479264" fill="none" extrusionOk="0">
                 <a:moveTo>
                   <a:pt x="0" y="0"/>
                 </a:moveTo>
@@ -19013,23 +17467,23 @@
                   <a:pt x="9869864" y="0"/>
                 </a:cubicBezTo>
                 <a:cubicBezTo>
-                  <a:pt x="10027904" y="1667649"/>
-                  <a:pt x="9863463" y="3186992"/>
-                  <a:pt x="9869864" y="4910435"/>
+                  <a:pt x="10027904" y="2011379"/>
+                  <a:pt x="9863463" y="3133819"/>
+                  <a:pt x="9869864" y="4479264"/>
                 </a:cubicBezTo>
                 <a:cubicBezTo>
-                  <a:pt x="7396228" y="4824203"/>
-                  <a:pt x="3393268" y="4827133"/>
-                  <a:pt x="0" y="4910435"/>
+                  <a:pt x="7396228" y="4393032"/>
+                  <a:pt x="3393268" y="4395962"/>
+                  <a:pt x="0" y="4479264"/>
                 </a:cubicBezTo>
                 <a:cubicBezTo>
-                  <a:pt x="-145898" y="3099276"/>
-                  <a:pt x="-24387" y="660950"/>
+                  <a:pt x="-145898" y="3619195"/>
+                  <a:pt x="-24387" y="1200516"/>
                   <a:pt x="0" y="0"/>
                 </a:cubicBezTo>
                 <a:close/>
               </a:path>
-              <a:path w="9869864" h="4910435" stroke="0" extrusionOk="0">
+              <a:path w="9869864" h="4479264" stroke="0" extrusionOk="0">
                 <a:moveTo>
                   <a:pt x="0" y="0"/>
                 </a:moveTo>
@@ -19039,18 +17493,18 @@
                   <a:pt x="9869864" y="0"/>
                 </a:cubicBezTo>
                 <a:cubicBezTo>
-                  <a:pt x="9961230" y="1206123"/>
-                  <a:pt x="9875015" y="2657538"/>
-                  <a:pt x="9869864" y="4910435"/>
+                  <a:pt x="9961230" y="833996"/>
+                  <a:pt x="9875015" y="2860015"/>
+                  <a:pt x="9869864" y="4479264"/>
                 </a:cubicBezTo>
                 <a:cubicBezTo>
-                  <a:pt x="6129429" y="4982865"/>
-                  <a:pt x="4447473" y="4989383"/>
-                  <a:pt x="0" y="4910435"/>
+                  <a:pt x="6129429" y="4551694"/>
+                  <a:pt x="4447473" y="4558212"/>
+                  <a:pt x="0" y="4479264"/>
                 </a:cubicBezTo>
                 <a:cubicBezTo>
-                  <a:pt x="77396" y="3204905"/>
-                  <a:pt x="15692" y="2262567"/>
+                  <a:pt x="77396" y="3799926"/>
+                  <a:pt x="15692" y="1626302"/>
                   <a:pt x="0" y="0"/>
                 </a:cubicBezTo>
                 <a:close/>
@@ -19099,36 +17553,16 @@
           <a:lstStyle/>
           <a:p>
             <a:pPr algn="ctr"/>
-            <a:r>
-              <a:rPr sz="1400" b="1">
-                <a:solidFill>
-                  <a:srgbClr val="2F2F2F"/>
-                </a:solidFill>
-                <a:latin typeface="Century Gothic"/>
-              </a:rPr>
-              <a:t>Как выявляют факторы: СОУТ</a:t>
-            </a:r>
             <a:endParaRPr lang="ru-RU"/>
-          </a:p>
-          <a:p>
-            <a:r>
-              <a:rPr sz="1400" b="0">
-                <a:solidFill>
-                  <a:srgbClr val="2F2F2F"/>
-                </a:solidFill>
-                <a:latin typeface="Century Gothic"/>
-              </a:rPr>
-              <a:t>По ФЗ-426: идентификация факторов → исследования и измерения → установление класса условий труда (от оптимальных до опасных).</a:t>
-            </a:r>
           </a:p>
         </p:txBody>
       </p:sp>
       <p:sp>
         <p:nvSpPr>
-          <p:cNvPr id="38" name="TextBox 37">
+          <p:cNvPr id="42" name="TextBox 41">
             <a:extLst>
               <a:ext uri="{FF2B5EF4-FFF2-40B4-BE49-F238E27FC236}">
-                <a16:creationId xmlns:a16="http://schemas.microsoft.com/office/drawing/2014/main" id="{4CD22F8E-6599-489D-96FD-D69217B29F3E}"/>
+                <a16:creationId xmlns:a16="http://schemas.microsoft.com/office/drawing/2014/main" id="{6C2623F0-1205-437B-80EB-293BD3B22892}"/>
               </a:ext>
             </a:extLst>
           </p:cNvPr>
@@ -19137,111 +17571,8 @@
         </p:nvSpPr>
         <p:spPr>
           <a:xfrm>
-            <a:off x="1653087" y="1483508"/>
-            <a:ext cx="8929852" cy="1123449"/>
-          </a:xfrm>
-          <a:prstGeom prst="rect">
-            <a:avLst/>
-          </a:prstGeom>
-          <a:noFill/>
-        </p:spPr>
-        <p:txBody>
-          <a:bodyPr wrap="square">
-            <a:spAutoFit/>
-          </a:bodyPr>
-          <a:lstStyle/>
-          <a:p>
-            <a:pPr>
-              <a:lnSpc>
-                <a:spcPct val="150000"/>
-              </a:lnSpc>
-              <a:spcAft>
-                <a:spcPts val="800"/>
-              </a:spcAft>
-            </a:pPr>
-            <a:endParaRPr lang="ru-RU" sz="1400" b="1" dirty="0">
-              <a:latin typeface="Century Gothic" panose="020B0502020202020204" pitchFamily="34" charset="0"/>
-              <a:ea typeface="Calibri" panose="020F0502020204030204" pitchFamily="34" charset="0"/>
-              <a:cs typeface="Times New Roman" panose="02020603050405020304" pitchFamily="18" charset="0"/>
-            </a:endParaRPr>
-          </a:p>
-        </p:txBody>
-      </p:sp>
-      <p:sp>
-        <p:nvSpPr>
-          <p:cNvPr id="39" name="TextBox 38">
-            <a:extLst>
-              <a:ext uri="{FF2B5EF4-FFF2-40B4-BE49-F238E27FC236}">
-                <a16:creationId xmlns:a16="http://schemas.microsoft.com/office/drawing/2014/main" id="{2AA3C534-9335-490D-8F1B-D1936FFFCB5F}"/>
-              </a:ext>
-            </a:extLst>
-          </p:cNvPr>
-          <p:cNvSpPr txBox="1"/>
-          <p:nvPr/>
-        </p:nvSpPr>
-        <p:spPr>
-          <a:xfrm>
-            <a:off x="1649736" y="2704561"/>
-            <a:ext cx="9063311" cy="1446614"/>
-          </a:xfrm>
-          <a:prstGeom prst="rect">
-            <a:avLst/>
-          </a:prstGeom>
-          <a:noFill/>
-        </p:spPr>
-        <p:txBody>
-          <a:bodyPr wrap="square">
-            <a:spAutoFit/>
-          </a:bodyPr>
-          <a:lstStyle/>
-          <a:p>
-            <a:pPr>
-              <a:lnSpc>
-                <a:spcPct val="150000"/>
-              </a:lnSpc>
-              <a:spcAft>
-                <a:spcPts val="800"/>
-              </a:spcAft>
-            </a:pPr>
-            <a:r>
-              <a:rPr sz="1400" b="1">
-                <a:solidFill>
-                  <a:srgbClr val="2F2F2F"/>
-                </a:solidFill>
-                <a:latin typeface="Century Gothic"/>
-              </a:rPr>
-              <a:t>Связь с управлением рисками</a:t>
-            </a:r>
-          </a:p>
-          <a:p>
-            <a:r>
-              <a:rPr sz="1400" b="0">
-                <a:solidFill>
-                  <a:srgbClr val="2F2F2F"/>
-                </a:solidFill>
-                <a:latin typeface="Century Gothic"/>
-              </a:rPr>
-              <a:t>Выявление опасностей, оценка рисков и разработка мер по их снижению опираются на результаты СОУТ и классификацию факторов.</a:t>
-            </a:r>
-          </a:p>
-        </p:txBody>
-      </p:sp>
-      <p:sp>
-        <p:nvSpPr>
-          <p:cNvPr id="40" name="TextBox 39">
-            <a:extLst>
-              <a:ext uri="{FF2B5EF4-FFF2-40B4-BE49-F238E27FC236}">
-                <a16:creationId xmlns:a16="http://schemas.microsoft.com/office/drawing/2014/main" id="{DBDFA73F-D516-43E7-B8A8-7D9F3D4D6189}"/>
-              </a:ext>
-            </a:extLst>
-          </p:cNvPr>
-          <p:cNvSpPr txBox="1"/>
-          <p:nvPr/>
-        </p:nvSpPr>
-        <p:spPr>
-          <a:xfrm>
-            <a:off x="1649736" y="4325119"/>
-            <a:ext cx="8933203" cy="1020857"/>
+            <a:off x="1862359" y="1736635"/>
+            <a:ext cx="8915312" cy="3283015"/>
           </a:xfrm>
           <a:prstGeom prst="rect">
             <a:avLst/>
@@ -19259,1722 +17590,46 @@
                 <a:spcPct val="150000"/>
               </a:lnSpc>
             </a:pPr>
-            <a:endParaRPr lang="en-US" sz="1400" b="1" i="0" dirty="0">
-              <a:effectLst/>
-              <a:latin typeface="Century Gothic" panose="020B0502020202020204" pitchFamily="34" charset="0"/>
-            </a:endParaRPr>
           </a:p>
         </p:txBody>
       </p:sp>
+      <p:pic>
+        <p:nvPicPr>
+          <p:cNvPr id="2" name="Рисунок 1">
+            <a:extLst>
+              <a:ext uri="{FF2B5EF4-FFF2-40B4-BE49-F238E27FC236}">
+                <a16:creationId xmlns:a16="http://schemas.microsoft.com/office/drawing/2014/main" id="{1238151D-9F0E-404B-808F-017B8F6E2F83}"/>
+              </a:ext>
+            </a:extLst>
+          </p:cNvPr>
+          <p:cNvPicPr>
+            <a:picLocks noChangeAspect="1"/>
+          </p:cNvPicPr>
+          <p:nvPr/>
+        </p:nvPicPr>
+        <p:blipFill>
+          <a:blip r:embed="rId4"/>
+          <a:stretch>
+            <a:fillRect/>
+          </a:stretch>
+        </p:blipFill>
+        <p:spPr>
+          <a:xfrm>
+            <a:off x="1350570" y="1741601"/>
+            <a:ext cx="511789" cy="511789"/>
+          </a:xfrm>
+          <a:prstGeom prst="rect">
+            <a:avLst/>
+          </a:prstGeom>
+        </p:spPr>
+      </p:pic>
     </p:spTree>
     <p:custDataLst>
       <p:tags r:id="rId1"/>
     </p:custDataLst>
     <p:extLst>
       <p:ext uri="{BB962C8B-B14F-4D97-AF65-F5344CB8AC3E}">
-        <p14:creationId xmlns:p14="http://schemas.microsoft.com/office/powerpoint/2010/main" val="683743847"/>
-      </p:ext>
-    </p:extLst>
-  </p:cSld>
-  <p:clrMapOvr>
-    <a:masterClrMapping/>
-  </p:clrMapOvr>
-</p:sld>
-</file>
-
-<file path=ppt/slides/slide9.xml><?xml version="1.0" encoding="utf-8"?>
-<p:sld xmlns:a="http://schemas.openxmlformats.org/drawingml/2006/main" xmlns:r="http://schemas.openxmlformats.org/officeDocument/2006/relationships" xmlns:p="http://schemas.openxmlformats.org/presentationml/2006/main">
-  <p:cSld>
-    <p:spTree>
-      <p:nvGrpSpPr>
-        <p:cNvPr id="1" name=""/>
-        <p:cNvGrpSpPr/>
-        <p:nvPr/>
-      </p:nvGrpSpPr>
-      <p:grpSpPr>
-        <a:xfrm>
-          <a:off x="0" y="0"/>
-          <a:ext cx="0" cy="0"/>
-          <a:chOff x="0" y="0"/>
-          <a:chExt cx="0" cy="0"/>
-        </a:xfrm>
-      </p:grpSpPr>
-      <p:grpSp>
-        <p:nvGrpSpPr>
-          <p:cNvPr id="36" name="Группа 35">
-            <a:extLst>
-              <a:ext uri="{FF2B5EF4-FFF2-40B4-BE49-F238E27FC236}">
-                <a16:creationId xmlns:a16="http://schemas.microsoft.com/office/drawing/2014/main" id="{7FF1FBDA-7EF8-4E32-B285-B9BF1A70F363}"/>
-              </a:ext>
-            </a:extLst>
-          </p:cNvPr>
-          <p:cNvGrpSpPr/>
-          <p:nvPr/>
-        </p:nvGrpSpPr>
-        <p:grpSpPr>
-          <a:xfrm>
-            <a:off x="0" y="-214817"/>
-            <a:ext cx="13248168" cy="7072817"/>
-            <a:chOff x="0" y="-4170772"/>
-            <a:chExt cx="13248168" cy="7072817"/>
-          </a:xfrm>
-        </p:grpSpPr>
-        <p:grpSp>
-          <p:nvGrpSpPr>
-            <p:cNvPr id="6" name="Группа 5">
-              <a:extLst>
-                <a:ext uri="{FF2B5EF4-FFF2-40B4-BE49-F238E27FC236}">
-                  <a16:creationId xmlns:a16="http://schemas.microsoft.com/office/drawing/2014/main" id="{D194E697-28B3-404D-8A29-F48E94BF6241}"/>
-                </a:ext>
-              </a:extLst>
-            </p:cNvPr>
-            <p:cNvGrpSpPr/>
-            <p:nvPr/>
-          </p:nvGrpSpPr>
-          <p:grpSpPr>
-            <a:xfrm>
-              <a:off x="0" y="-4170772"/>
-              <a:ext cx="13248168" cy="7072817"/>
-              <a:chOff x="-166577" y="-12798"/>
-              <a:chExt cx="13248168" cy="7072817"/>
-            </a:xfrm>
-          </p:grpSpPr>
-          <p:cxnSp>
-            <p:nvCxnSpPr>
-              <p:cNvPr id="7" name="Прямая соединительная линия 6">
-                <a:extLst>
-                  <a:ext uri="{FF2B5EF4-FFF2-40B4-BE49-F238E27FC236}">
-                    <a16:creationId xmlns:a16="http://schemas.microsoft.com/office/drawing/2014/main" id="{82C61482-8E50-4404-94EC-6B83D92F983D}"/>
-                  </a:ext>
-                </a:extLst>
-              </p:cNvPr>
-              <p:cNvCxnSpPr/>
-              <p:nvPr/>
-            </p:nvCxnSpPr>
-            <p:spPr>
-              <a:xfrm>
-                <a:off x="340242" y="202019"/>
-                <a:ext cx="0" cy="6858000"/>
-              </a:xfrm>
-              <a:prstGeom prst="line">
-                <a:avLst/>
-              </a:prstGeom>
-              <a:ln>
-                <a:solidFill>
-                  <a:schemeClr val="tx1"/>
-                </a:solidFill>
-              </a:ln>
-            </p:spPr>
-            <p:style>
-              <a:lnRef idx="1">
-                <a:schemeClr val="accent1"/>
-              </a:lnRef>
-              <a:fillRef idx="0">
-                <a:schemeClr val="accent1"/>
-              </a:fillRef>
-              <a:effectRef idx="0">
-                <a:schemeClr val="accent1"/>
-              </a:effectRef>
-              <a:fontRef idx="minor">
-                <a:schemeClr val="tx1"/>
-              </a:fontRef>
-            </p:style>
-          </p:cxnSp>
-          <p:cxnSp>
-            <p:nvCxnSpPr>
-              <p:cNvPr id="8" name="Прямая соединительная линия 7">
-                <a:extLst>
-                  <a:ext uri="{FF2B5EF4-FFF2-40B4-BE49-F238E27FC236}">
-                    <a16:creationId xmlns:a16="http://schemas.microsoft.com/office/drawing/2014/main" id="{79FD2ADB-6B7C-417E-8070-20B7AC7BEC87}"/>
-                  </a:ext>
-                </a:extLst>
-              </p:cNvPr>
-              <p:cNvCxnSpPr>
-                <a:cxnSpLocks/>
-              </p:cNvCxnSpPr>
-              <p:nvPr/>
-            </p:nvCxnSpPr>
-            <p:spPr>
-              <a:xfrm>
-                <a:off x="1063257" y="0"/>
-                <a:ext cx="0" cy="7060019"/>
-              </a:xfrm>
-              <a:prstGeom prst="line">
-                <a:avLst/>
-              </a:prstGeom>
-              <a:ln>
-                <a:solidFill>
-                  <a:schemeClr val="tx1"/>
-                </a:solidFill>
-              </a:ln>
-            </p:spPr>
-            <p:style>
-              <a:lnRef idx="1">
-                <a:schemeClr val="accent1"/>
-              </a:lnRef>
-              <a:fillRef idx="0">
-                <a:schemeClr val="accent1"/>
-              </a:fillRef>
-              <a:effectRef idx="0">
-                <a:schemeClr val="accent1"/>
-              </a:effectRef>
-              <a:fontRef idx="minor">
-                <a:schemeClr val="tx1"/>
-              </a:fontRef>
-            </p:style>
-          </p:cxnSp>
-          <p:cxnSp>
-            <p:nvCxnSpPr>
-              <p:cNvPr id="9" name="Прямая соединительная линия 8">
-                <a:extLst>
-                  <a:ext uri="{FF2B5EF4-FFF2-40B4-BE49-F238E27FC236}">
-                    <a16:creationId xmlns:a16="http://schemas.microsoft.com/office/drawing/2014/main" id="{742E3E11-256E-4150-8476-2708422F0F21}"/>
-                  </a:ext>
-                </a:extLst>
-              </p:cNvPr>
-              <p:cNvCxnSpPr>
-                <a:cxnSpLocks/>
-              </p:cNvCxnSpPr>
-              <p:nvPr/>
-            </p:nvCxnSpPr>
-            <p:spPr>
-              <a:xfrm>
-                <a:off x="1786271" y="0"/>
-                <a:ext cx="0" cy="7060019"/>
-              </a:xfrm>
-              <a:prstGeom prst="line">
-                <a:avLst/>
-              </a:prstGeom>
-              <a:ln>
-                <a:solidFill>
-                  <a:schemeClr val="tx1"/>
-                </a:solidFill>
-              </a:ln>
-            </p:spPr>
-            <p:style>
-              <a:lnRef idx="1">
-                <a:schemeClr val="accent1"/>
-              </a:lnRef>
-              <a:fillRef idx="0">
-                <a:schemeClr val="accent1"/>
-              </a:fillRef>
-              <a:effectRef idx="0">
-                <a:schemeClr val="accent1"/>
-              </a:effectRef>
-              <a:fontRef idx="minor">
-                <a:schemeClr val="tx1"/>
-              </a:fontRef>
-            </p:style>
-          </p:cxnSp>
-          <p:cxnSp>
-            <p:nvCxnSpPr>
-              <p:cNvPr id="10" name="Прямая соединительная линия 9">
-                <a:extLst>
-                  <a:ext uri="{FF2B5EF4-FFF2-40B4-BE49-F238E27FC236}">
-                    <a16:creationId xmlns:a16="http://schemas.microsoft.com/office/drawing/2014/main" id="{71A89E76-8A26-4714-A28B-178CFA97EAA9}"/>
-                  </a:ext>
-                </a:extLst>
-              </p:cNvPr>
-              <p:cNvCxnSpPr>
-                <a:cxnSpLocks/>
-              </p:cNvCxnSpPr>
-              <p:nvPr/>
-            </p:nvCxnSpPr>
-            <p:spPr>
-              <a:xfrm>
-                <a:off x="2498653" y="0"/>
-                <a:ext cx="0" cy="7060019"/>
-              </a:xfrm>
-              <a:prstGeom prst="line">
-                <a:avLst/>
-              </a:prstGeom>
-              <a:ln>
-                <a:solidFill>
-                  <a:schemeClr val="tx1"/>
-                </a:solidFill>
-              </a:ln>
-            </p:spPr>
-            <p:style>
-              <a:lnRef idx="1">
-                <a:schemeClr val="accent1"/>
-              </a:lnRef>
-              <a:fillRef idx="0">
-                <a:schemeClr val="accent1"/>
-              </a:fillRef>
-              <a:effectRef idx="0">
-                <a:schemeClr val="accent1"/>
-              </a:effectRef>
-              <a:fontRef idx="minor">
-                <a:schemeClr val="tx1"/>
-              </a:fontRef>
-            </p:style>
-          </p:cxnSp>
-          <p:cxnSp>
-            <p:nvCxnSpPr>
-              <p:cNvPr id="11" name="Прямая соединительная линия 10">
-                <a:extLst>
-                  <a:ext uri="{FF2B5EF4-FFF2-40B4-BE49-F238E27FC236}">
-                    <a16:creationId xmlns:a16="http://schemas.microsoft.com/office/drawing/2014/main" id="{35DE7A21-97FE-45D0-A8C3-5D5C44459CD8}"/>
-                  </a:ext>
-                </a:extLst>
-              </p:cNvPr>
-              <p:cNvCxnSpPr>
-                <a:cxnSpLocks/>
-              </p:cNvCxnSpPr>
-              <p:nvPr/>
-            </p:nvCxnSpPr>
-            <p:spPr>
-              <a:xfrm>
-                <a:off x="3211034" y="0"/>
-                <a:ext cx="0" cy="7060019"/>
-              </a:xfrm>
-              <a:prstGeom prst="line">
-                <a:avLst/>
-              </a:prstGeom>
-              <a:ln>
-                <a:solidFill>
-                  <a:schemeClr val="tx1"/>
-                </a:solidFill>
-              </a:ln>
-            </p:spPr>
-            <p:style>
-              <a:lnRef idx="1">
-                <a:schemeClr val="accent1"/>
-              </a:lnRef>
-              <a:fillRef idx="0">
-                <a:schemeClr val="accent1"/>
-              </a:fillRef>
-              <a:effectRef idx="0">
-                <a:schemeClr val="accent1"/>
-              </a:effectRef>
-              <a:fontRef idx="minor">
-                <a:schemeClr val="tx1"/>
-              </a:fontRef>
-            </p:style>
-          </p:cxnSp>
-          <p:cxnSp>
-            <p:nvCxnSpPr>
-              <p:cNvPr id="12" name="Прямая соединительная линия 11">
-                <a:extLst>
-                  <a:ext uri="{FF2B5EF4-FFF2-40B4-BE49-F238E27FC236}">
-                    <a16:creationId xmlns:a16="http://schemas.microsoft.com/office/drawing/2014/main" id="{2230EA40-BFDD-4F33-9739-A1F381E44FCA}"/>
-                  </a:ext>
-                </a:extLst>
-              </p:cNvPr>
-              <p:cNvCxnSpPr>
-                <a:cxnSpLocks/>
-              </p:cNvCxnSpPr>
-              <p:nvPr/>
-            </p:nvCxnSpPr>
-            <p:spPr>
-              <a:xfrm>
-                <a:off x="3934048" y="0"/>
-                <a:ext cx="0" cy="7060019"/>
-              </a:xfrm>
-              <a:prstGeom prst="line">
-                <a:avLst/>
-              </a:prstGeom>
-              <a:ln>
-                <a:solidFill>
-                  <a:schemeClr val="tx1"/>
-                </a:solidFill>
-              </a:ln>
-            </p:spPr>
-            <p:style>
-              <a:lnRef idx="1">
-                <a:schemeClr val="accent1"/>
-              </a:lnRef>
-              <a:fillRef idx="0">
-                <a:schemeClr val="accent1"/>
-              </a:fillRef>
-              <a:effectRef idx="0">
-                <a:schemeClr val="accent1"/>
-              </a:effectRef>
-              <a:fontRef idx="minor">
-                <a:schemeClr val="tx1"/>
-              </a:fontRef>
-            </p:style>
-          </p:cxnSp>
-          <p:cxnSp>
-            <p:nvCxnSpPr>
-              <p:cNvPr id="13" name="Прямая соединительная линия 12">
-                <a:extLst>
-                  <a:ext uri="{FF2B5EF4-FFF2-40B4-BE49-F238E27FC236}">
-                    <a16:creationId xmlns:a16="http://schemas.microsoft.com/office/drawing/2014/main" id="{A2F0D873-D58C-44BF-9302-3E5185DD141C}"/>
-                  </a:ext>
-                </a:extLst>
-              </p:cNvPr>
-              <p:cNvCxnSpPr>
-                <a:cxnSpLocks/>
-              </p:cNvCxnSpPr>
-              <p:nvPr/>
-            </p:nvCxnSpPr>
-            <p:spPr>
-              <a:xfrm flipH="1">
-                <a:off x="-95693" y="552893"/>
-                <a:ext cx="12525153" cy="0"/>
-              </a:xfrm>
-              <a:prstGeom prst="line">
-                <a:avLst/>
-              </a:prstGeom>
-              <a:ln>
-                <a:solidFill>
-                  <a:schemeClr val="tx1"/>
-                </a:solidFill>
-              </a:ln>
-            </p:spPr>
-            <p:style>
-              <a:lnRef idx="1">
-                <a:schemeClr val="accent1"/>
-              </a:lnRef>
-              <a:fillRef idx="0">
-                <a:schemeClr val="accent1"/>
-              </a:fillRef>
-              <a:effectRef idx="0">
-                <a:schemeClr val="accent1"/>
-              </a:effectRef>
-              <a:fontRef idx="minor">
-                <a:schemeClr val="tx1"/>
-              </a:fontRef>
-            </p:style>
-          </p:cxnSp>
-          <p:cxnSp>
-            <p:nvCxnSpPr>
-              <p:cNvPr id="14" name="Прямая соединительная линия 13">
-                <a:extLst>
-                  <a:ext uri="{FF2B5EF4-FFF2-40B4-BE49-F238E27FC236}">
-                    <a16:creationId xmlns:a16="http://schemas.microsoft.com/office/drawing/2014/main" id="{4B549B82-A1D8-4959-A4BA-6626F5C7E9EA}"/>
-                  </a:ext>
-                </a:extLst>
-              </p:cNvPr>
-              <p:cNvCxnSpPr>
-                <a:cxnSpLocks/>
-              </p:cNvCxnSpPr>
-              <p:nvPr/>
-            </p:nvCxnSpPr>
-            <p:spPr>
-              <a:xfrm flipH="1">
-                <a:off x="-166577" y="1265274"/>
-                <a:ext cx="12525153" cy="0"/>
-              </a:xfrm>
-              <a:prstGeom prst="line">
-                <a:avLst/>
-              </a:prstGeom>
-              <a:ln>
-                <a:solidFill>
-                  <a:schemeClr val="tx1"/>
-                </a:solidFill>
-              </a:ln>
-            </p:spPr>
-            <p:style>
-              <a:lnRef idx="1">
-                <a:schemeClr val="accent1"/>
-              </a:lnRef>
-              <a:fillRef idx="0">
-                <a:schemeClr val="accent1"/>
-              </a:fillRef>
-              <a:effectRef idx="0">
-                <a:schemeClr val="accent1"/>
-              </a:effectRef>
-              <a:fontRef idx="minor">
-                <a:schemeClr val="tx1"/>
-              </a:fontRef>
-            </p:style>
-          </p:cxnSp>
-          <p:cxnSp>
-            <p:nvCxnSpPr>
-              <p:cNvPr id="15" name="Прямая соединительная линия 14">
-                <a:extLst>
-                  <a:ext uri="{FF2B5EF4-FFF2-40B4-BE49-F238E27FC236}">
-                    <a16:creationId xmlns:a16="http://schemas.microsoft.com/office/drawing/2014/main" id="{7E902903-75AC-495E-92CC-0E6B41592315}"/>
-                  </a:ext>
-                </a:extLst>
-              </p:cNvPr>
-              <p:cNvCxnSpPr>
-                <a:cxnSpLocks/>
-              </p:cNvCxnSpPr>
-              <p:nvPr/>
-            </p:nvCxnSpPr>
-            <p:spPr>
-              <a:xfrm flipH="1">
-                <a:off x="-166577" y="1988287"/>
-                <a:ext cx="12525153" cy="0"/>
-              </a:xfrm>
-              <a:prstGeom prst="line">
-                <a:avLst/>
-              </a:prstGeom>
-              <a:ln>
-                <a:solidFill>
-                  <a:schemeClr val="tx1"/>
-                </a:solidFill>
-              </a:ln>
-            </p:spPr>
-            <p:style>
-              <a:lnRef idx="1">
-                <a:schemeClr val="accent1"/>
-              </a:lnRef>
-              <a:fillRef idx="0">
-                <a:schemeClr val="accent1"/>
-              </a:fillRef>
-              <a:effectRef idx="0">
-                <a:schemeClr val="accent1"/>
-              </a:effectRef>
-              <a:fontRef idx="minor">
-                <a:schemeClr val="tx1"/>
-              </a:fontRef>
-            </p:style>
-          </p:cxnSp>
-          <p:cxnSp>
-            <p:nvCxnSpPr>
-              <p:cNvPr id="16" name="Прямая соединительная линия 15">
-                <a:extLst>
-                  <a:ext uri="{FF2B5EF4-FFF2-40B4-BE49-F238E27FC236}">
-                    <a16:creationId xmlns:a16="http://schemas.microsoft.com/office/drawing/2014/main" id="{C10264B3-AA1B-4EDA-BFE4-9A014BE9E499}"/>
-                  </a:ext>
-                </a:extLst>
-              </p:cNvPr>
-              <p:cNvCxnSpPr>
-                <a:cxnSpLocks/>
-              </p:cNvCxnSpPr>
-              <p:nvPr/>
-            </p:nvCxnSpPr>
-            <p:spPr>
-              <a:xfrm flipH="1">
-                <a:off x="-166577" y="2711302"/>
-                <a:ext cx="12525153" cy="0"/>
-              </a:xfrm>
-              <a:prstGeom prst="line">
-                <a:avLst/>
-              </a:prstGeom>
-              <a:ln>
-                <a:solidFill>
-                  <a:schemeClr val="tx1"/>
-                </a:solidFill>
-              </a:ln>
-            </p:spPr>
-            <p:style>
-              <a:lnRef idx="1">
-                <a:schemeClr val="accent1"/>
-              </a:lnRef>
-              <a:fillRef idx="0">
-                <a:schemeClr val="accent1"/>
-              </a:fillRef>
-              <a:effectRef idx="0">
-                <a:schemeClr val="accent1"/>
-              </a:effectRef>
-              <a:fontRef idx="minor">
-                <a:schemeClr val="tx1"/>
-              </a:fontRef>
-            </p:style>
-          </p:cxnSp>
-          <p:cxnSp>
-            <p:nvCxnSpPr>
-              <p:cNvPr id="17" name="Прямая соединительная линия 16">
-                <a:extLst>
-                  <a:ext uri="{FF2B5EF4-FFF2-40B4-BE49-F238E27FC236}">
-                    <a16:creationId xmlns:a16="http://schemas.microsoft.com/office/drawing/2014/main" id="{7DB95352-4A59-44BD-9F84-7A56998CFE6C}"/>
-                  </a:ext>
-                </a:extLst>
-              </p:cNvPr>
-              <p:cNvCxnSpPr>
-                <a:cxnSpLocks/>
-              </p:cNvCxnSpPr>
-              <p:nvPr/>
-            </p:nvCxnSpPr>
-            <p:spPr>
-              <a:xfrm flipH="1">
-                <a:off x="-166577" y="3429000"/>
-                <a:ext cx="12525153" cy="0"/>
-              </a:xfrm>
-              <a:prstGeom prst="line">
-                <a:avLst/>
-              </a:prstGeom>
-              <a:ln>
-                <a:solidFill>
-                  <a:schemeClr val="tx1"/>
-                </a:solidFill>
-              </a:ln>
-            </p:spPr>
-            <p:style>
-              <a:lnRef idx="1">
-                <a:schemeClr val="accent1"/>
-              </a:lnRef>
-              <a:fillRef idx="0">
-                <a:schemeClr val="accent1"/>
-              </a:fillRef>
-              <a:effectRef idx="0">
-                <a:schemeClr val="accent1"/>
-              </a:effectRef>
-              <a:fontRef idx="minor">
-                <a:schemeClr val="tx1"/>
-              </a:fontRef>
-            </p:style>
-          </p:cxnSp>
-          <p:cxnSp>
-            <p:nvCxnSpPr>
-              <p:cNvPr id="18" name="Прямая соединительная линия 17">
-                <a:extLst>
-                  <a:ext uri="{FF2B5EF4-FFF2-40B4-BE49-F238E27FC236}">
-                    <a16:creationId xmlns:a16="http://schemas.microsoft.com/office/drawing/2014/main" id="{B374052C-54F7-4119-BB4C-01EBB5D6B2F6}"/>
-                  </a:ext>
-                </a:extLst>
-              </p:cNvPr>
-              <p:cNvCxnSpPr>
-                <a:cxnSpLocks/>
-              </p:cNvCxnSpPr>
-              <p:nvPr/>
-            </p:nvCxnSpPr>
-            <p:spPr>
-              <a:xfrm flipH="1">
-                <a:off x="-166577" y="4152013"/>
-                <a:ext cx="12525153" cy="0"/>
-              </a:xfrm>
-              <a:prstGeom prst="line">
-                <a:avLst/>
-              </a:prstGeom>
-              <a:ln>
-                <a:solidFill>
-                  <a:schemeClr val="tx1"/>
-                </a:solidFill>
-              </a:ln>
-            </p:spPr>
-            <p:style>
-              <a:lnRef idx="1">
-                <a:schemeClr val="accent1"/>
-              </a:lnRef>
-              <a:fillRef idx="0">
-                <a:schemeClr val="accent1"/>
-              </a:fillRef>
-              <a:effectRef idx="0">
-                <a:schemeClr val="accent1"/>
-              </a:effectRef>
-              <a:fontRef idx="minor">
-                <a:schemeClr val="tx1"/>
-              </a:fontRef>
-            </p:style>
-          </p:cxnSp>
-          <p:cxnSp>
-            <p:nvCxnSpPr>
-              <p:cNvPr id="19" name="Прямая соединительная линия 18">
-                <a:extLst>
-                  <a:ext uri="{FF2B5EF4-FFF2-40B4-BE49-F238E27FC236}">
-                    <a16:creationId xmlns:a16="http://schemas.microsoft.com/office/drawing/2014/main" id="{A0FD0A9A-69F9-4170-BA94-3846FED025DA}"/>
-                  </a:ext>
-                </a:extLst>
-              </p:cNvPr>
-              <p:cNvCxnSpPr>
-                <a:cxnSpLocks/>
-              </p:cNvCxnSpPr>
-              <p:nvPr/>
-            </p:nvCxnSpPr>
-            <p:spPr>
-              <a:xfrm flipH="1">
-                <a:off x="-166577" y="4875027"/>
-                <a:ext cx="12525153" cy="0"/>
-              </a:xfrm>
-              <a:prstGeom prst="line">
-                <a:avLst/>
-              </a:prstGeom>
-              <a:ln>
-                <a:solidFill>
-                  <a:schemeClr val="tx1"/>
-                </a:solidFill>
-              </a:ln>
-            </p:spPr>
-            <p:style>
-              <a:lnRef idx="1">
-                <a:schemeClr val="accent1"/>
-              </a:lnRef>
-              <a:fillRef idx="0">
-                <a:schemeClr val="accent1"/>
-              </a:fillRef>
-              <a:effectRef idx="0">
-                <a:schemeClr val="accent1"/>
-              </a:effectRef>
-              <a:fontRef idx="minor">
-                <a:schemeClr val="tx1"/>
-              </a:fontRef>
-            </p:style>
-          </p:cxnSp>
-          <p:cxnSp>
-            <p:nvCxnSpPr>
-              <p:cNvPr id="20" name="Прямая соединительная линия 19">
-                <a:extLst>
-                  <a:ext uri="{FF2B5EF4-FFF2-40B4-BE49-F238E27FC236}">
-                    <a16:creationId xmlns:a16="http://schemas.microsoft.com/office/drawing/2014/main" id="{C7407EBB-B386-401C-9331-199FBF6114CE}"/>
-                  </a:ext>
-                </a:extLst>
-              </p:cNvPr>
-              <p:cNvCxnSpPr>
-                <a:cxnSpLocks/>
-              </p:cNvCxnSpPr>
-              <p:nvPr/>
-            </p:nvCxnSpPr>
-            <p:spPr>
-              <a:xfrm flipH="1">
-                <a:off x="-166577" y="5592726"/>
-                <a:ext cx="12525153" cy="0"/>
-              </a:xfrm>
-              <a:prstGeom prst="line">
-                <a:avLst/>
-              </a:prstGeom>
-              <a:ln>
-                <a:solidFill>
-                  <a:schemeClr val="tx1"/>
-                </a:solidFill>
-              </a:ln>
-            </p:spPr>
-            <p:style>
-              <a:lnRef idx="1">
-                <a:schemeClr val="accent1"/>
-              </a:lnRef>
-              <a:fillRef idx="0">
-                <a:schemeClr val="accent1"/>
-              </a:fillRef>
-              <a:effectRef idx="0">
-                <a:schemeClr val="accent1"/>
-              </a:effectRef>
-              <a:fontRef idx="minor">
-                <a:schemeClr val="tx1"/>
-              </a:fontRef>
-            </p:style>
-          </p:cxnSp>
-          <p:cxnSp>
-            <p:nvCxnSpPr>
-              <p:cNvPr id="21" name="Прямая соединительная линия 20">
-                <a:extLst>
-                  <a:ext uri="{FF2B5EF4-FFF2-40B4-BE49-F238E27FC236}">
-                    <a16:creationId xmlns:a16="http://schemas.microsoft.com/office/drawing/2014/main" id="{5A00AFAC-24D0-4772-B007-1F6D4801E061}"/>
-                  </a:ext>
-                </a:extLst>
-              </p:cNvPr>
-              <p:cNvCxnSpPr>
-                <a:cxnSpLocks/>
-              </p:cNvCxnSpPr>
-              <p:nvPr/>
-            </p:nvCxnSpPr>
-            <p:spPr>
-              <a:xfrm flipH="1">
-                <a:off x="-166577" y="6305107"/>
-                <a:ext cx="12525153" cy="0"/>
-              </a:xfrm>
-              <a:prstGeom prst="line">
-                <a:avLst/>
-              </a:prstGeom>
-              <a:ln>
-                <a:solidFill>
-                  <a:schemeClr val="tx1"/>
-                </a:solidFill>
-              </a:ln>
-            </p:spPr>
-            <p:style>
-              <a:lnRef idx="1">
-                <a:schemeClr val="accent1"/>
-              </a:lnRef>
-              <a:fillRef idx="0">
-                <a:schemeClr val="accent1"/>
-              </a:fillRef>
-              <a:effectRef idx="0">
-                <a:schemeClr val="accent1"/>
-              </a:effectRef>
-              <a:fontRef idx="minor">
-                <a:schemeClr val="tx1"/>
-              </a:fontRef>
-            </p:style>
-          </p:cxnSp>
-          <p:cxnSp>
-            <p:nvCxnSpPr>
-              <p:cNvPr id="22" name="Прямая соединительная линия 21">
-                <a:extLst>
-                  <a:ext uri="{FF2B5EF4-FFF2-40B4-BE49-F238E27FC236}">
-                    <a16:creationId xmlns:a16="http://schemas.microsoft.com/office/drawing/2014/main" id="{C92C6CD4-7D64-4358-88EB-42B20046AA6C}"/>
-                  </a:ext>
-                </a:extLst>
-              </p:cNvPr>
-              <p:cNvCxnSpPr>
-                <a:cxnSpLocks/>
-              </p:cNvCxnSpPr>
-              <p:nvPr/>
-            </p:nvCxnSpPr>
-            <p:spPr>
-              <a:xfrm>
-                <a:off x="4657063" y="0"/>
-                <a:ext cx="0" cy="7060019"/>
-              </a:xfrm>
-              <a:prstGeom prst="line">
-                <a:avLst/>
-              </a:prstGeom>
-              <a:ln>
-                <a:solidFill>
-                  <a:schemeClr val="tx1"/>
-                </a:solidFill>
-              </a:ln>
-            </p:spPr>
-            <p:style>
-              <a:lnRef idx="1">
-                <a:schemeClr val="accent1"/>
-              </a:lnRef>
-              <a:fillRef idx="0">
-                <a:schemeClr val="accent1"/>
-              </a:fillRef>
-              <a:effectRef idx="0">
-                <a:schemeClr val="accent1"/>
-              </a:effectRef>
-              <a:fontRef idx="minor">
-                <a:schemeClr val="tx1"/>
-              </a:fontRef>
-            </p:style>
-          </p:cxnSp>
-          <p:cxnSp>
-            <p:nvCxnSpPr>
-              <p:cNvPr id="23" name="Прямая соединительная линия 22">
-                <a:extLst>
-                  <a:ext uri="{FF2B5EF4-FFF2-40B4-BE49-F238E27FC236}">
-                    <a16:creationId xmlns:a16="http://schemas.microsoft.com/office/drawing/2014/main" id="{DBCB635D-5CCB-48A9-8D29-8AEA9C51BED5}"/>
-                  </a:ext>
-                </a:extLst>
-              </p:cNvPr>
-              <p:cNvCxnSpPr>
-                <a:cxnSpLocks/>
-              </p:cNvCxnSpPr>
-              <p:nvPr/>
-            </p:nvCxnSpPr>
-            <p:spPr>
-              <a:xfrm flipH="1">
-                <a:off x="556438" y="6305107"/>
-                <a:ext cx="12525153" cy="0"/>
-              </a:xfrm>
-              <a:prstGeom prst="line">
-                <a:avLst/>
-              </a:prstGeom>
-              <a:ln>
-                <a:solidFill>
-                  <a:schemeClr val="tx1"/>
-                </a:solidFill>
-              </a:ln>
-            </p:spPr>
-            <p:style>
-              <a:lnRef idx="1">
-                <a:schemeClr val="accent1"/>
-              </a:lnRef>
-              <a:fillRef idx="0">
-                <a:schemeClr val="accent1"/>
-              </a:fillRef>
-              <a:effectRef idx="0">
-                <a:schemeClr val="accent1"/>
-              </a:effectRef>
-              <a:fontRef idx="minor">
-                <a:schemeClr val="tx1"/>
-              </a:fontRef>
-            </p:style>
-          </p:cxnSp>
-          <p:cxnSp>
-            <p:nvCxnSpPr>
-              <p:cNvPr id="24" name="Прямая соединительная линия 23">
-                <a:extLst>
-                  <a:ext uri="{FF2B5EF4-FFF2-40B4-BE49-F238E27FC236}">
-                    <a16:creationId xmlns:a16="http://schemas.microsoft.com/office/drawing/2014/main" id="{A6FC8F23-5AE0-4FDB-B2BB-E6D3E8F266DE}"/>
-                  </a:ext>
-                </a:extLst>
-              </p:cNvPr>
-              <p:cNvCxnSpPr>
-                <a:cxnSpLocks/>
-              </p:cNvCxnSpPr>
-              <p:nvPr/>
-            </p:nvCxnSpPr>
-            <p:spPr>
-              <a:xfrm>
-                <a:off x="5380077" y="0"/>
-                <a:ext cx="0" cy="7060019"/>
-              </a:xfrm>
-              <a:prstGeom prst="line">
-                <a:avLst/>
-              </a:prstGeom>
-              <a:ln>
-                <a:solidFill>
-                  <a:schemeClr val="tx1"/>
-                </a:solidFill>
-              </a:ln>
-            </p:spPr>
-            <p:style>
-              <a:lnRef idx="1">
-                <a:schemeClr val="accent1"/>
-              </a:lnRef>
-              <a:fillRef idx="0">
-                <a:schemeClr val="accent1"/>
-              </a:fillRef>
-              <a:effectRef idx="0">
-                <a:schemeClr val="accent1"/>
-              </a:effectRef>
-              <a:fontRef idx="minor">
-                <a:schemeClr val="tx1"/>
-              </a:fontRef>
-            </p:style>
-          </p:cxnSp>
-          <p:cxnSp>
-            <p:nvCxnSpPr>
-              <p:cNvPr id="25" name="Прямая соединительная линия 24">
-                <a:extLst>
-                  <a:ext uri="{FF2B5EF4-FFF2-40B4-BE49-F238E27FC236}">
-                    <a16:creationId xmlns:a16="http://schemas.microsoft.com/office/drawing/2014/main" id="{F478A673-FAA0-40F7-9553-BE69EB96603E}"/>
-                  </a:ext>
-                </a:extLst>
-              </p:cNvPr>
-              <p:cNvCxnSpPr>
-                <a:cxnSpLocks/>
-              </p:cNvCxnSpPr>
-              <p:nvPr/>
-            </p:nvCxnSpPr>
-            <p:spPr>
-              <a:xfrm>
-                <a:off x="6096003" y="0"/>
-                <a:ext cx="0" cy="7060019"/>
-              </a:xfrm>
-              <a:prstGeom prst="line">
-                <a:avLst/>
-              </a:prstGeom>
-              <a:ln>
-                <a:solidFill>
-                  <a:schemeClr val="tx1"/>
-                </a:solidFill>
-              </a:ln>
-            </p:spPr>
-            <p:style>
-              <a:lnRef idx="1">
-                <a:schemeClr val="accent1"/>
-              </a:lnRef>
-              <a:fillRef idx="0">
-                <a:schemeClr val="accent1"/>
-              </a:fillRef>
-              <a:effectRef idx="0">
-                <a:schemeClr val="accent1"/>
-              </a:effectRef>
-              <a:fontRef idx="minor">
-                <a:schemeClr val="tx1"/>
-              </a:fontRef>
-            </p:style>
-          </p:cxnSp>
-          <p:cxnSp>
-            <p:nvCxnSpPr>
-              <p:cNvPr id="26" name="Прямая соединительная линия 25">
-                <a:extLst>
-                  <a:ext uri="{FF2B5EF4-FFF2-40B4-BE49-F238E27FC236}">
-                    <a16:creationId xmlns:a16="http://schemas.microsoft.com/office/drawing/2014/main" id="{632D97B2-5B41-4725-8BED-1BB84D9049A3}"/>
-                  </a:ext>
-                </a:extLst>
-              </p:cNvPr>
-              <p:cNvCxnSpPr>
-                <a:cxnSpLocks/>
-              </p:cNvCxnSpPr>
-              <p:nvPr/>
-            </p:nvCxnSpPr>
-            <p:spPr>
-              <a:xfrm>
-                <a:off x="6819014" y="-12795"/>
-                <a:ext cx="0" cy="7060019"/>
-              </a:xfrm>
-              <a:prstGeom prst="line">
-                <a:avLst/>
-              </a:prstGeom>
-              <a:ln>
-                <a:solidFill>
-                  <a:schemeClr val="tx1"/>
-                </a:solidFill>
-              </a:ln>
-            </p:spPr>
-            <p:style>
-              <a:lnRef idx="1">
-                <a:schemeClr val="accent1"/>
-              </a:lnRef>
-              <a:fillRef idx="0">
-                <a:schemeClr val="accent1"/>
-              </a:fillRef>
-              <a:effectRef idx="0">
-                <a:schemeClr val="accent1"/>
-              </a:effectRef>
-              <a:fontRef idx="minor">
-                <a:schemeClr val="tx1"/>
-              </a:fontRef>
-            </p:style>
-          </p:cxnSp>
-          <p:cxnSp>
-            <p:nvCxnSpPr>
-              <p:cNvPr id="27" name="Прямая соединительная линия 26">
-                <a:extLst>
-                  <a:ext uri="{FF2B5EF4-FFF2-40B4-BE49-F238E27FC236}">
-                    <a16:creationId xmlns:a16="http://schemas.microsoft.com/office/drawing/2014/main" id="{0096069A-E1F5-484F-9AD5-E590F3AFB8C1}"/>
-                  </a:ext>
-                </a:extLst>
-              </p:cNvPr>
-              <p:cNvCxnSpPr>
-                <a:cxnSpLocks/>
-              </p:cNvCxnSpPr>
-              <p:nvPr/>
-            </p:nvCxnSpPr>
-            <p:spPr>
-              <a:xfrm>
-                <a:off x="7542032" y="-12796"/>
-                <a:ext cx="0" cy="7060019"/>
-              </a:xfrm>
-              <a:prstGeom prst="line">
-                <a:avLst/>
-              </a:prstGeom>
-              <a:ln>
-                <a:solidFill>
-                  <a:schemeClr val="tx1"/>
-                </a:solidFill>
-              </a:ln>
-            </p:spPr>
-            <p:style>
-              <a:lnRef idx="1">
-                <a:schemeClr val="accent1"/>
-              </a:lnRef>
-              <a:fillRef idx="0">
-                <a:schemeClr val="accent1"/>
-              </a:fillRef>
-              <a:effectRef idx="0">
-                <a:schemeClr val="accent1"/>
-              </a:effectRef>
-              <a:fontRef idx="minor">
-                <a:schemeClr val="tx1"/>
-              </a:fontRef>
-            </p:style>
-          </p:cxnSp>
-          <p:cxnSp>
-            <p:nvCxnSpPr>
-              <p:cNvPr id="28" name="Прямая соединительная линия 27">
-                <a:extLst>
-                  <a:ext uri="{FF2B5EF4-FFF2-40B4-BE49-F238E27FC236}">
-                    <a16:creationId xmlns:a16="http://schemas.microsoft.com/office/drawing/2014/main" id="{CD8CFF4F-9474-44E2-8483-EE501133D094}"/>
-                  </a:ext>
-                </a:extLst>
-              </p:cNvPr>
-              <p:cNvCxnSpPr>
-                <a:cxnSpLocks/>
-              </p:cNvCxnSpPr>
-              <p:nvPr/>
-            </p:nvCxnSpPr>
-            <p:spPr>
-              <a:xfrm>
-                <a:off x="8265045" y="-12797"/>
-                <a:ext cx="0" cy="7060019"/>
-              </a:xfrm>
-              <a:prstGeom prst="line">
-                <a:avLst/>
-              </a:prstGeom>
-              <a:ln>
-                <a:solidFill>
-                  <a:schemeClr val="tx1"/>
-                </a:solidFill>
-              </a:ln>
-            </p:spPr>
-            <p:style>
-              <a:lnRef idx="1">
-                <a:schemeClr val="accent1"/>
-              </a:lnRef>
-              <a:fillRef idx="0">
-                <a:schemeClr val="accent1"/>
-              </a:fillRef>
-              <a:effectRef idx="0">
-                <a:schemeClr val="accent1"/>
-              </a:effectRef>
-              <a:fontRef idx="minor">
-                <a:schemeClr val="tx1"/>
-              </a:fontRef>
-            </p:style>
-          </p:cxnSp>
-          <p:cxnSp>
-            <p:nvCxnSpPr>
-              <p:cNvPr id="29" name="Прямая соединительная линия 28">
-                <a:extLst>
-                  <a:ext uri="{FF2B5EF4-FFF2-40B4-BE49-F238E27FC236}">
-                    <a16:creationId xmlns:a16="http://schemas.microsoft.com/office/drawing/2014/main" id="{CA573EE6-F195-44AF-9C78-7860BF4CC13C}"/>
-                  </a:ext>
-                </a:extLst>
-              </p:cNvPr>
-              <p:cNvCxnSpPr>
-                <a:cxnSpLocks/>
-              </p:cNvCxnSpPr>
-              <p:nvPr/>
-            </p:nvCxnSpPr>
-            <p:spPr>
-              <a:xfrm>
-                <a:off x="8977428" y="-12798"/>
-                <a:ext cx="0" cy="7060019"/>
-              </a:xfrm>
-              <a:prstGeom prst="line">
-                <a:avLst/>
-              </a:prstGeom>
-              <a:ln>
-                <a:solidFill>
-                  <a:schemeClr val="tx1"/>
-                </a:solidFill>
-              </a:ln>
-            </p:spPr>
-            <p:style>
-              <a:lnRef idx="1">
-                <a:schemeClr val="accent1"/>
-              </a:lnRef>
-              <a:fillRef idx="0">
-                <a:schemeClr val="accent1"/>
-              </a:fillRef>
-              <a:effectRef idx="0">
-                <a:schemeClr val="accent1"/>
-              </a:effectRef>
-              <a:fontRef idx="minor">
-                <a:schemeClr val="tx1"/>
-              </a:fontRef>
-            </p:style>
-          </p:cxnSp>
-          <p:cxnSp>
-            <p:nvCxnSpPr>
-              <p:cNvPr id="30" name="Прямая соединительная линия 29">
-                <a:extLst>
-                  <a:ext uri="{FF2B5EF4-FFF2-40B4-BE49-F238E27FC236}">
-                    <a16:creationId xmlns:a16="http://schemas.microsoft.com/office/drawing/2014/main" id="{64DB25F9-7347-4751-961B-E6FEBE4F1600}"/>
-                  </a:ext>
-                </a:extLst>
-              </p:cNvPr>
-              <p:cNvCxnSpPr>
-                <a:cxnSpLocks/>
-              </p:cNvCxnSpPr>
-              <p:nvPr/>
-            </p:nvCxnSpPr>
-            <p:spPr>
-              <a:xfrm>
-                <a:off x="9693347" y="0"/>
-                <a:ext cx="0" cy="7060019"/>
-              </a:xfrm>
-              <a:prstGeom prst="line">
-                <a:avLst/>
-              </a:prstGeom>
-              <a:ln>
-                <a:solidFill>
-                  <a:schemeClr val="tx1"/>
-                </a:solidFill>
-              </a:ln>
-            </p:spPr>
-            <p:style>
-              <a:lnRef idx="1">
-                <a:schemeClr val="accent1"/>
-              </a:lnRef>
-              <a:fillRef idx="0">
-                <a:schemeClr val="accent1"/>
-              </a:fillRef>
-              <a:effectRef idx="0">
-                <a:schemeClr val="accent1"/>
-              </a:effectRef>
-              <a:fontRef idx="minor">
-                <a:schemeClr val="tx1"/>
-              </a:fontRef>
-            </p:style>
-          </p:cxnSp>
-          <p:cxnSp>
-            <p:nvCxnSpPr>
-              <p:cNvPr id="31" name="Прямая соединительная линия 30">
-                <a:extLst>
-                  <a:ext uri="{FF2B5EF4-FFF2-40B4-BE49-F238E27FC236}">
-                    <a16:creationId xmlns:a16="http://schemas.microsoft.com/office/drawing/2014/main" id="{E497B18E-A3B4-492E-98EC-EB5195E84BE0}"/>
-                  </a:ext>
-                </a:extLst>
-              </p:cNvPr>
-              <p:cNvCxnSpPr>
-                <a:cxnSpLocks/>
-              </p:cNvCxnSpPr>
-              <p:nvPr/>
-            </p:nvCxnSpPr>
-            <p:spPr>
-              <a:xfrm>
-                <a:off x="10416362" y="0"/>
-                <a:ext cx="0" cy="7060019"/>
-              </a:xfrm>
-              <a:prstGeom prst="line">
-                <a:avLst/>
-              </a:prstGeom>
-              <a:ln>
-                <a:solidFill>
-                  <a:schemeClr val="tx1"/>
-                </a:solidFill>
-              </a:ln>
-            </p:spPr>
-            <p:style>
-              <a:lnRef idx="1">
-                <a:schemeClr val="accent1"/>
-              </a:lnRef>
-              <a:fillRef idx="0">
-                <a:schemeClr val="accent1"/>
-              </a:fillRef>
-              <a:effectRef idx="0">
-                <a:schemeClr val="accent1"/>
-              </a:effectRef>
-              <a:fontRef idx="minor">
-                <a:schemeClr val="tx1"/>
-              </a:fontRef>
-            </p:style>
-          </p:cxnSp>
-          <p:cxnSp>
-            <p:nvCxnSpPr>
-              <p:cNvPr id="32" name="Прямая соединительная линия 31">
-                <a:extLst>
-                  <a:ext uri="{FF2B5EF4-FFF2-40B4-BE49-F238E27FC236}">
-                    <a16:creationId xmlns:a16="http://schemas.microsoft.com/office/drawing/2014/main" id="{9A209BAB-9A16-4C31-A951-28C1FF9C8C80}"/>
-                  </a:ext>
-                </a:extLst>
-              </p:cNvPr>
-              <p:cNvCxnSpPr>
-                <a:cxnSpLocks/>
-              </p:cNvCxnSpPr>
-              <p:nvPr/>
-            </p:nvCxnSpPr>
-            <p:spPr>
-              <a:xfrm>
-                <a:off x="11128743" y="0"/>
-                <a:ext cx="0" cy="7060019"/>
-              </a:xfrm>
-              <a:prstGeom prst="line">
-                <a:avLst/>
-              </a:prstGeom>
-              <a:ln>
-                <a:solidFill>
-                  <a:schemeClr val="tx1"/>
-                </a:solidFill>
-              </a:ln>
-            </p:spPr>
-            <p:style>
-              <a:lnRef idx="1">
-                <a:schemeClr val="accent1"/>
-              </a:lnRef>
-              <a:fillRef idx="0">
-                <a:schemeClr val="accent1"/>
-              </a:fillRef>
-              <a:effectRef idx="0">
-                <a:schemeClr val="accent1"/>
-              </a:effectRef>
-              <a:fontRef idx="minor">
-                <a:schemeClr val="tx1"/>
-              </a:fontRef>
-            </p:style>
-          </p:cxnSp>
-          <p:cxnSp>
-            <p:nvCxnSpPr>
-              <p:cNvPr id="33" name="Прямая соединительная линия 32">
-                <a:extLst>
-                  <a:ext uri="{FF2B5EF4-FFF2-40B4-BE49-F238E27FC236}">
-                    <a16:creationId xmlns:a16="http://schemas.microsoft.com/office/drawing/2014/main" id="{DF66F787-5F35-42BB-99A2-5599D69B2759}"/>
-                  </a:ext>
-                </a:extLst>
-              </p:cNvPr>
-              <p:cNvCxnSpPr>
-                <a:cxnSpLocks/>
-              </p:cNvCxnSpPr>
-              <p:nvPr/>
-            </p:nvCxnSpPr>
-            <p:spPr>
-              <a:xfrm>
-                <a:off x="11862644" y="0"/>
-                <a:ext cx="0" cy="7060019"/>
-              </a:xfrm>
-              <a:prstGeom prst="line">
-                <a:avLst/>
-              </a:prstGeom>
-              <a:ln>
-                <a:solidFill>
-                  <a:schemeClr val="tx1"/>
-                </a:solidFill>
-              </a:ln>
-            </p:spPr>
-            <p:style>
-              <a:lnRef idx="1">
-                <a:schemeClr val="accent1"/>
-              </a:lnRef>
-              <a:fillRef idx="0">
-                <a:schemeClr val="accent1"/>
-              </a:fillRef>
-              <a:effectRef idx="0">
-                <a:schemeClr val="accent1"/>
-              </a:effectRef>
-              <a:fontRef idx="minor">
-                <a:schemeClr val="tx1"/>
-              </a:fontRef>
-            </p:style>
-          </p:cxnSp>
-        </p:grpSp>
-        <p:cxnSp>
-          <p:nvCxnSpPr>
-            <p:cNvPr id="35" name="Прямая соединительная линия 34">
-              <a:extLst>
-                <a:ext uri="{FF2B5EF4-FFF2-40B4-BE49-F238E27FC236}">
-                  <a16:creationId xmlns:a16="http://schemas.microsoft.com/office/drawing/2014/main" id="{A5354744-6A8D-4078-A907-2FAD85E3AF28}"/>
-                </a:ext>
-              </a:extLst>
-            </p:cNvPr>
-            <p:cNvCxnSpPr/>
-            <p:nvPr/>
-          </p:nvCxnSpPr>
-          <p:spPr>
-            <a:xfrm>
-              <a:off x="0" y="2889247"/>
-              <a:ext cx="12596037" cy="0"/>
-            </a:xfrm>
-            <a:prstGeom prst="line">
-              <a:avLst/>
-            </a:prstGeom>
-            <a:ln>
-              <a:solidFill>
-                <a:schemeClr val="tx1"/>
-              </a:solidFill>
-            </a:ln>
-          </p:spPr>
-          <p:style>
-            <a:lnRef idx="1">
-              <a:schemeClr val="accent1"/>
-            </a:lnRef>
-            <a:fillRef idx="0">
-              <a:schemeClr val="accent1"/>
-            </a:fillRef>
-            <a:effectRef idx="0">
-              <a:schemeClr val="accent1"/>
-            </a:effectRef>
-            <a:fontRef idx="minor">
-              <a:schemeClr val="tx1"/>
-            </a:fontRef>
-          </p:style>
-        </p:cxnSp>
-      </p:grpSp>
-      <p:sp>
-        <p:nvSpPr>
-          <p:cNvPr id="44" name="Прямоугольник 43">
-            <a:extLst>
-              <a:ext uri="{FF2B5EF4-FFF2-40B4-BE49-F238E27FC236}">
-                <a16:creationId xmlns:a16="http://schemas.microsoft.com/office/drawing/2014/main" id="{3F54A79C-EE9A-4A17-830B-192AC83A4DF8}"/>
-              </a:ext>
-            </a:extLst>
-          </p:cNvPr>
-          <p:cNvSpPr/>
-          <p:nvPr/>
-        </p:nvSpPr>
-        <p:spPr>
-          <a:xfrm>
-            <a:off x="1446030" y="1467292"/>
-            <a:ext cx="9869864" cy="4910435"/>
-          </a:xfrm>
-          <a:custGeom>
-            <a:avLst/>
-            <a:gdLst>
-              <a:gd name="connsiteX0" fmla="*/ 0 w 9869864"/>
-              <a:gd name="connsiteY0" fmla="*/ 0 h 4910435"/>
-              <a:gd name="connsiteX1" fmla="*/ 9869864 w 9869864"/>
-              <a:gd name="connsiteY1" fmla="*/ 0 h 4910435"/>
-              <a:gd name="connsiteX2" fmla="*/ 9869864 w 9869864"/>
-              <a:gd name="connsiteY2" fmla="*/ 4910435 h 4910435"/>
-              <a:gd name="connsiteX3" fmla="*/ 0 w 9869864"/>
-              <a:gd name="connsiteY3" fmla="*/ 4910435 h 4910435"/>
-              <a:gd name="connsiteX4" fmla="*/ 0 w 9869864"/>
-              <a:gd name="connsiteY4" fmla="*/ 0 h 4910435"/>
-            </a:gdLst>
-            <a:ahLst/>
-            <a:cxnLst>
-              <a:cxn ang="0">
-                <a:pos x="connsiteX0" y="connsiteY0"/>
-              </a:cxn>
-              <a:cxn ang="0">
-                <a:pos x="connsiteX1" y="connsiteY1"/>
-              </a:cxn>
-              <a:cxn ang="0">
-                <a:pos x="connsiteX2" y="connsiteY2"/>
-              </a:cxn>
-              <a:cxn ang="0">
-                <a:pos x="connsiteX3" y="connsiteY3"/>
-              </a:cxn>
-              <a:cxn ang="0">
-                <a:pos x="connsiteX4" y="connsiteY4"/>
-              </a:cxn>
-            </a:cxnLst>
-            <a:rect l="l" t="t" r="r" b="b"/>
-            <a:pathLst>
-              <a:path w="9869864" h="4910435" fill="none" extrusionOk="0">
-                <a:moveTo>
-                  <a:pt x="0" y="0"/>
-                </a:moveTo>
-                <a:cubicBezTo>
-                  <a:pt x="3831520" y="-159440"/>
-                  <a:pt x="6605196" y="19408"/>
-                  <a:pt x="9869864" y="0"/>
-                </a:cubicBezTo>
-                <a:cubicBezTo>
-                  <a:pt x="10027904" y="1667649"/>
-                  <a:pt x="9863463" y="3186992"/>
-                  <a:pt x="9869864" y="4910435"/>
-                </a:cubicBezTo>
-                <a:cubicBezTo>
-                  <a:pt x="7396228" y="4824203"/>
-                  <a:pt x="3393268" y="4827133"/>
-                  <a:pt x="0" y="4910435"/>
-                </a:cubicBezTo>
-                <a:cubicBezTo>
-                  <a:pt x="-145898" y="3099276"/>
-                  <a:pt x="-24387" y="660950"/>
-                  <a:pt x="0" y="0"/>
-                </a:cubicBezTo>
-                <a:close/>
-              </a:path>
-              <a:path w="9869864" h="4910435" stroke="0" extrusionOk="0">
-                <a:moveTo>
-                  <a:pt x="0" y="0"/>
-                </a:moveTo>
-                <a:cubicBezTo>
-                  <a:pt x="4863626" y="112754"/>
-                  <a:pt x="7115958" y="-67146"/>
-                  <a:pt x="9869864" y="0"/>
-                </a:cubicBezTo>
-                <a:cubicBezTo>
-                  <a:pt x="9961230" y="1206123"/>
-                  <a:pt x="9875015" y="2657538"/>
-                  <a:pt x="9869864" y="4910435"/>
-                </a:cubicBezTo>
-                <a:cubicBezTo>
-                  <a:pt x="6129429" y="4982865"/>
-                  <a:pt x="4447473" y="4989383"/>
-                  <a:pt x="0" y="4910435"/>
-                </a:cubicBezTo>
-                <a:cubicBezTo>
-                  <a:pt x="77396" y="3204905"/>
-                  <a:pt x="15692" y="2262567"/>
-                  <a:pt x="0" y="0"/>
-                </a:cubicBezTo>
-                <a:close/>
-              </a:path>
-            </a:pathLst>
-          </a:custGeom>
-          <a:solidFill>
-            <a:schemeClr val="accent5">
-              <a:lumMod val="20000"/>
-              <a:lumOff val="80000"/>
-            </a:schemeClr>
-          </a:solidFill>
-          <a:ln>
-            <a:solidFill>
-              <a:schemeClr val="tx1"/>
-            </a:solidFill>
-            <a:extLst>
-              <a:ext uri="{C807C97D-BFC1-408E-A445-0C87EB9F89A2}">
-                <ask:lineSketchStyleProps xmlns:ask="http://schemas.microsoft.com/office/drawing/2018/sketchyshapes" sd="1336358556">
-                  <a:prstGeom prst="rect">
-                    <a:avLst/>
-                  </a:prstGeom>
-                  <ask:type>
-                    <ask:lineSketchCurved/>
-                  </ask:type>
-                </ask:lineSketchStyleProps>
-              </a:ext>
-            </a:extLst>
-          </a:ln>
-        </p:spPr>
-        <p:style>
-          <a:lnRef idx="2">
-            <a:schemeClr val="accent1">
-              <a:shade val="50000"/>
-            </a:schemeClr>
-          </a:lnRef>
-          <a:fillRef idx="1">
-            <a:schemeClr val="accent1"/>
-          </a:fillRef>
-          <a:effectRef idx="0">
-            <a:schemeClr val="accent1"/>
-          </a:effectRef>
-          <a:fontRef idx="minor">
-            <a:schemeClr val="lt1"/>
-          </a:fontRef>
-        </p:style>
-        <p:txBody>
-          <a:bodyPr rtlCol="0" anchor="ctr"/>
-          <a:lstStyle/>
-          <a:p>
-            <a:pPr algn="ctr"/>
-            <a:r>
-              <a:rPr sz="1400" b="1">
-                <a:solidFill>
-                  <a:srgbClr val="2F2F2F"/>
-                </a:solidFill>
-                <a:latin typeface="Century Gothic"/>
-              </a:rPr>
-              <a:t>На что обратить внимание</a:t>
-            </a:r>
-            <a:endParaRPr lang="ru-RU"/>
-          </a:p>
-          <a:p>
-            <a:r>
-              <a:rPr sz="1400" b="0">
-                <a:solidFill>
-                  <a:srgbClr val="2F2F2F"/>
-                </a:solidFill>
-                <a:latin typeface="Century Gothic"/>
-              </a:rPr>
-              <a:t>Длительная работа сидя, нагрузка на зрение и нервную систему, неправильная организация рабочего места. Опасные факторы тоже возможны: электротравма, спотыкание, падение предметов, поражение при неисправной технике.</a:t>
-            </a:r>
-          </a:p>
-        </p:txBody>
-      </p:sp>
-      <p:sp>
-        <p:nvSpPr>
-          <p:cNvPr id="37" name="Прямоугольник 36">
-            <a:extLst>
-              <a:ext uri="{FF2B5EF4-FFF2-40B4-BE49-F238E27FC236}">
-                <a16:creationId xmlns:a16="http://schemas.microsoft.com/office/drawing/2014/main" id="{247A25D5-0201-4715-B299-1F1450E9A577}"/>
-              </a:ext>
-            </a:extLst>
-          </p:cNvPr>
-          <p:cNvSpPr/>
-          <p:nvPr/>
-        </p:nvSpPr>
-        <p:spPr>
-          <a:xfrm>
-            <a:off x="1161068" y="1179856"/>
-            <a:ext cx="9869864" cy="4910435"/>
-          </a:xfrm>
-          <a:custGeom>
-            <a:avLst/>
-            <a:gdLst>
-              <a:gd name="connsiteX0" fmla="*/ 0 w 9869864"/>
-              <a:gd name="connsiteY0" fmla="*/ 0 h 4910435"/>
-              <a:gd name="connsiteX1" fmla="*/ 9869864 w 9869864"/>
-              <a:gd name="connsiteY1" fmla="*/ 0 h 4910435"/>
-              <a:gd name="connsiteX2" fmla="*/ 9869864 w 9869864"/>
-              <a:gd name="connsiteY2" fmla="*/ 4910435 h 4910435"/>
-              <a:gd name="connsiteX3" fmla="*/ 0 w 9869864"/>
-              <a:gd name="connsiteY3" fmla="*/ 4910435 h 4910435"/>
-              <a:gd name="connsiteX4" fmla="*/ 0 w 9869864"/>
-              <a:gd name="connsiteY4" fmla="*/ 0 h 4910435"/>
-            </a:gdLst>
-            <a:ahLst/>
-            <a:cxnLst>
-              <a:cxn ang="0">
-                <a:pos x="connsiteX0" y="connsiteY0"/>
-              </a:cxn>
-              <a:cxn ang="0">
-                <a:pos x="connsiteX1" y="connsiteY1"/>
-              </a:cxn>
-              <a:cxn ang="0">
-                <a:pos x="connsiteX2" y="connsiteY2"/>
-              </a:cxn>
-              <a:cxn ang="0">
-                <a:pos x="connsiteX3" y="connsiteY3"/>
-              </a:cxn>
-              <a:cxn ang="0">
-                <a:pos x="connsiteX4" y="connsiteY4"/>
-              </a:cxn>
-            </a:cxnLst>
-            <a:rect l="l" t="t" r="r" b="b"/>
-            <a:pathLst>
-              <a:path w="9869864" h="4910435" fill="none" extrusionOk="0">
-                <a:moveTo>
-                  <a:pt x="0" y="0"/>
-                </a:moveTo>
-                <a:cubicBezTo>
-                  <a:pt x="3831520" y="-159440"/>
-                  <a:pt x="6605196" y="19408"/>
-                  <a:pt x="9869864" y="0"/>
-                </a:cubicBezTo>
-                <a:cubicBezTo>
-                  <a:pt x="10027904" y="1667649"/>
-                  <a:pt x="9863463" y="3186992"/>
-                  <a:pt x="9869864" y="4910435"/>
-                </a:cubicBezTo>
-                <a:cubicBezTo>
-                  <a:pt x="7396228" y="4824203"/>
-                  <a:pt x="3393268" y="4827133"/>
-                  <a:pt x="0" y="4910435"/>
-                </a:cubicBezTo>
-                <a:cubicBezTo>
-                  <a:pt x="-145898" y="3099276"/>
-                  <a:pt x="-24387" y="660950"/>
-                  <a:pt x="0" y="0"/>
-                </a:cubicBezTo>
-                <a:close/>
-              </a:path>
-              <a:path w="9869864" h="4910435" stroke="0" extrusionOk="0">
-                <a:moveTo>
-                  <a:pt x="0" y="0"/>
-                </a:moveTo>
-                <a:cubicBezTo>
-                  <a:pt x="4863626" y="112754"/>
-                  <a:pt x="7115958" y="-67146"/>
-                  <a:pt x="9869864" y="0"/>
-                </a:cubicBezTo>
-                <a:cubicBezTo>
-                  <a:pt x="9961230" y="1206123"/>
-                  <a:pt x="9875015" y="2657538"/>
-                  <a:pt x="9869864" y="4910435"/>
-                </a:cubicBezTo>
-                <a:cubicBezTo>
-                  <a:pt x="6129429" y="4982865"/>
-                  <a:pt x="4447473" y="4989383"/>
-                  <a:pt x="0" y="4910435"/>
-                </a:cubicBezTo>
-                <a:cubicBezTo>
-                  <a:pt x="77396" y="3204905"/>
-                  <a:pt x="15692" y="2262567"/>
-                  <a:pt x="0" y="0"/>
-                </a:cubicBezTo>
-                <a:close/>
-              </a:path>
-            </a:pathLst>
-          </a:custGeom>
-          <a:solidFill>
-            <a:srgbClr val="DAE3F3"/>
-          </a:solidFill>
-          <a:ln>
-            <a:solidFill>
-              <a:schemeClr val="tx1"/>
-            </a:solidFill>
-            <a:extLst>
-              <a:ext uri="{C807C97D-BFC1-408E-A445-0C87EB9F89A2}">
-                <ask:lineSketchStyleProps xmlns:ask="http://schemas.microsoft.com/office/drawing/2018/sketchyshapes" sd="1336358556">
-                  <a:prstGeom prst="rect">
-                    <a:avLst/>
-                  </a:prstGeom>
-                  <ask:type>
-                    <ask:lineSketchCurved/>
-                  </ask:type>
-                </ask:lineSketchStyleProps>
-              </a:ext>
-            </a:extLst>
-          </a:ln>
-        </p:spPr>
-        <p:style>
-          <a:lnRef idx="2">
-            <a:schemeClr val="accent1">
-              <a:shade val="50000"/>
-            </a:schemeClr>
-          </a:lnRef>
-          <a:fillRef idx="1">
-            <a:schemeClr val="accent1"/>
-          </a:fillRef>
-          <a:effectRef idx="0">
-            <a:schemeClr val="accent1"/>
-          </a:effectRef>
-          <a:fontRef idx="minor">
-            <a:schemeClr val="lt1"/>
-          </a:fontRef>
-        </p:style>
-        <p:txBody>
-          <a:bodyPr rtlCol="0" anchor="ctr"/>
-          <a:lstStyle/>
-          <a:p>
-            <a:pPr algn="ctr"/>
-            <a:r>
-              <a:rPr sz="1400" b="1">
-                <a:solidFill>
-                  <a:srgbClr val="2F2F2F"/>
-                </a:solidFill>
-                <a:latin typeface="Century Gothic"/>
-              </a:rPr>
-              <a:t>Факторы, типичные для офиса</a:t>
-            </a:r>
-            <a:endParaRPr lang="ru-RU"/>
-          </a:p>
-          <a:p>
-            <a:r>
-              <a:rPr sz="1400" b="0">
-                <a:solidFill>
-                  <a:srgbClr val="2F2F2F"/>
-                </a:solidFill>
-                <a:latin typeface="Century Gothic"/>
-              </a:rPr>
-              <a:t>Чаще всего встречаются: микроклимат (жара, холод, сквозняки), освещённость, шум, электромагнитные поля от оргтехники, а также напряжённость труда при работе за компьютером.</a:t>
-            </a:r>
-          </a:p>
-        </p:txBody>
-      </p:sp>
-      <p:sp>
-        <p:nvSpPr>
-          <p:cNvPr id="42" name="TextBox 41">
-            <a:extLst>
-              <a:ext uri="{FF2B5EF4-FFF2-40B4-BE49-F238E27FC236}">
-                <a16:creationId xmlns:a16="http://schemas.microsoft.com/office/drawing/2014/main" id="{E393B0F4-C184-417F-9035-92EF3E107ED3}"/>
-              </a:ext>
-            </a:extLst>
-          </p:cNvPr>
-          <p:cNvSpPr txBox="1"/>
-          <p:nvPr/>
-        </p:nvSpPr>
-        <p:spPr>
-          <a:xfrm>
-            <a:off x="1665610" y="1467292"/>
-            <a:ext cx="8753605" cy="851580"/>
-          </a:xfrm>
-          <a:prstGeom prst="rect">
-            <a:avLst/>
-          </a:prstGeom>
-          <a:noFill/>
-        </p:spPr>
-        <p:txBody>
-          <a:bodyPr wrap="square">
-            <a:spAutoFit/>
-          </a:bodyPr>
-          <a:lstStyle/>
-          <a:p>
-            <a:pPr fontAlgn="base">
-              <a:lnSpc>
-                <a:spcPct val="150000"/>
-              </a:lnSpc>
-              <a:spcAft>
-                <a:spcPts val="1200"/>
-              </a:spcAft>
-            </a:pPr>
-            <a:endParaRPr lang="en-US" sz="1400" b="1" dirty="0">
-              <a:latin typeface="Century Gothic" panose="020B0502020202020204" pitchFamily="34" charset="0"/>
-              <a:ea typeface="Times New Roman" panose="02020603050405020304" pitchFamily="18" charset="0"/>
-            </a:endParaRPr>
-          </a:p>
-        </p:txBody>
-      </p:sp>
-      <p:sp>
-        <p:nvSpPr>
-          <p:cNvPr id="43" name="TextBox 42">
-            <a:extLst>
-              <a:ext uri="{FF2B5EF4-FFF2-40B4-BE49-F238E27FC236}">
-                <a16:creationId xmlns:a16="http://schemas.microsoft.com/office/drawing/2014/main" id="{0630E37F-2C87-4FDB-8FC5-870FFA1EDA19}"/>
-              </a:ext>
-            </a:extLst>
-          </p:cNvPr>
-          <p:cNvSpPr txBox="1"/>
-          <p:nvPr/>
-        </p:nvSpPr>
-        <p:spPr>
-          <a:xfrm>
-            <a:off x="1665610" y="2826543"/>
-            <a:ext cx="9133779" cy="1446614"/>
-          </a:xfrm>
-          <a:prstGeom prst="rect">
-            <a:avLst/>
-          </a:prstGeom>
-          <a:noFill/>
-        </p:spPr>
-        <p:txBody>
-          <a:bodyPr wrap="square">
-            <a:spAutoFit/>
-          </a:bodyPr>
-          <a:lstStyle/>
-          <a:p>
-            <a:pPr>
-              <a:lnSpc>
-                <a:spcPct val="150000"/>
-              </a:lnSpc>
-              <a:spcAft>
-                <a:spcPts val="800"/>
-              </a:spcAft>
-            </a:pPr>
-          </a:p>
-        </p:txBody>
-      </p:sp>
-    </p:spTree>
-    <p:custDataLst>
-      <p:tags r:id="rId1"/>
-    </p:custDataLst>
-    <p:extLst>
-      <p:ext uri="{BB962C8B-B14F-4D97-AF65-F5344CB8AC3E}">
-        <p14:creationId xmlns:p14="http://schemas.microsoft.com/office/powerpoint/2010/main" val="2275704587"/>
+        <p14:creationId xmlns:p14="http://schemas.microsoft.com/office/powerpoint/2010/main" val="852760726"/>
       </p:ext>
     </p:extLst>
   </p:cSld>

--- a/presentations/2.1_Klassifikaciya_ViOPF.pptx
+++ b/presentations/2.1_Klassifikaciya_ViOPF.pptx
@@ -10,6 +10,7 @@
   <p:sldIdLst>
     <p:sldId id="256" r:id="rId16"/>
     <p:sldId id="257" r:id="rId17"/>
+    <p:sldId id="266" r:id="rId26"/>
     <p:sldId id="258" r:id="rId18"/>
     <p:sldId id="259" r:id="rId19"/>
     <p:sldId id="260" r:id="rId20"/>
@@ -8508,6 +8509,1716 @@
       </p:grpSp>
       <p:sp>
         <p:nvSpPr>
+          <p:cNvPr id="43" name="Прямоугольник 42">
+            <a:extLst>
+              <a:ext uri="{FF2B5EF4-FFF2-40B4-BE49-F238E27FC236}">
+                <a16:creationId xmlns:a16="http://schemas.microsoft.com/office/drawing/2014/main" id="{F1BA58C8-CB0D-42C8-9353-C041814589B5}"/>
+              </a:ext>
+            </a:extLst>
+          </p:cNvPr>
+          <p:cNvSpPr/>
+          <p:nvPr/>
+        </p:nvSpPr>
+        <p:spPr>
+          <a:xfrm>
+            <a:off x="1522575" y="1523675"/>
+            <a:ext cx="9869864" cy="4479264"/>
+          </a:xfrm>
+          <a:custGeom>
+            <a:avLst/>
+            <a:gdLst>
+              <a:gd name="connsiteX0" fmla="*/ 0 w 9869864"/>
+              <a:gd name="connsiteY0" fmla="*/ 0 h 4479264"/>
+              <a:gd name="connsiteX1" fmla="*/ 9869864 w 9869864"/>
+              <a:gd name="connsiteY1" fmla="*/ 0 h 4479264"/>
+              <a:gd name="connsiteX2" fmla="*/ 9869864 w 9869864"/>
+              <a:gd name="connsiteY2" fmla="*/ 4479264 h 4479264"/>
+              <a:gd name="connsiteX3" fmla="*/ 0 w 9869864"/>
+              <a:gd name="connsiteY3" fmla="*/ 4479264 h 4479264"/>
+              <a:gd name="connsiteX4" fmla="*/ 0 w 9869864"/>
+              <a:gd name="connsiteY4" fmla="*/ 0 h 4479264"/>
+            </a:gdLst>
+            <a:ahLst/>
+            <a:cxnLst>
+              <a:cxn ang="0">
+                <a:pos x="connsiteX0" y="connsiteY0"/>
+              </a:cxn>
+              <a:cxn ang="0">
+                <a:pos x="connsiteX1" y="connsiteY1"/>
+              </a:cxn>
+              <a:cxn ang="0">
+                <a:pos x="connsiteX2" y="connsiteY2"/>
+              </a:cxn>
+              <a:cxn ang="0">
+                <a:pos x="connsiteX3" y="connsiteY3"/>
+              </a:cxn>
+              <a:cxn ang="0">
+                <a:pos x="connsiteX4" y="connsiteY4"/>
+              </a:cxn>
+            </a:cxnLst>
+            <a:rect l="l" t="t" r="r" b="b"/>
+            <a:pathLst>
+              <a:path w="9869864" h="4479264" fill="none" extrusionOk="0">
+                <a:moveTo>
+                  <a:pt x="0" y="0"/>
+                </a:moveTo>
+                <a:cubicBezTo>
+                  <a:pt x="3831520" y="-159440"/>
+                  <a:pt x="6605196" y="19408"/>
+                  <a:pt x="9869864" y="0"/>
+                </a:cubicBezTo>
+                <a:cubicBezTo>
+                  <a:pt x="10027904" y="2011379"/>
+                  <a:pt x="9863463" y="3133819"/>
+                  <a:pt x="9869864" y="4479264"/>
+                </a:cubicBezTo>
+                <a:cubicBezTo>
+                  <a:pt x="7396228" y="4393032"/>
+                  <a:pt x="3393268" y="4395962"/>
+                  <a:pt x="0" y="4479264"/>
+                </a:cubicBezTo>
+                <a:cubicBezTo>
+                  <a:pt x="-145898" y="3619195"/>
+                  <a:pt x="-24387" y="1200516"/>
+                  <a:pt x="0" y="0"/>
+                </a:cubicBezTo>
+                <a:close/>
+              </a:path>
+              <a:path w="9869864" h="4479264" stroke="0" extrusionOk="0">
+                <a:moveTo>
+                  <a:pt x="0" y="0"/>
+                </a:moveTo>
+                <a:cubicBezTo>
+                  <a:pt x="4863626" y="112754"/>
+                  <a:pt x="7115958" y="-67146"/>
+                  <a:pt x="9869864" y="0"/>
+                </a:cubicBezTo>
+                <a:cubicBezTo>
+                  <a:pt x="9961230" y="833996"/>
+                  <a:pt x="9875015" y="2860015"/>
+                  <a:pt x="9869864" y="4479264"/>
+                </a:cubicBezTo>
+                <a:cubicBezTo>
+                  <a:pt x="6129429" y="4551694"/>
+                  <a:pt x="4447473" y="4558212"/>
+                  <a:pt x="0" y="4479264"/>
+                </a:cubicBezTo>
+                <a:cubicBezTo>
+                  <a:pt x="77396" y="3799926"/>
+                  <a:pt x="15692" y="1626302"/>
+                  <a:pt x="0" y="0"/>
+                </a:cubicBezTo>
+                <a:close/>
+              </a:path>
+            </a:pathLst>
+          </a:custGeom>
+          <a:solidFill>
+            <a:schemeClr val="accent5">
+              <a:lumMod val="20000"/>
+              <a:lumOff val="80000"/>
+            </a:schemeClr>
+          </a:solidFill>
+          <a:ln>
+            <a:solidFill>
+              <a:schemeClr val="tx1"/>
+            </a:solidFill>
+            <a:extLst>
+              <a:ext uri="{C807C97D-BFC1-408E-A445-0C87EB9F89A2}">
+                <ask:lineSketchStyleProps xmlns:ask="http://schemas.microsoft.com/office/drawing/2018/sketchyshapes" sd="1336358556">
+                  <a:prstGeom prst="rect">
+                    <a:avLst/>
+                  </a:prstGeom>
+                  <ask:type>
+                    <ask:lineSketchCurved/>
+                  </ask:type>
+                </ask:lineSketchStyleProps>
+              </a:ext>
+            </a:extLst>
+          </a:ln>
+        </p:spPr>
+        <p:style>
+          <a:lnRef idx="2">
+            <a:schemeClr val="accent1">
+              <a:shade val="50000"/>
+            </a:schemeClr>
+          </a:lnRef>
+          <a:fillRef idx="1">
+            <a:schemeClr val="accent1"/>
+          </a:fillRef>
+          <a:effectRef idx="0">
+            <a:schemeClr val="accent1"/>
+          </a:effectRef>
+          <a:fontRef idx="minor">
+            <a:schemeClr val="lt1"/>
+          </a:fontRef>
+        </p:style>
+        <p:txBody>
+          <a:bodyPr rtlCol="0" anchor="ctr"/>
+          <a:lstStyle/>
+          <a:p>
+            <a:pPr algn="ctr"/>
+            <a:r>
+              <a:rPr sz="1400" b="1">
+                <a:solidFill>
+                  <a:srgbClr val="2F2F2F"/>
+                </a:solidFill>
+                <a:latin typeface="Century Gothic"/>
+              </a:rPr>
+              <a:t>Опасности и опасные факторы — не одно и то же</a:t>
+            </a:r>
+            <a:endParaRPr lang="ru-RU"/>
+          </a:p>
+          <a:p>
+            <a:r>
+              <a:rPr sz="800" b="0">
+                <a:solidFill>
+                  <a:srgbClr val="2F2F2F"/>
+                </a:solidFill>
+                <a:latin typeface="Century Gothic"/>
+              </a:rPr>
+              <a:t/>
+            </a:r>
+          </a:p>
+          <a:p>
+            <a:r>
+              <a:rPr sz="1400" b="0">
+                <a:solidFill>
+                  <a:srgbClr val="2F2F2F"/>
+                </a:solidFill>
+                <a:latin typeface="Century Gothic"/>
+              </a:rPr>
+              <a:t>На рабочем месте есть опасности — потенциальные источники вреда жизни и здоровью.</a:t>
+            </a:r>
+          </a:p>
+          <a:p>
+            <a:r>
+              <a:rPr sz="1400" b="0">
+                <a:solidFill>
+                  <a:srgbClr val="2F2F2F"/>
+                </a:solidFill>
+                <a:latin typeface="Century Gothic"/>
+              </a:rPr>
+              <a:t>Но кроме самих опасностей существуют вредные и опасные производственные факторы — конкретные воздействия, через которые эта угроза реализуется.</a:t>
+            </a:r>
+          </a:p>
+          <a:p>
+            <a:r>
+              <a:rPr sz="800" b="0">
+                <a:solidFill>
+                  <a:srgbClr val="2F2F2F"/>
+                </a:solidFill>
+                <a:latin typeface="Century Gothic"/>
+              </a:rPr>
+              <a:t/>
+            </a:r>
+          </a:p>
+          <a:p>
+            <a:r>
+              <a:rPr sz="1400" b="0">
+                <a:solidFill>
+                  <a:srgbClr val="2F2F2F"/>
+                </a:solidFill>
+                <a:latin typeface="Century Gothic"/>
+              </a:rPr>
+              <a:t>Опасный фактор может привести к травме, вредный — к заболеванию. Поэтому важно не только «видеть опасность», но и понимать, какие именно факторы действуют на рабочем месте.</a:t>
+            </a:r>
+          </a:p>
+        </p:txBody>
+      </p:sp>
+      <p:sp>
+        <p:nvSpPr>
+          <p:cNvPr id="37" name="Прямоугольник 36">
+            <a:extLst>
+              <a:ext uri="{FF2B5EF4-FFF2-40B4-BE49-F238E27FC236}">
+                <a16:creationId xmlns:a16="http://schemas.microsoft.com/office/drawing/2014/main" id="{247A25D5-0201-4715-B299-1F1450E9A577}"/>
+              </a:ext>
+            </a:extLst>
+          </p:cNvPr>
+          <p:cNvSpPr/>
+          <p:nvPr/>
+        </p:nvSpPr>
+        <p:spPr>
+          <a:xfrm>
+            <a:off x="1161068" y="1179857"/>
+            <a:ext cx="9869864" cy="4479264"/>
+          </a:xfrm>
+          <a:custGeom>
+            <a:avLst/>
+            <a:gdLst>
+              <a:gd name="connsiteX0" fmla="*/ 0 w 9869864"/>
+              <a:gd name="connsiteY0" fmla="*/ 0 h 4479264"/>
+              <a:gd name="connsiteX1" fmla="*/ 9869864 w 9869864"/>
+              <a:gd name="connsiteY1" fmla="*/ 0 h 4479264"/>
+              <a:gd name="connsiteX2" fmla="*/ 9869864 w 9869864"/>
+              <a:gd name="connsiteY2" fmla="*/ 4479264 h 4479264"/>
+              <a:gd name="connsiteX3" fmla="*/ 0 w 9869864"/>
+              <a:gd name="connsiteY3" fmla="*/ 4479264 h 4479264"/>
+              <a:gd name="connsiteX4" fmla="*/ 0 w 9869864"/>
+              <a:gd name="connsiteY4" fmla="*/ 0 h 4479264"/>
+            </a:gdLst>
+            <a:ahLst/>
+            <a:cxnLst>
+              <a:cxn ang="0">
+                <a:pos x="connsiteX0" y="connsiteY0"/>
+              </a:cxn>
+              <a:cxn ang="0">
+                <a:pos x="connsiteX1" y="connsiteY1"/>
+              </a:cxn>
+              <a:cxn ang="0">
+                <a:pos x="connsiteX2" y="connsiteY2"/>
+              </a:cxn>
+              <a:cxn ang="0">
+                <a:pos x="connsiteX3" y="connsiteY3"/>
+              </a:cxn>
+              <a:cxn ang="0">
+                <a:pos x="connsiteX4" y="connsiteY4"/>
+              </a:cxn>
+            </a:cxnLst>
+            <a:rect l="l" t="t" r="r" b="b"/>
+            <a:pathLst>
+              <a:path w="9869864" h="4479264" fill="none" extrusionOk="0">
+                <a:moveTo>
+                  <a:pt x="0" y="0"/>
+                </a:moveTo>
+                <a:cubicBezTo>
+                  <a:pt x="3831520" y="-159440"/>
+                  <a:pt x="6605196" y="19408"/>
+                  <a:pt x="9869864" y="0"/>
+                </a:cubicBezTo>
+                <a:cubicBezTo>
+                  <a:pt x="10027904" y="2011379"/>
+                  <a:pt x="9863463" y="3133819"/>
+                  <a:pt x="9869864" y="4479264"/>
+                </a:cubicBezTo>
+                <a:cubicBezTo>
+                  <a:pt x="7396228" y="4393032"/>
+                  <a:pt x="3393268" y="4395962"/>
+                  <a:pt x="0" y="4479264"/>
+                </a:cubicBezTo>
+                <a:cubicBezTo>
+                  <a:pt x="-145898" y="3619195"/>
+                  <a:pt x="-24387" y="1200516"/>
+                  <a:pt x="0" y="0"/>
+                </a:cubicBezTo>
+                <a:close/>
+              </a:path>
+              <a:path w="9869864" h="4479264" stroke="0" extrusionOk="0">
+                <a:moveTo>
+                  <a:pt x="0" y="0"/>
+                </a:moveTo>
+                <a:cubicBezTo>
+                  <a:pt x="4863626" y="112754"/>
+                  <a:pt x="7115958" y="-67146"/>
+                  <a:pt x="9869864" y="0"/>
+                </a:cubicBezTo>
+                <a:cubicBezTo>
+                  <a:pt x="9961230" y="833996"/>
+                  <a:pt x="9875015" y="2860015"/>
+                  <a:pt x="9869864" y="4479264"/>
+                </a:cubicBezTo>
+                <a:cubicBezTo>
+                  <a:pt x="6129429" y="4551694"/>
+                  <a:pt x="4447473" y="4558212"/>
+                  <a:pt x="0" y="4479264"/>
+                </a:cubicBezTo>
+                <a:cubicBezTo>
+                  <a:pt x="77396" y="3799926"/>
+                  <a:pt x="15692" y="1626302"/>
+                  <a:pt x="0" y="0"/>
+                </a:cubicBezTo>
+                <a:close/>
+              </a:path>
+            </a:pathLst>
+          </a:custGeom>
+          <a:solidFill>
+            <a:srgbClr val="DAE3F3"/>
+          </a:solidFill>
+          <a:ln>
+            <a:solidFill>
+              <a:schemeClr val="tx1"/>
+            </a:solidFill>
+            <a:extLst>
+              <a:ext uri="{C807C97D-BFC1-408E-A445-0C87EB9F89A2}">
+                <ask:lineSketchStyleProps xmlns:ask="http://schemas.microsoft.com/office/drawing/2018/sketchyshapes" sd="1336358556">
+                  <a:prstGeom prst="rect">
+                    <a:avLst/>
+                  </a:prstGeom>
+                  <ask:type>
+                    <ask:lineSketchCurved/>
+                  </ask:type>
+                </ask:lineSketchStyleProps>
+              </a:ext>
+            </a:extLst>
+          </a:ln>
+        </p:spPr>
+        <p:style>
+          <a:lnRef idx="2">
+            <a:schemeClr val="accent1">
+              <a:shade val="50000"/>
+            </a:schemeClr>
+          </a:lnRef>
+          <a:fillRef idx="1">
+            <a:schemeClr val="accent1"/>
+          </a:fillRef>
+          <a:effectRef idx="0">
+            <a:schemeClr val="accent1"/>
+          </a:effectRef>
+          <a:fontRef idx="minor">
+            <a:schemeClr val="lt1"/>
+          </a:fontRef>
+        </p:style>
+        <p:txBody>
+          <a:bodyPr rtlCol="0" anchor="ctr"/>
+          <a:lstStyle/>
+          <a:p>
+            <a:pPr algn="ctr"/>
+            <a:endParaRPr lang="ru-RU"/>
+          </a:p>
+        </p:txBody>
+      </p:sp>
+      <p:sp>
+        <p:nvSpPr>
+          <p:cNvPr id="42" name="TextBox 41">
+            <a:extLst>
+              <a:ext uri="{FF2B5EF4-FFF2-40B4-BE49-F238E27FC236}">
+                <a16:creationId xmlns:a16="http://schemas.microsoft.com/office/drawing/2014/main" id="{6C2623F0-1205-437B-80EB-293BD3B22892}"/>
+              </a:ext>
+            </a:extLst>
+          </p:cNvPr>
+          <p:cNvSpPr txBox="1"/>
+          <p:nvPr/>
+        </p:nvSpPr>
+        <p:spPr>
+          <a:xfrm>
+            <a:off x="1862359" y="1736635"/>
+            <a:ext cx="8915312" cy="3283015"/>
+          </a:xfrm>
+          <a:prstGeom prst="rect">
+            <a:avLst/>
+          </a:prstGeom>
+          <a:noFill/>
+        </p:spPr>
+        <p:txBody>
+          <a:bodyPr wrap="square">
+            <a:spAutoFit/>
+          </a:bodyPr>
+          <a:lstStyle/>
+          <a:p>
+            <a:pPr>
+              <a:lnSpc>
+                <a:spcPct val="150000"/>
+              </a:lnSpc>
+            </a:pPr>
+          </a:p>
+        </p:txBody>
+      </p:sp>
+      <p:pic>
+        <p:nvPicPr>
+          <p:cNvPr id="2" name="Рисунок 1">
+            <a:extLst>
+              <a:ext uri="{FF2B5EF4-FFF2-40B4-BE49-F238E27FC236}">
+                <a16:creationId xmlns:a16="http://schemas.microsoft.com/office/drawing/2014/main" id="{1238151D-9F0E-404B-808F-017B8F6E2F83}"/>
+              </a:ext>
+            </a:extLst>
+          </p:cNvPr>
+          <p:cNvPicPr>
+            <a:picLocks noChangeAspect="1"/>
+          </p:cNvPicPr>
+          <p:nvPr/>
+        </p:nvPicPr>
+        <p:blipFill>
+          <a:blip r:embed="rId4"/>
+          <a:stretch>
+            <a:fillRect/>
+          </a:stretch>
+        </p:blipFill>
+        <p:spPr>
+          <a:xfrm>
+            <a:off x="1350570" y="1741601"/>
+            <a:ext cx="511789" cy="511789"/>
+          </a:xfrm>
+          <a:prstGeom prst="rect">
+            <a:avLst/>
+          </a:prstGeom>
+        </p:spPr>
+      </p:pic>
+    </p:spTree>
+    <p:custDataLst>
+      <p:tags r:id="rId1"/>
+    </p:custDataLst>
+    <p:extLst>
+      <p:ext uri="{BB962C8B-B14F-4D97-AF65-F5344CB8AC3E}">
+        <p14:creationId xmlns:p14="http://schemas.microsoft.com/office/powerpoint/2010/main" val="852760726"/>
+      </p:ext>
+    </p:extLst>
+  </p:cSld>
+  <p:clrMapOvr>
+    <a:masterClrMapping/>
+  </p:clrMapOvr>
+</p:sld>
+</file>
+
+<file path=ppt/slides/slide4.xml><?xml version="1.0" encoding="utf-8"?>
+<p:sld xmlns:a="http://schemas.openxmlformats.org/drawingml/2006/main" xmlns:r="http://schemas.openxmlformats.org/officeDocument/2006/relationships" xmlns:p="http://schemas.openxmlformats.org/presentationml/2006/main">
+  <p:cSld>
+    <p:spTree>
+      <p:nvGrpSpPr>
+        <p:cNvPr id="1" name=""/>
+        <p:cNvGrpSpPr/>
+        <p:nvPr/>
+      </p:nvGrpSpPr>
+      <p:grpSpPr>
+        <a:xfrm>
+          <a:off x="0" y="0"/>
+          <a:ext cx="0" cy="0"/>
+          <a:chOff x="0" y="0"/>
+          <a:chExt cx="0" cy="0"/>
+        </a:xfrm>
+      </p:grpSpPr>
+      <p:grpSp>
+        <p:nvGrpSpPr>
+          <p:cNvPr id="36" name="Группа 35">
+            <a:extLst>
+              <a:ext uri="{FF2B5EF4-FFF2-40B4-BE49-F238E27FC236}">
+                <a16:creationId xmlns:a16="http://schemas.microsoft.com/office/drawing/2014/main" id="{7FF1FBDA-7EF8-4E32-B285-B9BF1A70F363}"/>
+              </a:ext>
+            </a:extLst>
+          </p:cNvPr>
+          <p:cNvGrpSpPr/>
+          <p:nvPr/>
+        </p:nvGrpSpPr>
+        <p:grpSpPr>
+          <a:xfrm>
+            <a:off x="0" y="-214817"/>
+            <a:ext cx="13248168" cy="7072817"/>
+            <a:chOff x="0" y="-4170772"/>
+            <a:chExt cx="13248168" cy="7072817"/>
+          </a:xfrm>
+        </p:grpSpPr>
+        <p:grpSp>
+          <p:nvGrpSpPr>
+            <p:cNvPr id="6" name="Группа 5">
+              <a:extLst>
+                <a:ext uri="{FF2B5EF4-FFF2-40B4-BE49-F238E27FC236}">
+                  <a16:creationId xmlns:a16="http://schemas.microsoft.com/office/drawing/2014/main" id="{D194E697-28B3-404D-8A29-F48E94BF6241}"/>
+                </a:ext>
+              </a:extLst>
+            </p:cNvPr>
+            <p:cNvGrpSpPr/>
+            <p:nvPr/>
+          </p:nvGrpSpPr>
+          <p:grpSpPr>
+            <a:xfrm>
+              <a:off x="0" y="-4170772"/>
+              <a:ext cx="13248168" cy="7072817"/>
+              <a:chOff x="-166577" y="-12798"/>
+              <a:chExt cx="13248168" cy="7072817"/>
+            </a:xfrm>
+          </p:grpSpPr>
+          <p:cxnSp>
+            <p:nvCxnSpPr>
+              <p:cNvPr id="7" name="Прямая соединительная линия 6">
+                <a:extLst>
+                  <a:ext uri="{FF2B5EF4-FFF2-40B4-BE49-F238E27FC236}">
+                    <a16:creationId xmlns:a16="http://schemas.microsoft.com/office/drawing/2014/main" id="{82C61482-8E50-4404-94EC-6B83D92F983D}"/>
+                  </a:ext>
+                </a:extLst>
+              </p:cNvPr>
+              <p:cNvCxnSpPr/>
+              <p:nvPr/>
+            </p:nvCxnSpPr>
+            <p:spPr>
+              <a:xfrm>
+                <a:off x="340242" y="202019"/>
+                <a:ext cx="0" cy="6858000"/>
+              </a:xfrm>
+              <a:prstGeom prst="line">
+                <a:avLst/>
+              </a:prstGeom>
+              <a:ln>
+                <a:solidFill>
+                  <a:schemeClr val="tx1"/>
+                </a:solidFill>
+              </a:ln>
+            </p:spPr>
+            <p:style>
+              <a:lnRef idx="1">
+                <a:schemeClr val="accent1"/>
+              </a:lnRef>
+              <a:fillRef idx="0">
+                <a:schemeClr val="accent1"/>
+              </a:fillRef>
+              <a:effectRef idx="0">
+                <a:schemeClr val="accent1"/>
+              </a:effectRef>
+              <a:fontRef idx="minor">
+                <a:schemeClr val="tx1"/>
+              </a:fontRef>
+            </p:style>
+          </p:cxnSp>
+          <p:cxnSp>
+            <p:nvCxnSpPr>
+              <p:cNvPr id="8" name="Прямая соединительная линия 7">
+                <a:extLst>
+                  <a:ext uri="{FF2B5EF4-FFF2-40B4-BE49-F238E27FC236}">
+                    <a16:creationId xmlns:a16="http://schemas.microsoft.com/office/drawing/2014/main" id="{79FD2ADB-6B7C-417E-8070-20B7AC7BEC87}"/>
+                  </a:ext>
+                </a:extLst>
+              </p:cNvPr>
+              <p:cNvCxnSpPr>
+                <a:cxnSpLocks/>
+              </p:cNvCxnSpPr>
+              <p:nvPr/>
+            </p:nvCxnSpPr>
+            <p:spPr>
+              <a:xfrm>
+                <a:off x="1063257" y="0"/>
+                <a:ext cx="0" cy="7060019"/>
+              </a:xfrm>
+              <a:prstGeom prst="line">
+                <a:avLst/>
+              </a:prstGeom>
+              <a:ln>
+                <a:solidFill>
+                  <a:schemeClr val="tx1"/>
+                </a:solidFill>
+              </a:ln>
+            </p:spPr>
+            <p:style>
+              <a:lnRef idx="1">
+                <a:schemeClr val="accent1"/>
+              </a:lnRef>
+              <a:fillRef idx="0">
+                <a:schemeClr val="accent1"/>
+              </a:fillRef>
+              <a:effectRef idx="0">
+                <a:schemeClr val="accent1"/>
+              </a:effectRef>
+              <a:fontRef idx="minor">
+                <a:schemeClr val="tx1"/>
+              </a:fontRef>
+            </p:style>
+          </p:cxnSp>
+          <p:cxnSp>
+            <p:nvCxnSpPr>
+              <p:cNvPr id="9" name="Прямая соединительная линия 8">
+                <a:extLst>
+                  <a:ext uri="{FF2B5EF4-FFF2-40B4-BE49-F238E27FC236}">
+                    <a16:creationId xmlns:a16="http://schemas.microsoft.com/office/drawing/2014/main" id="{742E3E11-256E-4150-8476-2708422F0F21}"/>
+                  </a:ext>
+                </a:extLst>
+              </p:cNvPr>
+              <p:cNvCxnSpPr>
+                <a:cxnSpLocks/>
+              </p:cNvCxnSpPr>
+              <p:nvPr/>
+            </p:nvCxnSpPr>
+            <p:spPr>
+              <a:xfrm>
+                <a:off x="1786271" y="0"/>
+                <a:ext cx="0" cy="7060019"/>
+              </a:xfrm>
+              <a:prstGeom prst="line">
+                <a:avLst/>
+              </a:prstGeom>
+              <a:ln>
+                <a:solidFill>
+                  <a:schemeClr val="tx1"/>
+                </a:solidFill>
+              </a:ln>
+            </p:spPr>
+            <p:style>
+              <a:lnRef idx="1">
+                <a:schemeClr val="accent1"/>
+              </a:lnRef>
+              <a:fillRef idx="0">
+                <a:schemeClr val="accent1"/>
+              </a:fillRef>
+              <a:effectRef idx="0">
+                <a:schemeClr val="accent1"/>
+              </a:effectRef>
+              <a:fontRef idx="minor">
+                <a:schemeClr val="tx1"/>
+              </a:fontRef>
+            </p:style>
+          </p:cxnSp>
+          <p:cxnSp>
+            <p:nvCxnSpPr>
+              <p:cNvPr id="10" name="Прямая соединительная линия 9">
+                <a:extLst>
+                  <a:ext uri="{FF2B5EF4-FFF2-40B4-BE49-F238E27FC236}">
+                    <a16:creationId xmlns:a16="http://schemas.microsoft.com/office/drawing/2014/main" id="{71A89E76-8A26-4714-A28B-178CFA97EAA9}"/>
+                  </a:ext>
+                </a:extLst>
+              </p:cNvPr>
+              <p:cNvCxnSpPr>
+                <a:cxnSpLocks/>
+              </p:cNvCxnSpPr>
+              <p:nvPr/>
+            </p:nvCxnSpPr>
+            <p:spPr>
+              <a:xfrm>
+                <a:off x="2498653" y="0"/>
+                <a:ext cx="0" cy="7060019"/>
+              </a:xfrm>
+              <a:prstGeom prst="line">
+                <a:avLst/>
+              </a:prstGeom>
+              <a:ln>
+                <a:solidFill>
+                  <a:schemeClr val="tx1"/>
+                </a:solidFill>
+              </a:ln>
+            </p:spPr>
+            <p:style>
+              <a:lnRef idx="1">
+                <a:schemeClr val="accent1"/>
+              </a:lnRef>
+              <a:fillRef idx="0">
+                <a:schemeClr val="accent1"/>
+              </a:fillRef>
+              <a:effectRef idx="0">
+                <a:schemeClr val="accent1"/>
+              </a:effectRef>
+              <a:fontRef idx="minor">
+                <a:schemeClr val="tx1"/>
+              </a:fontRef>
+            </p:style>
+          </p:cxnSp>
+          <p:cxnSp>
+            <p:nvCxnSpPr>
+              <p:cNvPr id="11" name="Прямая соединительная линия 10">
+                <a:extLst>
+                  <a:ext uri="{FF2B5EF4-FFF2-40B4-BE49-F238E27FC236}">
+                    <a16:creationId xmlns:a16="http://schemas.microsoft.com/office/drawing/2014/main" id="{35DE7A21-97FE-45D0-A8C3-5D5C44459CD8}"/>
+                  </a:ext>
+                </a:extLst>
+              </p:cNvPr>
+              <p:cNvCxnSpPr>
+                <a:cxnSpLocks/>
+              </p:cNvCxnSpPr>
+              <p:nvPr/>
+            </p:nvCxnSpPr>
+            <p:spPr>
+              <a:xfrm>
+                <a:off x="3211034" y="0"/>
+                <a:ext cx="0" cy="7060019"/>
+              </a:xfrm>
+              <a:prstGeom prst="line">
+                <a:avLst/>
+              </a:prstGeom>
+              <a:ln>
+                <a:solidFill>
+                  <a:schemeClr val="tx1"/>
+                </a:solidFill>
+              </a:ln>
+            </p:spPr>
+            <p:style>
+              <a:lnRef idx="1">
+                <a:schemeClr val="accent1"/>
+              </a:lnRef>
+              <a:fillRef idx="0">
+                <a:schemeClr val="accent1"/>
+              </a:fillRef>
+              <a:effectRef idx="0">
+                <a:schemeClr val="accent1"/>
+              </a:effectRef>
+              <a:fontRef idx="minor">
+                <a:schemeClr val="tx1"/>
+              </a:fontRef>
+            </p:style>
+          </p:cxnSp>
+          <p:cxnSp>
+            <p:nvCxnSpPr>
+              <p:cNvPr id="12" name="Прямая соединительная линия 11">
+                <a:extLst>
+                  <a:ext uri="{FF2B5EF4-FFF2-40B4-BE49-F238E27FC236}">
+                    <a16:creationId xmlns:a16="http://schemas.microsoft.com/office/drawing/2014/main" id="{2230EA40-BFDD-4F33-9739-A1F381E44FCA}"/>
+                  </a:ext>
+                </a:extLst>
+              </p:cNvPr>
+              <p:cNvCxnSpPr>
+                <a:cxnSpLocks/>
+              </p:cNvCxnSpPr>
+              <p:nvPr/>
+            </p:nvCxnSpPr>
+            <p:spPr>
+              <a:xfrm>
+                <a:off x="3934048" y="0"/>
+                <a:ext cx="0" cy="7060019"/>
+              </a:xfrm>
+              <a:prstGeom prst="line">
+                <a:avLst/>
+              </a:prstGeom>
+              <a:ln>
+                <a:solidFill>
+                  <a:schemeClr val="tx1"/>
+                </a:solidFill>
+              </a:ln>
+            </p:spPr>
+            <p:style>
+              <a:lnRef idx="1">
+                <a:schemeClr val="accent1"/>
+              </a:lnRef>
+              <a:fillRef idx="0">
+                <a:schemeClr val="accent1"/>
+              </a:fillRef>
+              <a:effectRef idx="0">
+                <a:schemeClr val="accent1"/>
+              </a:effectRef>
+              <a:fontRef idx="minor">
+                <a:schemeClr val="tx1"/>
+              </a:fontRef>
+            </p:style>
+          </p:cxnSp>
+          <p:cxnSp>
+            <p:nvCxnSpPr>
+              <p:cNvPr id="13" name="Прямая соединительная линия 12">
+                <a:extLst>
+                  <a:ext uri="{FF2B5EF4-FFF2-40B4-BE49-F238E27FC236}">
+                    <a16:creationId xmlns:a16="http://schemas.microsoft.com/office/drawing/2014/main" id="{A2F0D873-D58C-44BF-9302-3E5185DD141C}"/>
+                  </a:ext>
+                </a:extLst>
+              </p:cNvPr>
+              <p:cNvCxnSpPr>
+                <a:cxnSpLocks/>
+              </p:cNvCxnSpPr>
+              <p:nvPr/>
+            </p:nvCxnSpPr>
+            <p:spPr>
+              <a:xfrm flipH="1">
+                <a:off x="-95693" y="552893"/>
+                <a:ext cx="12525153" cy="0"/>
+              </a:xfrm>
+              <a:prstGeom prst="line">
+                <a:avLst/>
+              </a:prstGeom>
+              <a:ln>
+                <a:solidFill>
+                  <a:schemeClr val="tx1"/>
+                </a:solidFill>
+              </a:ln>
+            </p:spPr>
+            <p:style>
+              <a:lnRef idx="1">
+                <a:schemeClr val="accent1"/>
+              </a:lnRef>
+              <a:fillRef idx="0">
+                <a:schemeClr val="accent1"/>
+              </a:fillRef>
+              <a:effectRef idx="0">
+                <a:schemeClr val="accent1"/>
+              </a:effectRef>
+              <a:fontRef idx="minor">
+                <a:schemeClr val="tx1"/>
+              </a:fontRef>
+            </p:style>
+          </p:cxnSp>
+          <p:cxnSp>
+            <p:nvCxnSpPr>
+              <p:cNvPr id="14" name="Прямая соединительная линия 13">
+                <a:extLst>
+                  <a:ext uri="{FF2B5EF4-FFF2-40B4-BE49-F238E27FC236}">
+                    <a16:creationId xmlns:a16="http://schemas.microsoft.com/office/drawing/2014/main" id="{4B549B82-A1D8-4959-A4BA-6626F5C7E9EA}"/>
+                  </a:ext>
+                </a:extLst>
+              </p:cNvPr>
+              <p:cNvCxnSpPr>
+                <a:cxnSpLocks/>
+              </p:cNvCxnSpPr>
+              <p:nvPr/>
+            </p:nvCxnSpPr>
+            <p:spPr>
+              <a:xfrm flipH="1">
+                <a:off x="-166577" y="1265274"/>
+                <a:ext cx="12525153" cy="0"/>
+              </a:xfrm>
+              <a:prstGeom prst="line">
+                <a:avLst/>
+              </a:prstGeom>
+              <a:ln>
+                <a:solidFill>
+                  <a:schemeClr val="tx1"/>
+                </a:solidFill>
+              </a:ln>
+            </p:spPr>
+            <p:style>
+              <a:lnRef idx="1">
+                <a:schemeClr val="accent1"/>
+              </a:lnRef>
+              <a:fillRef idx="0">
+                <a:schemeClr val="accent1"/>
+              </a:fillRef>
+              <a:effectRef idx="0">
+                <a:schemeClr val="accent1"/>
+              </a:effectRef>
+              <a:fontRef idx="minor">
+                <a:schemeClr val="tx1"/>
+              </a:fontRef>
+            </p:style>
+          </p:cxnSp>
+          <p:cxnSp>
+            <p:nvCxnSpPr>
+              <p:cNvPr id="15" name="Прямая соединительная линия 14">
+                <a:extLst>
+                  <a:ext uri="{FF2B5EF4-FFF2-40B4-BE49-F238E27FC236}">
+                    <a16:creationId xmlns:a16="http://schemas.microsoft.com/office/drawing/2014/main" id="{7E902903-75AC-495E-92CC-0E6B41592315}"/>
+                  </a:ext>
+                </a:extLst>
+              </p:cNvPr>
+              <p:cNvCxnSpPr>
+                <a:cxnSpLocks/>
+              </p:cNvCxnSpPr>
+              <p:nvPr/>
+            </p:nvCxnSpPr>
+            <p:spPr>
+              <a:xfrm flipH="1">
+                <a:off x="-166577" y="1988287"/>
+                <a:ext cx="12525153" cy="0"/>
+              </a:xfrm>
+              <a:prstGeom prst="line">
+                <a:avLst/>
+              </a:prstGeom>
+              <a:ln>
+                <a:solidFill>
+                  <a:schemeClr val="tx1"/>
+                </a:solidFill>
+              </a:ln>
+            </p:spPr>
+            <p:style>
+              <a:lnRef idx="1">
+                <a:schemeClr val="accent1"/>
+              </a:lnRef>
+              <a:fillRef idx="0">
+                <a:schemeClr val="accent1"/>
+              </a:fillRef>
+              <a:effectRef idx="0">
+                <a:schemeClr val="accent1"/>
+              </a:effectRef>
+              <a:fontRef idx="minor">
+                <a:schemeClr val="tx1"/>
+              </a:fontRef>
+            </p:style>
+          </p:cxnSp>
+          <p:cxnSp>
+            <p:nvCxnSpPr>
+              <p:cNvPr id="16" name="Прямая соединительная линия 15">
+                <a:extLst>
+                  <a:ext uri="{FF2B5EF4-FFF2-40B4-BE49-F238E27FC236}">
+                    <a16:creationId xmlns:a16="http://schemas.microsoft.com/office/drawing/2014/main" id="{C10264B3-AA1B-4EDA-BFE4-9A014BE9E499}"/>
+                  </a:ext>
+                </a:extLst>
+              </p:cNvPr>
+              <p:cNvCxnSpPr>
+                <a:cxnSpLocks/>
+              </p:cNvCxnSpPr>
+              <p:nvPr/>
+            </p:nvCxnSpPr>
+            <p:spPr>
+              <a:xfrm flipH="1">
+                <a:off x="-166577" y="2711302"/>
+                <a:ext cx="12525153" cy="0"/>
+              </a:xfrm>
+              <a:prstGeom prst="line">
+                <a:avLst/>
+              </a:prstGeom>
+              <a:ln>
+                <a:solidFill>
+                  <a:schemeClr val="tx1"/>
+                </a:solidFill>
+              </a:ln>
+            </p:spPr>
+            <p:style>
+              <a:lnRef idx="1">
+                <a:schemeClr val="accent1"/>
+              </a:lnRef>
+              <a:fillRef idx="0">
+                <a:schemeClr val="accent1"/>
+              </a:fillRef>
+              <a:effectRef idx="0">
+                <a:schemeClr val="accent1"/>
+              </a:effectRef>
+              <a:fontRef idx="minor">
+                <a:schemeClr val="tx1"/>
+              </a:fontRef>
+            </p:style>
+          </p:cxnSp>
+          <p:cxnSp>
+            <p:nvCxnSpPr>
+              <p:cNvPr id="17" name="Прямая соединительная линия 16">
+                <a:extLst>
+                  <a:ext uri="{FF2B5EF4-FFF2-40B4-BE49-F238E27FC236}">
+                    <a16:creationId xmlns:a16="http://schemas.microsoft.com/office/drawing/2014/main" id="{7DB95352-4A59-44BD-9F84-7A56998CFE6C}"/>
+                  </a:ext>
+                </a:extLst>
+              </p:cNvPr>
+              <p:cNvCxnSpPr>
+                <a:cxnSpLocks/>
+              </p:cNvCxnSpPr>
+              <p:nvPr/>
+            </p:nvCxnSpPr>
+            <p:spPr>
+              <a:xfrm flipH="1">
+                <a:off x="-166577" y="3429000"/>
+                <a:ext cx="12525153" cy="0"/>
+              </a:xfrm>
+              <a:prstGeom prst="line">
+                <a:avLst/>
+              </a:prstGeom>
+              <a:ln>
+                <a:solidFill>
+                  <a:schemeClr val="tx1"/>
+                </a:solidFill>
+              </a:ln>
+            </p:spPr>
+            <p:style>
+              <a:lnRef idx="1">
+                <a:schemeClr val="accent1"/>
+              </a:lnRef>
+              <a:fillRef idx="0">
+                <a:schemeClr val="accent1"/>
+              </a:fillRef>
+              <a:effectRef idx="0">
+                <a:schemeClr val="accent1"/>
+              </a:effectRef>
+              <a:fontRef idx="minor">
+                <a:schemeClr val="tx1"/>
+              </a:fontRef>
+            </p:style>
+          </p:cxnSp>
+          <p:cxnSp>
+            <p:nvCxnSpPr>
+              <p:cNvPr id="18" name="Прямая соединительная линия 17">
+                <a:extLst>
+                  <a:ext uri="{FF2B5EF4-FFF2-40B4-BE49-F238E27FC236}">
+                    <a16:creationId xmlns:a16="http://schemas.microsoft.com/office/drawing/2014/main" id="{B374052C-54F7-4119-BB4C-01EBB5D6B2F6}"/>
+                  </a:ext>
+                </a:extLst>
+              </p:cNvPr>
+              <p:cNvCxnSpPr>
+                <a:cxnSpLocks/>
+              </p:cNvCxnSpPr>
+              <p:nvPr/>
+            </p:nvCxnSpPr>
+            <p:spPr>
+              <a:xfrm flipH="1">
+                <a:off x="-166577" y="4152013"/>
+                <a:ext cx="12525153" cy="0"/>
+              </a:xfrm>
+              <a:prstGeom prst="line">
+                <a:avLst/>
+              </a:prstGeom>
+              <a:ln>
+                <a:solidFill>
+                  <a:schemeClr val="tx1"/>
+                </a:solidFill>
+              </a:ln>
+            </p:spPr>
+            <p:style>
+              <a:lnRef idx="1">
+                <a:schemeClr val="accent1"/>
+              </a:lnRef>
+              <a:fillRef idx="0">
+                <a:schemeClr val="accent1"/>
+              </a:fillRef>
+              <a:effectRef idx="0">
+                <a:schemeClr val="accent1"/>
+              </a:effectRef>
+              <a:fontRef idx="minor">
+                <a:schemeClr val="tx1"/>
+              </a:fontRef>
+            </p:style>
+          </p:cxnSp>
+          <p:cxnSp>
+            <p:nvCxnSpPr>
+              <p:cNvPr id="19" name="Прямая соединительная линия 18">
+                <a:extLst>
+                  <a:ext uri="{FF2B5EF4-FFF2-40B4-BE49-F238E27FC236}">
+                    <a16:creationId xmlns:a16="http://schemas.microsoft.com/office/drawing/2014/main" id="{A0FD0A9A-69F9-4170-BA94-3846FED025DA}"/>
+                  </a:ext>
+                </a:extLst>
+              </p:cNvPr>
+              <p:cNvCxnSpPr>
+                <a:cxnSpLocks/>
+              </p:cNvCxnSpPr>
+              <p:nvPr/>
+            </p:nvCxnSpPr>
+            <p:spPr>
+              <a:xfrm flipH="1">
+                <a:off x="-166577" y="4875027"/>
+                <a:ext cx="12525153" cy="0"/>
+              </a:xfrm>
+              <a:prstGeom prst="line">
+                <a:avLst/>
+              </a:prstGeom>
+              <a:ln>
+                <a:solidFill>
+                  <a:schemeClr val="tx1"/>
+                </a:solidFill>
+              </a:ln>
+            </p:spPr>
+            <p:style>
+              <a:lnRef idx="1">
+                <a:schemeClr val="accent1"/>
+              </a:lnRef>
+              <a:fillRef idx="0">
+                <a:schemeClr val="accent1"/>
+              </a:fillRef>
+              <a:effectRef idx="0">
+                <a:schemeClr val="accent1"/>
+              </a:effectRef>
+              <a:fontRef idx="minor">
+                <a:schemeClr val="tx1"/>
+              </a:fontRef>
+            </p:style>
+          </p:cxnSp>
+          <p:cxnSp>
+            <p:nvCxnSpPr>
+              <p:cNvPr id="20" name="Прямая соединительная линия 19">
+                <a:extLst>
+                  <a:ext uri="{FF2B5EF4-FFF2-40B4-BE49-F238E27FC236}">
+                    <a16:creationId xmlns:a16="http://schemas.microsoft.com/office/drawing/2014/main" id="{C7407EBB-B386-401C-9331-199FBF6114CE}"/>
+                  </a:ext>
+                </a:extLst>
+              </p:cNvPr>
+              <p:cNvCxnSpPr>
+                <a:cxnSpLocks/>
+              </p:cNvCxnSpPr>
+              <p:nvPr/>
+            </p:nvCxnSpPr>
+            <p:spPr>
+              <a:xfrm flipH="1">
+                <a:off x="-166577" y="5592726"/>
+                <a:ext cx="12525153" cy="0"/>
+              </a:xfrm>
+              <a:prstGeom prst="line">
+                <a:avLst/>
+              </a:prstGeom>
+              <a:ln>
+                <a:solidFill>
+                  <a:schemeClr val="tx1"/>
+                </a:solidFill>
+              </a:ln>
+            </p:spPr>
+            <p:style>
+              <a:lnRef idx="1">
+                <a:schemeClr val="accent1"/>
+              </a:lnRef>
+              <a:fillRef idx="0">
+                <a:schemeClr val="accent1"/>
+              </a:fillRef>
+              <a:effectRef idx="0">
+                <a:schemeClr val="accent1"/>
+              </a:effectRef>
+              <a:fontRef idx="minor">
+                <a:schemeClr val="tx1"/>
+              </a:fontRef>
+            </p:style>
+          </p:cxnSp>
+          <p:cxnSp>
+            <p:nvCxnSpPr>
+              <p:cNvPr id="21" name="Прямая соединительная линия 20">
+                <a:extLst>
+                  <a:ext uri="{FF2B5EF4-FFF2-40B4-BE49-F238E27FC236}">
+                    <a16:creationId xmlns:a16="http://schemas.microsoft.com/office/drawing/2014/main" id="{5A00AFAC-24D0-4772-B007-1F6D4801E061}"/>
+                  </a:ext>
+                </a:extLst>
+              </p:cNvPr>
+              <p:cNvCxnSpPr>
+                <a:cxnSpLocks/>
+              </p:cNvCxnSpPr>
+              <p:nvPr/>
+            </p:nvCxnSpPr>
+            <p:spPr>
+              <a:xfrm flipH="1">
+                <a:off x="-166577" y="6305107"/>
+                <a:ext cx="12525153" cy="0"/>
+              </a:xfrm>
+              <a:prstGeom prst="line">
+                <a:avLst/>
+              </a:prstGeom>
+              <a:ln>
+                <a:solidFill>
+                  <a:schemeClr val="tx1"/>
+                </a:solidFill>
+              </a:ln>
+            </p:spPr>
+            <p:style>
+              <a:lnRef idx="1">
+                <a:schemeClr val="accent1"/>
+              </a:lnRef>
+              <a:fillRef idx="0">
+                <a:schemeClr val="accent1"/>
+              </a:fillRef>
+              <a:effectRef idx="0">
+                <a:schemeClr val="accent1"/>
+              </a:effectRef>
+              <a:fontRef idx="minor">
+                <a:schemeClr val="tx1"/>
+              </a:fontRef>
+            </p:style>
+          </p:cxnSp>
+          <p:cxnSp>
+            <p:nvCxnSpPr>
+              <p:cNvPr id="22" name="Прямая соединительная линия 21">
+                <a:extLst>
+                  <a:ext uri="{FF2B5EF4-FFF2-40B4-BE49-F238E27FC236}">
+                    <a16:creationId xmlns:a16="http://schemas.microsoft.com/office/drawing/2014/main" id="{C92C6CD4-7D64-4358-88EB-42B20046AA6C}"/>
+                  </a:ext>
+                </a:extLst>
+              </p:cNvPr>
+              <p:cNvCxnSpPr>
+                <a:cxnSpLocks/>
+              </p:cNvCxnSpPr>
+              <p:nvPr/>
+            </p:nvCxnSpPr>
+            <p:spPr>
+              <a:xfrm>
+                <a:off x="4657063" y="0"/>
+                <a:ext cx="0" cy="7060019"/>
+              </a:xfrm>
+              <a:prstGeom prst="line">
+                <a:avLst/>
+              </a:prstGeom>
+              <a:ln>
+                <a:solidFill>
+                  <a:schemeClr val="tx1"/>
+                </a:solidFill>
+              </a:ln>
+            </p:spPr>
+            <p:style>
+              <a:lnRef idx="1">
+                <a:schemeClr val="accent1"/>
+              </a:lnRef>
+              <a:fillRef idx="0">
+                <a:schemeClr val="accent1"/>
+              </a:fillRef>
+              <a:effectRef idx="0">
+                <a:schemeClr val="accent1"/>
+              </a:effectRef>
+              <a:fontRef idx="minor">
+                <a:schemeClr val="tx1"/>
+              </a:fontRef>
+            </p:style>
+          </p:cxnSp>
+          <p:cxnSp>
+            <p:nvCxnSpPr>
+              <p:cNvPr id="23" name="Прямая соединительная линия 22">
+                <a:extLst>
+                  <a:ext uri="{FF2B5EF4-FFF2-40B4-BE49-F238E27FC236}">
+                    <a16:creationId xmlns:a16="http://schemas.microsoft.com/office/drawing/2014/main" id="{DBCB635D-5CCB-48A9-8D29-8AEA9C51BED5}"/>
+                  </a:ext>
+                </a:extLst>
+              </p:cNvPr>
+              <p:cNvCxnSpPr>
+                <a:cxnSpLocks/>
+              </p:cNvCxnSpPr>
+              <p:nvPr/>
+            </p:nvCxnSpPr>
+            <p:spPr>
+              <a:xfrm flipH="1">
+                <a:off x="556438" y="6305107"/>
+                <a:ext cx="12525153" cy="0"/>
+              </a:xfrm>
+              <a:prstGeom prst="line">
+                <a:avLst/>
+              </a:prstGeom>
+              <a:ln>
+                <a:solidFill>
+                  <a:schemeClr val="tx1"/>
+                </a:solidFill>
+              </a:ln>
+            </p:spPr>
+            <p:style>
+              <a:lnRef idx="1">
+                <a:schemeClr val="accent1"/>
+              </a:lnRef>
+              <a:fillRef idx="0">
+                <a:schemeClr val="accent1"/>
+              </a:fillRef>
+              <a:effectRef idx="0">
+                <a:schemeClr val="accent1"/>
+              </a:effectRef>
+              <a:fontRef idx="minor">
+                <a:schemeClr val="tx1"/>
+              </a:fontRef>
+            </p:style>
+          </p:cxnSp>
+          <p:cxnSp>
+            <p:nvCxnSpPr>
+              <p:cNvPr id="24" name="Прямая соединительная линия 23">
+                <a:extLst>
+                  <a:ext uri="{FF2B5EF4-FFF2-40B4-BE49-F238E27FC236}">
+                    <a16:creationId xmlns:a16="http://schemas.microsoft.com/office/drawing/2014/main" id="{A6FC8F23-5AE0-4FDB-B2BB-E6D3E8F266DE}"/>
+                  </a:ext>
+                </a:extLst>
+              </p:cNvPr>
+              <p:cNvCxnSpPr>
+                <a:cxnSpLocks/>
+              </p:cNvCxnSpPr>
+              <p:nvPr/>
+            </p:nvCxnSpPr>
+            <p:spPr>
+              <a:xfrm>
+                <a:off x="5380077" y="0"/>
+                <a:ext cx="0" cy="7060019"/>
+              </a:xfrm>
+              <a:prstGeom prst="line">
+                <a:avLst/>
+              </a:prstGeom>
+              <a:ln>
+                <a:solidFill>
+                  <a:schemeClr val="tx1"/>
+                </a:solidFill>
+              </a:ln>
+            </p:spPr>
+            <p:style>
+              <a:lnRef idx="1">
+                <a:schemeClr val="accent1"/>
+              </a:lnRef>
+              <a:fillRef idx="0">
+                <a:schemeClr val="accent1"/>
+              </a:fillRef>
+              <a:effectRef idx="0">
+                <a:schemeClr val="accent1"/>
+              </a:effectRef>
+              <a:fontRef idx="minor">
+                <a:schemeClr val="tx1"/>
+              </a:fontRef>
+            </p:style>
+          </p:cxnSp>
+          <p:cxnSp>
+            <p:nvCxnSpPr>
+              <p:cNvPr id="25" name="Прямая соединительная линия 24">
+                <a:extLst>
+                  <a:ext uri="{FF2B5EF4-FFF2-40B4-BE49-F238E27FC236}">
+                    <a16:creationId xmlns:a16="http://schemas.microsoft.com/office/drawing/2014/main" id="{F478A673-FAA0-40F7-9553-BE69EB96603E}"/>
+                  </a:ext>
+                </a:extLst>
+              </p:cNvPr>
+              <p:cNvCxnSpPr>
+                <a:cxnSpLocks/>
+              </p:cNvCxnSpPr>
+              <p:nvPr/>
+            </p:nvCxnSpPr>
+            <p:spPr>
+              <a:xfrm>
+                <a:off x="6096003" y="0"/>
+                <a:ext cx="0" cy="7060019"/>
+              </a:xfrm>
+              <a:prstGeom prst="line">
+                <a:avLst/>
+              </a:prstGeom>
+              <a:ln>
+                <a:solidFill>
+                  <a:schemeClr val="tx1"/>
+                </a:solidFill>
+              </a:ln>
+            </p:spPr>
+            <p:style>
+              <a:lnRef idx="1">
+                <a:schemeClr val="accent1"/>
+              </a:lnRef>
+              <a:fillRef idx="0">
+                <a:schemeClr val="accent1"/>
+              </a:fillRef>
+              <a:effectRef idx="0">
+                <a:schemeClr val="accent1"/>
+              </a:effectRef>
+              <a:fontRef idx="minor">
+                <a:schemeClr val="tx1"/>
+              </a:fontRef>
+            </p:style>
+          </p:cxnSp>
+          <p:cxnSp>
+            <p:nvCxnSpPr>
+              <p:cNvPr id="26" name="Прямая соединительная линия 25">
+                <a:extLst>
+                  <a:ext uri="{FF2B5EF4-FFF2-40B4-BE49-F238E27FC236}">
+                    <a16:creationId xmlns:a16="http://schemas.microsoft.com/office/drawing/2014/main" id="{632D97B2-5B41-4725-8BED-1BB84D9049A3}"/>
+                  </a:ext>
+                </a:extLst>
+              </p:cNvPr>
+              <p:cNvCxnSpPr>
+                <a:cxnSpLocks/>
+              </p:cNvCxnSpPr>
+              <p:nvPr/>
+            </p:nvCxnSpPr>
+            <p:spPr>
+              <a:xfrm>
+                <a:off x="6819014" y="-12795"/>
+                <a:ext cx="0" cy="7060019"/>
+              </a:xfrm>
+              <a:prstGeom prst="line">
+                <a:avLst/>
+              </a:prstGeom>
+              <a:ln>
+                <a:solidFill>
+                  <a:schemeClr val="tx1"/>
+                </a:solidFill>
+              </a:ln>
+            </p:spPr>
+            <p:style>
+              <a:lnRef idx="1">
+                <a:schemeClr val="accent1"/>
+              </a:lnRef>
+              <a:fillRef idx="0">
+                <a:schemeClr val="accent1"/>
+              </a:fillRef>
+              <a:effectRef idx="0">
+                <a:schemeClr val="accent1"/>
+              </a:effectRef>
+              <a:fontRef idx="minor">
+                <a:schemeClr val="tx1"/>
+              </a:fontRef>
+            </p:style>
+          </p:cxnSp>
+          <p:cxnSp>
+            <p:nvCxnSpPr>
+              <p:cNvPr id="27" name="Прямая соединительная линия 26">
+                <a:extLst>
+                  <a:ext uri="{FF2B5EF4-FFF2-40B4-BE49-F238E27FC236}">
+                    <a16:creationId xmlns:a16="http://schemas.microsoft.com/office/drawing/2014/main" id="{0096069A-E1F5-484F-9AD5-E590F3AFB8C1}"/>
+                  </a:ext>
+                </a:extLst>
+              </p:cNvPr>
+              <p:cNvCxnSpPr>
+                <a:cxnSpLocks/>
+              </p:cNvCxnSpPr>
+              <p:nvPr/>
+            </p:nvCxnSpPr>
+            <p:spPr>
+              <a:xfrm>
+                <a:off x="7542032" y="-12796"/>
+                <a:ext cx="0" cy="7060019"/>
+              </a:xfrm>
+              <a:prstGeom prst="line">
+                <a:avLst/>
+              </a:prstGeom>
+              <a:ln>
+                <a:solidFill>
+                  <a:schemeClr val="tx1"/>
+                </a:solidFill>
+              </a:ln>
+            </p:spPr>
+            <p:style>
+              <a:lnRef idx="1">
+                <a:schemeClr val="accent1"/>
+              </a:lnRef>
+              <a:fillRef idx="0">
+                <a:schemeClr val="accent1"/>
+              </a:fillRef>
+              <a:effectRef idx="0">
+                <a:schemeClr val="accent1"/>
+              </a:effectRef>
+              <a:fontRef idx="minor">
+                <a:schemeClr val="tx1"/>
+              </a:fontRef>
+            </p:style>
+          </p:cxnSp>
+          <p:cxnSp>
+            <p:nvCxnSpPr>
+              <p:cNvPr id="28" name="Прямая соединительная линия 27">
+                <a:extLst>
+                  <a:ext uri="{FF2B5EF4-FFF2-40B4-BE49-F238E27FC236}">
+                    <a16:creationId xmlns:a16="http://schemas.microsoft.com/office/drawing/2014/main" id="{CD8CFF4F-9474-44E2-8483-EE501133D094}"/>
+                  </a:ext>
+                </a:extLst>
+              </p:cNvPr>
+              <p:cNvCxnSpPr>
+                <a:cxnSpLocks/>
+              </p:cNvCxnSpPr>
+              <p:nvPr/>
+            </p:nvCxnSpPr>
+            <p:spPr>
+              <a:xfrm>
+                <a:off x="8265045" y="-12797"/>
+                <a:ext cx="0" cy="7060019"/>
+              </a:xfrm>
+              <a:prstGeom prst="line">
+                <a:avLst/>
+              </a:prstGeom>
+              <a:ln>
+                <a:solidFill>
+                  <a:schemeClr val="tx1"/>
+                </a:solidFill>
+              </a:ln>
+            </p:spPr>
+            <p:style>
+              <a:lnRef idx="1">
+                <a:schemeClr val="accent1"/>
+              </a:lnRef>
+              <a:fillRef idx="0">
+                <a:schemeClr val="accent1"/>
+              </a:fillRef>
+              <a:effectRef idx="0">
+                <a:schemeClr val="accent1"/>
+              </a:effectRef>
+              <a:fontRef idx="minor">
+                <a:schemeClr val="tx1"/>
+              </a:fontRef>
+            </p:style>
+          </p:cxnSp>
+          <p:cxnSp>
+            <p:nvCxnSpPr>
+              <p:cNvPr id="29" name="Прямая соединительная линия 28">
+                <a:extLst>
+                  <a:ext uri="{FF2B5EF4-FFF2-40B4-BE49-F238E27FC236}">
+                    <a16:creationId xmlns:a16="http://schemas.microsoft.com/office/drawing/2014/main" id="{CA573EE6-F195-44AF-9C78-7860BF4CC13C}"/>
+                  </a:ext>
+                </a:extLst>
+              </p:cNvPr>
+              <p:cNvCxnSpPr>
+                <a:cxnSpLocks/>
+              </p:cNvCxnSpPr>
+              <p:nvPr/>
+            </p:nvCxnSpPr>
+            <p:spPr>
+              <a:xfrm>
+                <a:off x="8977428" y="-12798"/>
+                <a:ext cx="0" cy="7060019"/>
+              </a:xfrm>
+              <a:prstGeom prst="line">
+                <a:avLst/>
+              </a:prstGeom>
+              <a:ln>
+                <a:solidFill>
+                  <a:schemeClr val="tx1"/>
+                </a:solidFill>
+              </a:ln>
+            </p:spPr>
+            <p:style>
+              <a:lnRef idx="1">
+                <a:schemeClr val="accent1"/>
+              </a:lnRef>
+              <a:fillRef idx="0">
+                <a:schemeClr val="accent1"/>
+              </a:fillRef>
+              <a:effectRef idx="0">
+                <a:schemeClr val="accent1"/>
+              </a:effectRef>
+              <a:fontRef idx="minor">
+                <a:schemeClr val="tx1"/>
+              </a:fontRef>
+            </p:style>
+          </p:cxnSp>
+          <p:cxnSp>
+            <p:nvCxnSpPr>
+              <p:cNvPr id="30" name="Прямая соединительная линия 29">
+                <a:extLst>
+                  <a:ext uri="{FF2B5EF4-FFF2-40B4-BE49-F238E27FC236}">
+                    <a16:creationId xmlns:a16="http://schemas.microsoft.com/office/drawing/2014/main" id="{64DB25F9-7347-4751-961B-E6FEBE4F1600}"/>
+                  </a:ext>
+                </a:extLst>
+              </p:cNvPr>
+              <p:cNvCxnSpPr>
+                <a:cxnSpLocks/>
+              </p:cNvCxnSpPr>
+              <p:nvPr/>
+            </p:nvCxnSpPr>
+            <p:spPr>
+              <a:xfrm>
+                <a:off x="9693347" y="0"/>
+                <a:ext cx="0" cy="7060019"/>
+              </a:xfrm>
+              <a:prstGeom prst="line">
+                <a:avLst/>
+              </a:prstGeom>
+              <a:ln>
+                <a:solidFill>
+                  <a:schemeClr val="tx1"/>
+                </a:solidFill>
+              </a:ln>
+            </p:spPr>
+            <p:style>
+              <a:lnRef idx="1">
+                <a:schemeClr val="accent1"/>
+              </a:lnRef>
+              <a:fillRef idx="0">
+                <a:schemeClr val="accent1"/>
+              </a:fillRef>
+              <a:effectRef idx="0">
+                <a:schemeClr val="accent1"/>
+              </a:effectRef>
+              <a:fontRef idx="minor">
+                <a:schemeClr val="tx1"/>
+              </a:fontRef>
+            </p:style>
+          </p:cxnSp>
+          <p:cxnSp>
+            <p:nvCxnSpPr>
+              <p:cNvPr id="31" name="Прямая соединительная линия 30">
+                <a:extLst>
+                  <a:ext uri="{FF2B5EF4-FFF2-40B4-BE49-F238E27FC236}">
+                    <a16:creationId xmlns:a16="http://schemas.microsoft.com/office/drawing/2014/main" id="{E497B18E-A3B4-492E-98EC-EB5195E84BE0}"/>
+                  </a:ext>
+                </a:extLst>
+              </p:cNvPr>
+              <p:cNvCxnSpPr>
+                <a:cxnSpLocks/>
+              </p:cNvCxnSpPr>
+              <p:nvPr/>
+            </p:nvCxnSpPr>
+            <p:spPr>
+              <a:xfrm>
+                <a:off x="10416362" y="0"/>
+                <a:ext cx="0" cy="7060019"/>
+              </a:xfrm>
+              <a:prstGeom prst="line">
+                <a:avLst/>
+              </a:prstGeom>
+              <a:ln>
+                <a:solidFill>
+                  <a:schemeClr val="tx1"/>
+                </a:solidFill>
+              </a:ln>
+            </p:spPr>
+            <p:style>
+              <a:lnRef idx="1">
+                <a:schemeClr val="accent1"/>
+              </a:lnRef>
+              <a:fillRef idx="0">
+                <a:schemeClr val="accent1"/>
+              </a:fillRef>
+              <a:effectRef idx="0">
+                <a:schemeClr val="accent1"/>
+              </a:effectRef>
+              <a:fontRef idx="minor">
+                <a:schemeClr val="tx1"/>
+              </a:fontRef>
+            </p:style>
+          </p:cxnSp>
+          <p:cxnSp>
+            <p:nvCxnSpPr>
+              <p:cNvPr id="32" name="Прямая соединительная линия 31">
+                <a:extLst>
+                  <a:ext uri="{FF2B5EF4-FFF2-40B4-BE49-F238E27FC236}">
+                    <a16:creationId xmlns:a16="http://schemas.microsoft.com/office/drawing/2014/main" id="{9A209BAB-9A16-4C31-A951-28C1FF9C8C80}"/>
+                  </a:ext>
+                </a:extLst>
+              </p:cNvPr>
+              <p:cNvCxnSpPr>
+                <a:cxnSpLocks/>
+              </p:cNvCxnSpPr>
+              <p:nvPr/>
+            </p:nvCxnSpPr>
+            <p:spPr>
+              <a:xfrm>
+                <a:off x="11128743" y="0"/>
+                <a:ext cx="0" cy="7060019"/>
+              </a:xfrm>
+              <a:prstGeom prst="line">
+                <a:avLst/>
+              </a:prstGeom>
+              <a:ln>
+                <a:solidFill>
+                  <a:schemeClr val="tx1"/>
+                </a:solidFill>
+              </a:ln>
+            </p:spPr>
+            <p:style>
+              <a:lnRef idx="1">
+                <a:schemeClr val="accent1"/>
+              </a:lnRef>
+              <a:fillRef idx="0">
+                <a:schemeClr val="accent1"/>
+              </a:fillRef>
+              <a:effectRef idx="0">
+                <a:schemeClr val="accent1"/>
+              </a:effectRef>
+              <a:fontRef idx="minor">
+                <a:schemeClr val="tx1"/>
+              </a:fontRef>
+            </p:style>
+          </p:cxnSp>
+          <p:cxnSp>
+            <p:nvCxnSpPr>
+              <p:cNvPr id="33" name="Прямая соединительная линия 32">
+                <a:extLst>
+                  <a:ext uri="{FF2B5EF4-FFF2-40B4-BE49-F238E27FC236}">
+                    <a16:creationId xmlns:a16="http://schemas.microsoft.com/office/drawing/2014/main" id="{DF66F787-5F35-42BB-99A2-5599D69B2759}"/>
+                  </a:ext>
+                </a:extLst>
+              </p:cNvPr>
+              <p:cNvCxnSpPr>
+                <a:cxnSpLocks/>
+              </p:cNvCxnSpPr>
+              <p:nvPr/>
+            </p:nvCxnSpPr>
+            <p:spPr>
+              <a:xfrm>
+                <a:off x="11862644" y="0"/>
+                <a:ext cx="0" cy="7060019"/>
+              </a:xfrm>
+              <a:prstGeom prst="line">
+                <a:avLst/>
+              </a:prstGeom>
+              <a:ln>
+                <a:solidFill>
+                  <a:schemeClr val="tx1"/>
+                </a:solidFill>
+              </a:ln>
+            </p:spPr>
+            <p:style>
+              <a:lnRef idx="1">
+                <a:schemeClr val="accent1"/>
+              </a:lnRef>
+              <a:fillRef idx="0">
+                <a:schemeClr val="accent1"/>
+              </a:fillRef>
+              <a:effectRef idx="0">
+                <a:schemeClr val="accent1"/>
+              </a:effectRef>
+              <a:fontRef idx="minor">
+                <a:schemeClr val="tx1"/>
+              </a:fontRef>
+            </p:style>
+          </p:cxnSp>
+        </p:grpSp>
+        <p:cxnSp>
+          <p:nvCxnSpPr>
+            <p:cNvPr id="35" name="Прямая соединительная линия 34">
+              <a:extLst>
+                <a:ext uri="{FF2B5EF4-FFF2-40B4-BE49-F238E27FC236}">
+                  <a16:creationId xmlns:a16="http://schemas.microsoft.com/office/drawing/2014/main" id="{A5354744-6A8D-4078-A907-2FAD85E3AF28}"/>
+                </a:ext>
+              </a:extLst>
+            </p:cNvPr>
+            <p:cNvCxnSpPr/>
+            <p:nvPr/>
+          </p:nvCxnSpPr>
+          <p:spPr>
+            <a:xfrm>
+              <a:off x="0" y="2889247"/>
+              <a:ext cx="12596037" cy="0"/>
+            </a:xfrm>
+            <a:prstGeom prst="line">
+              <a:avLst/>
+            </a:prstGeom>
+            <a:ln>
+              <a:solidFill>
+                <a:schemeClr val="tx1"/>
+              </a:solidFill>
+            </a:ln>
+          </p:spPr>
+          <p:style>
+            <a:lnRef idx="1">
+              <a:schemeClr val="accent1"/>
+            </a:lnRef>
+            <a:fillRef idx="0">
+              <a:schemeClr val="accent1"/>
+            </a:fillRef>
+            <a:effectRef idx="0">
+              <a:schemeClr val="accent1"/>
+            </a:effectRef>
+            <a:fontRef idx="minor">
+              <a:schemeClr val="tx1"/>
+            </a:fontRef>
+          </p:style>
+        </p:cxnSp>
+      </p:grpSp>
+      <p:sp>
+        <p:nvSpPr>
           <p:cNvPr id="44" name="Прямоугольник 43">
             <a:extLst>
               <a:ext uri="{FF2B5EF4-FFF2-40B4-BE49-F238E27FC236}">
@@ -8949,7 +10660,7 @@
 </p:sld>
 </file>
 
-<file path=ppt/slides/slide4.xml><?xml version="1.0" encoding="utf-8"?>
+<file path=ppt/slides/slide5.xml><?xml version="1.0" encoding="utf-8"?>
 <p:sld xmlns:a="http://schemas.openxmlformats.org/drawingml/2006/main" xmlns:r="http://schemas.openxmlformats.org/officeDocument/2006/relationships" xmlns:p="http://schemas.openxmlformats.org/presentationml/2006/main">
   <p:cSld>
     <p:spTree>
@@ -10712,7 +12423,7 @@
 </p:sld>
 </file>
 
-<file path=ppt/slides/slide5.xml><?xml version="1.0" encoding="utf-8"?>
+<file path=ppt/slides/slide6.xml><?xml version="1.0" encoding="utf-8"?>
 <p:sld xmlns:a="http://schemas.openxmlformats.org/drawingml/2006/main" xmlns:r="http://schemas.openxmlformats.org/officeDocument/2006/relationships" xmlns:p="http://schemas.openxmlformats.org/presentationml/2006/main">
   <p:cSld>
     <p:spTree>
@@ -12475,7 +14186,7 @@
 </p:sld>
 </file>
 
-<file path=ppt/slides/slide6.xml><?xml version="1.0" encoding="utf-8"?>
+<file path=ppt/slides/slide7.xml><?xml version="1.0" encoding="utf-8"?>
 <p:sld xmlns:a="http://schemas.openxmlformats.org/drawingml/2006/main" xmlns:r="http://schemas.openxmlformats.org/officeDocument/2006/relationships" xmlns:p="http://schemas.openxmlformats.org/presentationml/2006/main">
   <p:cSld>
     <p:spTree>
@@ -14238,7 +15949,7 @@
 </p:sld>
 </file>
 
-<file path=ppt/slides/slide7.xml><?xml version="1.0" encoding="utf-8"?>
+<file path=ppt/slides/slide8.xml><?xml version="1.0" encoding="utf-8"?>
 <p:sld xmlns:a="http://schemas.openxmlformats.org/drawingml/2006/main" xmlns:r="http://schemas.openxmlformats.org/officeDocument/2006/relationships" xmlns:p="http://schemas.openxmlformats.org/presentationml/2006/main">
   <p:cSld>
     <p:spTree>
@@ -15940,7 +17651,7 @@
 </p:sld>
 </file>
 
-<file path=ppt/slides/slide8.xml><?xml version="1.0" encoding="utf-8"?>
+<file path=ppt/slides/slide9.xml><?xml version="1.0" encoding="utf-8"?>
 <p:sld xmlns:a="http://schemas.openxmlformats.org/drawingml/2006/main" xmlns:r="http://schemas.openxmlformats.org/officeDocument/2006/relationships" xmlns:p="http://schemas.openxmlformats.org/presentationml/2006/main">
   <p:cSld>
     <p:spTree>

--- a/presentations/2.1_Klassifikaciya_ViOPF.pptx
+++ b/presentations/2.1_Klassifikaciya_ViOPF.pptx
@@ -8664,13 +8664,13 @@
                 </a:solidFill>
                 <a:latin typeface="Century Gothic"/>
               </a:rPr>
-              <a:t>Опасности и опасные факторы — не одно и то же</a:t>
+              <a:t>Опасности и производственные факторы</a:t>
             </a:r>
             <a:endParaRPr lang="ru-RU"/>
           </a:p>
           <a:p>
             <a:r>
-              <a:rPr sz="800" b="0">
+              <a:rPr sz="600" b="0">
                 <a:solidFill>
                   <a:srgbClr val="2F2F2F"/>
                 </a:solidFill>
@@ -8681,29 +8681,18 @@
           </a:p>
           <a:p>
             <a:r>
-              <a:rPr sz="1400" b="0">
+              <a:rPr sz="1300" b="0">
                 <a:solidFill>
                   <a:srgbClr val="2F2F2F"/>
                 </a:solidFill>
                 <a:latin typeface="Century Gothic"/>
               </a:rPr>
-              <a:t>На рабочем месте есть опасности — потенциальные источники вреда жизни и здоровью.</a:t>
+              <a:t>На рабочем месте есть опасности — потенциальные источники вреда жизни и здоровью. Но кроме самих опасностей действуют вредные и опасные производственные факторы — конкретные воздействия, через которые угроза реализуется.</a:t>
             </a:r>
           </a:p>
           <a:p>
             <a:r>
-              <a:rPr sz="1400" b="0">
-                <a:solidFill>
-                  <a:srgbClr val="2F2F2F"/>
-                </a:solidFill>
-                <a:latin typeface="Century Gothic"/>
-              </a:rPr>
-              <a:t>Но кроме самих опасностей существуют вредные и опасные производственные факторы — конкретные воздействия, через которые эта угроза реализуется.</a:t>
-            </a:r>
-          </a:p>
-          <a:p>
-            <a:r>
-              <a:rPr sz="800" b="0">
+              <a:rPr sz="600" b="0">
                 <a:solidFill>
                   <a:srgbClr val="2F2F2F"/>
                 </a:solidFill>
@@ -8714,13 +8703,35 @@
           </a:p>
           <a:p>
             <a:r>
-              <a:rPr sz="1400" b="0">
+              <a:rPr sz="1300" b="0">
                 <a:solidFill>
                   <a:srgbClr val="2F2F2F"/>
                 </a:solidFill>
                 <a:latin typeface="Century Gothic"/>
               </a:rPr>
-              <a:t>Опасный фактор может привести к травме, вредный — к заболеванию. Поэтому важно не только «видеть опасность», но и понимать, какие именно факторы действуют на рабочем месте.</a:t>
+              <a:t>Опасный фактор может привести к травме, вредный — к заболеванию. По ст. 13 ФЗ-426 факторы классифицируют на физические, химические, биологические, а также тяжесть и напряжённость трудового процесса.</a:t>
+            </a:r>
+          </a:p>
+          <a:p>
+            <a:r>
+              <a:rPr sz="600" b="0">
+                <a:solidFill>
+                  <a:srgbClr val="2F2F2F"/>
+                </a:solidFill>
+                <a:latin typeface="Century Gothic"/>
+              </a:rPr>
+              <a:t/>
+            </a:r>
+          </a:p>
+          <a:p>
+            <a:r>
+              <a:rPr sz="1300" b="0">
+                <a:solidFill>
+                  <a:srgbClr val="2F2F2F"/>
+                </a:solidFill>
+                <a:latin typeface="Century Gothic"/>
+              </a:rPr>
+              <a:t>Их выявляют при СОУТ: идентификация → измерения → класс условий труда. Важно не только «видеть опасность», но и понимать, какие факторы реально действуют на рабочем месте — в том числе в офисе.</a:t>
             </a:r>
           </a:p>
         </p:txBody>

--- a/presentations/2.1_Klassifikaciya_ViOPF.pptx
+++ b/presentations/2.1_Klassifikaciya_ViOPF.pptx
@@ -8670,7 +8670,7 @@
           </a:p>
           <a:p>
             <a:r>
-              <a:rPr sz="600" b="0">
+              <a:rPr sz="800" b="0">
                 <a:solidFill>
                   <a:srgbClr val="2F2F2F"/>
                 </a:solidFill>
@@ -8681,18 +8681,18 @@
           </a:p>
           <a:p>
             <a:r>
-              <a:rPr sz="1300" b="0">
+              <a:rPr sz="1400" b="0">
                 <a:solidFill>
                   <a:srgbClr val="2F2F2F"/>
                 </a:solidFill>
                 <a:latin typeface="Century Gothic"/>
               </a:rPr>
-              <a:t>На рабочем месте есть опасности — потенциальные источники вреда жизни и здоровью. Но кроме самих опасностей действуют вредные и опасные производственные факторы — конкретные воздействия, через которые угроза реализуется.</a:t>
+              <a:t>Кроме опасностей на рабочем месте действуют вредные и опасные производственные факторы: первые ведут к заболеванию, вторые — к травме.</a:t>
             </a:r>
           </a:p>
           <a:p>
             <a:r>
-              <a:rPr sz="600" b="0">
+              <a:rPr sz="800" b="0">
                 <a:solidFill>
                   <a:srgbClr val="2F2F2F"/>
                 </a:solidFill>
@@ -8703,35 +8703,13 @@
           </a:p>
           <a:p>
             <a:r>
-              <a:rPr sz="1300" b="0">
+              <a:rPr sz="1400" b="0">
                 <a:solidFill>
                   <a:srgbClr val="2F2F2F"/>
                 </a:solidFill>
                 <a:latin typeface="Century Gothic"/>
               </a:rPr>
-              <a:t>Опасный фактор может привести к травме, вредный — к заболеванию. По ст. 13 ФЗ-426 факторы классифицируют на физические, химические, биологические, а также тяжесть и напряжённость трудового процесса.</a:t>
-            </a:r>
-          </a:p>
-          <a:p>
-            <a:r>
-              <a:rPr sz="600" b="0">
-                <a:solidFill>
-                  <a:srgbClr val="2F2F2F"/>
-                </a:solidFill>
-                <a:latin typeface="Century Gothic"/>
-              </a:rPr>
-              <a:t/>
-            </a:r>
-          </a:p>
-          <a:p>
-            <a:r>
-              <a:rPr sz="1300" b="0">
-                <a:solidFill>
-                  <a:srgbClr val="2F2F2F"/>
-                </a:solidFill>
-                <a:latin typeface="Century Gothic"/>
-              </a:rPr>
-              <a:t>Их выявляют при СОУТ: идентификация → измерения → класс условий труда. Важно не только «видеть опасность», но и понимать, какие факторы реально действуют на рабочем месте — в том числе в офисе.</a:t>
+              <a:t>По ФЗ-426 их делят на физические, химические, биологические, тяжесть и напряжённость труда и выявляют при СОУТ.</a:t>
             </a:r>
           </a:p>
         </p:txBody>
